--- a/Weekly Reports/slides/2-alexis-perez.pptx
+++ b/Weekly Reports/slides/2-alexis-perez.pptx
@@ -6,8 +6,6 @@
   </p:sldMasterIdLst>
   <p:sldIdLst>
     <p:sldId id="258" r:id="rId2"/>
-    <p:sldId id="259" r:id="rId3"/>
-    <p:sldId id="260" r:id="rId4"/>
   </p:sldIdLst>
   <p:sldSz cx="12192000" cy="6858000"/>
   <p:notesSz cx="6858000" cy="9144000"/>
@@ -261,7 +259,7 @@
           <a:p>
             <a:fld id="{752E6B35-DAD5-CF47-9E65-9CA12B499D8C}" type="datetimeFigureOut">
               <a:rPr lang="en-US" smtClean="0"/>
-              <a:t>9/21/2026</a:t>
+              <a:t>9/29/2026</a:t>
             </a:fld>
             <a:endParaRPr lang="en-US"/>
           </a:p>
@@ -459,7 +457,7 @@
           <a:p>
             <a:fld id="{752E6B35-DAD5-CF47-9E65-9CA12B499D8C}" type="datetimeFigureOut">
               <a:rPr lang="en-US" smtClean="0"/>
-              <a:t>9/21/2026</a:t>
+              <a:t>9/29/2026</a:t>
             </a:fld>
             <a:endParaRPr lang="en-US"/>
           </a:p>
@@ -667,7 +665,7 @@
           <a:p>
             <a:fld id="{752E6B35-DAD5-CF47-9E65-9CA12B499D8C}" type="datetimeFigureOut">
               <a:rPr lang="en-US" smtClean="0"/>
-              <a:t>9/21/2026</a:t>
+              <a:t>9/29/2026</a:t>
             </a:fld>
             <a:endParaRPr lang="en-US"/>
           </a:p>
@@ -865,7 +863,7 @@
           <a:p>
             <a:fld id="{752E6B35-DAD5-CF47-9E65-9CA12B499D8C}" type="datetimeFigureOut">
               <a:rPr lang="en-US" smtClean="0"/>
-              <a:t>9/21/2026</a:t>
+              <a:t>9/29/2026</a:t>
             </a:fld>
             <a:endParaRPr lang="en-US"/>
           </a:p>
@@ -1140,7 +1138,7 @@
           <a:p>
             <a:fld id="{752E6B35-DAD5-CF47-9E65-9CA12B499D8C}" type="datetimeFigureOut">
               <a:rPr lang="en-US" smtClean="0"/>
-              <a:t>9/21/2026</a:t>
+              <a:t>9/29/2026</a:t>
             </a:fld>
             <a:endParaRPr lang="en-US"/>
           </a:p>
@@ -1405,7 +1403,7 @@
           <a:p>
             <a:fld id="{752E6B35-DAD5-CF47-9E65-9CA12B499D8C}" type="datetimeFigureOut">
               <a:rPr lang="en-US" smtClean="0"/>
-              <a:t>9/21/2026</a:t>
+              <a:t>9/29/2026</a:t>
             </a:fld>
             <a:endParaRPr lang="en-US"/>
           </a:p>
@@ -1817,7 +1815,7 @@
           <a:p>
             <a:fld id="{752E6B35-DAD5-CF47-9E65-9CA12B499D8C}" type="datetimeFigureOut">
               <a:rPr lang="en-US" smtClean="0"/>
-              <a:t>9/21/2026</a:t>
+              <a:t>9/29/2026</a:t>
             </a:fld>
             <a:endParaRPr lang="en-US"/>
           </a:p>
@@ -1958,7 +1956,7 @@
           <a:p>
             <a:fld id="{752E6B35-DAD5-CF47-9E65-9CA12B499D8C}" type="datetimeFigureOut">
               <a:rPr lang="en-US" smtClean="0"/>
-              <a:t>9/21/2026</a:t>
+              <a:t>9/29/2026</a:t>
             </a:fld>
             <a:endParaRPr lang="en-US"/>
           </a:p>
@@ -2071,7 +2069,7 @@
           <a:p>
             <a:fld id="{752E6B35-DAD5-CF47-9E65-9CA12B499D8C}" type="datetimeFigureOut">
               <a:rPr lang="en-US" smtClean="0"/>
-              <a:t>9/21/2026</a:t>
+              <a:t>9/29/2026</a:t>
             </a:fld>
             <a:endParaRPr lang="en-US"/>
           </a:p>
@@ -2382,7 +2380,7 @@
           <a:p>
             <a:fld id="{752E6B35-DAD5-CF47-9E65-9CA12B499D8C}" type="datetimeFigureOut">
               <a:rPr lang="en-US" smtClean="0"/>
-              <a:t>9/21/2026</a:t>
+              <a:t>9/29/2026</a:t>
             </a:fld>
             <a:endParaRPr lang="en-US"/>
           </a:p>
@@ -2670,7 +2668,7 @@
           <a:p>
             <a:fld id="{752E6B35-DAD5-CF47-9E65-9CA12B499D8C}" type="datetimeFigureOut">
               <a:rPr lang="en-US" smtClean="0"/>
-              <a:t>9/21/2026</a:t>
+              <a:t>9/29/2026</a:t>
             </a:fld>
             <a:endParaRPr lang="en-US"/>
           </a:p>
@@ -2911,7 +2909,7 @@
           <a:p>
             <a:fld id="{752E6B35-DAD5-CF47-9E65-9CA12B499D8C}" type="datetimeFigureOut">
               <a:rPr lang="en-US" smtClean="0"/>
-              <a:t>9/21/2026</a:t>
+              <a:t>9/29/2026</a:t>
             </a:fld>
             <a:endParaRPr lang="en-US"/>
           </a:p>
@@ -3375,7 +3373,7 @@
         <p:spPr/>
         <p:txBody>
           <a:bodyPr>
-            <a:normAutofit fontScale="85000" lnSpcReduction="20000"/>
+            <a:normAutofit fontScale="92500" lnSpcReduction="10000"/>
           </a:bodyPr>
           <a:lstStyle/>
           <a:p>
@@ -3388,21 +3386,14 @@
             <a:pPr lvl="1"/>
             <a:r>
               <a:rPr lang="en-US" dirty="0"/>
-              <a:t>Implement ultrasonic sensor onto Raspberry Pi </a:t>
+              <a:t>Research different Vehicle Navigation Options</a:t>
             </a:r>
           </a:p>
           <a:p>
             <a:pPr lvl="1"/>
             <a:r>
               <a:rPr lang="en-US" dirty="0"/>
-              <a:t>Test motors and motor controller </a:t>
-            </a:r>
-          </a:p>
-          <a:p>
-            <a:pPr lvl="1"/>
-            <a:r>
-              <a:rPr lang="en-US" dirty="0"/>
-              <a:t>Research battery/power supply options</a:t>
+              <a:t>Start OpenCV Course</a:t>
             </a:r>
           </a:p>
           <a:p>
@@ -3415,21 +3406,14 @@
             <a:pPr lvl="1"/>
             <a:r>
               <a:rPr lang="en-US" dirty="0"/>
-              <a:t>Finalized ultrasonic sensor implementation on Raspberry Pi </a:t>
+              <a:t>Finalized/presented different Vehicle Navigation Options</a:t>
             </a:r>
           </a:p>
           <a:p>
             <a:pPr lvl="1"/>
             <a:r>
               <a:rPr lang="en-US" dirty="0"/>
-              <a:t>Tested motors and motor controller for performance </a:t>
-            </a:r>
-          </a:p>
-          <a:p>
-            <a:pPr lvl="1"/>
-            <a:r>
-              <a:rPr lang="en-US" dirty="0"/>
-              <a:t>Determined hardware power requirements for future battery/power supply selection</a:t>
+              <a:t>Completed OpenCV course</a:t>
             </a:r>
           </a:p>
           <a:p>
@@ -3442,14 +3426,18 @@
             <a:pPr lvl="1"/>
             <a:r>
               <a:rPr lang="en-US" dirty="0"/>
-              <a:t>Select replacement motors/controller if needed </a:t>
+              <a:t>Research and buy any missing components (per Navigation Option)</a:t>
             </a:r>
           </a:p>
           <a:p>
             <a:pPr lvl="1"/>
             <a:r>
+              <a:rPr lang="en-US"/>
+              <a:t>Continue </a:t>
+            </a:r>
+            <a:r>
               <a:rPr lang="en-US" dirty="0"/>
-              <a:t>Narrow down battery/power supply options </a:t>
+              <a:t>OpenCV learning</a:t>
             </a:r>
           </a:p>
           <a:p>
@@ -3471,670 +3459,6 @@
     <p:extLst>
       <p:ext uri="{BB962C8B-B14F-4D97-AF65-F5344CB8AC3E}">
         <p14:creationId xmlns:p14="http://schemas.microsoft.com/office/powerpoint/2010/main" val="3566922106"/>
-      </p:ext>
-    </p:extLst>
-  </p:cSld>
-  <p:clrMapOvr>
-    <a:masterClrMapping/>
-  </p:clrMapOvr>
-</p:sld>
-</file>
-
-<file path=ppt/slides/slide2.xml><?xml version="1.0" encoding="utf-8"?>
-<p:sld xmlns:a="http://schemas.openxmlformats.org/drawingml/2006/main" xmlns:r="http://schemas.openxmlformats.org/officeDocument/2006/relationships" xmlns:p="http://schemas.openxmlformats.org/presentationml/2006/main">
-  <p:cSld>
-    <p:bg>
-      <p:bgPr>
-        <a:solidFill>
-          <a:schemeClr val="bg1"/>
-        </a:solidFill>
-        <a:effectLst/>
-      </p:bgPr>
-    </p:bg>
-    <p:spTree>
-      <p:nvGrpSpPr>
-        <p:cNvPr id="1" name=""/>
-        <p:cNvGrpSpPr/>
-        <p:nvPr/>
-      </p:nvGrpSpPr>
-      <p:grpSpPr>
-        <a:xfrm>
-          <a:off x="0" y="0"/>
-          <a:ext cx="0" cy="0"/>
-          <a:chOff x="0" y="0"/>
-          <a:chExt cx="0" cy="0"/>
-        </a:xfrm>
-      </p:grpSpPr>
-      <p:sp useBgFill="1">
-        <p:nvSpPr>
-          <p:cNvPr id="17" name="Rectangle 16">
-            <a:extLst>
-              <a:ext uri="{FF2B5EF4-FFF2-40B4-BE49-F238E27FC236}">
-                <a16:creationId xmlns:a16="http://schemas.microsoft.com/office/drawing/2014/main" id="{5EBC18B6-E5C3-4AD1-97A4-E6A3477A0BB9}"/>
-              </a:ext>
-              <a:ext uri="{C183D7F6-B498-43B3-948B-1728B52AA6E4}">
-                <adec:decorative xmlns:adec="http://schemas.microsoft.com/office/drawing/2017/decorative" val="1"/>
-              </a:ext>
-            </a:extLst>
-          </p:cNvPr>
-          <p:cNvSpPr>
-            <a:spLocks noGrp="1" noRot="1" noChangeAspect="1" noMove="1" noResize="1" noEditPoints="1" noAdjustHandles="1" noChangeArrowheads="1" noChangeShapeType="1" noTextEdit="1"/>
-          </p:cNvSpPr>
-          <p:nvPr>
-            <p:extLst>
-              <p:ext uri="{386F3935-93C4-4BCD-93E2-E3B085C9AB24}">
-                <p16:designElem xmlns:p16="http://schemas.microsoft.com/office/powerpoint/2015/main" val="1"/>
-              </p:ext>
-            </p:extLst>
-          </p:nvPr>
-        </p:nvSpPr>
-        <p:spPr>
-          <a:xfrm>
-            <a:off x="0" y="0"/>
-            <a:ext cx="12192000" cy="6858000"/>
-          </a:xfrm>
-          <a:prstGeom prst="rect">
-            <a:avLst/>
-          </a:prstGeom>
-          <a:ln>
-            <a:noFill/>
-          </a:ln>
-        </p:spPr>
-        <p:style>
-          <a:lnRef idx="2">
-            <a:schemeClr val="accent1">
-              <a:shade val="50000"/>
-            </a:schemeClr>
-          </a:lnRef>
-          <a:fillRef idx="1">
-            <a:schemeClr val="accent1"/>
-          </a:fillRef>
-          <a:effectRef idx="0">
-            <a:schemeClr val="accent1"/>
-          </a:effectRef>
-          <a:fontRef idx="minor">
-            <a:schemeClr val="lt1"/>
-          </a:fontRef>
-        </p:style>
-        <p:txBody>
-          <a:bodyPr rtlCol="0" anchor="ctr"/>
-          <a:lstStyle/>
-          <a:p>
-            <a:pPr algn="ctr"/>
-            <a:endParaRPr lang="en-US"/>
-          </a:p>
-        </p:txBody>
-      </p:sp>
-      <p:sp>
-        <p:nvSpPr>
-          <p:cNvPr id="2" name="Title 1">
-            <a:extLst>
-              <a:ext uri="{FF2B5EF4-FFF2-40B4-BE49-F238E27FC236}">
-                <a16:creationId xmlns:a16="http://schemas.microsoft.com/office/drawing/2014/main" id="{D8685021-91A2-D085-D313-8849798D63DD}"/>
-              </a:ext>
-            </a:extLst>
-          </p:cNvPr>
-          <p:cNvSpPr>
-            <a:spLocks noGrp="1"/>
-          </p:cNvSpPr>
-          <p:nvPr>
-            <p:ph type="title"/>
-          </p:nvPr>
-        </p:nvSpPr>
-        <p:spPr>
-          <a:xfrm>
-            <a:off x="612648" y="1078992"/>
-            <a:ext cx="6272784" cy="1545336"/>
-          </a:xfrm>
-        </p:spPr>
-        <p:txBody>
-          <a:bodyPr vert="horz" lIns="91440" tIns="45720" rIns="91440" bIns="45720" rtlCol="0" anchor="b">
-            <a:normAutofit/>
-          </a:bodyPr>
-          <a:lstStyle/>
-          <a:p>
-            <a:r>
-              <a:rPr lang="en-US" sz="5200" kern="1200">
-                <a:solidFill>
-                  <a:schemeClr val="tx1"/>
-                </a:solidFill>
-                <a:latin typeface="+mj-lt"/>
-                <a:ea typeface="+mj-ea"/>
-                <a:cs typeface="+mj-cs"/>
-              </a:rPr>
-              <a:t>Ultrasonic Sensor Testing</a:t>
-            </a:r>
-          </a:p>
-        </p:txBody>
-      </p:sp>
-      <p:sp>
-        <p:nvSpPr>
-          <p:cNvPr id="19" name="Rectangle 18">
-            <a:extLst>
-              <a:ext uri="{FF2B5EF4-FFF2-40B4-BE49-F238E27FC236}">
-                <a16:creationId xmlns:a16="http://schemas.microsoft.com/office/drawing/2014/main" id="{136A4AB6-B72B-4CC6-ADCF-BE807B6C3D71}"/>
-              </a:ext>
-              <a:ext uri="{C183D7F6-B498-43B3-948B-1728B52AA6E4}">
-                <adec:decorative xmlns:adec="http://schemas.microsoft.com/office/drawing/2017/decorative" val="1"/>
-              </a:ext>
-            </a:extLst>
-          </p:cNvPr>
-          <p:cNvSpPr>
-            <a:spLocks noGrp="1" noRot="1" noChangeAspect="1" noMove="1" noResize="1" noEditPoints="1" noAdjustHandles="1" noChangeArrowheads="1" noChangeShapeType="1" noTextEdit="1"/>
-          </p:cNvSpPr>
-          <p:nvPr>
-            <p:extLst>
-              <p:ext uri="{386F3935-93C4-4BCD-93E2-E3B085C9AB24}">
-                <p16:designElem xmlns:p16="http://schemas.microsoft.com/office/powerpoint/2015/main" val="1"/>
-              </p:ext>
-            </p:extLst>
-          </p:nvPr>
-        </p:nvSpPr>
-        <p:spPr>
-          <a:xfrm rot="5400000">
-            <a:off x="850392" y="363389"/>
-            <a:ext cx="73152" cy="548640"/>
-          </a:xfrm>
-          <a:prstGeom prst="rect">
-            <a:avLst/>
-          </a:prstGeom>
-          <a:solidFill>
-            <a:schemeClr val="accent2"/>
-          </a:solidFill>
-          <a:ln>
-            <a:noFill/>
-          </a:ln>
-        </p:spPr>
-        <p:style>
-          <a:lnRef idx="2">
-            <a:schemeClr val="accent1">
-              <a:shade val="50000"/>
-            </a:schemeClr>
-          </a:lnRef>
-          <a:fillRef idx="1">
-            <a:schemeClr val="accent1"/>
-          </a:fillRef>
-          <a:effectRef idx="0">
-            <a:schemeClr val="accent1"/>
-          </a:effectRef>
-          <a:fontRef idx="minor">
-            <a:schemeClr val="lt1"/>
-          </a:fontRef>
-        </p:style>
-        <p:txBody>
-          <a:bodyPr rtlCol="0" anchor="ctr"/>
-          <a:lstStyle/>
-          <a:p>
-            <a:pPr marL="0" marR="0" lvl="0" indent="0" algn="ctr" defTabSz="914400" rtl="0" eaLnBrk="1" fontAlgn="auto" latinLnBrk="0" hangingPunct="1">
-              <a:lnSpc>
-                <a:spcPct val="100000"/>
-              </a:lnSpc>
-              <a:spcBef>
-                <a:spcPts val="0"/>
-              </a:spcBef>
-              <a:spcAft>
-                <a:spcPts val="0"/>
-              </a:spcAft>
-              <a:buClrTx/>
-              <a:buSzTx/>
-              <a:buFontTx/>
-              <a:buNone/>
-              <a:tabLst/>
-              <a:defRPr/>
-            </a:pPr>
-            <a:endParaRPr kumimoji="0" lang="en-US" sz="1800" b="0" i="0" u="none" strike="noStrike" kern="1200" cap="none" spc="0" normalizeH="0" baseline="0" noProof="0">
-              <a:ln>
-                <a:noFill/>
-              </a:ln>
-              <a:solidFill>
-                <a:prstClr val="white"/>
-              </a:solidFill>
-              <a:effectLst/>
-              <a:uLnTx/>
-              <a:uFillTx/>
-              <a:latin typeface="Calibri" panose="020F0502020204030204"/>
-              <a:ea typeface="+mn-ea"/>
-              <a:cs typeface="+mn-cs"/>
-            </a:endParaRPr>
-          </a:p>
-        </p:txBody>
-      </p:sp>
-      <p:pic>
-        <p:nvPicPr>
-          <p:cNvPr id="8" name="Content Placeholder 6">
-            <a:extLst>
-              <a:ext uri="{FF2B5EF4-FFF2-40B4-BE49-F238E27FC236}">
-                <a16:creationId xmlns:a16="http://schemas.microsoft.com/office/drawing/2014/main" id="{E9B4CCDE-9DCA-D8A6-15AB-9601CC5C06DE}"/>
-              </a:ext>
-            </a:extLst>
-          </p:cNvPr>
-          <p:cNvPicPr>
-            <a:picLocks noChangeAspect="1"/>
-          </p:cNvPicPr>
-          <p:nvPr/>
-        </p:nvPicPr>
-        <p:blipFill>
-          <a:blip r:embed="rId2"/>
-          <a:srcRect b="15770"/>
-          <a:stretch>
-            <a:fillRect/>
-          </a:stretch>
-        </p:blipFill>
-        <p:spPr>
-          <a:xfrm>
-            <a:off x="7684008" y="2262050"/>
-            <a:ext cx="4507992" cy="2240280"/>
-          </a:xfrm>
-          <a:prstGeom prst="rect">
-            <a:avLst/>
-          </a:prstGeom>
-        </p:spPr>
-      </p:pic>
-      <p:sp>
-        <p:nvSpPr>
-          <p:cNvPr id="21" name="Rectangle 20">
-            <a:extLst>
-              <a:ext uri="{FF2B5EF4-FFF2-40B4-BE49-F238E27FC236}">
-                <a16:creationId xmlns:a16="http://schemas.microsoft.com/office/drawing/2014/main" id="{B35D540D-9486-4236-952A-F72DC52D79BF}"/>
-              </a:ext>
-              <a:ext uri="{C183D7F6-B498-43B3-948B-1728B52AA6E4}">
-                <adec:decorative xmlns:adec="http://schemas.microsoft.com/office/drawing/2017/decorative" val="1"/>
-              </a:ext>
-            </a:extLst>
-          </p:cNvPr>
-          <p:cNvSpPr>
-            <a:spLocks noGrp="1" noRot="1" noChangeAspect="1" noMove="1" noResize="1" noEditPoints="1" noAdjustHandles="1" noChangeArrowheads="1" noChangeShapeType="1" noTextEdit="1"/>
-          </p:cNvSpPr>
-          <p:nvPr>
-            <p:extLst>
-              <p:ext uri="{386F3935-93C4-4BCD-93E2-E3B085C9AB24}">
-                <p16:designElem xmlns:p16="http://schemas.microsoft.com/office/powerpoint/2015/main" val="1"/>
-              </p:ext>
-            </p:extLst>
-          </p:nvPr>
-        </p:nvSpPr>
-        <p:spPr>
-          <a:xfrm>
-            <a:off x="621792" y="2935541"/>
-            <a:ext cx="6217920" cy="18288"/>
-          </a:xfrm>
-          <a:prstGeom prst="rect">
-            <a:avLst/>
-          </a:prstGeom>
-          <a:solidFill>
-            <a:srgbClr val="D5D5D5"/>
-          </a:solidFill>
-          <a:ln w="3175">
-            <a:noFill/>
-          </a:ln>
-          <a:effectLst/>
-        </p:spPr>
-        <p:style>
-          <a:lnRef idx="2">
-            <a:schemeClr val="accent1">
-              <a:shade val="50000"/>
-            </a:schemeClr>
-          </a:lnRef>
-          <a:fillRef idx="1">
-            <a:schemeClr val="accent1"/>
-          </a:fillRef>
-          <a:effectRef idx="0">
-            <a:schemeClr val="accent1"/>
-          </a:effectRef>
-          <a:fontRef idx="minor">
-            <a:schemeClr val="lt1"/>
-          </a:fontRef>
-        </p:style>
-        <p:txBody>
-          <a:bodyPr rtlCol="0" anchor="ctr"/>
-          <a:lstStyle/>
-          <a:p>
-            <a:pPr marL="0" marR="0" lvl="0" indent="0" algn="ctr" defTabSz="914400" rtl="0" eaLnBrk="1" fontAlgn="auto" latinLnBrk="0" hangingPunct="1">
-              <a:lnSpc>
-                <a:spcPct val="100000"/>
-              </a:lnSpc>
-              <a:spcBef>
-                <a:spcPts val="0"/>
-              </a:spcBef>
-              <a:spcAft>
-                <a:spcPts val="0"/>
-              </a:spcAft>
-              <a:buClrTx/>
-              <a:buSzTx/>
-              <a:buFontTx/>
-              <a:buNone/>
-              <a:tabLst/>
-              <a:defRPr/>
-            </a:pPr>
-            <a:endParaRPr kumimoji="0" lang="en-US" sz="1800" b="0" i="0" u="none" strike="noStrike" kern="1200" cap="none" spc="0" normalizeH="0" baseline="0" noProof="0">
-              <a:ln>
-                <a:noFill/>
-              </a:ln>
-              <a:solidFill>
-                <a:prstClr val="white"/>
-              </a:solidFill>
-              <a:effectLst/>
-              <a:uLnTx/>
-              <a:uFillTx/>
-              <a:latin typeface="Calibri" panose="020F0502020204030204"/>
-              <a:ea typeface="+mn-ea"/>
-              <a:cs typeface="+mn-cs"/>
-            </a:endParaRPr>
-          </a:p>
-        </p:txBody>
-      </p:sp>
-      <p:sp>
-        <p:nvSpPr>
-          <p:cNvPr id="14" name="Content Placeholder 13">
-            <a:extLst>
-              <a:ext uri="{FF2B5EF4-FFF2-40B4-BE49-F238E27FC236}">
-                <a16:creationId xmlns:a16="http://schemas.microsoft.com/office/drawing/2014/main" id="{C2DB5B6C-3CFB-A33B-9C34-E24E7E974FB3}"/>
-              </a:ext>
-            </a:extLst>
-          </p:cNvPr>
-          <p:cNvSpPr>
-            <a:spLocks noGrp="1"/>
-          </p:cNvSpPr>
-          <p:nvPr>
-            <p:ph sz="half" idx="1"/>
-          </p:nvPr>
-        </p:nvSpPr>
-        <p:spPr>
-          <a:xfrm>
-            <a:off x="612648" y="3355848"/>
-            <a:ext cx="6272784" cy="2825496"/>
-          </a:xfrm>
-        </p:spPr>
-        <p:txBody>
-          <a:bodyPr vert="horz" lIns="91440" tIns="45720" rIns="91440" bIns="45720" rtlCol="0">
-            <a:normAutofit/>
-          </a:bodyPr>
-          <a:lstStyle/>
-          <a:p>
-            <a:r>
-              <a:rPr lang="en-US" sz="2200" dirty="0"/>
-              <a:t>Additional testing for distance readings and range</a:t>
-            </a:r>
-          </a:p>
-          <a:p>
-            <a:r>
-              <a:rPr lang="en-US" sz="2400" dirty="0"/>
-              <a:t>Finalizing ultrasonic sensor implementation on Raspberry Pi</a:t>
-            </a:r>
-            <a:endParaRPr lang="en-US" sz="2200" dirty="0"/>
-          </a:p>
-        </p:txBody>
-      </p:sp>
-      <p:pic>
-        <p:nvPicPr>
-          <p:cNvPr id="10" name="Content Placeholder 9">
-            <a:extLst>
-              <a:ext uri="{FF2B5EF4-FFF2-40B4-BE49-F238E27FC236}">
-                <a16:creationId xmlns:a16="http://schemas.microsoft.com/office/drawing/2014/main" id="{60DE7792-39F0-1674-6813-4DB0293F4A62}"/>
-              </a:ext>
-            </a:extLst>
-          </p:cNvPr>
-          <p:cNvPicPr>
-            <a:picLocks noGrp="1" noChangeAspect="1"/>
-          </p:cNvPicPr>
-          <p:nvPr>
-            <p:ph sz="half" idx="2"/>
-          </p:nvPr>
-        </p:nvPicPr>
-        <p:blipFill>
-          <a:blip r:embed="rId3"/>
-          <a:srcRect t="1256" b="17609"/>
-          <a:stretch>
-            <a:fillRect/>
-          </a:stretch>
-        </p:blipFill>
-        <p:spPr>
-          <a:xfrm>
-            <a:off x="7684008" y="4595950"/>
-            <a:ext cx="4507992" cy="2240280"/>
-          </a:xfrm>
-          <a:prstGeom prst="rect">
-            <a:avLst/>
-          </a:prstGeom>
-        </p:spPr>
-      </p:pic>
-      <p:pic>
-        <p:nvPicPr>
-          <p:cNvPr id="7" name="Content Placeholder 6">
-            <a:extLst>
-              <a:ext uri="{FF2B5EF4-FFF2-40B4-BE49-F238E27FC236}">
-                <a16:creationId xmlns:a16="http://schemas.microsoft.com/office/drawing/2014/main" id="{4077C99A-E8F4-B5C1-66D0-3A9849345762}"/>
-              </a:ext>
-            </a:extLst>
-          </p:cNvPr>
-          <p:cNvPicPr>
-            <a:picLocks noChangeAspect="1"/>
-          </p:cNvPicPr>
-          <p:nvPr/>
-        </p:nvPicPr>
-        <p:blipFill>
-          <a:blip r:embed="rId4"/>
-          <a:srcRect t="25395" b="1523"/>
-          <a:stretch>
-            <a:fillRect/>
-          </a:stretch>
-        </p:blipFill>
-        <p:spPr>
-          <a:xfrm>
-            <a:off x="7684008" y="21770"/>
-            <a:ext cx="4507992" cy="2146660"/>
-          </a:xfrm>
-          <a:prstGeom prst="rect">
-            <a:avLst/>
-          </a:prstGeom>
-        </p:spPr>
-      </p:pic>
-    </p:spTree>
-    <p:extLst>
-      <p:ext uri="{BB962C8B-B14F-4D97-AF65-F5344CB8AC3E}">
-        <p14:creationId xmlns:p14="http://schemas.microsoft.com/office/powerpoint/2010/main" val="3552499650"/>
-      </p:ext>
-    </p:extLst>
-  </p:cSld>
-  <p:clrMapOvr>
-    <a:masterClrMapping/>
-  </p:clrMapOvr>
-</p:sld>
-</file>
-
-<file path=ppt/slides/slide3.xml><?xml version="1.0" encoding="utf-8"?>
-<p:sld xmlns:a="http://schemas.openxmlformats.org/drawingml/2006/main" xmlns:r="http://schemas.openxmlformats.org/officeDocument/2006/relationships" xmlns:p="http://schemas.openxmlformats.org/presentationml/2006/main">
-  <p:cSld>
-    <p:bg>
-      <p:bgPr>
-        <a:solidFill>
-          <a:schemeClr val="bg1"/>
-        </a:solidFill>
-        <a:effectLst/>
-      </p:bgPr>
-    </p:bg>
-    <p:spTree>
-      <p:nvGrpSpPr>
-        <p:cNvPr id="1" name=""/>
-        <p:cNvGrpSpPr/>
-        <p:nvPr/>
-      </p:nvGrpSpPr>
-      <p:grpSpPr>
-        <a:xfrm>
-          <a:off x="0" y="0"/>
-          <a:ext cx="0" cy="0"/>
-          <a:chOff x="0" y="0"/>
-          <a:chExt cx="0" cy="0"/>
-        </a:xfrm>
-      </p:grpSpPr>
-      <p:sp>
-        <p:nvSpPr>
-          <p:cNvPr id="2" name="Title 1">
-            <a:extLst>
-              <a:ext uri="{FF2B5EF4-FFF2-40B4-BE49-F238E27FC236}">
-                <a16:creationId xmlns:a16="http://schemas.microsoft.com/office/drawing/2014/main" id="{B1CFA3FD-36CD-4450-2E36-5487B2DF4436}"/>
-              </a:ext>
-            </a:extLst>
-          </p:cNvPr>
-          <p:cNvSpPr>
-            <a:spLocks noGrp="1"/>
-          </p:cNvSpPr>
-          <p:nvPr>
-            <p:ph type="title"/>
-          </p:nvPr>
-        </p:nvSpPr>
-        <p:spPr>
-          <a:xfrm>
-            <a:off x="6417733" y="490537"/>
-            <a:ext cx="5291663" cy="1628775"/>
-          </a:xfrm>
-        </p:spPr>
-        <p:txBody>
-          <a:bodyPr anchor="b">
-            <a:normAutofit/>
-          </a:bodyPr>
-          <a:lstStyle/>
-          <a:p>
-            <a:r>
-              <a:rPr lang="en-US" sz="4000" dirty="0"/>
-              <a:t>Motors and Motor Controller</a:t>
-            </a:r>
-          </a:p>
-        </p:txBody>
-      </p:sp>
-      <p:pic>
-        <p:nvPicPr>
-          <p:cNvPr id="5" name="Content Placeholder 4">
-            <a:extLst>
-              <a:ext uri="{FF2B5EF4-FFF2-40B4-BE49-F238E27FC236}">
-                <a16:creationId xmlns:a16="http://schemas.microsoft.com/office/drawing/2014/main" id="{4A4C719A-655E-C6BB-7233-3A21AB105FD5}"/>
-              </a:ext>
-            </a:extLst>
-          </p:cNvPr>
-          <p:cNvPicPr>
-            <a:picLocks noChangeAspect="1"/>
-          </p:cNvPicPr>
-          <p:nvPr/>
-        </p:nvPicPr>
-        <p:blipFill>
-          <a:blip r:embed="rId2"/>
-          <a:srcRect l="4809" r="6281"/>
-          <a:stretch>
-            <a:fillRect/>
-          </a:stretch>
-        </p:blipFill>
-        <p:spPr>
-          <a:xfrm>
-            <a:off x="2" y="1587"/>
-            <a:ext cx="6095999" cy="6856413"/>
-          </a:xfrm>
-          <a:custGeom>
-            <a:avLst/>
-            <a:gdLst/>
-            <a:ahLst/>
-            <a:cxnLst/>
-            <a:rect l="l" t="t" r="r" b="b"/>
-            <a:pathLst>
-              <a:path w="6649908" h="6856413">
-                <a:moveTo>
-                  <a:pt x="0" y="0"/>
-                </a:moveTo>
-                <a:lnTo>
-                  <a:pt x="6559859" y="0"/>
-                </a:lnTo>
-                <a:lnTo>
-                  <a:pt x="6572145" y="79394"/>
-                </a:lnTo>
-                <a:cubicBezTo>
-                  <a:pt x="6857782" y="2230562"/>
-                  <a:pt x="6243159" y="4473353"/>
-                  <a:pt x="6528796" y="6624522"/>
-                </a:cubicBezTo>
-                <a:lnTo>
-                  <a:pt x="6564680" y="6856413"/>
-                </a:lnTo>
-                <a:lnTo>
-                  <a:pt x="0" y="6856413"/>
-                </a:lnTo>
-                <a:close/>
-              </a:path>
-            </a:pathLst>
-          </a:custGeom>
-        </p:spPr>
-      </p:pic>
-      <p:sp>
-        <p:nvSpPr>
-          <p:cNvPr id="9" name="Content Placeholder 8">
-            <a:extLst>
-              <a:ext uri="{FF2B5EF4-FFF2-40B4-BE49-F238E27FC236}">
-                <a16:creationId xmlns:a16="http://schemas.microsoft.com/office/drawing/2014/main" id="{B2A1C60F-8669-8937-5F65-ACBA0471CCCD}"/>
-              </a:ext>
-            </a:extLst>
-          </p:cNvPr>
-          <p:cNvSpPr>
-            <a:spLocks noGrp="1"/>
-          </p:cNvSpPr>
-          <p:nvPr>
-            <p:ph idx="1"/>
-          </p:nvPr>
-        </p:nvSpPr>
-        <p:spPr>
-          <a:xfrm>
-            <a:off x="6417734" y="2614612"/>
-            <a:ext cx="5291663" cy="3752849"/>
-          </a:xfrm>
-        </p:spPr>
-        <p:txBody>
-          <a:bodyPr>
-            <a:normAutofit/>
-          </a:bodyPr>
-          <a:lstStyle/>
-          <a:p>
-            <a:r>
-              <a:rPr lang="en-US" sz="2200" dirty="0"/>
-              <a:t>Ordered motors and motor controller</a:t>
-            </a:r>
-          </a:p>
-          <a:p>
-            <a:pPr lvl="1"/>
-            <a:r>
-              <a:rPr lang="en-US" sz="2200" dirty="0"/>
-              <a:t>L298N Motor Controller</a:t>
-            </a:r>
-          </a:p>
-          <a:p>
-            <a:pPr lvl="1"/>
-            <a:r>
-              <a:rPr lang="en-US" sz="2200" dirty="0"/>
-              <a:t>2x TT-Style DC motors</a:t>
-            </a:r>
-          </a:p>
-          <a:p>
-            <a:r>
-              <a:rPr lang="en-US" sz="2200" dirty="0"/>
-              <a:t>Tested motors/controller for performance</a:t>
-            </a:r>
-          </a:p>
-          <a:p>
-            <a:pPr lvl="0"/>
-            <a:r>
-              <a:rPr lang="en-US" sz="2200" dirty="0"/>
-              <a:t>Identified issues with current components </a:t>
-            </a:r>
-          </a:p>
-          <a:p>
-            <a:pPr lvl="0"/>
-            <a:r>
-              <a:rPr lang="en-US" sz="2200" dirty="0"/>
-              <a:t>Considering replacement motor/controller options</a:t>
-            </a:r>
-          </a:p>
-        </p:txBody>
-      </p:sp>
-    </p:spTree>
-    <p:extLst>
-      <p:ext uri="{BB962C8B-B14F-4D97-AF65-F5344CB8AC3E}">
-        <p14:creationId xmlns:p14="http://schemas.microsoft.com/office/powerpoint/2010/main" val="2069986074"/>
       </p:ext>
     </p:extLst>
   </p:cSld>

--- a/Weekly Reports/slides/2-alexis-perez.pptx
+++ b/Weekly Reports/slides/2-alexis-perez.pptx
@@ -259,7 +259,7 @@
           <a:p>
             <a:fld id="{752E6B35-DAD5-CF47-9E65-9CA12B499D8C}" type="datetimeFigureOut">
               <a:rPr lang="en-US" smtClean="0"/>
-              <a:t>9/29/2026</a:t>
+              <a:t>10/6/2026</a:t>
             </a:fld>
             <a:endParaRPr lang="en-US"/>
           </a:p>
@@ -457,7 +457,7 @@
           <a:p>
             <a:fld id="{752E6B35-DAD5-CF47-9E65-9CA12B499D8C}" type="datetimeFigureOut">
               <a:rPr lang="en-US" smtClean="0"/>
-              <a:t>9/29/2026</a:t>
+              <a:t>10/6/2026</a:t>
             </a:fld>
             <a:endParaRPr lang="en-US"/>
           </a:p>
@@ -665,7 +665,7 @@
           <a:p>
             <a:fld id="{752E6B35-DAD5-CF47-9E65-9CA12B499D8C}" type="datetimeFigureOut">
               <a:rPr lang="en-US" smtClean="0"/>
-              <a:t>9/29/2026</a:t>
+              <a:t>10/6/2026</a:t>
             </a:fld>
             <a:endParaRPr lang="en-US"/>
           </a:p>
@@ -863,7 +863,7 @@
           <a:p>
             <a:fld id="{752E6B35-DAD5-CF47-9E65-9CA12B499D8C}" type="datetimeFigureOut">
               <a:rPr lang="en-US" smtClean="0"/>
-              <a:t>9/29/2026</a:t>
+              <a:t>10/6/2026</a:t>
             </a:fld>
             <a:endParaRPr lang="en-US"/>
           </a:p>
@@ -1138,7 +1138,7 @@
           <a:p>
             <a:fld id="{752E6B35-DAD5-CF47-9E65-9CA12B499D8C}" type="datetimeFigureOut">
               <a:rPr lang="en-US" smtClean="0"/>
-              <a:t>9/29/2026</a:t>
+              <a:t>10/6/2026</a:t>
             </a:fld>
             <a:endParaRPr lang="en-US"/>
           </a:p>
@@ -1403,7 +1403,7 @@
           <a:p>
             <a:fld id="{752E6B35-DAD5-CF47-9E65-9CA12B499D8C}" type="datetimeFigureOut">
               <a:rPr lang="en-US" smtClean="0"/>
-              <a:t>9/29/2026</a:t>
+              <a:t>10/6/2026</a:t>
             </a:fld>
             <a:endParaRPr lang="en-US"/>
           </a:p>
@@ -1815,7 +1815,7 @@
           <a:p>
             <a:fld id="{752E6B35-DAD5-CF47-9E65-9CA12B499D8C}" type="datetimeFigureOut">
               <a:rPr lang="en-US" smtClean="0"/>
-              <a:t>9/29/2026</a:t>
+              <a:t>10/6/2026</a:t>
             </a:fld>
             <a:endParaRPr lang="en-US"/>
           </a:p>
@@ -1956,7 +1956,7 @@
           <a:p>
             <a:fld id="{752E6B35-DAD5-CF47-9E65-9CA12B499D8C}" type="datetimeFigureOut">
               <a:rPr lang="en-US" smtClean="0"/>
-              <a:t>9/29/2026</a:t>
+              <a:t>10/6/2026</a:t>
             </a:fld>
             <a:endParaRPr lang="en-US"/>
           </a:p>
@@ -2069,7 +2069,7 @@
           <a:p>
             <a:fld id="{752E6B35-DAD5-CF47-9E65-9CA12B499D8C}" type="datetimeFigureOut">
               <a:rPr lang="en-US" smtClean="0"/>
-              <a:t>9/29/2026</a:t>
+              <a:t>10/6/2026</a:t>
             </a:fld>
             <a:endParaRPr lang="en-US"/>
           </a:p>
@@ -2380,7 +2380,7 @@
           <a:p>
             <a:fld id="{752E6B35-DAD5-CF47-9E65-9CA12B499D8C}" type="datetimeFigureOut">
               <a:rPr lang="en-US" smtClean="0"/>
-              <a:t>9/29/2026</a:t>
+              <a:t>10/6/2026</a:t>
             </a:fld>
             <a:endParaRPr lang="en-US"/>
           </a:p>
@@ -2668,7 +2668,7 @@
           <a:p>
             <a:fld id="{752E6B35-DAD5-CF47-9E65-9CA12B499D8C}" type="datetimeFigureOut">
               <a:rPr lang="en-US" smtClean="0"/>
-              <a:t>9/29/2026</a:t>
+              <a:t>10/6/2026</a:t>
             </a:fld>
             <a:endParaRPr lang="en-US"/>
           </a:p>
@@ -2909,7 +2909,7 @@
           <a:p>
             <a:fld id="{752E6B35-DAD5-CF47-9E65-9CA12B499D8C}" type="datetimeFigureOut">
               <a:rPr lang="en-US" smtClean="0"/>
-              <a:t>9/29/2026</a:t>
+              <a:t>10/6/2026</a:t>
             </a:fld>
             <a:endParaRPr lang="en-US"/>
           </a:p>
@@ -3373,7 +3373,7 @@
         <p:spPr/>
         <p:txBody>
           <a:bodyPr>
-            <a:normAutofit fontScale="92500" lnSpcReduction="10000"/>
+            <a:normAutofit lnSpcReduction="10000"/>
           </a:bodyPr>
           <a:lstStyle/>
           <a:p>
@@ -3386,14 +3386,14 @@
             <a:pPr lvl="1"/>
             <a:r>
               <a:rPr lang="en-US" dirty="0"/>
-              <a:t>Research different Vehicle Navigation Options</a:t>
+              <a:t>Continue OpenCV Learning</a:t>
             </a:r>
           </a:p>
           <a:p>
             <a:pPr lvl="1"/>
             <a:r>
               <a:rPr lang="en-US" dirty="0"/>
-              <a:t>Start OpenCV Course</a:t>
+              <a:t>Research Line Sensor Options</a:t>
             </a:r>
           </a:p>
           <a:p>
@@ -3406,14 +3406,14 @@
             <a:pPr lvl="1"/>
             <a:r>
               <a:rPr lang="en-US" dirty="0"/>
-              <a:t>Finalized/presented different Vehicle Navigation Options</a:t>
+              <a:t>Selected and ordered  Line Sensors</a:t>
             </a:r>
           </a:p>
           <a:p>
             <a:pPr lvl="1"/>
             <a:r>
               <a:rPr lang="en-US" dirty="0"/>
-              <a:t>Completed OpenCV course</a:t>
+              <a:t>Completed OpenCV Beginner course</a:t>
             </a:r>
           </a:p>
           <a:p>
@@ -3426,18 +3426,27 @@
             <a:pPr lvl="1"/>
             <a:r>
               <a:rPr lang="en-US" dirty="0"/>
-              <a:t>Research and buy any missing components (per Navigation Option)</a:t>
-            </a:r>
+              <a:t>Integrate line sensors with </a:t>
+            </a:r>
+            <a:r>
+              <a:rPr lang="en-US" dirty="0" err="1"/>
+              <a:t>RaspberryPi</a:t>
+            </a:r>
+            <a:endParaRPr lang="en-US" dirty="0"/>
           </a:p>
           <a:p>
             <a:pPr lvl="1"/>
             <a:r>
-              <a:rPr lang="en-US"/>
-              <a:t>Continue </a:t>
-            </a:r>
-            <a:r>
               <a:rPr lang="en-US" dirty="0"/>
-              <a:t>OpenCV learning</a:t>
+              <a:t>Implement OpenCV with </a:t>
+            </a:r>
+            <a:r>
+              <a:rPr lang="en-US" dirty="0" err="1"/>
+              <a:t>RaspberryPi</a:t>
+            </a:r>
+            <a:r>
+              <a:rPr lang="en-US" dirty="0"/>
+              <a:t> Camera</a:t>
             </a:r>
           </a:p>
           <a:p>
@@ -3450,7 +3459,7 @@
             <a:pPr lvl="1"/>
             <a:r>
               <a:rPr lang="en-US" dirty="0"/>
-              <a:t>7 hours.</a:t>
+              <a:t>6 hours.</a:t>
             </a:r>
           </a:p>
         </p:txBody>

--- a/Weekly Reports/slides/2-alexis-perez.pptx
+++ b/Weekly Reports/slides/2-alexis-perez.pptx
@@ -6,6 +6,7 @@
   </p:sldMasterIdLst>
   <p:sldIdLst>
     <p:sldId id="258" r:id="rId2"/>
+    <p:sldId id="259" r:id="rId3"/>
   </p:sldIdLst>
   <p:sldSz cx="12192000" cy="6858000"/>
   <p:notesSz cx="6858000" cy="9144000"/>
@@ -259,7 +260,7 @@
           <a:p>
             <a:fld id="{752E6B35-DAD5-CF47-9E65-9CA12B499D8C}" type="datetimeFigureOut">
               <a:rPr lang="en-US" smtClean="0"/>
-              <a:t>10/6/2026</a:t>
+              <a:t>10/13/2026</a:t>
             </a:fld>
             <a:endParaRPr lang="en-US"/>
           </a:p>
@@ -457,7 +458,7 @@
           <a:p>
             <a:fld id="{752E6B35-DAD5-CF47-9E65-9CA12B499D8C}" type="datetimeFigureOut">
               <a:rPr lang="en-US" smtClean="0"/>
-              <a:t>10/6/2026</a:t>
+              <a:t>10/13/2026</a:t>
             </a:fld>
             <a:endParaRPr lang="en-US"/>
           </a:p>
@@ -665,7 +666,7 @@
           <a:p>
             <a:fld id="{752E6B35-DAD5-CF47-9E65-9CA12B499D8C}" type="datetimeFigureOut">
               <a:rPr lang="en-US" smtClean="0"/>
-              <a:t>10/6/2026</a:t>
+              <a:t>10/13/2026</a:t>
             </a:fld>
             <a:endParaRPr lang="en-US"/>
           </a:p>
@@ -863,7 +864,7 @@
           <a:p>
             <a:fld id="{752E6B35-DAD5-CF47-9E65-9CA12B499D8C}" type="datetimeFigureOut">
               <a:rPr lang="en-US" smtClean="0"/>
-              <a:t>10/6/2026</a:t>
+              <a:t>10/13/2026</a:t>
             </a:fld>
             <a:endParaRPr lang="en-US"/>
           </a:p>
@@ -1138,7 +1139,7 @@
           <a:p>
             <a:fld id="{752E6B35-DAD5-CF47-9E65-9CA12B499D8C}" type="datetimeFigureOut">
               <a:rPr lang="en-US" smtClean="0"/>
-              <a:t>10/6/2026</a:t>
+              <a:t>10/13/2026</a:t>
             </a:fld>
             <a:endParaRPr lang="en-US"/>
           </a:p>
@@ -1403,7 +1404,7 @@
           <a:p>
             <a:fld id="{752E6B35-DAD5-CF47-9E65-9CA12B499D8C}" type="datetimeFigureOut">
               <a:rPr lang="en-US" smtClean="0"/>
-              <a:t>10/6/2026</a:t>
+              <a:t>10/13/2026</a:t>
             </a:fld>
             <a:endParaRPr lang="en-US"/>
           </a:p>
@@ -1815,7 +1816,7 @@
           <a:p>
             <a:fld id="{752E6B35-DAD5-CF47-9E65-9CA12B499D8C}" type="datetimeFigureOut">
               <a:rPr lang="en-US" smtClean="0"/>
-              <a:t>10/6/2026</a:t>
+              <a:t>10/13/2026</a:t>
             </a:fld>
             <a:endParaRPr lang="en-US"/>
           </a:p>
@@ -1956,7 +1957,7 @@
           <a:p>
             <a:fld id="{752E6B35-DAD5-CF47-9E65-9CA12B499D8C}" type="datetimeFigureOut">
               <a:rPr lang="en-US" smtClean="0"/>
-              <a:t>10/6/2026</a:t>
+              <a:t>10/13/2026</a:t>
             </a:fld>
             <a:endParaRPr lang="en-US"/>
           </a:p>
@@ -2069,7 +2070,7 @@
           <a:p>
             <a:fld id="{752E6B35-DAD5-CF47-9E65-9CA12B499D8C}" type="datetimeFigureOut">
               <a:rPr lang="en-US" smtClean="0"/>
-              <a:t>10/6/2026</a:t>
+              <a:t>10/13/2026</a:t>
             </a:fld>
             <a:endParaRPr lang="en-US"/>
           </a:p>
@@ -2380,7 +2381,7 @@
           <a:p>
             <a:fld id="{752E6B35-DAD5-CF47-9E65-9CA12B499D8C}" type="datetimeFigureOut">
               <a:rPr lang="en-US" smtClean="0"/>
-              <a:t>10/6/2026</a:t>
+              <a:t>10/13/2026</a:t>
             </a:fld>
             <a:endParaRPr lang="en-US"/>
           </a:p>
@@ -2668,7 +2669,7 @@
           <a:p>
             <a:fld id="{752E6B35-DAD5-CF47-9E65-9CA12B499D8C}" type="datetimeFigureOut">
               <a:rPr lang="en-US" smtClean="0"/>
-              <a:t>10/6/2026</a:t>
+              <a:t>10/13/2026</a:t>
             </a:fld>
             <a:endParaRPr lang="en-US"/>
           </a:p>
@@ -2909,7 +2910,7 @@
           <a:p>
             <a:fld id="{752E6B35-DAD5-CF47-9E65-9CA12B499D8C}" type="datetimeFigureOut">
               <a:rPr lang="en-US" smtClean="0"/>
-              <a:t>10/6/2026</a:t>
+              <a:t>10/13/2026</a:t>
             </a:fld>
             <a:endParaRPr lang="en-US"/>
           </a:p>
@@ -3386,14 +3387,14 @@
             <a:pPr lvl="1"/>
             <a:r>
               <a:rPr lang="en-US" dirty="0"/>
-              <a:t>Continue OpenCV Learning</a:t>
+              <a:t>Continue OpenCV Course</a:t>
             </a:r>
           </a:p>
           <a:p>
             <a:pPr lvl="1"/>
             <a:r>
               <a:rPr lang="en-US" dirty="0"/>
-              <a:t>Research Line Sensor Options</a:t>
+              <a:t>Test Line Sensors before integration</a:t>
             </a:r>
           </a:p>
           <a:p>
@@ -3406,33 +3407,27 @@
             <a:pPr lvl="1"/>
             <a:r>
               <a:rPr lang="en-US" dirty="0"/>
-              <a:t>Selected and ordered  Line Sensors</a:t>
-            </a:r>
+              <a:t>Completed OpenCV Course</a:t>
+            </a:r>
+            <a:endParaRPr lang="en-US" b="1" dirty="0"/>
           </a:p>
           <a:p>
             <a:pPr lvl="1"/>
             <a:r>
               <a:rPr lang="en-US" dirty="0"/>
-              <a:t>Completed OpenCV Beginner course</a:t>
-            </a:r>
+              <a:t>Integrate Line Sensors with </a:t>
+            </a:r>
+            <a:r>
+              <a:rPr lang="en-US" dirty="0" err="1"/>
+              <a:t>RaspberryPi</a:t>
+            </a:r>
+            <a:endParaRPr lang="en-US" dirty="0"/>
           </a:p>
           <a:p>
             <a:r>
               <a:rPr lang="en-US" b="1" dirty="0"/>
               <a:t>Goals for next week</a:t>
             </a:r>
-          </a:p>
-          <a:p>
-            <a:pPr lvl="1"/>
-            <a:r>
-              <a:rPr lang="en-US" dirty="0"/>
-              <a:t>Integrate line sensors with </a:t>
-            </a:r>
-            <a:r>
-              <a:rPr lang="en-US" dirty="0" err="1"/>
-              <a:t>RaspberryPi</a:t>
-            </a:r>
-            <a:endParaRPr lang="en-US" dirty="0"/>
           </a:p>
           <a:p>
             <a:pPr lvl="1"/>
@@ -3468,6 +3463,905 @@
     <p:extLst>
       <p:ext uri="{BB962C8B-B14F-4D97-AF65-F5344CB8AC3E}">
         <p14:creationId xmlns:p14="http://schemas.microsoft.com/office/powerpoint/2010/main" val="3566922106"/>
+      </p:ext>
+    </p:extLst>
+  </p:cSld>
+  <p:clrMapOvr>
+    <a:masterClrMapping/>
+  </p:clrMapOvr>
+</p:sld>
+</file>
+
+<file path=ppt/slides/slide2.xml><?xml version="1.0" encoding="utf-8"?>
+<p:sld xmlns:a="http://schemas.openxmlformats.org/drawingml/2006/main" xmlns:r="http://schemas.openxmlformats.org/officeDocument/2006/relationships" xmlns:p="http://schemas.openxmlformats.org/presentationml/2006/main">
+  <p:cSld>
+    <p:bg>
+      <p:bgPr>
+        <a:solidFill>
+          <a:schemeClr val="bg1"/>
+        </a:solidFill>
+        <a:effectLst/>
+      </p:bgPr>
+    </p:bg>
+    <p:spTree>
+      <p:nvGrpSpPr>
+        <p:cNvPr id="1" name=""/>
+        <p:cNvGrpSpPr/>
+        <p:nvPr/>
+      </p:nvGrpSpPr>
+      <p:grpSpPr>
+        <a:xfrm>
+          <a:off x="0" y="0"/>
+          <a:ext cx="0" cy="0"/>
+          <a:chOff x="0" y="0"/>
+          <a:chExt cx="0" cy="0"/>
+        </a:xfrm>
+      </p:grpSpPr>
+      <p:sp useBgFill="1">
+        <p:nvSpPr>
+          <p:cNvPr id="42" name="Rectangle 41">
+            <a:extLst>
+              <a:ext uri="{FF2B5EF4-FFF2-40B4-BE49-F238E27FC236}">
+                <a16:creationId xmlns:a16="http://schemas.microsoft.com/office/drawing/2014/main" id="{394842B0-684D-44CC-B4BC-D13331CFD290}"/>
+              </a:ext>
+              <a:ext uri="{C183D7F6-B498-43B3-948B-1728B52AA6E4}">
+                <adec:decorative xmlns:adec="http://schemas.microsoft.com/office/drawing/2017/decorative" val="1"/>
+              </a:ext>
+            </a:extLst>
+          </p:cNvPr>
+          <p:cNvSpPr>
+            <a:spLocks noGrp="1" noRot="1" noChangeAspect="1" noMove="1" noResize="1" noEditPoints="1" noAdjustHandles="1" noChangeArrowheads="1" noChangeShapeType="1" noTextEdit="1"/>
+          </p:cNvSpPr>
+          <p:nvPr>
+            <p:extLst>
+              <p:ext uri="{386F3935-93C4-4BCD-93E2-E3B085C9AB24}">
+                <p16:designElem xmlns:p16="http://schemas.microsoft.com/office/powerpoint/2015/main" val="1"/>
+              </p:ext>
+            </p:extLst>
+          </p:nvPr>
+        </p:nvSpPr>
+        <p:spPr>
+          <a:xfrm>
+            <a:off x="0" y="0"/>
+            <a:ext cx="12188952" cy="6858000"/>
+          </a:xfrm>
+          <a:prstGeom prst="rect">
+            <a:avLst/>
+          </a:prstGeom>
+          <a:ln>
+            <a:noFill/>
+          </a:ln>
+        </p:spPr>
+        <p:style>
+          <a:lnRef idx="2">
+            <a:schemeClr val="accent1">
+              <a:shade val="50000"/>
+            </a:schemeClr>
+          </a:lnRef>
+          <a:fillRef idx="1">
+            <a:schemeClr val="accent1"/>
+          </a:fillRef>
+          <a:effectRef idx="0">
+            <a:schemeClr val="accent1"/>
+          </a:effectRef>
+          <a:fontRef idx="minor">
+            <a:schemeClr val="lt1"/>
+          </a:fontRef>
+        </p:style>
+        <p:txBody>
+          <a:bodyPr rtlCol="0" anchor="ctr"/>
+          <a:lstStyle/>
+          <a:p>
+            <a:pPr algn="ctr"/>
+            <a:endParaRPr lang="en-US"/>
+          </a:p>
+        </p:txBody>
+      </p:sp>
+      <p:sp>
+        <p:nvSpPr>
+          <p:cNvPr id="2" name="Title 1">
+            <a:extLst>
+              <a:ext uri="{FF2B5EF4-FFF2-40B4-BE49-F238E27FC236}">
+                <a16:creationId xmlns:a16="http://schemas.microsoft.com/office/drawing/2014/main" id="{4F231F43-1EFC-70EC-1329-C1A17E794D4D}"/>
+              </a:ext>
+            </a:extLst>
+          </p:cNvPr>
+          <p:cNvSpPr>
+            <a:spLocks noGrp="1"/>
+          </p:cNvSpPr>
+          <p:nvPr>
+            <p:ph type="title"/>
+          </p:nvPr>
+        </p:nvSpPr>
+        <p:spPr>
+          <a:xfrm>
+            <a:off x="640080" y="329184"/>
+            <a:ext cx="6894576" cy="1783080"/>
+          </a:xfrm>
+        </p:spPr>
+        <p:txBody>
+          <a:bodyPr anchor="b">
+            <a:normAutofit/>
+          </a:bodyPr>
+          <a:lstStyle/>
+          <a:p>
+            <a:r>
+              <a:rPr lang="en-US" sz="5000" dirty="0"/>
+              <a:t>Line Sensors </a:t>
+            </a:r>
+          </a:p>
+        </p:txBody>
+      </p:sp>
+      <p:sp>
+        <p:nvSpPr>
+          <p:cNvPr id="43" name="sketch line">
+            <a:extLst>
+              <a:ext uri="{FF2B5EF4-FFF2-40B4-BE49-F238E27FC236}">
+                <a16:creationId xmlns:a16="http://schemas.microsoft.com/office/drawing/2014/main" id="{4C2A3DC3-F495-4B99-9FF3-3FB30D63235E}"/>
+              </a:ext>
+              <a:ext uri="{C183D7F6-B498-43B3-948B-1728B52AA6E4}">
+                <adec:decorative xmlns:adec="http://schemas.microsoft.com/office/drawing/2017/decorative" val="1"/>
+              </a:ext>
+            </a:extLst>
+          </p:cNvPr>
+          <p:cNvSpPr>
+            <a:spLocks noGrp="1" noRot="1" noChangeAspect="1" noMove="1" noResize="1" noEditPoints="1" noAdjustHandles="1" noChangeArrowheads="1" noChangeShapeType="1" noTextEdit="1"/>
+          </p:cNvSpPr>
+          <p:nvPr>
+            <p:extLst>
+              <p:ext uri="{386F3935-93C4-4BCD-93E2-E3B085C9AB24}">
+                <p16:designElem xmlns:p16="http://schemas.microsoft.com/office/powerpoint/2015/main" val="1"/>
+              </p:ext>
+            </p:extLst>
+          </p:nvPr>
+        </p:nvSpPr>
+        <p:spPr>
+          <a:xfrm>
+            <a:off x="758952" y="2395728"/>
+            <a:ext cx="4243589" cy="18288"/>
+          </a:xfrm>
+          <a:custGeom>
+            <a:avLst/>
+            <a:gdLst>
+              <a:gd name="csX0" fmla="*/ 0 w 4243589"/>
+              <a:gd name="csY0" fmla="*/ 0 h 18288"/>
+              <a:gd name="csX1" fmla="*/ 478919 w 4243589"/>
+              <a:gd name="csY1" fmla="*/ 0 h 18288"/>
+              <a:gd name="csX2" fmla="*/ 957839 w 4243589"/>
+              <a:gd name="csY2" fmla="*/ 0 h 18288"/>
+              <a:gd name="csX3" fmla="*/ 1521630 w 4243589"/>
+              <a:gd name="csY3" fmla="*/ 0 h 18288"/>
+              <a:gd name="csX4" fmla="*/ 2212729 w 4243589"/>
+              <a:gd name="csY4" fmla="*/ 0 h 18288"/>
+              <a:gd name="csX5" fmla="*/ 2734084 w 4243589"/>
+              <a:gd name="csY5" fmla="*/ 0 h 18288"/>
+              <a:gd name="csX6" fmla="*/ 3255439 w 4243589"/>
+              <a:gd name="csY6" fmla="*/ 0 h 18288"/>
+              <a:gd name="csX7" fmla="*/ 4243589 w 4243589"/>
+              <a:gd name="csY7" fmla="*/ 0 h 18288"/>
+              <a:gd name="csX8" fmla="*/ 4243589 w 4243589"/>
+              <a:gd name="csY8" fmla="*/ 18288 h 18288"/>
+              <a:gd name="csX9" fmla="*/ 3594926 w 4243589"/>
+              <a:gd name="csY9" fmla="*/ 18288 h 18288"/>
+              <a:gd name="csX10" fmla="*/ 3073571 w 4243589"/>
+              <a:gd name="csY10" fmla="*/ 18288 h 18288"/>
+              <a:gd name="csX11" fmla="*/ 2552216 w 4243589"/>
+              <a:gd name="csY11" fmla="*/ 18288 h 18288"/>
+              <a:gd name="csX12" fmla="*/ 1903553 w 4243589"/>
+              <a:gd name="csY12" fmla="*/ 18288 h 18288"/>
+              <a:gd name="csX13" fmla="*/ 1212454 w 4243589"/>
+              <a:gd name="csY13" fmla="*/ 18288 h 18288"/>
+              <a:gd name="csX14" fmla="*/ 733535 w 4243589"/>
+              <a:gd name="csY14" fmla="*/ 18288 h 18288"/>
+              <a:gd name="csX15" fmla="*/ 0 w 4243589"/>
+              <a:gd name="csY15" fmla="*/ 18288 h 18288"/>
+              <a:gd name="csX16" fmla="*/ 0 w 4243589"/>
+              <a:gd name="csY16" fmla="*/ 0 h 18288"/>
+            </a:gdLst>
+            <a:ahLst/>
+            <a:cxnLst>
+              <a:cxn ang="0">
+                <a:pos x="csX0" y="csY0"/>
+              </a:cxn>
+              <a:cxn ang="0">
+                <a:pos x="csX1" y="csY1"/>
+              </a:cxn>
+              <a:cxn ang="0">
+                <a:pos x="csX2" y="csY2"/>
+              </a:cxn>
+              <a:cxn ang="0">
+                <a:pos x="csX3" y="csY3"/>
+              </a:cxn>
+              <a:cxn ang="0">
+                <a:pos x="csX4" y="csY4"/>
+              </a:cxn>
+              <a:cxn ang="0">
+                <a:pos x="csX5" y="csY5"/>
+              </a:cxn>
+              <a:cxn ang="0">
+                <a:pos x="csX6" y="csY6"/>
+              </a:cxn>
+              <a:cxn ang="0">
+                <a:pos x="csX7" y="csY7"/>
+              </a:cxn>
+              <a:cxn ang="0">
+                <a:pos x="csX8" y="csY8"/>
+              </a:cxn>
+              <a:cxn ang="0">
+                <a:pos x="csX9" y="csY9"/>
+              </a:cxn>
+              <a:cxn ang="0">
+                <a:pos x="csX10" y="csY10"/>
+              </a:cxn>
+              <a:cxn ang="0">
+                <a:pos x="csX11" y="csY11"/>
+              </a:cxn>
+              <a:cxn ang="0">
+                <a:pos x="csX12" y="csY12"/>
+              </a:cxn>
+              <a:cxn ang="0">
+                <a:pos x="csX13" y="csY13"/>
+              </a:cxn>
+              <a:cxn ang="0">
+                <a:pos x="csX14" y="csY14"/>
+              </a:cxn>
+              <a:cxn ang="0">
+                <a:pos x="csX15" y="csY15"/>
+              </a:cxn>
+              <a:cxn ang="0">
+                <a:pos x="csX16" y="csY16"/>
+              </a:cxn>
+            </a:cxnLst>
+            <a:rect l="l" t="t" r="r" b="b"/>
+            <a:pathLst>
+              <a:path w="4243589" h="18288" fill="none" extrusionOk="0">
+                <a:moveTo>
+                  <a:pt x="0" y="0"/>
+                </a:moveTo>
+                <a:cubicBezTo>
+                  <a:pt x="213395" y="-21006"/>
+                  <a:pt x="307421" y="-18116"/>
+                  <a:pt x="478919" y="0"/>
+                </a:cubicBezTo>
+                <a:cubicBezTo>
+                  <a:pt x="650417" y="18116"/>
+                  <a:pt x="831092" y="-21237"/>
+                  <a:pt x="957839" y="0"/>
+                </a:cubicBezTo>
+                <a:cubicBezTo>
+                  <a:pt x="1084586" y="21237"/>
+                  <a:pt x="1301682" y="25124"/>
+                  <a:pt x="1521630" y="0"/>
+                </a:cubicBezTo>
+                <a:cubicBezTo>
+                  <a:pt x="1741578" y="-25124"/>
+                  <a:pt x="1970269" y="-29139"/>
+                  <a:pt x="2212729" y="0"/>
+                </a:cubicBezTo>
+                <a:cubicBezTo>
+                  <a:pt x="2455189" y="29139"/>
+                  <a:pt x="2558847" y="-4796"/>
+                  <a:pt x="2734084" y="0"/>
+                </a:cubicBezTo>
+                <a:cubicBezTo>
+                  <a:pt x="2909321" y="4796"/>
+                  <a:pt x="3097217" y="-13409"/>
+                  <a:pt x="3255439" y="0"/>
+                </a:cubicBezTo>
+                <a:cubicBezTo>
+                  <a:pt x="3413662" y="13409"/>
+                  <a:pt x="3979999" y="-10121"/>
+                  <a:pt x="4243589" y="0"/>
+                </a:cubicBezTo>
+                <a:cubicBezTo>
+                  <a:pt x="4244484" y="8974"/>
+                  <a:pt x="4243043" y="9359"/>
+                  <a:pt x="4243589" y="18288"/>
+                </a:cubicBezTo>
+                <a:cubicBezTo>
+                  <a:pt x="4058777" y="31246"/>
+                  <a:pt x="3910348" y="3158"/>
+                  <a:pt x="3594926" y="18288"/>
+                </a:cubicBezTo>
+                <a:cubicBezTo>
+                  <a:pt x="3279504" y="33418"/>
+                  <a:pt x="3319955" y="-3977"/>
+                  <a:pt x="3073571" y="18288"/>
+                </a:cubicBezTo>
+                <a:cubicBezTo>
+                  <a:pt x="2827187" y="40553"/>
+                  <a:pt x="2767387" y="1863"/>
+                  <a:pt x="2552216" y="18288"/>
+                </a:cubicBezTo>
+                <a:cubicBezTo>
+                  <a:pt x="2337046" y="34713"/>
+                  <a:pt x="2181871" y="19527"/>
+                  <a:pt x="1903553" y="18288"/>
+                </a:cubicBezTo>
+                <a:cubicBezTo>
+                  <a:pt x="1625235" y="17049"/>
+                  <a:pt x="1557672" y="24174"/>
+                  <a:pt x="1212454" y="18288"/>
+                </a:cubicBezTo>
+                <a:cubicBezTo>
+                  <a:pt x="867236" y="12402"/>
+                  <a:pt x="874382" y="15627"/>
+                  <a:pt x="733535" y="18288"/>
+                </a:cubicBezTo>
+                <a:cubicBezTo>
+                  <a:pt x="592688" y="20949"/>
+                  <a:pt x="183477" y="14753"/>
+                  <a:pt x="0" y="18288"/>
+                </a:cubicBezTo>
+                <a:cubicBezTo>
+                  <a:pt x="-229" y="14222"/>
+                  <a:pt x="509" y="5816"/>
+                  <a:pt x="0" y="0"/>
+                </a:cubicBezTo>
+                <a:close/>
+              </a:path>
+              <a:path w="4243589" h="18288" stroke="0" extrusionOk="0">
+                <a:moveTo>
+                  <a:pt x="0" y="0"/>
+                </a:moveTo>
+                <a:cubicBezTo>
+                  <a:pt x="143690" y="16630"/>
+                  <a:pt x="266667" y="14847"/>
+                  <a:pt x="521355" y="0"/>
+                </a:cubicBezTo>
+                <a:cubicBezTo>
+                  <a:pt x="776043" y="-14847"/>
+                  <a:pt x="814491" y="-17363"/>
+                  <a:pt x="1000275" y="0"/>
+                </a:cubicBezTo>
+                <a:cubicBezTo>
+                  <a:pt x="1186059" y="17363"/>
+                  <a:pt x="1352504" y="-23507"/>
+                  <a:pt x="1521630" y="0"/>
+                </a:cubicBezTo>
+                <a:cubicBezTo>
+                  <a:pt x="1690756" y="23507"/>
+                  <a:pt x="1889525" y="5871"/>
+                  <a:pt x="2127857" y="0"/>
+                </a:cubicBezTo>
+                <a:cubicBezTo>
+                  <a:pt x="2366189" y="-5871"/>
+                  <a:pt x="2620628" y="-27997"/>
+                  <a:pt x="2776520" y="0"/>
+                </a:cubicBezTo>
+                <a:cubicBezTo>
+                  <a:pt x="2932412" y="27997"/>
+                  <a:pt x="3131683" y="-25073"/>
+                  <a:pt x="3467618" y="0"/>
+                </a:cubicBezTo>
+                <a:cubicBezTo>
+                  <a:pt x="3803553" y="25073"/>
+                  <a:pt x="4017371" y="3071"/>
+                  <a:pt x="4243589" y="0"/>
+                </a:cubicBezTo>
+                <a:cubicBezTo>
+                  <a:pt x="4243134" y="6162"/>
+                  <a:pt x="4243492" y="11775"/>
+                  <a:pt x="4243589" y="18288"/>
+                </a:cubicBezTo>
+                <a:cubicBezTo>
+                  <a:pt x="4017834" y="-5779"/>
+                  <a:pt x="3834586" y="13376"/>
+                  <a:pt x="3594926" y="18288"/>
+                </a:cubicBezTo>
+                <a:cubicBezTo>
+                  <a:pt x="3355266" y="23200"/>
+                  <a:pt x="3204179" y="2869"/>
+                  <a:pt x="2903827" y="18288"/>
+                </a:cubicBezTo>
+                <a:cubicBezTo>
+                  <a:pt x="2603475" y="33707"/>
+                  <a:pt x="2526187" y="46187"/>
+                  <a:pt x="2212729" y="18288"/>
+                </a:cubicBezTo>
+                <a:cubicBezTo>
+                  <a:pt x="1899271" y="-9611"/>
+                  <a:pt x="1966289" y="29692"/>
+                  <a:pt x="1733809" y="18288"/>
+                </a:cubicBezTo>
+                <a:cubicBezTo>
+                  <a:pt x="1501329" y="6884"/>
+                  <a:pt x="1343612" y="12492"/>
+                  <a:pt x="1085146" y="18288"/>
+                </a:cubicBezTo>
+                <a:cubicBezTo>
+                  <a:pt x="826680" y="24084"/>
+                  <a:pt x="778184" y="35607"/>
+                  <a:pt x="521355" y="18288"/>
+                </a:cubicBezTo>
+                <a:cubicBezTo>
+                  <a:pt x="264526" y="969"/>
+                  <a:pt x="120277" y="4268"/>
+                  <a:pt x="0" y="18288"/>
+                </a:cubicBezTo>
+                <a:cubicBezTo>
+                  <a:pt x="766" y="10800"/>
+                  <a:pt x="-457" y="8180"/>
+                  <a:pt x="0" y="0"/>
+                </a:cubicBezTo>
+                <a:close/>
+              </a:path>
+            </a:pathLst>
+          </a:custGeom>
+          <a:solidFill>
+            <a:schemeClr val="accent2"/>
+          </a:solidFill>
+          <a:ln w="41275" cap="rnd">
+            <a:solidFill>
+              <a:schemeClr val="accent2"/>
+            </a:solidFill>
+            <a:round/>
+            <a:extLst>
+              <a:ext uri="{C807C97D-BFC1-408E-A445-0C87EB9F89A2}">
+                <ask:lineSketchStyleProps xmlns:ask="http://schemas.microsoft.com/office/drawing/2018/sketchyshapes" sd="2727557108">
+                  <a:prstGeom prst="rect">
+                    <a:avLst/>
+                  </a:prstGeom>
+                  <ask:type>
+                    <ask:lineSketchFreehand/>
+                  </ask:type>
+                </ask:lineSketchStyleProps>
+              </a:ext>
+            </a:extLst>
+          </a:ln>
+        </p:spPr>
+        <p:style>
+          <a:lnRef idx="2">
+            <a:schemeClr val="accent1">
+              <a:shade val="50000"/>
+            </a:schemeClr>
+          </a:lnRef>
+          <a:fillRef idx="1">
+            <a:schemeClr val="accent1"/>
+          </a:fillRef>
+          <a:effectRef idx="0">
+            <a:schemeClr val="accent1"/>
+          </a:effectRef>
+          <a:fontRef idx="minor">
+            <a:schemeClr val="lt1"/>
+          </a:fontRef>
+        </p:style>
+        <p:txBody>
+          <a:bodyPr rtlCol="0" anchor="ctr"/>
+          <a:lstStyle/>
+          <a:p>
+            <a:pPr algn="ctr"/>
+            <a:endParaRPr lang="en-US"/>
+          </a:p>
+        </p:txBody>
+      </p:sp>
+      <p:sp>
+        <p:nvSpPr>
+          <p:cNvPr id="33" name="Content Placeholder 17">
+            <a:extLst>
+              <a:ext uri="{FF2B5EF4-FFF2-40B4-BE49-F238E27FC236}">
+                <a16:creationId xmlns:a16="http://schemas.microsoft.com/office/drawing/2014/main" id="{AC179724-C167-9754-FC67-A55A460FC63E}"/>
+              </a:ext>
+            </a:extLst>
+          </p:cNvPr>
+          <p:cNvSpPr>
+            <a:spLocks noGrp="1"/>
+          </p:cNvSpPr>
+          <p:nvPr>
+            <p:ph idx="1"/>
+          </p:nvPr>
+        </p:nvSpPr>
+        <p:spPr>
+          <a:xfrm>
+            <a:off x="640080" y="2706624"/>
+            <a:ext cx="6894576" cy="3483864"/>
+          </a:xfrm>
+        </p:spPr>
+        <p:txBody>
+          <a:bodyPr>
+            <a:normAutofit/>
+          </a:bodyPr>
+          <a:lstStyle/>
+          <a:p>
+            <a:r>
+              <a:rPr lang="en-US" sz="2400" dirty="0"/>
+              <a:t>TCS34725 RGB Color Sensor (Top)</a:t>
+            </a:r>
+            <a:endParaRPr lang="en-US" sz="1800" dirty="0"/>
+          </a:p>
+          <a:p>
+            <a:r>
+              <a:rPr lang="en-US" sz="2400" dirty="0"/>
+              <a:t>TCRT5000 IR Line Sensor (Bottom)</a:t>
+            </a:r>
+          </a:p>
+          <a:p>
+            <a:endParaRPr lang="en-US" sz="2400" dirty="0"/>
+          </a:p>
+        </p:txBody>
+      </p:sp>
+      <p:pic>
+        <p:nvPicPr>
+          <p:cNvPr id="12" name="Picture 11">
+            <a:extLst>
+              <a:ext uri="{FF2B5EF4-FFF2-40B4-BE49-F238E27FC236}">
+                <a16:creationId xmlns:a16="http://schemas.microsoft.com/office/drawing/2014/main" id="{70BE8611-6E4D-8CA7-DE11-9707FDEC2A5E}"/>
+              </a:ext>
+            </a:extLst>
+          </p:cNvPr>
+          <p:cNvPicPr>
+            <a:picLocks noChangeAspect="1"/>
+          </p:cNvPicPr>
+          <p:nvPr/>
+        </p:nvPicPr>
+        <p:blipFill>
+          <a:blip r:embed="rId2"/>
+          <a:srcRect t="3958" r="-4" b="-4"/>
+          <a:stretch>
+            <a:fillRect/>
+          </a:stretch>
+        </p:blipFill>
+        <p:spPr>
+          <a:xfrm>
+            <a:off x="8156454" y="-7"/>
+            <a:ext cx="4035547" cy="4178808"/>
+          </a:xfrm>
+          <a:custGeom>
+            <a:avLst/>
+            <a:gdLst/>
+            <a:ahLst/>
+            <a:cxnLst/>
+            <a:rect l="l" t="t" r="r" b="b"/>
+            <a:pathLst>
+              <a:path w="4035547" h="4178808">
+                <a:moveTo>
+                  <a:pt x="14988" y="0"/>
+                </a:moveTo>
+                <a:lnTo>
+                  <a:pt x="4035547" y="0"/>
+                </a:lnTo>
+                <a:lnTo>
+                  <a:pt x="4035547" y="4161794"/>
+                </a:lnTo>
+                <a:lnTo>
+                  <a:pt x="3918602" y="4164199"/>
+                </a:lnTo>
+                <a:cubicBezTo>
+                  <a:pt x="3673497" y="4178956"/>
+                  <a:pt x="3428120" y="4172295"/>
+                  <a:pt x="3183014" y="4175560"/>
+                </a:cubicBezTo>
+                <a:cubicBezTo>
+                  <a:pt x="2855121" y="4180001"/>
+                  <a:pt x="2527499" y="4168639"/>
+                  <a:pt x="2199742" y="4167595"/>
+                </a:cubicBezTo>
+                <a:cubicBezTo>
+                  <a:pt x="2132562" y="4167334"/>
+                  <a:pt x="2065110" y="4170729"/>
+                  <a:pt x="1998202" y="4175952"/>
+                </a:cubicBezTo>
+                <a:cubicBezTo>
+                  <a:pt x="1905507" y="4183005"/>
+                  <a:pt x="1814033" y="4174124"/>
+                  <a:pt x="1722153" y="4165766"/>
+                </a:cubicBezTo>
+                <a:cubicBezTo>
+                  <a:pt x="1611407" y="4155711"/>
+                  <a:pt x="1500933" y="4164591"/>
+                  <a:pt x="1390867" y="4176214"/>
+                </a:cubicBezTo>
+                <a:lnTo>
+                  <a:pt x="1348076" y="4178808"/>
+                </a:lnTo>
+                <a:lnTo>
+                  <a:pt x="597587" y="4178808"/>
+                </a:lnTo>
+                <a:lnTo>
+                  <a:pt x="507890" y="4175773"/>
+                </a:lnTo>
+                <a:cubicBezTo>
+                  <a:pt x="403218" y="4174810"/>
+                  <a:pt x="298546" y="4175691"/>
+                  <a:pt x="193840" y="4176214"/>
+                </a:cubicBezTo>
+                <a:lnTo>
+                  <a:pt x="2757" y="4175742"/>
+                </a:lnTo>
+                <a:lnTo>
+                  <a:pt x="2810" y="4034870"/>
+                </a:lnTo>
+                <a:cubicBezTo>
+                  <a:pt x="5629" y="3979851"/>
+                  <a:pt x="10539" y="3924896"/>
+                  <a:pt x="15416" y="3870068"/>
+                </a:cubicBezTo>
+                <a:cubicBezTo>
+                  <a:pt x="23018" y="3799731"/>
+                  <a:pt x="25045" y="3728899"/>
+                  <a:pt x="21498" y="3658244"/>
+                </a:cubicBezTo>
+                <a:cubicBezTo>
+                  <a:pt x="17063" y="3602147"/>
+                  <a:pt x="10095" y="3546050"/>
+                  <a:pt x="8828" y="3489953"/>
+                </a:cubicBezTo>
+                <a:cubicBezTo>
+                  <a:pt x="6548" y="3389688"/>
+                  <a:pt x="7434" y="3289424"/>
+                  <a:pt x="13262" y="3189160"/>
+                </a:cubicBezTo>
+                <a:cubicBezTo>
+                  <a:pt x="16176" y="3138901"/>
+                  <a:pt x="20864" y="3089150"/>
+                  <a:pt x="22891" y="3038510"/>
+                </a:cubicBezTo>
+                <a:cubicBezTo>
+                  <a:pt x="24918" y="2987870"/>
+                  <a:pt x="28973" y="2936723"/>
+                  <a:pt x="17444" y="2887098"/>
+                </a:cubicBezTo>
+                <a:cubicBezTo>
+                  <a:pt x="-2068" y="2802699"/>
+                  <a:pt x="12249" y="2718680"/>
+                  <a:pt x="16430" y="2634534"/>
+                </a:cubicBezTo>
+                <a:cubicBezTo>
+                  <a:pt x="18964" y="2582244"/>
+                  <a:pt x="34168" y="2528685"/>
+                  <a:pt x="20738" y="2477919"/>
+                </a:cubicBezTo>
+                <a:cubicBezTo>
+                  <a:pt x="-421" y="2398342"/>
+                  <a:pt x="13389" y="2320415"/>
+                  <a:pt x="20738" y="2242107"/>
+                </a:cubicBezTo>
+                <a:cubicBezTo>
+                  <a:pt x="29213" y="2168001"/>
+                  <a:pt x="27718" y="2093082"/>
+                  <a:pt x="16303" y="2019369"/>
+                </a:cubicBezTo>
+                <a:cubicBezTo>
+                  <a:pt x="1986" y="1946239"/>
+                  <a:pt x="1986" y="1871028"/>
+                  <a:pt x="16303" y="1797899"/>
+                </a:cubicBezTo>
+                <a:cubicBezTo>
+                  <a:pt x="28162" y="1737537"/>
+                  <a:pt x="29530" y="1675589"/>
+                  <a:pt x="20357" y="1614758"/>
+                </a:cubicBezTo>
+                <a:cubicBezTo>
+                  <a:pt x="14149" y="1571226"/>
+                  <a:pt x="3000" y="1527947"/>
+                  <a:pt x="1480" y="1484415"/>
+                </a:cubicBezTo>
+                <a:cubicBezTo>
+                  <a:pt x="-1662" y="1393377"/>
+                  <a:pt x="200" y="1302238"/>
+                  <a:pt x="7055" y="1211417"/>
+                </a:cubicBezTo>
+                <a:cubicBezTo>
+                  <a:pt x="15036" y="1107980"/>
+                  <a:pt x="30366" y="1004923"/>
+                  <a:pt x="19724" y="900725"/>
+                </a:cubicBezTo>
+                <a:cubicBezTo>
+                  <a:pt x="16050" y="864934"/>
+                  <a:pt x="8575" y="829270"/>
+                  <a:pt x="7815" y="793353"/>
+                </a:cubicBezTo>
+                <a:cubicBezTo>
+                  <a:pt x="6168" y="726087"/>
+                  <a:pt x="5407" y="659710"/>
+                  <a:pt x="9208" y="590286"/>
+                </a:cubicBezTo>
+                <a:cubicBezTo>
+                  <a:pt x="13009" y="520863"/>
+                  <a:pt x="27452" y="450424"/>
+                  <a:pt x="17697" y="382270"/>
+                </a:cubicBezTo>
+                <a:cubicBezTo>
+                  <a:pt x="7941" y="314115"/>
+                  <a:pt x="14276" y="247103"/>
+                  <a:pt x="20611" y="180218"/>
+                </a:cubicBezTo>
+                <a:cubicBezTo>
+                  <a:pt x="23652" y="148426"/>
+                  <a:pt x="25711" y="116982"/>
+                  <a:pt x="25156" y="85665"/>
+                </a:cubicBezTo>
+                <a:close/>
+              </a:path>
+            </a:pathLst>
+          </a:custGeom>
+        </p:spPr>
+      </p:pic>
+      <p:pic>
+        <p:nvPicPr>
+          <p:cNvPr id="9" name="Content Placeholder 8">
+            <a:extLst>
+              <a:ext uri="{FF2B5EF4-FFF2-40B4-BE49-F238E27FC236}">
+                <a16:creationId xmlns:a16="http://schemas.microsoft.com/office/drawing/2014/main" id="{0B340DF5-82FB-796D-5F0C-CA58BC0ACBDC}"/>
+              </a:ext>
+            </a:extLst>
+          </p:cNvPr>
+          <p:cNvPicPr>
+            <a:picLocks noChangeAspect="1"/>
+          </p:cNvPicPr>
+          <p:nvPr/>
+        </p:nvPicPr>
+        <p:blipFill>
+          <a:blip r:embed="rId3"/>
+          <a:srcRect t="16050" r="-1" b="9305"/>
+          <a:stretch>
+            <a:fillRect/>
+          </a:stretch>
+        </p:blipFill>
+        <p:spPr>
+          <a:xfrm>
+            <a:off x="8174736" y="4036195"/>
+            <a:ext cx="4047645" cy="2590808"/>
+          </a:xfrm>
+          <a:custGeom>
+            <a:avLst/>
+            <a:gdLst/>
+            <a:ahLst/>
+            <a:cxnLst/>
+            <a:rect l="l" t="t" r="r" b="b"/>
+            <a:pathLst>
+              <a:path w="4047645" h="2495811">
+                <a:moveTo>
+                  <a:pt x="2441891" y="4"/>
+                </a:moveTo>
+                <a:cubicBezTo>
+                  <a:pt x="2489381" y="-78"/>
+                  <a:pt x="2536882" y="1163"/>
+                  <a:pt x="2584383" y="4428"/>
+                </a:cubicBezTo>
+                <a:cubicBezTo>
+                  <a:pt x="2744314" y="17813"/>
+                  <a:pt x="2904989" y="21079"/>
+                  <a:pt x="3065367" y="14222"/>
+                </a:cubicBezTo>
+                <a:cubicBezTo>
+                  <a:pt x="3194244" y="5694"/>
+                  <a:pt x="3323514" y="4206"/>
+                  <a:pt x="3452568" y="9782"/>
+                </a:cubicBezTo>
+                <a:cubicBezTo>
+                  <a:pt x="3572813" y="16442"/>
+                  <a:pt x="3693059" y="23233"/>
+                  <a:pt x="3813712" y="19315"/>
+                </a:cubicBezTo>
+                <a:cubicBezTo>
+                  <a:pt x="3861755" y="17748"/>
+                  <a:pt x="3909121" y="15789"/>
+                  <a:pt x="3956758" y="13177"/>
+                </a:cubicBezTo>
+                <a:lnTo>
+                  <a:pt x="4047645" y="9696"/>
+                </a:lnTo>
+                <a:lnTo>
+                  <a:pt x="4047645" y="2495811"/>
+                </a:lnTo>
+                <a:lnTo>
+                  <a:pt x="28177" y="2495811"/>
+                </a:lnTo>
+                <a:lnTo>
+                  <a:pt x="28782" y="2485852"/>
+                </a:lnTo>
+                <a:cubicBezTo>
+                  <a:pt x="31911" y="2365446"/>
+                  <a:pt x="35027" y="2245002"/>
+                  <a:pt x="38157" y="2124521"/>
+                </a:cubicBezTo>
+                <a:cubicBezTo>
+                  <a:pt x="38284" y="2119444"/>
+                  <a:pt x="39171" y="2114494"/>
+                  <a:pt x="39171" y="2109417"/>
+                </a:cubicBezTo>
+                <a:cubicBezTo>
+                  <a:pt x="48166" y="1995573"/>
+                  <a:pt x="53107" y="1881729"/>
+                  <a:pt x="18899" y="1770550"/>
+                </a:cubicBezTo>
+                <a:cubicBezTo>
+                  <a:pt x="15871" y="1760104"/>
+                  <a:pt x="14262" y="1749304"/>
+                  <a:pt x="14084" y="1738440"/>
+                </a:cubicBezTo>
+                <a:cubicBezTo>
+                  <a:pt x="12413" y="1641514"/>
+                  <a:pt x="16644" y="1544587"/>
+                  <a:pt x="26754" y="1448181"/>
+                </a:cubicBezTo>
+                <a:cubicBezTo>
+                  <a:pt x="31949" y="1389038"/>
+                  <a:pt x="26754" y="1329006"/>
+                  <a:pt x="43478" y="1270498"/>
+                </a:cubicBezTo>
+                <a:cubicBezTo>
+                  <a:pt x="50864" y="1241421"/>
+                  <a:pt x="55109" y="1211634"/>
+                  <a:pt x="56147" y="1181656"/>
+                </a:cubicBezTo>
+                <a:cubicBezTo>
+                  <a:pt x="59948" y="1109060"/>
+                  <a:pt x="38537" y="1040779"/>
+                  <a:pt x="18139" y="972244"/>
+                </a:cubicBezTo>
+                <a:cubicBezTo>
+                  <a:pt x="7370" y="935945"/>
+                  <a:pt x="-5426" y="898886"/>
+                  <a:pt x="2429" y="860811"/>
+                </a:cubicBezTo>
+                <a:cubicBezTo>
+                  <a:pt x="16707" y="802251"/>
+                  <a:pt x="24854" y="742359"/>
+                  <a:pt x="26754" y="682112"/>
+                </a:cubicBezTo>
+                <a:cubicBezTo>
+                  <a:pt x="26754" y="639468"/>
+                  <a:pt x="16365" y="597712"/>
+                  <a:pt x="20039" y="555195"/>
+                </a:cubicBezTo>
+                <a:cubicBezTo>
+                  <a:pt x="28211" y="472712"/>
+                  <a:pt x="30238" y="389734"/>
+                  <a:pt x="26121" y="306946"/>
+                </a:cubicBezTo>
+                <a:cubicBezTo>
+                  <a:pt x="26095" y="273846"/>
+                  <a:pt x="29846" y="240848"/>
+                  <a:pt x="37270" y="208585"/>
+                </a:cubicBezTo>
+                <a:cubicBezTo>
+                  <a:pt x="46506" y="151651"/>
+                  <a:pt x="48419" y="93777"/>
+                  <a:pt x="42971" y="36360"/>
+                </a:cubicBezTo>
+                <a:lnTo>
+                  <a:pt x="38853" y="8429"/>
+                </a:lnTo>
+                <a:lnTo>
+                  <a:pt x="56649" y="7824"/>
+                </a:lnTo>
+                <a:cubicBezTo>
+                  <a:pt x="210497" y="-156"/>
+                  <a:pt x="364754" y="3162"/>
+                  <a:pt x="518087" y="17748"/>
+                </a:cubicBezTo>
+                <a:cubicBezTo>
+                  <a:pt x="626567" y="25440"/>
+                  <a:pt x="735534" y="24213"/>
+                  <a:pt x="843809" y="14092"/>
+                </a:cubicBezTo>
+                <a:cubicBezTo>
+                  <a:pt x="1042499" y="-1711"/>
+                  <a:pt x="1240782" y="10958"/>
+                  <a:pt x="1439065" y="21666"/>
+                </a:cubicBezTo>
+                <a:cubicBezTo>
+                  <a:pt x="1631105" y="32113"/>
+                  <a:pt x="1823010" y="24408"/>
+                  <a:pt x="2015050" y="17487"/>
+                </a:cubicBezTo>
+                <a:cubicBezTo>
+                  <a:pt x="2157045" y="12394"/>
+                  <a:pt x="2299420" y="249"/>
+                  <a:pt x="2441891" y="4"/>
+                </a:cubicBezTo>
+                <a:close/>
+              </a:path>
+            </a:pathLst>
+          </a:custGeom>
+        </p:spPr>
+      </p:pic>
+    </p:spTree>
+    <p:extLst>
+      <p:ext uri="{BB962C8B-B14F-4D97-AF65-F5344CB8AC3E}">
+        <p14:creationId xmlns:p14="http://schemas.microsoft.com/office/powerpoint/2010/main" val="4051797227"/>
       </p:ext>
     </p:extLst>
   </p:cSld>

--- a/Weekly Reports/slides/2-alexis-perez.pptx
+++ b/Weekly Reports/slides/2-alexis-perez.pptx
@@ -260,7 +260,7 @@
           <a:p>
             <a:fld id="{752E6B35-DAD5-CF47-9E65-9CA12B499D8C}" type="datetimeFigureOut">
               <a:rPr lang="en-US" smtClean="0"/>
-              <a:t>10/13/2026</a:t>
+              <a:t>10/20/2026</a:t>
             </a:fld>
             <a:endParaRPr lang="en-US"/>
           </a:p>
@@ -458,7 +458,7 @@
           <a:p>
             <a:fld id="{752E6B35-DAD5-CF47-9E65-9CA12B499D8C}" type="datetimeFigureOut">
               <a:rPr lang="en-US" smtClean="0"/>
-              <a:t>10/13/2026</a:t>
+              <a:t>10/20/2026</a:t>
             </a:fld>
             <a:endParaRPr lang="en-US"/>
           </a:p>
@@ -666,7 +666,7 @@
           <a:p>
             <a:fld id="{752E6B35-DAD5-CF47-9E65-9CA12B499D8C}" type="datetimeFigureOut">
               <a:rPr lang="en-US" smtClean="0"/>
-              <a:t>10/13/2026</a:t>
+              <a:t>10/20/2026</a:t>
             </a:fld>
             <a:endParaRPr lang="en-US"/>
           </a:p>
@@ -864,7 +864,7 @@
           <a:p>
             <a:fld id="{752E6B35-DAD5-CF47-9E65-9CA12B499D8C}" type="datetimeFigureOut">
               <a:rPr lang="en-US" smtClean="0"/>
-              <a:t>10/13/2026</a:t>
+              <a:t>10/20/2026</a:t>
             </a:fld>
             <a:endParaRPr lang="en-US"/>
           </a:p>
@@ -1139,7 +1139,7 @@
           <a:p>
             <a:fld id="{752E6B35-DAD5-CF47-9E65-9CA12B499D8C}" type="datetimeFigureOut">
               <a:rPr lang="en-US" smtClean="0"/>
-              <a:t>10/13/2026</a:t>
+              <a:t>10/20/2026</a:t>
             </a:fld>
             <a:endParaRPr lang="en-US"/>
           </a:p>
@@ -1404,7 +1404,7 @@
           <a:p>
             <a:fld id="{752E6B35-DAD5-CF47-9E65-9CA12B499D8C}" type="datetimeFigureOut">
               <a:rPr lang="en-US" smtClean="0"/>
-              <a:t>10/13/2026</a:t>
+              <a:t>10/20/2026</a:t>
             </a:fld>
             <a:endParaRPr lang="en-US"/>
           </a:p>
@@ -1816,7 +1816,7 @@
           <a:p>
             <a:fld id="{752E6B35-DAD5-CF47-9E65-9CA12B499D8C}" type="datetimeFigureOut">
               <a:rPr lang="en-US" smtClean="0"/>
-              <a:t>10/13/2026</a:t>
+              <a:t>10/20/2026</a:t>
             </a:fld>
             <a:endParaRPr lang="en-US"/>
           </a:p>
@@ -1957,7 +1957,7 @@
           <a:p>
             <a:fld id="{752E6B35-DAD5-CF47-9E65-9CA12B499D8C}" type="datetimeFigureOut">
               <a:rPr lang="en-US" smtClean="0"/>
-              <a:t>10/13/2026</a:t>
+              <a:t>10/20/2026</a:t>
             </a:fld>
             <a:endParaRPr lang="en-US"/>
           </a:p>
@@ -2070,7 +2070,7 @@
           <a:p>
             <a:fld id="{752E6B35-DAD5-CF47-9E65-9CA12B499D8C}" type="datetimeFigureOut">
               <a:rPr lang="en-US" smtClean="0"/>
-              <a:t>10/13/2026</a:t>
+              <a:t>10/20/2026</a:t>
             </a:fld>
             <a:endParaRPr lang="en-US"/>
           </a:p>
@@ -2381,7 +2381,7 @@
           <a:p>
             <a:fld id="{752E6B35-DAD5-CF47-9E65-9CA12B499D8C}" type="datetimeFigureOut">
               <a:rPr lang="en-US" smtClean="0"/>
-              <a:t>10/13/2026</a:t>
+              <a:t>10/20/2026</a:t>
             </a:fld>
             <a:endParaRPr lang="en-US"/>
           </a:p>
@@ -2669,7 +2669,7 @@
           <a:p>
             <a:fld id="{752E6B35-DAD5-CF47-9E65-9CA12B499D8C}" type="datetimeFigureOut">
               <a:rPr lang="en-US" smtClean="0"/>
-              <a:t>10/13/2026</a:t>
+              <a:t>10/20/2026</a:t>
             </a:fld>
             <a:endParaRPr lang="en-US"/>
           </a:p>
@@ -2910,7 +2910,7 @@
           <a:p>
             <a:fld id="{752E6B35-DAD5-CF47-9E65-9CA12B499D8C}" type="datetimeFigureOut">
               <a:rPr lang="en-US" smtClean="0"/>
-              <a:t>10/13/2026</a:t>
+              <a:t>10/20/2026</a:t>
             </a:fld>
             <a:endParaRPr lang="en-US"/>
           </a:p>
@@ -3387,14 +3387,14 @@
             <a:pPr lvl="1"/>
             <a:r>
               <a:rPr lang="en-US" dirty="0"/>
-              <a:t>Continue OpenCV Course</a:t>
+              <a:t>OpenCV Learning and Testing</a:t>
             </a:r>
           </a:p>
           <a:p>
             <a:pPr lvl="1"/>
             <a:r>
               <a:rPr lang="en-US" dirty="0"/>
-              <a:t>Test Line Sensors before integration</a:t>
+              <a:t>Test vehicle components together</a:t>
             </a:r>
           </a:p>
           <a:p>
@@ -3407,21 +3407,15 @@
             <a:pPr lvl="1"/>
             <a:r>
               <a:rPr lang="en-US" dirty="0"/>
-              <a:t>Completed OpenCV Course</a:t>
-            </a:r>
-            <a:endParaRPr lang="en-US" b="1" dirty="0"/>
+              <a:t>OpenCV testing on Webcam</a:t>
+            </a:r>
           </a:p>
           <a:p>
             <a:pPr lvl="1"/>
             <a:r>
               <a:rPr lang="en-US" dirty="0"/>
-              <a:t>Integrate Line Sensors with </a:t>
-            </a:r>
-            <a:r>
-              <a:rPr lang="en-US" dirty="0" err="1"/>
-              <a:t>RaspberryPi</a:t>
-            </a:r>
-            <a:endParaRPr lang="en-US" dirty="0"/>
+              <a:t>Ordered Chassis to test components</a:t>
+            </a:r>
           </a:p>
           <a:p>
             <a:r>
@@ -3499,10 +3493,10 @@
       </p:grpSpPr>
       <p:sp useBgFill="1">
         <p:nvSpPr>
-          <p:cNvPr id="42" name="Rectangle 41">
-            <a:extLst>
-              <a:ext uri="{FF2B5EF4-FFF2-40B4-BE49-F238E27FC236}">
-                <a16:creationId xmlns:a16="http://schemas.microsoft.com/office/drawing/2014/main" id="{394842B0-684D-44CC-B4BC-D13331CFD290}"/>
+          <p:cNvPr id="12" name="Rectangle 11">
+            <a:extLst>
+              <a:ext uri="{FF2B5EF4-FFF2-40B4-BE49-F238E27FC236}">
+                <a16:creationId xmlns:a16="http://schemas.microsoft.com/office/drawing/2014/main" id="{F13C74B1-5B17-4795-BED0-7140497B445A}"/>
               </a:ext>
               <a:ext uri="{C183D7F6-B498-43B3-948B-1728B52AA6E4}">
                 <adec:decorative xmlns:adec="http://schemas.microsoft.com/office/drawing/2017/decorative" val="1"/>
@@ -3562,7 +3556,7 @@
           <p:cNvPr id="2" name="Title 1">
             <a:extLst>
               <a:ext uri="{FF2B5EF4-FFF2-40B4-BE49-F238E27FC236}">
-                <a16:creationId xmlns:a16="http://schemas.microsoft.com/office/drawing/2014/main" id="{4F231F43-1EFC-70EC-1329-C1A17E794D4D}"/>
+                <a16:creationId xmlns:a16="http://schemas.microsoft.com/office/drawing/2014/main" id="{F8F615E2-3BCF-141C-922F-3366A8E886C5}"/>
               </a:ext>
             </a:extLst>
           </p:cNvPr>
@@ -3575,8 +3569,8 @@
         </p:nvSpPr>
         <p:spPr>
           <a:xfrm>
-            <a:off x="640080" y="329184"/>
-            <a:ext cx="6894576" cy="1783080"/>
+            <a:off x="640080" y="325369"/>
+            <a:ext cx="4368602" cy="1956841"/>
           </a:xfrm>
         </p:spPr>
         <p:txBody>
@@ -3586,18 +3580,18 @@
           <a:lstStyle/>
           <a:p>
             <a:r>
-              <a:rPr lang="en-US" sz="5000" dirty="0"/>
-              <a:t>Line Sensors </a:t>
-            </a:r>
-          </a:p>
-        </p:txBody>
-      </p:sp>
-      <p:sp>
-        <p:nvSpPr>
-          <p:cNvPr id="43" name="sketch line">
-            <a:extLst>
-              <a:ext uri="{FF2B5EF4-FFF2-40B4-BE49-F238E27FC236}">
-                <a16:creationId xmlns:a16="http://schemas.microsoft.com/office/drawing/2014/main" id="{4C2A3DC3-F495-4B99-9FF3-3FB30D63235E}"/>
+              <a:rPr lang="en-US" sz="5400" dirty="0"/>
+              <a:t>Test Chassis</a:t>
+            </a:r>
+          </a:p>
+        </p:txBody>
+      </p:sp>
+      <p:sp>
+        <p:nvSpPr>
+          <p:cNvPr id="14" name="sketchy line">
+            <a:extLst>
+              <a:ext uri="{FF2B5EF4-FFF2-40B4-BE49-F238E27FC236}">
+                <a16:creationId xmlns:a16="http://schemas.microsoft.com/office/drawing/2014/main" id="{D4974D33-8DC5-464E-8C6D-BE58F0669C17}"/>
               </a:ext>
               <a:ext uri="{C183D7F6-B498-43B3-948B-1728B52AA6E4}">
                 <adec:decorative xmlns:adec="http://schemas.microsoft.com/office/drawing/2017/decorative" val="1"/>
@@ -3617,46 +3611,38 @@
         </p:nvSpPr>
         <p:spPr>
           <a:xfrm>
-            <a:off x="758952" y="2395728"/>
-            <a:ext cx="4243589" cy="18288"/>
+            <a:off x="640080" y="2586994"/>
+            <a:ext cx="3474720" cy="18288"/>
           </a:xfrm>
           <a:custGeom>
             <a:avLst/>
             <a:gdLst>
-              <a:gd name="csX0" fmla="*/ 0 w 4243589"/>
+              <a:gd name="csX0" fmla="*/ 0 w 3474720"/>
               <a:gd name="csY0" fmla="*/ 0 h 18288"/>
-              <a:gd name="csX1" fmla="*/ 478919 w 4243589"/>
+              <a:gd name="csX1" fmla="*/ 694944 w 3474720"/>
               <a:gd name="csY1" fmla="*/ 0 h 18288"/>
-              <a:gd name="csX2" fmla="*/ 957839 w 4243589"/>
+              <a:gd name="csX2" fmla="*/ 1355141 w 3474720"/>
               <a:gd name="csY2" fmla="*/ 0 h 18288"/>
-              <a:gd name="csX3" fmla="*/ 1521630 w 4243589"/>
+              <a:gd name="csX3" fmla="*/ 2015338 w 3474720"/>
               <a:gd name="csY3" fmla="*/ 0 h 18288"/>
-              <a:gd name="csX4" fmla="*/ 2212729 w 4243589"/>
+              <a:gd name="csX4" fmla="*/ 2779776 w 3474720"/>
               <a:gd name="csY4" fmla="*/ 0 h 18288"/>
-              <a:gd name="csX5" fmla="*/ 2734084 w 4243589"/>
+              <a:gd name="csX5" fmla="*/ 3474720 w 3474720"/>
               <a:gd name="csY5" fmla="*/ 0 h 18288"/>
-              <a:gd name="csX6" fmla="*/ 3255439 w 4243589"/>
-              <a:gd name="csY6" fmla="*/ 0 h 18288"/>
-              <a:gd name="csX7" fmla="*/ 4243589 w 4243589"/>
-              <a:gd name="csY7" fmla="*/ 0 h 18288"/>
-              <a:gd name="csX8" fmla="*/ 4243589 w 4243589"/>
+              <a:gd name="csX6" fmla="*/ 3474720 w 3474720"/>
+              <a:gd name="csY6" fmla="*/ 18288 h 18288"/>
+              <a:gd name="csX7" fmla="*/ 2779776 w 3474720"/>
+              <a:gd name="csY7" fmla="*/ 18288 h 18288"/>
+              <a:gd name="csX8" fmla="*/ 2189074 w 3474720"/>
               <a:gd name="csY8" fmla="*/ 18288 h 18288"/>
-              <a:gd name="csX9" fmla="*/ 3594926 w 4243589"/>
+              <a:gd name="csX9" fmla="*/ 1528877 w 3474720"/>
               <a:gd name="csY9" fmla="*/ 18288 h 18288"/>
-              <a:gd name="csX10" fmla="*/ 3073571 w 4243589"/>
+              <a:gd name="csX10" fmla="*/ 868680 w 3474720"/>
               <a:gd name="csY10" fmla="*/ 18288 h 18288"/>
-              <a:gd name="csX11" fmla="*/ 2552216 w 4243589"/>
+              <a:gd name="csX11" fmla="*/ 0 w 3474720"/>
               <a:gd name="csY11" fmla="*/ 18288 h 18288"/>
-              <a:gd name="csX12" fmla="*/ 1903553 w 4243589"/>
-              <a:gd name="csY12" fmla="*/ 18288 h 18288"/>
-              <a:gd name="csX13" fmla="*/ 1212454 w 4243589"/>
-              <a:gd name="csY13" fmla="*/ 18288 h 18288"/>
-              <a:gd name="csX14" fmla="*/ 733535 w 4243589"/>
-              <a:gd name="csY14" fmla="*/ 18288 h 18288"/>
-              <a:gd name="csX15" fmla="*/ 0 w 4243589"/>
-              <a:gd name="csY15" fmla="*/ 18288 h 18288"/>
-              <a:gd name="csX16" fmla="*/ 0 w 4243589"/>
-              <a:gd name="csY16" fmla="*/ 0 h 18288"/>
+              <a:gd name="csX12" fmla="*/ 0 w 3474720"/>
+              <a:gd name="csY12" fmla="*/ 0 h 18288"/>
             </a:gdLst>
             <a:ahLst/>
             <a:cxnLst>
@@ -3699,189 +3685,137 @@
               <a:cxn ang="0">
                 <a:pos x="csX12" y="csY12"/>
               </a:cxn>
-              <a:cxn ang="0">
-                <a:pos x="csX13" y="csY13"/>
-              </a:cxn>
-              <a:cxn ang="0">
-                <a:pos x="csX14" y="csY14"/>
-              </a:cxn>
-              <a:cxn ang="0">
-                <a:pos x="csX15" y="csY15"/>
-              </a:cxn>
-              <a:cxn ang="0">
-                <a:pos x="csX16" y="csY16"/>
-              </a:cxn>
             </a:cxnLst>
             <a:rect l="l" t="t" r="r" b="b"/>
             <a:pathLst>
-              <a:path w="4243589" h="18288" fill="none" extrusionOk="0">
+              <a:path w="3474720" h="18288" fill="none" extrusionOk="0">
                 <a:moveTo>
                   <a:pt x="0" y="0"/>
                 </a:moveTo>
                 <a:cubicBezTo>
-                  <a:pt x="213395" y="-21006"/>
-                  <a:pt x="307421" y="-18116"/>
-                  <a:pt x="478919" y="0"/>
+                  <a:pt x="224454" y="-14544"/>
+                  <a:pt x="495407" y="26540"/>
+                  <a:pt x="694944" y="0"/>
                 </a:cubicBezTo>
                 <a:cubicBezTo>
-                  <a:pt x="650417" y="18116"/>
-                  <a:pt x="831092" y="-21237"/>
-                  <a:pt x="957839" y="0"/>
+                  <a:pt x="894481" y="-26540"/>
+                  <a:pt x="1130063" y="24713"/>
+                  <a:pt x="1355141" y="0"/>
                 </a:cubicBezTo>
                 <a:cubicBezTo>
-                  <a:pt x="1084586" y="21237"/>
-                  <a:pt x="1301682" y="25124"/>
-                  <a:pt x="1521630" y="0"/>
+                  <a:pt x="1580219" y="-24713"/>
+                  <a:pt x="1820099" y="26695"/>
+                  <a:pt x="2015338" y="0"/>
                 </a:cubicBezTo>
                 <a:cubicBezTo>
-                  <a:pt x="1741578" y="-25124"/>
-                  <a:pt x="1970269" y="-29139"/>
-                  <a:pt x="2212729" y="0"/>
+                  <a:pt x="2210577" y="-26695"/>
+                  <a:pt x="2402045" y="165"/>
+                  <a:pt x="2779776" y="0"/>
                 </a:cubicBezTo>
                 <a:cubicBezTo>
-                  <a:pt x="2455189" y="29139"/>
-                  <a:pt x="2558847" y="-4796"/>
-                  <a:pt x="2734084" y="0"/>
+                  <a:pt x="3157507" y="-165"/>
+                  <a:pt x="3286859" y="-15571"/>
+                  <a:pt x="3474720" y="0"/>
                 </a:cubicBezTo>
                 <a:cubicBezTo>
-                  <a:pt x="2909321" y="4796"/>
-                  <a:pt x="3097217" y="-13409"/>
-                  <a:pt x="3255439" y="0"/>
+                  <a:pt x="3474286" y="7551"/>
+                  <a:pt x="3474253" y="9822"/>
+                  <a:pt x="3474720" y="18288"/>
                 </a:cubicBezTo>
                 <a:cubicBezTo>
-                  <a:pt x="3413662" y="13409"/>
-                  <a:pt x="3979999" y="-10121"/>
-                  <a:pt x="4243589" y="0"/>
+                  <a:pt x="3233904" y="29845"/>
+                  <a:pt x="2945134" y="-5256"/>
+                  <a:pt x="2779776" y="18288"/>
                 </a:cubicBezTo>
                 <a:cubicBezTo>
-                  <a:pt x="4244484" y="8974"/>
-                  <a:pt x="4243043" y="9359"/>
-                  <a:pt x="4243589" y="18288"/>
+                  <a:pt x="2614418" y="41832"/>
+                  <a:pt x="2339768" y="22709"/>
+                  <a:pt x="2189074" y="18288"/>
                 </a:cubicBezTo>
                 <a:cubicBezTo>
-                  <a:pt x="4058777" y="31246"/>
-                  <a:pt x="3910348" y="3158"/>
-                  <a:pt x="3594926" y="18288"/>
+                  <a:pt x="2038380" y="13867"/>
+                  <a:pt x="1817434" y="-4947"/>
+                  <a:pt x="1528877" y="18288"/>
                 </a:cubicBezTo>
                 <a:cubicBezTo>
-                  <a:pt x="3279504" y="33418"/>
-                  <a:pt x="3319955" y="-3977"/>
-                  <a:pt x="3073571" y="18288"/>
+                  <a:pt x="1240320" y="41523"/>
+                  <a:pt x="1042447" y="37198"/>
+                  <a:pt x="868680" y="18288"/>
                 </a:cubicBezTo>
                 <a:cubicBezTo>
-                  <a:pt x="2827187" y="40553"/>
-                  <a:pt x="2767387" y="1863"/>
-                  <a:pt x="2552216" y="18288"/>
-                </a:cubicBezTo>
-                <a:cubicBezTo>
-                  <a:pt x="2337046" y="34713"/>
-                  <a:pt x="2181871" y="19527"/>
-                  <a:pt x="1903553" y="18288"/>
-                </a:cubicBezTo>
-                <a:cubicBezTo>
-                  <a:pt x="1625235" y="17049"/>
-                  <a:pt x="1557672" y="24174"/>
-                  <a:pt x="1212454" y="18288"/>
-                </a:cubicBezTo>
-                <a:cubicBezTo>
-                  <a:pt x="867236" y="12402"/>
-                  <a:pt x="874382" y="15627"/>
-                  <a:pt x="733535" y="18288"/>
-                </a:cubicBezTo>
-                <a:cubicBezTo>
-                  <a:pt x="592688" y="20949"/>
-                  <a:pt x="183477" y="14753"/>
+                  <a:pt x="694913" y="-622"/>
+                  <a:pt x="233232" y="44909"/>
                   <a:pt x="0" y="18288"/>
                 </a:cubicBezTo>
                 <a:cubicBezTo>
-                  <a:pt x="-229" y="14222"/>
-                  <a:pt x="509" y="5816"/>
+                  <a:pt x="60" y="11696"/>
+                  <a:pt x="66" y="3758"/>
                   <a:pt x="0" y="0"/>
                 </a:cubicBezTo>
                 <a:close/>
               </a:path>
-              <a:path w="4243589" h="18288" stroke="0" extrusionOk="0">
+              <a:path w="3474720" h="18288" stroke="0" extrusionOk="0">
                 <a:moveTo>
                   <a:pt x="0" y="0"/>
                 </a:moveTo>
                 <a:cubicBezTo>
-                  <a:pt x="143690" y="16630"/>
-                  <a:pt x="266667" y="14847"/>
-                  <a:pt x="521355" y="0"/>
+                  <a:pt x="202328" y="-14716"/>
+                  <a:pt x="332722" y="-11499"/>
+                  <a:pt x="625450" y="0"/>
                 </a:cubicBezTo>
                 <a:cubicBezTo>
-                  <a:pt x="776043" y="-14847"/>
-                  <a:pt x="814491" y="-17363"/>
-                  <a:pt x="1000275" y="0"/>
+                  <a:pt x="918178" y="11499"/>
+                  <a:pt x="1096688" y="5123"/>
+                  <a:pt x="1389888" y="0"/>
                 </a:cubicBezTo>
                 <a:cubicBezTo>
-                  <a:pt x="1186059" y="17363"/>
-                  <a:pt x="1352504" y="-23507"/>
-                  <a:pt x="1521630" y="0"/>
+                  <a:pt x="1683088" y="-5123"/>
+                  <a:pt x="1835981" y="-14038"/>
+                  <a:pt x="1980590" y="0"/>
                 </a:cubicBezTo>
                 <a:cubicBezTo>
-                  <a:pt x="1690756" y="23507"/>
-                  <a:pt x="1889525" y="5871"/>
-                  <a:pt x="2127857" y="0"/>
+                  <a:pt x="2125199" y="14038"/>
+                  <a:pt x="2396099" y="-7203"/>
+                  <a:pt x="2571293" y="0"/>
                 </a:cubicBezTo>
                 <a:cubicBezTo>
-                  <a:pt x="2366189" y="-5871"/>
-                  <a:pt x="2620628" y="-27997"/>
-                  <a:pt x="2776520" y="0"/>
+                  <a:pt x="2746487" y="7203"/>
+                  <a:pt x="3041609" y="-12036"/>
+                  <a:pt x="3474720" y="0"/>
                 </a:cubicBezTo>
                 <a:cubicBezTo>
-                  <a:pt x="2932412" y="27997"/>
-                  <a:pt x="3131683" y="-25073"/>
-                  <a:pt x="3467618" y="0"/>
+                  <a:pt x="3474638" y="4406"/>
+                  <a:pt x="3474631" y="9982"/>
+                  <a:pt x="3474720" y="18288"/>
                 </a:cubicBezTo>
                 <a:cubicBezTo>
-                  <a:pt x="3803553" y="25073"/>
-                  <a:pt x="4017371" y="3071"/>
-                  <a:pt x="4243589" y="0"/>
+                  <a:pt x="3324873" y="21876"/>
+                  <a:pt x="3136771" y="12587"/>
+                  <a:pt x="2814523" y="18288"/>
                 </a:cubicBezTo>
                 <a:cubicBezTo>
-                  <a:pt x="4243134" y="6162"/>
-                  <a:pt x="4243492" y="11775"/>
-                  <a:pt x="4243589" y="18288"/>
+                  <a:pt x="2492275" y="23989"/>
+                  <a:pt x="2294402" y="47111"/>
+                  <a:pt x="2154326" y="18288"/>
                 </a:cubicBezTo>
                 <a:cubicBezTo>
-                  <a:pt x="4017834" y="-5779"/>
-                  <a:pt x="3834586" y="13376"/>
-                  <a:pt x="3594926" y="18288"/>
+                  <a:pt x="2014250" y="-10535"/>
+                  <a:pt x="1820317" y="33903"/>
+                  <a:pt x="1494130" y="18288"/>
                 </a:cubicBezTo>
                 <a:cubicBezTo>
-                  <a:pt x="3355266" y="23200"/>
-                  <a:pt x="3204179" y="2869"/>
-                  <a:pt x="2903827" y="18288"/>
+                  <a:pt x="1167943" y="2673"/>
+                  <a:pt x="948432" y="14868"/>
+                  <a:pt x="729691" y="18288"/>
                 </a:cubicBezTo>
                 <a:cubicBezTo>
-                  <a:pt x="2603475" y="33707"/>
-                  <a:pt x="2526187" y="46187"/>
-                  <a:pt x="2212729" y="18288"/>
-                </a:cubicBezTo>
-                <a:cubicBezTo>
-                  <a:pt x="1899271" y="-9611"/>
-                  <a:pt x="1966289" y="29692"/>
-                  <a:pt x="1733809" y="18288"/>
-                </a:cubicBezTo>
-                <a:cubicBezTo>
-                  <a:pt x="1501329" y="6884"/>
-                  <a:pt x="1343612" y="12492"/>
-                  <a:pt x="1085146" y="18288"/>
-                </a:cubicBezTo>
-                <a:cubicBezTo>
-                  <a:pt x="826680" y="24084"/>
-                  <a:pt x="778184" y="35607"/>
-                  <a:pt x="521355" y="18288"/>
-                </a:cubicBezTo>
-                <a:cubicBezTo>
-                  <a:pt x="264526" y="969"/>
-                  <a:pt x="120277" y="4268"/>
+                  <a:pt x="510950" y="21708"/>
+                  <a:pt x="264032" y="24354"/>
                   <a:pt x="0" y="18288"/>
                 </a:cubicBezTo>
                 <a:cubicBezTo>
-                  <a:pt x="766" y="10800"/>
-                  <a:pt x="-457" y="8180"/>
+                  <a:pt x="189" y="14288"/>
+                  <a:pt x="-703" y="3747"/>
                   <a:pt x="0" y="0"/>
                 </a:cubicBezTo>
                 <a:close/>
@@ -3891,14 +3825,14 @@
           <a:solidFill>
             <a:schemeClr val="accent2"/>
           </a:solidFill>
-          <a:ln w="41275" cap="rnd">
+          <a:ln w="44450" cap="rnd">
             <a:solidFill>
               <a:schemeClr val="accent2"/>
             </a:solidFill>
             <a:round/>
             <a:extLst>
               <a:ext uri="{C807C97D-BFC1-408E-A445-0C87EB9F89A2}">
-                <ask:lineSketchStyleProps xmlns:ask="http://schemas.microsoft.com/office/drawing/2018/sketchyshapes" sd="2727557108">
+                <ask:lineSketchStyleProps xmlns:ask="http://schemas.microsoft.com/office/drawing/2018/sketchyshapes" sd="2863741219">
                   <a:prstGeom prst="rect">
                     <a:avLst/>
                   </a:prstGeom>
@@ -3937,10 +3871,10 @@
       </p:sp>
       <p:sp>
         <p:nvSpPr>
-          <p:cNvPr id="33" name="Content Placeholder 17">
-            <a:extLst>
-              <a:ext uri="{FF2B5EF4-FFF2-40B4-BE49-F238E27FC236}">
-                <a16:creationId xmlns:a16="http://schemas.microsoft.com/office/drawing/2014/main" id="{AC179724-C167-9754-FC67-A55A460FC63E}"/>
+          <p:cNvPr id="9" name="Content Placeholder 8">
+            <a:extLst>
+              <a:ext uri="{FF2B5EF4-FFF2-40B4-BE49-F238E27FC236}">
+                <a16:creationId xmlns:a16="http://schemas.microsoft.com/office/drawing/2014/main" id="{7C9F5815-0534-FAE7-A690-5064A383DF3E}"/>
               </a:ext>
             </a:extLst>
           </p:cNvPr>
@@ -3953,8 +3887,8 @@
         </p:nvSpPr>
         <p:spPr>
           <a:xfrm>
-            <a:off x="640080" y="2706624"/>
-            <a:ext cx="6894576" cy="3483864"/>
+            <a:off x="640080" y="2872899"/>
+            <a:ext cx="4243589" cy="3320668"/>
           </a:xfrm>
         </p:spPr>
         <p:txBody>
@@ -3963,29 +3897,16 @@
           </a:bodyPr>
           <a:lstStyle/>
           <a:p>
-            <a:r>
-              <a:rPr lang="en-US" sz="2400" dirty="0"/>
-              <a:t>TCS34725 RGB Color Sensor (Top)</a:t>
-            </a:r>
-            <a:endParaRPr lang="en-US" sz="1800" dirty="0"/>
-          </a:p>
-          <a:p>
-            <a:r>
-              <a:rPr lang="en-US" sz="2400" dirty="0"/>
-              <a:t>TCRT5000 IR Line Sensor (Bottom)</a:t>
-            </a:r>
-          </a:p>
-          <a:p>
-            <a:endParaRPr lang="en-US" sz="2400" dirty="0"/>
+            <a:endParaRPr lang="en-US" sz="2200" dirty="0"/>
           </a:p>
         </p:txBody>
       </p:sp>
       <p:pic>
         <p:nvPicPr>
-          <p:cNvPr id="12" name="Picture 11">
-            <a:extLst>
-              <a:ext uri="{FF2B5EF4-FFF2-40B4-BE49-F238E27FC236}">
-                <a16:creationId xmlns:a16="http://schemas.microsoft.com/office/drawing/2014/main" id="{70BE8611-6E4D-8CA7-DE11-9707FDEC2A5E}"/>
+          <p:cNvPr id="5" name="Content Placeholder 4">
+            <a:extLst>
+              <a:ext uri="{FF2B5EF4-FFF2-40B4-BE49-F238E27FC236}">
+                <a16:creationId xmlns:a16="http://schemas.microsoft.com/office/drawing/2014/main" id="{CFA3C877-0F59-85E7-79C2-C2AF0EC2A360}"/>
               </a:ext>
             </a:extLst>
           </p:cNvPr>
@@ -3996,15 +3917,15 @@
         </p:nvPicPr>
         <p:blipFill>
           <a:blip r:embed="rId2"/>
-          <a:srcRect t="3958" r="-4" b="-4"/>
+          <a:srcRect t="302"/>
           <a:stretch>
             <a:fillRect/>
           </a:stretch>
         </p:blipFill>
         <p:spPr>
           <a:xfrm>
-            <a:off x="8156454" y="-7"/>
-            <a:ext cx="4035547" cy="4178808"/>
+            <a:off x="5311702" y="10"/>
+            <a:ext cx="6878775" cy="6857990"/>
           </a:xfrm>
           <a:custGeom>
             <a:avLst/>
@@ -4013,344 +3934,109 @@
             <a:cxnLst/>
             <a:rect l="l" t="t" r="r" b="b"/>
             <a:pathLst>
-              <a:path w="4035547" h="4178808">
+              <a:path w="6878775" h="6858000">
                 <a:moveTo>
-                  <a:pt x="14988" y="0"/>
+                  <a:pt x="1102973" y="0"/>
                 </a:moveTo>
                 <a:lnTo>
-                  <a:pt x="4035547" y="0"/>
+                  <a:pt x="1160688" y="0"/>
                 </a:lnTo>
                 <a:lnTo>
-                  <a:pt x="4035547" y="4161794"/>
+                  <a:pt x="983189" y="331786"/>
+                </a:lnTo>
+                <a:cubicBezTo>
+                  <a:pt x="914866" y="469145"/>
+                  <a:pt x="850355" y="608712"/>
+                  <a:pt x="789261" y="750263"/>
+                </a:cubicBezTo>
+                <a:cubicBezTo>
+                  <a:pt x="774307" y="784928"/>
+                  <a:pt x="759992" y="819849"/>
+                  <a:pt x="745295" y="854514"/>
+                </a:cubicBezTo>
+                <a:cubicBezTo>
+                  <a:pt x="756682" y="845393"/>
+                  <a:pt x="765489" y="833492"/>
+                  <a:pt x="770857" y="819975"/>
+                </a:cubicBezTo>
+                <a:cubicBezTo>
+                  <a:pt x="879943" y="589569"/>
+                  <a:pt x="999605" y="365513"/>
+                  <a:pt x="1131329" y="148742"/>
+                </a:cubicBezTo>
+                <a:lnTo>
+                  <a:pt x="1227589" y="0"/>
                 </a:lnTo>
                 <a:lnTo>
-                  <a:pt x="3918602" y="4164199"/>
+                  <a:pt x="6878775" y="0"/>
+                </a:lnTo>
+                <a:lnTo>
+                  <a:pt x="6878775" y="6858000"/>
+                </a:lnTo>
+                <a:lnTo>
+                  <a:pt x="713521" y="6858000"/>
+                </a:lnTo>
+                <a:lnTo>
+                  <a:pt x="625642" y="6670527"/>
                 </a:lnTo>
                 <a:cubicBezTo>
-                  <a:pt x="3673497" y="4178956"/>
-                  <a:pt x="3428120" y="4172295"/>
-                  <a:pt x="3183014" y="4175560"/>
+                  <a:pt x="507232" y="6398531"/>
+                  <a:pt x="403083" y="6118381"/>
+                  <a:pt x="312785" y="5830359"/>
                 </a:cubicBezTo>
                 <a:cubicBezTo>
-                  <a:pt x="2855121" y="4180001"/>
-                  <a:pt x="2527499" y="4168639"/>
-                  <a:pt x="2199742" y="4167595"/>
+                  <a:pt x="278149" y="5719759"/>
+                  <a:pt x="248879" y="5607635"/>
+                  <a:pt x="212198" y="5480401"/>
                 </a:cubicBezTo>
                 <a:cubicBezTo>
-                  <a:pt x="2132562" y="4167334"/>
-                  <a:pt x="2065110" y="4170729"/>
-                  <a:pt x="1998202" y="4175952"/>
+                  <a:pt x="212208" y="5491601"/>
+                  <a:pt x="212803" y="5502788"/>
+                  <a:pt x="213988" y="5513923"/>
                 </a:cubicBezTo>
                 <a:cubicBezTo>
-                  <a:pt x="1905507" y="4183005"/>
-                  <a:pt x="1814033" y="4174124"/>
-                  <a:pt x="1722153" y="4165766"/>
+                  <a:pt x="264089" y="5723695"/>
+                  <a:pt x="307290" y="5935370"/>
+                  <a:pt x="365826" y="6142729"/>
                 </a:cubicBezTo>
                 <a:cubicBezTo>
-                  <a:pt x="1611407" y="4155711"/>
-                  <a:pt x="1500933" y="4164591"/>
-                  <a:pt x="1390867" y="4176214"/>
+                  <a:pt x="433152" y="6380817"/>
+                  <a:pt x="510068" y="6614016"/>
+                  <a:pt x="597975" y="6841549"/>
                 </a:cubicBezTo>
                 <a:lnTo>
-                  <a:pt x="1348076" y="4178808"/>
+                  <a:pt x="604824" y="6858000"/>
                 </a:lnTo>
                 <a:lnTo>
-                  <a:pt x="597587" y="4178808"/>
+                  <a:pt x="552056" y="6858000"/>
                 </a:lnTo>
                 <a:lnTo>
-                  <a:pt x="507890" y="4175773"/>
+                  <a:pt x="539576" y="6828295"/>
                 </a:lnTo>
                 <a:cubicBezTo>
-                  <a:pt x="403218" y="4174810"/>
-                  <a:pt x="298546" y="4175691"/>
-                  <a:pt x="193840" y="4176214"/>
-                </a:cubicBezTo>
-                <a:lnTo>
-                  <a:pt x="2757" y="4175742"/>
-                </a:lnTo>
-                <a:lnTo>
-                  <a:pt x="2810" y="4034870"/>
-                </a:lnTo>
-                <a:cubicBezTo>
-                  <a:pt x="5629" y="3979851"/>
-                  <a:pt x="10539" y="3924896"/>
-                  <a:pt x="15416" y="3870068"/>
+                  <a:pt x="380597" y="6414594"/>
+                  <a:pt x="260223" y="5988893"/>
+                  <a:pt x="171555" y="5552906"/>
                 </a:cubicBezTo>
                 <a:cubicBezTo>
-                  <a:pt x="23018" y="3799731"/>
-                  <a:pt x="25045" y="3728899"/>
-                  <a:pt x="21498" y="3658244"/>
+                  <a:pt x="91163" y="5157998"/>
+                  <a:pt x="43746" y="4758899"/>
+                  <a:pt x="12305" y="4357388"/>
                 </a:cubicBezTo>
                 <a:cubicBezTo>
-                  <a:pt x="17063" y="3602147"/>
-                  <a:pt x="10095" y="3546050"/>
-                  <a:pt x="8828" y="3489953"/>
+                  <a:pt x="-14281" y="4013908"/>
+                  <a:pt x="4507" y="3672965"/>
+                  <a:pt x="46684" y="3331516"/>
                 </a:cubicBezTo>
                 <a:cubicBezTo>
-                  <a:pt x="6548" y="3389688"/>
-                  <a:pt x="7434" y="3289424"/>
-                  <a:pt x="13262" y="3189160"/>
+                  <a:pt x="127203" y="2664286"/>
+                  <a:pt x="277819" y="2007265"/>
+                  <a:pt x="496065" y="1371196"/>
                 </a:cubicBezTo>
                 <a:cubicBezTo>
-                  <a:pt x="16176" y="3138901"/>
-                  <a:pt x="20864" y="3089150"/>
-                  <a:pt x="22891" y="3038510"/>
-                </a:cubicBezTo>
-                <a:cubicBezTo>
-                  <a:pt x="24918" y="2987870"/>
-                  <a:pt x="28973" y="2936723"/>
-                  <a:pt x="17444" y="2887098"/>
-                </a:cubicBezTo>
-                <a:cubicBezTo>
-                  <a:pt x="-2068" y="2802699"/>
-                  <a:pt x="12249" y="2718680"/>
-                  <a:pt x="16430" y="2634534"/>
-                </a:cubicBezTo>
-                <a:cubicBezTo>
-                  <a:pt x="18964" y="2582244"/>
-                  <a:pt x="34168" y="2528685"/>
-                  <a:pt x="20738" y="2477919"/>
-                </a:cubicBezTo>
-                <a:cubicBezTo>
-                  <a:pt x="-421" y="2398342"/>
-                  <a:pt x="13389" y="2320415"/>
-                  <a:pt x="20738" y="2242107"/>
-                </a:cubicBezTo>
-                <a:cubicBezTo>
-                  <a:pt x="29213" y="2168001"/>
-                  <a:pt x="27718" y="2093082"/>
-                  <a:pt x="16303" y="2019369"/>
-                </a:cubicBezTo>
-                <a:cubicBezTo>
-                  <a:pt x="1986" y="1946239"/>
-                  <a:pt x="1986" y="1871028"/>
-                  <a:pt x="16303" y="1797899"/>
-                </a:cubicBezTo>
-                <a:cubicBezTo>
-                  <a:pt x="28162" y="1737537"/>
-                  <a:pt x="29530" y="1675589"/>
-                  <a:pt x="20357" y="1614758"/>
-                </a:cubicBezTo>
-                <a:cubicBezTo>
-                  <a:pt x="14149" y="1571226"/>
-                  <a:pt x="3000" y="1527947"/>
-                  <a:pt x="1480" y="1484415"/>
-                </a:cubicBezTo>
-                <a:cubicBezTo>
-                  <a:pt x="-1662" y="1393377"/>
-                  <a:pt x="200" y="1302238"/>
-                  <a:pt x="7055" y="1211417"/>
-                </a:cubicBezTo>
-                <a:cubicBezTo>
-                  <a:pt x="15036" y="1107980"/>
-                  <a:pt x="30366" y="1004923"/>
-                  <a:pt x="19724" y="900725"/>
-                </a:cubicBezTo>
-                <a:cubicBezTo>
-                  <a:pt x="16050" y="864934"/>
-                  <a:pt x="8575" y="829270"/>
-                  <a:pt x="7815" y="793353"/>
-                </a:cubicBezTo>
-                <a:cubicBezTo>
-                  <a:pt x="6168" y="726087"/>
-                  <a:pt x="5407" y="659710"/>
-                  <a:pt x="9208" y="590286"/>
-                </a:cubicBezTo>
-                <a:cubicBezTo>
-                  <a:pt x="13009" y="520863"/>
-                  <a:pt x="27452" y="450424"/>
-                  <a:pt x="17697" y="382270"/>
-                </a:cubicBezTo>
-                <a:cubicBezTo>
-                  <a:pt x="7941" y="314115"/>
-                  <a:pt x="14276" y="247103"/>
-                  <a:pt x="20611" y="180218"/>
-                </a:cubicBezTo>
-                <a:cubicBezTo>
-                  <a:pt x="23652" y="148426"/>
-                  <a:pt x="25711" y="116982"/>
-                  <a:pt x="25156" y="85665"/>
-                </a:cubicBezTo>
-                <a:close/>
-              </a:path>
-            </a:pathLst>
-          </a:custGeom>
-        </p:spPr>
-      </p:pic>
-      <p:pic>
-        <p:nvPicPr>
-          <p:cNvPr id="9" name="Content Placeholder 8">
-            <a:extLst>
-              <a:ext uri="{FF2B5EF4-FFF2-40B4-BE49-F238E27FC236}">
-                <a16:creationId xmlns:a16="http://schemas.microsoft.com/office/drawing/2014/main" id="{0B340DF5-82FB-796D-5F0C-CA58BC0ACBDC}"/>
-              </a:ext>
-            </a:extLst>
-          </p:cNvPr>
-          <p:cNvPicPr>
-            <a:picLocks noChangeAspect="1"/>
-          </p:cNvPicPr>
-          <p:nvPr/>
-        </p:nvPicPr>
-        <p:blipFill>
-          <a:blip r:embed="rId3"/>
-          <a:srcRect t="16050" r="-1" b="9305"/>
-          <a:stretch>
-            <a:fillRect/>
-          </a:stretch>
-        </p:blipFill>
-        <p:spPr>
-          <a:xfrm>
-            <a:off x="8174736" y="4036195"/>
-            <a:ext cx="4047645" cy="2590808"/>
-          </a:xfrm>
-          <a:custGeom>
-            <a:avLst/>
-            <a:gdLst/>
-            <a:ahLst/>
-            <a:cxnLst/>
-            <a:rect l="l" t="t" r="r" b="b"/>
-            <a:pathLst>
-              <a:path w="4047645" h="2495811">
-                <a:moveTo>
-                  <a:pt x="2441891" y="4"/>
-                </a:moveTo>
-                <a:cubicBezTo>
-                  <a:pt x="2489381" y="-78"/>
-                  <a:pt x="2536882" y="1163"/>
-                  <a:pt x="2584383" y="4428"/>
-                </a:cubicBezTo>
-                <a:cubicBezTo>
-                  <a:pt x="2744314" y="17813"/>
-                  <a:pt x="2904989" y="21079"/>
-                  <a:pt x="3065367" y="14222"/>
-                </a:cubicBezTo>
-                <a:cubicBezTo>
-                  <a:pt x="3194244" y="5694"/>
-                  <a:pt x="3323514" y="4206"/>
-                  <a:pt x="3452568" y="9782"/>
-                </a:cubicBezTo>
-                <a:cubicBezTo>
-                  <a:pt x="3572813" y="16442"/>
-                  <a:pt x="3693059" y="23233"/>
-                  <a:pt x="3813712" y="19315"/>
-                </a:cubicBezTo>
-                <a:cubicBezTo>
-                  <a:pt x="3861755" y="17748"/>
-                  <a:pt x="3909121" y="15789"/>
-                  <a:pt x="3956758" y="13177"/>
-                </a:cubicBezTo>
-                <a:lnTo>
-                  <a:pt x="4047645" y="9696"/>
-                </a:lnTo>
-                <a:lnTo>
-                  <a:pt x="4047645" y="2495811"/>
-                </a:lnTo>
-                <a:lnTo>
-                  <a:pt x="28177" y="2495811"/>
-                </a:lnTo>
-                <a:lnTo>
-                  <a:pt x="28782" y="2485852"/>
-                </a:lnTo>
-                <a:cubicBezTo>
-                  <a:pt x="31911" y="2365446"/>
-                  <a:pt x="35027" y="2245002"/>
-                  <a:pt x="38157" y="2124521"/>
-                </a:cubicBezTo>
-                <a:cubicBezTo>
-                  <a:pt x="38284" y="2119444"/>
-                  <a:pt x="39171" y="2114494"/>
-                  <a:pt x="39171" y="2109417"/>
-                </a:cubicBezTo>
-                <a:cubicBezTo>
-                  <a:pt x="48166" y="1995573"/>
-                  <a:pt x="53107" y="1881729"/>
-                  <a:pt x="18899" y="1770550"/>
-                </a:cubicBezTo>
-                <a:cubicBezTo>
-                  <a:pt x="15871" y="1760104"/>
-                  <a:pt x="14262" y="1749304"/>
-                  <a:pt x="14084" y="1738440"/>
-                </a:cubicBezTo>
-                <a:cubicBezTo>
-                  <a:pt x="12413" y="1641514"/>
-                  <a:pt x="16644" y="1544587"/>
-                  <a:pt x="26754" y="1448181"/>
-                </a:cubicBezTo>
-                <a:cubicBezTo>
-                  <a:pt x="31949" y="1389038"/>
-                  <a:pt x="26754" y="1329006"/>
-                  <a:pt x="43478" y="1270498"/>
-                </a:cubicBezTo>
-                <a:cubicBezTo>
-                  <a:pt x="50864" y="1241421"/>
-                  <a:pt x="55109" y="1211634"/>
-                  <a:pt x="56147" y="1181656"/>
-                </a:cubicBezTo>
-                <a:cubicBezTo>
-                  <a:pt x="59948" y="1109060"/>
-                  <a:pt x="38537" y="1040779"/>
-                  <a:pt x="18139" y="972244"/>
-                </a:cubicBezTo>
-                <a:cubicBezTo>
-                  <a:pt x="7370" y="935945"/>
-                  <a:pt x="-5426" y="898886"/>
-                  <a:pt x="2429" y="860811"/>
-                </a:cubicBezTo>
-                <a:cubicBezTo>
-                  <a:pt x="16707" y="802251"/>
-                  <a:pt x="24854" y="742359"/>
-                  <a:pt x="26754" y="682112"/>
-                </a:cubicBezTo>
-                <a:cubicBezTo>
-                  <a:pt x="26754" y="639468"/>
-                  <a:pt x="16365" y="597712"/>
-                  <a:pt x="20039" y="555195"/>
-                </a:cubicBezTo>
-                <a:cubicBezTo>
-                  <a:pt x="28211" y="472712"/>
-                  <a:pt x="30238" y="389734"/>
-                  <a:pt x="26121" y="306946"/>
-                </a:cubicBezTo>
-                <a:cubicBezTo>
-                  <a:pt x="26095" y="273846"/>
-                  <a:pt x="29846" y="240848"/>
-                  <a:pt x="37270" y="208585"/>
-                </a:cubicBezTo>
-                <a:cubicBezTo>
-                  <a:pt x="46506" y="151651"/>
-                  <a:pt x="48419" y="93777"/>
-                  <a:pt x="42971" y="36360"/>
-                </a:cubicBezTo>
-                <a:lnTo>
-                  <a:pt x="38853" y="8429"/>
-                </a:lnTo>
-                <a:lnTo>
-                  <a:pt x="56649" y="7824"/>
-                </a:lnTo>
-                <a:cubicBezTo>
-                  <a:pt x="210497" y="-156"/>
-                  <a:pt x="364754" y="3162"/>
-                  <a:pt x="518087" y="17748"/>
-                </a:cubicBezTo>
-                <a:cubicBezTo>
-                  <a:pt x="626567" y="25440"/>
-                  <a:pt x="735534" y="24213"/>
-                  <a:pt x="843809" y="14092"/>
-                </a:cubicBezTo>
-                <a:cubicBezTo>
-                  <a:pt x="1042499" y="-1711"/>
-                  <a:pt x="1240782" y="10958"/>
-                  <a:pt x="1439065" y="21666"/>
-                </a:cubicBezTo>
-                <a:cubicBezTo>
-                  <a:pt x="1631105" y="32113"/>
-                  <a:pt x="1823010" y="24408"/>
-                  <a:pt x="2015050" y="17487"/>
-                </a:cubicBezTo>
-                <a:cubicBezTo>
-                  <a:pt x="2157045" y="12394"/>
-                  <a:pt x="2299420" y="249"/>
-                  <a:pt x="2441891" y="4"/>
+                  <a:pt x="636273" y="966066"/>
+                  <a:pt x="800445" y="573253"/>
+                  <a:pt x="995723" y="196614"/>
                 </a:cubicBezTo>
                 <a:close/>
               </a:path>
@@ -4361,7 +4047,7 @@
     </p:spTree>
     <p:extLst>
       <p:ext uri="{BB962C8B-B14F-4D97-AF65-F5344CB8AC3E}">
-        <p14:creationId xmlns:p14="http://schemas.microsoft.com/office/powerpoint/2010/main" val="4051797227"/>
+        <p14:creationId xmlns:p14="http://schemas.microsoft.com/office/powerpoint/2010/main" val="1098827441"/>
       </p:ext>
     </p:extLst>
   </p:cSld>

--- a/Weekly Reports/slides/2-alexis-perez.pptx
+++ b/Weekly Reports/slides/2-alexis-perez.pptx
@@ -6,6 +6,7 @@
   </p:sldMasterIdLst>
   <p:sldIdLst>
     <p:sldId id="258" r:id="rId2"/>
+    <p:sldId id="260" r:id="rId8"/>
     <p:sldId id="259" r:id="rId3"/>
   </p:sldIdLst>
   <p:sldSz cx="12192000" cy="6858000"/>
@@ -4057,6 +4058,48 @@
 </p:sld>
 </file>
 
+<file path=ppt/slides/slide3.xml><?xml version="1.0" encoding="utf-8"?>
+<p:sld xmlns:a="http://schemas.openxmlformats.org/drawingml/2006/main" xmlns:p="http://schemas.openxmlformats.org/presentationml/2006/main" xmlns:r="http://schemas.openxmlformats.org/officeDocument/2006/relationships">
+  <p:cSld>
+    <p:spTree>
+      <p:nvGrpSpPr>
+        <p:cNvPr id="1" name=""/>
+        <p:cNvGrpSpPr/>
+        <p:nvPr/>
+      </p:nvGrpSpPr>
+      <p:grpSpPr/>
+      <p:pic>
+        <p:nvPicPr>
+          <p:cNvPr id="2" name="Picture 1" descr="1.jpg"/>
+          <p:cNvPicPr>
+            <a:picLocks noChangeAspect="1"/>
+          </p:cNvPicPr>
+          <p:nvPr/>
+        </p:nvPicPr>
+        <p:blipFill>
+          <a:blip r:embed="rId2"/>
+          <a:stretch>
+            <a:fillRect/>
+          </a:stretch>
+        </p:blipFill>
+        <p:spPr>
+          <a:xfrm>
+            <a:off x="943483" y="0"/>
+            <a:ext cx="10305033" cy="6858000"/>
+          </a:xfrm>
+          <a:prstGeom prst="rect">
+            <a:avLst/>
+          </a:prstGeom>
+        </p:spPr>
+      </p:pic>
+    </p:spTree>
+  </p:cSld>
+  <p:clrMapOvr>
+    <a:masterClrMapping/>
+  </p:clrMapOvr>
+</p:sld>
+</file>
+
 <file path=ppt/theme/theme1.xml><?xml version="1.0" encoding="utf-8"?>
 <a:theme xmlns:a="http://schemas.openxmlformats.org/drawingml/2006/main" name="Office Theme">
   <a:themeElements>

--- a/Weekly Reports/slides/2-alexis-perez.pptx
+++ b/Weekly Reports/slides/2-alexis-perez.pptx
@@ -6,7 +6,6 @@
   </p:sldMasterIdLst>
   <p:sldIdLst>
     <p:sldId id="256" r:id="rId3"/>
-    <p:sldId id="258" r:id="rId6"/>
     <p:sldId id="257" r:id="rId4"/>
   </p:sldIdLst>
   <p:sldSz cx="12192000" cy="6858000"/>
@@ -15,8 +14,8 @@
 </file>
 
 <file path=ppt/slideLayouts/slideLayout1.xml><?xml version="1.0" encoding="utf-8"?>
-<p:sldLayout xmlns:a="http://schemas.openxmlformats.org/drawingml/2006/main" xmlns:p="http://schemas.openxmlformats.org/presentationml/2006/main" xmlns:r="http://schemas.openxmlformats.org/officeDocument/2006/relationships" xmlns:p14="http://schemas.microsoft.com/office/powerpoint/2010/main" xmlns:p15="http://schemas.microsoft.com/office/powerpoint/2012/main" xmlns:mc="http://schemas.openxmlformats.org/markup-compatibility/2006" type="title" preserve="1">
-  <p:cSld name="Title Slide">
+<p:sldLayout xmlns:a="http://schemas.openxmlformats.org/drawingml/2006/main" xmlns:p="http://schemas.openxmlformats.org/presentationml/2006/main" xmlns:r="http://schemas.openxmlformats.org/officeDocument/2006/relationships" xmlns:p14="http://schemas.microsoft.com/office/powerpoint/2010/main" xmlns:p15="http://schemas.microsoft.com/office/powerpoint/2012/main" xmlns:mc="http://schemas.openxmlformats.org/markup-compatibility/2006" type="blank" preserve="1">
+  <p:cSld name="Blank">
     <p:bg>
       <p:bgPr>
         <a:solidFill>
@@ -45,85 +44,13 @@
             <a:spLocks noGrp="1"/>
           </p:cNvSpPr>
           <p:nvPr>
-            <p:ph type="title"/>
-          </p:nvPr>
-        </p:nvSpPr>
-        <p:spPr>
-          <a:xfrm>
-            <a:off x="1523880" y="1122480"/>
-            <a:ext cx="9143640" cy="2387160"/>
-          </a:xfrm>
-          <a:prstGeom prst="rect">
-            <a:avLst/>
-          </a:prstGeom>
-          <a:noFill/>
-          <a:ln w="0">
-            <a:noFill/>
-          </a:ln>
-        </p:spPr>
-        <p:txBody>
-          <a:bodyPr lIns="91440" tIns="45720" rIns="91440" bIns="45720" anchor="b">
-            <a:noAutofit/>
-          </a:bodyPr>
-          <a:lstStyle>
-            <a:lvl1pPr indent="0" algn="ctr" defTabSz="914400">
-              <a:lnSpc>
-                <a:spcPct val="90000"/>
-              </a:lnSpc>
-              <a:buNone/>
-              <a:defRPr lang="en-US" sz="6000" b="0" u="none" strike="noStrike">
-                <a:solidFill>
-                  <a:schemeClr val="dk1"/>
-                </a:solidFill>
-                <a:effectLst/>
-                <a:uFillTx/>
-                <a:latin typeface="Aptos Display"/>
-              </a:defRPr>
-            </a:lvl1pPr>
-          </a:lstStyle>
-          <a:p>
-            <a:pPr indent="0" algn="ctr" defTabSz="914400">
-              <a:lnSpc>
-                <a:spcPct val="90000"/>
-              </a:lnSpc>
-              <a:buNone/>
-            </a:pPr>
-            <a:r>
-              <a:rPr lang="en-US" sz="6000" b="0" u="none" strike="noStrike">
-                <a:solidFill>
-                  <a:schemeClr val="dk1"/>
-                </a:solidFill>
-                <a:effectLst/>
-                <a:uFillTx/>
-                <a:latin typeface="Aptos Display"/>
-              </a:rPr>
-              <a:t>Click to edit Master title style</a:t>
-            </a:r>
-            <a:endParaRPr lang="en-US" sz="6000" b="0" u="none" strike="noStrike">
-              <a:solidFill>
-                <a:schemeClr val="dk1"/>
-              </a:solidFill>
-              <a:effectLst/>
-              <a:uFillTx/>
-              <a:latin typeface="Aptos Display"/>
-            </a:endParaRPr>
-          </a:p>
-        </p:txBody>
-      </p:sp>
-      <p:sp>
-        <p:nvSpPr>
-          <p:cNvPr id="3" name="PlaceHolder 2"/>
-          <p:cNvSpPr>
-            <a:spLocks noGrp="1"/>
-          </p:cNvSpPr>
-          <p:nvPr>
             <p:ph type="dt" idx="1"/>
           </p:nvPr>
         </p:nvSpPr>
         <p:spPr>
           <a:xfrm>
             <a:off x="838080" y="6356520"/>
-            <a:ext cx="2742840" cy="364680"/>
+            <a:ext cx="2742480" cy="364320"/>
           </a:xfrm>
           <a:prstGeom prst="rect">
             <a:avLst/>
@@ -143,6 +70,9 @@
                 <a:spcPct val="100000"/>
               </a:lnSpc>
               <a:buNone/>
+              <a:tabLst>
+                <a:tab pos="0" algn="l"/>
+              </a:tabLst>
               <a:defRPr lang="en-US" sz="1200" b="0" u="none" strike="noStrike">
                 <a:solidFill>
                   <a:schemeClr val="dk1">
@@ -161,6 +91,9 @@
                 <a:spcPct val="100000"/>
               </a:lnSpc>
               <a:buNone/>
+              <a:tabLst>
+                <a:tab pos="0" algn="l"/>
+              </a:tabLst>
             </a:pPr>
             <a:r>
               <a:rPr lang="en-US" sz="1200" b="0" u="none" strike="noStrike">
@@ -188,7 +121,7 @@
       </p:sp>
       <p:sp>
         <p:nvSpPr>
-          <p:cNvPr id="4" name="PlaceHolder 3"/>
+          <p:cNvPr id="3" name="PlaceHolder 2"/>
           <p:cNvSpPr>
             <a:spLocks noGrp="1"/>
           </p:cNvSpPr>
@@ -199,7 +132,7 @@
         <p:spPr>
           <a:xfrm>
             <a:off x="4038480" y="6356520"/>
-            <a:ext cx="4114440" cy="364680"/>
+            <a:ext cx="4114080" cy="364320"/>
           </a:xfrm>
           <a:prstGeom prst="rect">
             <a:avLst/>
@@ -215,7 +148,13 @@
           </a:bodyPr>
           <a:lstStyle>
             <a:lvl1pPr indent="0" algn="ctr">
-              <a:buNone/>
+              <a:lnSpc>
+                <a:spcPct val="100000"/>
+              </a:lnSpc>
+              <a:buNone/>
+              <a:tabLst>
+                <a:tab pos="0" algn="l"/>
+              </a:tabLst>
               <a:defRPr lang="en-US" sz="1400" b="0" u="none" strike="noStrike">
                 <a:solidFill>
                   <a:srgbClr val="000000"/>
@@ -228,7 +167,13 @@
           </a:lstStyle>
           <a:p>
             <a:pPr indent="0" algn="ctr">
-              <a:buNone/>
+              <a:lnSpc>
+                <a:spcPct val="100000"/>
+              </a:lnSpc>
+              <a:buNone/>
+              <a:tabLst>
+                <a:tab pos="0" algn="l"/>
+              </a:tabLst>
             </a:pPr>
             <a:r>
               <a:rPr lang="en-US" sz="1400" b="0" u="none" strike="noStrike">
@@ -254,7 +199,7 @@
       </p:sp>
       <p:sp>
         <p:nvSpPr>
-          <p:cNvPr id="5" name="PlaceHolder 4"/>
+          <p:cNvPr id="4" name="PlaceHolder 3"/>
           <p:cNvSpPr>
             <a:spLocks noGrp="1"/>
           </p:cNvSpPr>
@@ -265,7 +210,7 @@
         <p:spPr>
           <a:xfrm>
             <a:off x="8610480" y="6356520"/>
-            <a:ext cx="2742840" cy="364680"/>
+            <a:ext cx="2742480" cy="364320"/>
           </a:xfrm>
           <a:prstGeom prst="rect">
             <a:avLst/>
@@ -285,6 +230,9 @@
                 <a:spcPct val="100000"/>
               </a:lnSpc>
               <a:buNone/>
+              <a:tabLst>
+                <a:tab pos="0" algn="l"/>
+              </a:tabLst>
               <a:defRPr lang="en-US" sz="1200" b="0" u="none" strike="noStrike">
                 <a:solidFill>
                   <a:schemeClr val="dk1">
@@ -303,8 +251,11 @@
                 <a:spcPct val="100000"/>
               </a:lnSpc>
               <a:buNone/>
-            </a:pPr>
-            <a:fld id="{01328752-8813-4BB9-B7FE-0A968FF3A40D}" type="slidenum">
+              <a:tabLst>
+                <a:tab pos="0" algn="l"/>
+              </a:tabLst>
+            </a:pPr>
+            <a:fld id="{CE490F9B-8A9B-4F5E-8EBF-893E22BC8FD3}" type="slidenum">
               <a:rPr lang="en-US" sz="1200" b="0" u="none" strike="noStrike">
                 <a:solidFill>
                   <a:schemeClr val="dk1">
@@ -324,6 +275,460 @@
               <a:effectLst/>
               <a:uFillTx/>
               <a:latin typeface="Times New Roman"/>
+            </a:endParaRPr>
+          </a:p>
+        </p:txBody>
+      </p:sp>
+      <p:sp>
+        <p:nvSpPr>
+          <p:cNvPr id="5" name="PlaceHolder 4"/>
+          <p:cNvSpPr>
+            <a:spLocks noGrp="1"/>
+          </p:cNvSpPr>
+          <p:nvPr>
+            <p:ph type="title"/>
+          </p:nvPr>
+        </p:nvSpPr>
+        <p:spPr>
+          <a:xfrm>
+            <a:off x="609480" y="273600"/>
+            <a:ext cx="10972440" cy="1144800"/>
+          </a:xfrm>
+          <a:prstGeom prst="rect">
+            <a:avLst/>
+          </a:prstGeom>
+          <a:noFill/>
+          <a:ln w="0">
+            <a:noFill/>
+          </a:ln>
+        </p:spPr>
+        <p:txBody>
+          <a:bodyPr lIns="0" tIns="0" rIns="0" bIns="0" anchor="ctr">
+            <a:noAutofit/>
+          </a:bodyPr>
+          <a:lstStyle>
+            <a:lvl1pPr indent="0" algn="ctr">
+              <a:buNone/>
+              <a:defRPr lang="en-US" sz="4400" b="0" u="none" strike="noStrike">
+                <a:solidFill>
+                  <a:srgbClr val="000000"/>
+                </a:solidFill>
+                <a:effectLst/>
+                <a:uFillTx/>
+                <a:latin typeface="Arial"/>
+              </a:defRPr>
+            </a:lvl1pPr>
+          </a:lstStyle>
+          <a:p>
+            <a:pPr indent="0" algn="ctr">
+              <a:buNone/>
+            </a:pPr>
+            <a:r>
+              <a:rPr lang="en-US" sz="4400" b="0" u="none" strike="noStrike">
+                <a:solidFill>
+                  <a:srgbClr val="000000"/>
+                </a:solidFill>
+                <a:effectLst/>
+                <a:uFillTx/>
+                <a:latin typeface="Arial"/>
+              </a:rPr>
+              <a:t>Click to edit the title text format</a:t>
+            </a:r>
+            <a:endParaRPr lang="en-US" sz="4400" b="0" u="none" strike="noStrike">
+              <a:solidFill>
+                <a:srgbClr val="000000"/>
+              </a:solidFill>
+              <a:effectLst/>
+              <a:uFillTx/>
+              <a:latin typeface="Arial"/>
+            </a:endParaRPr>
+          </a:p>
+        </p:txBody>
+      </p:sp>
+      <p:sp>
+        <p:nvSpPr>
+          <p:cNvPr id="6" name="PlaceHolder 5"/>
+          <p:cNvSpPr>
+            <a:spLocks noGrp="1"/>
+          </p:cNvSpPr>
+          <p:nvPr>
+            <p:ph type="body"/>
+          </p:nvPr>
+        </p:nvSpPr>
+        <p:spPr>
+          <a:xfrm>
+            <a:off x="609480" y="1604520"/>
+            <a:ext cx="10972440" cy="3977280"/>
+          </a:xfrm>
+          <a:prstGeom prst="rect">
+            <a:avLst/>
+          </a:prstGeom>
+          <a:noFill/>
+          <a:ln w="0">
+            <a:noFill/>
+          </a:ln>
+        </p:spPr>
+        <p:txBody>
+          <a:bodyPr lIns="0" tIns="0" rIns="0" bIns="0" anchor="t">
+            <a:normAutofit/>
+          </a:bodyPr>
+          <a:lstStyle>
+            <a:lvl1pPr algn="l">
+              <a:spcBef>
+                <a:spcPts val="1417"/>
+              </a:spcBef>
+              <a:buClr>
+                <a:srgbClr val="000000"/>
+              </a:buClr>
+              <a:buSzPct val="45000"/>
+              <a:buFont typeface="Wingdings" charset="2"/>
+              <a:buChar char=""/>
+              <a:defRPr lang="en-US" sz="3200" b="0" u="none" strike="noStrike">
+                <a:solidFill>
+                  <a:srgbClr val="000000"/>
+                </a:solidFill>
+                <a:effectLst/>
+                <a:uFillTx/>
+                <a:latin typeface="Arial"/>
+              </a:defRPr>
+            </a:lvl1pPr>
+            <a:lvl2pPr lvl="1" algn="l">
+              <a:spcBef>
+                <a:spcPts val="1134"/>
+              </a:spcBef>
+              <a:buClr>
+                <a:srgbClr val="000000"/>
+              </a:buClr>
+              <a:buSzPct val="75000"/>
+              <a:buFont typeface="Symbol" charset="2"/>
+              <a:buChar char=""/>
+              <a:defRPr lang="en-US" sz="2800" b="0" u="none" strike="noStrike">
+                <a:solidFill>
+                  <a:srgbClr val="000000"/>
+                </a:solidFill>
+                <a:effectLst/>
+                <a:uFillTx/>
+                <a:latin typeface="Arial"/>
+              </a:defRPr>
+            </a:lvl2pPr>
+            <a:lvl3pPr lvl="2" algn="l">
+              <a:spcBef>
+                <a:spcPts val="850"/>
+              </a:spcBef>
+              <a:buClr>
+                <a:srgbClr val="000000"/>
+              </a:buClr>
+              <a:buSzPct val="45000"/>
+              <a:buFont typeface="Wingdings" charset="2"/>
+              <a:buChar char=""/>
+              <a:defRPr lang="en-US" sz="2400" b="0" u="none" strike="noStrike">
+                <a:solidFill>
+                  <a:srgbClr val="000000"/>
+                </a:solidFill>
+                <a:effectLst/>
+                <a:uFillTx/>
+                <a:latin typeface="Arial"/>
+              </a:defRPr>
+            </a:lvl3pPr>
+            <a:lvl4pPr lvl="3" algn="l">
+              <a:spcBef>
+                <a:spcPts val="567"/>
+              </a:spcBef>
+              <a:buClr>
+                <a:srgbClr val="000000"/>
+              </a:buClr>
+              <a:buSzPct val="75000"/>
+              <a:buFont typeface="Symbol" charset="2"/>
+              <a:buChar char=""/>
+              <a:defRPr lang="en-US" sz="2000" b="0" u="none" strike="noStrike">
+                <a:solidFill>
+                  <a:srgbClr val="000000"/>
+                </a:solidFill>
+                <a:effectLst/>
+                <a:uFillTx/>
+                <a:latin typeface="Arial"/>
+              </a:defRPr>
+            </a:lvl4pPr>
+            <a:lvl5pPr lvl="4" algn="l">
+              <a:spcBef>
+                <a:spcPts val="283"/>
+              </a:spcBef>
+              <a:buClr>
+                <a:srgbClr val="000000"/>
+              </a:buClr>
+              <a:buSzPct val="45000"/>
+              <a:buFont typeface="Wingdings" charset="2"/>
+              <a:buChar char=""/>
+              <a:defRPr lang="en-US" sz="2000" b="0" u="none" strike="noStrike">
+                <a:solidFill>
+                  <a:srgbClr val="000000"/>
+                </a:solidFill>
+                <a:effectLst/>
+                <a:uFillTx/>
+                <a:latin typeface="Arial"/>
+              </a:defRPr>
+            </a:lvl5pPr>
+            <a:lvl6pPr lvl="5" algn="l">
+              <a:spcBef>
+                <a:spcPts val="283"/>
+              </a:spcBef>
+              <a:buClr>
+                <a:srgbClr val="000000"/>
+              </a:buClr>
+              <a:buSzPct val="45000"/>
+              <a:buFont typeface="Wingdings" charset="2"/>
+              <a:buChar char=""/>
+              <a:defRPr lang="en-US" sz="2000" b="0" u="none" strike="noStrike">
+                <a:solidFill>
+                  <a:srgbClr val="000000"/>
+                </a:solidFill>
+                <a:effectLst/>
+                <a:uFillTx/>
+                <a:latin typeface="Arial"/>
+              </a:defRPr>
+            </a:lvl6pPr>
+            <a:lvl7pPr lvl="6" algn="l">
+              <a:spcBef>
+                <a:spcPts val="283"/>
+              </a:spcBef>
+              <a:buClr>
+                <a:srgbClr val="000000"/>
+              </a:buClr>
+              <a:buSzPct val="45000"/>
+              <a:buFont typeface="Wingdings" charset="2"/>
+              <a:buChar char=""/>
+              <a:defRPr lang="en-US" sz="2000" b="0" u="none" strike="noStrike">
+                <a:solidFill>
+                  <a:srgbClr val="000000"/>
+                </a:solidFill>
+                <a:effectLst/>
+                <a:uFillTx/>
+                <a:latin typeface="Arial"/>
+              </a:defRPr>
+            </a:lvl7pPr>
+          </a:lstStyle>
+          <a:p>
+            <a:pPr marL="432000" indent="-324000" algn="l">
+              <a:spcBef>
+                <a:spcPts val="1417"/>
+              </a:spcBef>
+              <a:buClr>
+                <a:srgbClr val="000000"/>
+              </a:buClr>
+              <a:buSzPct val="45000"/>
+              <a:buFont typeface="Wingdings" charset="2"/>
+              <a:buChar char=""/>
+            </a:pPr>
+            <a:r>
+              <a:rPr lang="en-US" sz="3200" b="0" u="none" strike="noStrike">
+                <a:solidFill>
+                  <a:srgbClr val="000000"/>
+                </a:solidFill>
+                <a:effectLst/>
+                <a:uFillTx/>
+                <a:latin typeface="Arial"/>
+              </a:rPr>
+              <a:t>Click to edit the outline text format</a:t>
+            </a:r>
+            <a:endParaRPr lang="en-US" sz="3200" b="0" u="none" strike="noStrike">
+              <a:solidFill>
+                <a:srgbClr val="000000"/>
+              </a:solidFill>
+              <a:effectLst/>
+              <a:uFillTx/>
+              <a:latin typeface="Arial"/>
+            </a:endParaRPr>
+          </a:p>
+          <a:p>
+            <a:pPr marL="864000" lvl="1" indent="-324000" algn="l">
+              <a:spcBef>
+                <a:spcPts val="1134"/>
+              </a:spcBef>
+              <a:buClr>
+                <a:srgbClr val="000000"/>
+              </a:buClr>
+              <a:buSzPct val="75000"/>
+              <a:buFont typeface="Symbol" charset="2"/>
+              <a:buChar char=""/>
+            </a:pPr>
+            <a:r>
+              <a:rPr lang="en-US" sz="2800" b="0" u="none" strike="noStrike">
+                <a:solidFill>
+                  <a:srgbClr val="000000"/>
+                </a:solidFill>
+                <a:effectLst/>
+                <a:uFillTx/>
+                <a:latin typeface="Arial"/>
+              </a:rPr>
+              <a:t>Second Outline Level</a:t>
+            </a:r>
+            <a:endParaRPr lang="en-US" sz="2800" b="0" u="none" strike="noStrike">
+              <a:solidFill>
+                <a:srgbClr val="000000"/>
+              </a:solidFill>
+              <a:effectLst/>
+              <a:uFillTx/>
+              <a:latin typeface="Arial"/>
+            </a:endParaRPr>
+          </a:p>
+          <a:p>
+            <a:pPr marL="1296000" lvl="2" indent="-288000" algn="l">
+              <a:spcBef>
+                <a:spcPts val="850"/>
+              </a:spcBef>
+              <a:buClr>
+                <a:srgbClr val="000000"/>
+              </a:buClr>
+              <a:buSzPct val="45000"/>
+              <a:buFont typeface="Wingdings" charset="2"/>
+              <a:buChar char=""/>
+            </a:pPr>
+            <a:r>
+              <a:rPr lang="en-US" sz="2400" b="0" u="none" strike="noStrike">
+                <a:solidFill>
+                  <a:srgbClr val="000000"/>
+                </a:solidFill>
+                <a:effectLst/>
+                <a:uFillTx/>
+                <a:latin typeface="Arial"/>
+              </a:rPr>
+              <a:t>Third Outline Level</a:t>
+            </a:r>
+            <a:endParaRPr lang="en-US" sz="2400" b="0" u="none" strike="noStrike">
+              <a:solidFill>
+                <a:srgbClr val="000000"/>
+              </a:solidFill>
+              <a:effectLst/>
+              <a:uFillTx/>
+              <a:latin typeface="Arial"/>
+            </a:endParaRPr>
+          </a:p>
+          <a:p>
+            <a:pPr marL="1728000" lvl="3" indent="-216000" algn="l">
+              <a:spcBef>
+                <a:spcPts val="567"/>
+              </a:spcBef>
+              <a:buClr>
+                <a:srgbClr val="000000"/>
+              </a:buClr>
+              <a:buSzPct val="75000"/>
+              <a:buFont typeface="Symbol" charset="2"/>
+              <a:buChar char=""/>
+            </a:pPr>
+            <a:r>
+              <a:rPr lang="en-US" sz="2000" b="0" u="none" strike="noStrike">
+                <a:solidFill>
+                  <a:srgbClr val="000000"/>
+                </a:solidFill>
+                <a:effectLst/>
+                <a:uFillTx/>
+                <a:latin typeface="Arial"/>
+              </a:rPr>
+              <a:t>Fourth Outline Level</a:t>
+            </a:r>
+            <a:endParaRPr lang="en-US" sz="2000" b="0" u="none" strike="noStrike">
+              <a:solidFill>
+                <a:srgbClr val="000000"/>
+              </a:solidFill>
+              <a:effectLst/>
+              <a:uFillTx/>
+              <a:latin typeface="Arial"/>
+            </a:endParaRPr>
+          </a:p>
+          <a:p>
+            <a:pPr marL="2160000" lvl="4" indent="-216000" algn="l">
+              <a:spcBef>
+                <a:spcPts val="283"/>
+              </a:spcBef>
+              <a:buClr>
+                <a:srgbClr val="000000"/>
+              </a:buClr>
+              <a:buSzPct val="45000"/>
+              <a:buFont typeface="Wingdings" charset="2"/>
+              <a:buChar char=""/>
+            </a:pPr>
+            <a:r>
+              <a:rPr lang="en-US" sz="2000" b="0" u="none" strike="noStrike">
+                <a:solidFill>
+                  <a:srgbClr val="000000"/>
+                </a:solidFill>
+                <a:effectLst/>
+                <a:uFillTx/>
+                <a:latin typeface="Arial"/>
+              </a:rPr>
+              <a:t>Fifth Outline Level</a:t>
+            </a:r>
+            <a:endParaRPr lang="en-US" sz="2000" b="0" u="none" strike="noStrike">
+              <a:solidFill>
+                <a:srgbClr val="000000"/>
+              </a:solidFill>
+              <a:effectLst/>
+              <a:uFillTx/>
+              <a:latin typeface="Arial"/>
+            </a:endParaRPr>
+          </a:p>
+          <a:p>
+            <a:pPr marL="2592000" lvl="5" indent="-216000" algn="l">
+              <a:spcBef>
+                <a:spcPts val="283"/>
+              </a:spcBef>
+              <a:buClr>
+                <a:srgbClr val="000000"/>
+              </a:buClr>
+              <a:buSzPct val="45000"/>
+              <a:buFont typeface="Wingdings" charset="2"/>
+              <a:buChar char=""/>
+            </a:pPr>
+            <a:r>
+              <a:rPr lang="en-US" sz="2000" b="0" u="none" strike="noStrike">
+                <a:solidFill>
+                  <a:srgbClr val="000000"/>
+                </a:solidFill>
+                <a:effectLst/>
+                <a:uFillTx/>
+                <a:latin typeface="Arial"/>
+              </a:rPr>
+              <a:t>Sixth Outline Level</a:t>
+            </a:r>
+            <a:endParaRPr lang="en-US" sz="2000" b="0" u="none" strike="noStrike">
+              <a:solidFill>
+                <a:srgbClr val="000000"/>
+              </a:solidFill>
+              <a:effectLst/>
+              <a:uFillTx/>
+              <a:latin typeface="Arial"/>
+            </a:endParaRPr>
+          </a:p>
+          <a:p>
+            <a:pPr marL="3024000" lvl="6" indent="-216000" algn="l">
+              <a:spcBef>
+                <a:spcPts val="283"/>
+              </a:spcBef>
+              <a:buClr>
+                <a:srgbClr val="000000"/>
+              </a:buClr>
+              <a:buSzPct val="45000"/>
+              <a:buFont typeface="Wingdings" charset="2"/>
+              <a:buChar char=""/>
+            </a:pPr>
+            <a:r>
+              <a:rPr lang="en-US" sz="2000" b="0" u="none" strike="noStrike">
+                <a:solidFill>
+                  <a:srgbClr val="000000"/>
+                </a:solidFill>
+                <a:effectLst/>
+                <a:uFillTx/>
+                <a:latin typeface="Arial"/>
+              </a:rPr>
+              <a:t>Seventh Outline Level</a:t>
+            </a:r>
+            <a:endParaRPr lang="en-US" sz="2000" b="0" u="none" strike="noStrike">
+              <a:solidFill>
+                <a:srgbClr val="000000"/>
+              </a:solidFill>
+              <a:effectLst/>
+              <a:uFillTx/>
+              <a:latin typeface="Arial"/>
             </a:endParaRPr>
           </a:p>
         </p:txBody>
@@ -334,6 +739,1544 @@
 </file>
 
 <file path=ppt/slideLayouts/slideLayout10.xml><?xml version="1.0" encoding="utf-8"?>
+<p:sldLayout xmlns:a="http://schemas.openxmlformats.org/drawingml/2006/main" xmlns:p="http://schemas.openxmlformats.org/presentationml/2006/main" xmlns:r="http://schemas.openxmlformats.org/officeDocument/2006/relationships" xmlns:p14="http://schemas.microsoft.com/office/powerpoint/2010/main" xmlns:p15="http://schemas.microsoft.com/office/powerpoint/2012/main" xmlns:mc="http://schemas.openxmlformats.org/markup-compatibility/2006" type="blank" preserve="1">
+  <p:cSld name="Comparison">
+    <p:bg>
+      <p:bgPr>
+        <a:solidFill>
+          <a:srgbClr val="FFFFFF"/>
+        </a:solidFill>
+      </p:bgPr>
+    </p:bg>
+    <p:spTree>
+      <p:nvGrpSpPr>
+        <p:cNvPr id="1" name=""/>
+        <p:cNvGrpSpPr/>
+        <p:nvPr/>
+      </p:nvGrpSpPr>
+      <p:grpSpPr>
+        <a:xfrm>
+          <a:off x="0" y="0"/>
+          <a:ext cx="0" cy="0"/>
+          <a:chOff x="0" y="0"/>
+          <a:chExt cx="0" cy="0"/>
+        </a:xfrm>
+      </p:grpSpPr>
+      <p:sp>
+        <p:nvSpPr>
+          <p:cNvPr id="49" name="PlaceHolder 1"/>
+          <p:cNvSpPr>
+            <a:spLocks noGrp="1"/>
+          </p:cNvSpPr>
+          <p:nvPr>
+            <p:ph type="title"/>
+          </p:nvPr>
+        </p:nvSpPr>
+        <p:spPr>
+          <a:xfrm>
+            <a:off x="839880" y="365040"/>
+            <a:ext cx="10514880" cy="1324800"/>
+          </a:xfrm>
+          <a:prstGeom prst="rect">
+            <a:avLst/>
+          </a:prstGeom>
+          <a:noFill/>
+          <a:ln w="0">
+            <a:noFill/>
+          </a:ln>
+        </p:spPr>
+        <p:txBody>
+          <a:bodyPr lIns="91440" tIns="45720" rIns="91440" bIns="45720" anchor="ctr">
+            <a:noAutofit/>
+          </a:bodyPr>
+          <a:lstStyle>
+            <a:lvl1pPr indent="0" algn="l" defTabSz="914400">
+              <a:lnSpc>
+                <a:spcPct val="90000"/>
+              </a:lnSpc>
+              <a:buNone/>
+              <a:tabLst>
+                <a:tab pos="0" algn="l"/>
+              </a:tabLst>
+              <a:defRPr lang="en-US" sz="4400" b="0" u="none" strike="noStrike">
+                <a:solidFill>
+                  <a:schemeClr val="dk1"/>
+                </a:solidFill>
+                <a:effectLst/>
+                <a:uFillTx/>
+                <a:latin typeface="Aptos Display"/>
+              </a:defRPr>
+            </a:lvl1pPr>
+          </a:lstStyle>
+          <a:p>
+            <a:pPr indent="0" algn="l" defTabSz="914400">
+              <a:lnSpc>
+                <a:spcPct val="90000"/>
+              </a:lnSpc>
+              <a:buNone/>
+              <a:tabLst>
+                <a:tab pos="0" algn="l"/>
+              </a:tabLst>
+            </a:pPr>
+            <a:r>
+              <a:rPr lang="en-US" sz="4400" b="0" u="none" strike="noStrike">
+                <a:solidFill>
+                  <a:schemeClr val="dk1"/>
+                </a:solidFill>
+                <a:effectLst/>
+                <a:uFillTx/>
+                <a:latin typeface="Aptos Display"/>
+              </a:rPr>
+              <a:t>Click to edit Master title style</a:t>
+            </a:r>
+            <a:endParaRPr lang="en-US" sz="4400" b="0" u="none" strike="noStrike">
+              <a:solidFill>
+                <a:schemeClr val="dk1"/>
+              </a:solidFill>
+              <a:effectLst/>
+              <a:uFillTx/>
+              <a:latin typeface="Aptos Display"/>
+            </a:endParaRPr>
+          </a:p>
+        </p:txBody>
+      </p:sp>
+      <p:sp>
+        <p:nvSpPr>
+          <p:cNvPr id="50" name="PlaceHolder 2"/>
+          <p:cNvSpPr>
+            <a:spLocks noGrp="1"/>
+          </p:cNvSpPr>
+          <p:nvPr>
+            <p:ph type="body"/>
+          </p:nvPr>
+        </p:nvSpPr>
+        <p:spPr>
+          <a:xfrm>
+            <a:off x="839880" y="1681200"/>
+            <a:ext cx="5157000" cy="823320"/>
+          </a:xfrm>
+          <a:prstGeom prst="rect">
+            <a:avLst/>
+          </a:prstGeom>
+          <a:noFill/>
+          <a:ln w="0">
+            <a:noFill/>
+          </a:ln>
+        </p:spPr>
+        <p:txBody>
+          <a:bodyPr lIns="91440" tIns="45720" rIns="91440" bIns="45720" anchor="b">
+            <a:noAutofit/>
+          </a:bodyPr>
+          <a:lstStyle>
+            <a:lvl1pPr indent="0" algn="l" defTabSz="914400">
+              <a:lnSpc>
+                <a:spcPct val="90000"/>
+              </a:lnSpc>
+              <a:spcBef>
+                <a:spcPts val="1001"/>
+              </a:spcBef>
+              <a:buNone/>
+              <a:tabLst>
+                <a:tab pos="0" algn="l"/>
+              </a:tabLst>
+              <a:defRPr lang="en-US" sz="2400" b="1" u="none" strike="noStrike">
+                <a:solidFill>
+                  <a:schemeClr val="dk1"/>
+                </a:solidFill>
+                <a:effectLst/>
+                <a:uFillTx/>
+                <a:latin typeface="Aptos"/>
+              </a:defRPr>
+            </a:lvl1pPr>
+          </a:lstStyle>
+          <a:p>
+            <a:pPr indent="0" algn="l" defTabSz="914400">
+              <a:lnSpc>
+                <a:spcPct val="90000"/>
+              </a:lnSpc>
+              <a:spcBef>
+                <a:spcPts val="1001"/>
+              </a:spcBef>
+              <a:buNone/>
+              <a:tabLst>
+                <a:tab pos="0" algn="l"/>
+              </a:tabLst>
+            </a:pPr>
+            <a:r>
+              <a:rPr lang="en-US" sz="2400" b="1" u="none" strike="noStrike">
+                <a:solidFill>
+                  <a:schemeClr val="dk1"/>
+                </a:solidFill>
+                <a:effectLst/>
+                <a:uFillTx/>
+                <a:latin typeface="Aptos"/>
+              </a:rPr>
+              <a:t>Click to edit Master text styles</a:t>
+            </a:r>
+            <a:endParaRPr lang="en-US" sz="2400" b="0" u="none" strike="noStrike">
+              <a:solidFill>
+                <a:schemeClr val="dk1"/>
+              </a:solidFill>
+              <a:effectLst/>
+              <a:uFillTx/>
+              <a:latin typeface="Aptos"/>
+            </a:endParaRPr>
+          </a:p>
+        </p:txBody>
+      </p:sp>
+      <p:sp>
+        <p:nvSpPr>
+          <p:cNvPr id="51" name="PlaceHolder 3"/>
+          <p:cNvSpPr>
+            <a:spLocks noGrp="1"/>
+          </p:cNvSpPr>
+          <p:nvPr>
+            <p:ph type="body"/>
+          </p:nvPr>
+        </p:nvSpPr>
+        <p:spPr>
+          <a:xfrm>
+            <a:off x="839880" y="2505240"/>
+            <a:ext cx="5157000" cy="3683880"/>
+          </a:xfrm>
+          <a:prstGeom prst="rect">
+            <a:avLst/>
+          </a:prstGeom>
+          <a:noFill/>
+          <a:ln w="0">
+            <a:noFill/>
+          </a:ln>
+        </p:spPr>
+        <p:txBody>
+          <a:bodyPr lIns="91440" tIns="45720" rIns="91440" bIns="45720" anchor="t">
+            <a:noAutofit/>
+          </a:bodyPr>
+          <a:lstStyle>
+            <a:lvl1pPr algn="l" defTabSz="914400">
+              <a:lnSpc>
+                <a:spcPct val="90000"/>
+              </a:lnSpc>
+              <a:spcBef>
+                <a:spcPts val="1001"/>
+              </a:spcBef>
+              <a:buClr>
+                <a:srgbClr val="000000"/>
+              </a:buClr>
+              <a:buFont typeface="Arial"/>
+              <a:buChar char="•"/>
+              <a:tabLst>
+                <a:tab pos="0" algn="l"/>
+              </a:tabLst>
+              <a:defRPr lang="en-US" sz="2800" b="0" u="none" strike="noStrike">
+                <a:solidFill>
+                  <a:schemeClr val="dk1"/>
+                </a:solidFill>
+                <a:effectLst/>
+                <a:uFillTx/>
+                <a:latin typeface="Aptos"/>
+              </a:defRPr>
+            </a:lvl1pPr>
+            <a:lvl2pPr lvl="1" algn="l" defTabSz="914400">
+              <a:lnSpc>
+                <a:spcPct val="90000"/>
+              </a:lnSpc>
+              <a:spcBef>
+                <a:spcPts val="499"/>
+              </a:spcBef>
+              <a:buClr>
+                <a:srgbClr val="000000"/>
+              </a:buClr>
+              <a:buFont typeface="Arial"/>
+              <a:buChar char="•"/>
+              <a:tabLst>
+                <a:tab pos="0" algn="l"/>
+              </a:tabLst>
+              <a:defRPr lang="en-US" sz="2400" b="0" u="none" strike="noStrike">
+                <a:solidFill>
+                  <a:schemeClr val="dk1"/>
+                </a:solidFill>
+                <a:effectLst/>
+                <a:uFillTx/>
+                <a:latin typeface="Aptos"/>
+              </a:defRPr>
+            </a:lvl2pPr>
+            <a:lvl3pPr lvl="2" algn="l" defTabSz="914400">
+              <a:lnSpc>
+                <a:spcPct val="90000"/>
+              </a:lnSpc>
+              <a:spcBef>
+                <a:spcPts val="499"/>
+              </a:spcBef>
+              <a:buClr>
+                <a:srgbClr val="000000"/>
+              </a:buClr>
+              <a:buFont typeface="Arial"/>
+              <a:buChar char="•"/>
+              <a:tabLst>
+                <a:tab pos="0" algn="l"/>
+              </a:tabLst>
+              <a:defRPr lang="en-US" sz="2000" b="0" u="none" strike="noStrike">
+                <a:solidFill>
+                  <a:schemeClr val="dk1"/>
+                </a:solidFill>
+                <a:effectLst/>
+                <a:uFillTx/>
+                <a:latin typeface="Aptos"/>
+              </a:defRPr>
+            </a:lvl3pPr>
+            <a:lvl4pPr lvl="3" algn="l" defTabSz="914400">
+              <a:lnSpc>
+                <a:spcPct val="90000"/>
+              </a:lnSpc>
+              <a:spcBef>
+                <a:spcPts val="499"/>
+              </a:spcBef>
+              <a:buClr>
+                <a:srgbClr val="000000"/>
+              </a:buClr>
+              <a:buFont typeface="Arial"/>
+              <a:buChar char="•"/>
+              <a:tabLst>
+                <a:tab pos="0" algn="l"/>
+              </a:tabLst>
+              <a:defRPr lang="en-US" sz="1800" b="0" u="none" strike="noStrike">
+                <a:solidFill>
+                  <a:schemeClr val="dk1"/>
+                </a:solidFill>
+                <a:effectLst/>
+                <a:uFillTx/>
+                <a:latin typeface="Aptos"/>
+              </a:defRPr>
+            </a:lvl4pPr>
+            <a:lvl5pPr lvl="4" algn="l" defTabSz="914400">
+              <a:lnSpc>
+                <a:spcPct val="90000"/>
+              </a:lnSpc>
+              <a:spcBef>
+                <a:spcPts val="499"/>
+              </a:spcBef>
+              <a:buClr>
+                <a:srgbClr val="000000"/>
+              </a:buClr>
+              <a:buFont typeface="Arial"/>
+              <a:buChar char="•"/>
+              <a:tabLst>
+                <a:tab pos="0" algn="l"/>
+              </a:tabLst>
+              <a:defRPr lang="en-US" sz="1800" b="0" u="none" strike="noStrike">
+                <a:solidFill>
+                  <a:schemeClr val="dk1"/>
+                </a:solidFill>
+                <a:effectLst/>
+                <a:uFillTx/>
+                <a:latin typeface="Aptos"/>
+              </a:defRPr>
+            </a:lvl5pPr>
+          </a:lstStyle>
+          <a:p>
+            <a:pPr marL="228600" indent="-228600" algn="l" defTabSz="914400">
+              <a:lnSpc>
+                <a:spcPct val="90000"/>
+              </a:lnSpc>
+              <a:spcBef>
+                <a:spcPts val="1001"/>
+              </a:spcBef>
+              <a:buClr>
+                <a:srgbClr val="000000"/>
+              </a:buClr>
+              <a:buFont typeface="Arial"/>
+              <a:buChar char="•"/>
+              <a:tabLst>
+                <a:tab pos="0" algn="l"/>
+              </a:tabLst>
+            </a:pPr>
+            <a:r>
+              <a:rPr lang="en-US" sz="2800" b="0" u="none" strike="noStrike">
+                <a:solidFill>
+                  <a:schemeClr val="dk1"/>
+                </a:solidFill>
+                <a:effectLst/>
+                <a:uFillTx/>
+                <a:latin typeface="Aptos"/>
+              </a:rPr>
+              <a:t>Click to edit Master text styles</a:t>
+            </a:r>
+            <a:endParaRPr lang="en-US" sz="2800" b="0" u="none" strike="noStrike">
+              <a:solidFill>
+                <a:schemeClr val="dk1"/>
+              </a:solidFill>
+              <a:effectLst/>
+              <a:uFillTx/>
+              <a:latin typeface="Aptos"/>
+            </a:endParaRPr>
+          </a:p>
+          <a:p>
+            <a:pPr marL="685800" lvl="1" indent="-228600" algn="l" defTabSz="914400">
+              <a:lnSpc>
+                <a:spcPct val="90000"/>
+              </a:lnSpc>
+              <a:spcBef>
+                <a:spcPts val="499"/>
+              </a:spcBef>
+              <a:buClr>
+                <a:srgbClr val="000000"/>
+              </a:buClr>
+              <a:buFont typeface="Arial"/>
+              <a:buChar char="•"/>
+              <a:tabLst>
+                <a:tab pos="0" algn="l"/>
+              </a:tabLst>
+            </a:pPr>
+            <a:r>
+              <a:rPr lang="en-US" sz="2400" b="0" u="none" strike="noStrike">
+                <a:solidFill>
+                  <a:schemeClr val="dk1"/>
+                </a:solidFill>
+                <a:effectLst/>
+                <a:uFillTx/>
+                <a:latin typeface="Aptos"/>
+              </a:rPr>
+              <a:t>Second level</a:t>
+            </a:r>
+            <a:endParaRPr lang="en-US" sz="2400" b="0" u="none" strike="noStrike">
+              <a:solidFill>
+                <a:schemeClr val="dk1"/>
+              </a:solidFill>
+              <a:effectLst/>
+              <a:uFillTx/>
+              <a:latin typeface="Aptos"/>
+            </a:endParaRPr>
+          </a:p>
+          <a:p>
+            <a:pPr marL="1143000" lvl="2" indent="-228600" algn="l" defTabSz="914400">
+              <a:lnSpc>
+                <a:spcPct val="90000"/>
+              </a:lnSpc>
+              <a:spcBef>
+                <a:spcPts val="499"/>
+              </a:spcBef>
+              <a:buClr>
+                <a:srgbClr val="000000"/>
+              </a:buClr>
+              <a:buFont typeface="Arial"/>
+              <a:buChar char="•"/>
+              <a:tabLst>
+                <a:tab pos="0" algn="l"/>
+              </a:tabLst>
+            </a:pPr>
+            <a:r>
+              <a:rPr lang="en-US" sz="2000" b="0" u="none" strike="noStrike">
+                <a:solidFill>
+                  <a:schemeClr val="dk1"/>
+                </a:solidFill>
+                <a:effectLst/>
+                <a:uFillTx/>
+                <a:latin typeface="Aptos"/>
+              </a:rPr>
+              <a:t>Third level</a:t>
+            </a:r>
+            <a:endParaRPr lang="en-US" sz="2000" b="0" u="none" strike="noStrike">
+              <a:solidFill>
+                <a:schemeClr val="dk1"/>
+              </a:solidFill>
+              <a:effectLst/>
+              <a:uFillTx/>
+              <a:latin typeface="Aptos"/>
+            </a:endParaRPr>
+          </a:p>
+          <a:p>
+            <a:pPr marL="1600200" lvl="3" indent="-228600" algn="l" defTabSz="914400">
+              <a:lnSpc>
+                <a:spcPct val="90000"/>
+              </a:lnSpc>
+              <a:spcBef>
+                <a:spcPts val="499"/>
+              </a:spcBef>
+              <a:buClr>
+                <a:srgbClr val="000000"/>
+              </a:buClr>
+              <a:buFont typeface="Arial"/>
+              <a:buChar char="•"/>
+              <a:tabLst>
+                <a:tab pos="0" algn="l"/>
+              </a:tabLst>
+            </a:pPr>
+            <a:r>
+              <a:rPr lang="en-US" sz="1800" b="0" u="none" strike="noStrike">
+                <a:solidFill>
+                  <a:schemeClr val="dk1"/>
+                </a:solidFill>
+                <a:effectLst/>
+                <a:uFillTx/>
+                <a:latin typeface="Aptos"/>
+              </a:rPr>
+              <a:t>Fourth level</a:t>
+            </a:r>
+            <a:endParaRPr lang="en-US" sz="1800" b="0" u="none" strike="noStrike">
+              <a:solidFill>
+                <a:schemeClr val="dk1"/>
+              </a:solidFill>
+              <a:effectLst/>
+              <a:uFillTx/>
+              <a:latin typeface="Aptos"/>
+            </a:endParaRPr>
+          </a:p>
+          <a:p>
+            <a:pPr marL="2057400" lvl="4" indent="-228600" algn="l" defTabSz="914400">
+              <a:lnSpc>
+                <a:spcPct val="90000"/>
+              </a:lnSpc>
+              <a:spcBef>
+                <a:spcPts val="499"/>
+              </a:spcBef>
+              <a:buClr>
+                <a:srgbClr val="000000"/>
+              </a:buClr>
+              <a:buFont typeface="Arial"/>
+              <a:buChar char="•"/>
+              <a:tabLst>
+                <a:tab pos="0" algn="l"/>
+              </a:tabLst>
+            </a:pPr>
+            <a:r>
+              <a:rPr lang="en-US" sz="1800" b="0" u="none" strike="noStrike">
+                <a:solidFill>
+                  <a:schemeClr val="dk1"/>
+                </a:solidFill>
+                <a:effectLst/>
+                <a:uFillTx/>
+                <a:latin typeface="Aptos"/>
+              </a:rPr>
+              <a:t>Fifth level</a:t>
+            </a:r>
+            <a:endParaRPr lang="en-US" sz="1800" b="0" u="none" strike="noStrike">
+              <a:solidFill>
+                <a:schemeClr val="dk1"/>
+              </a:solidFill>
+              <a:effectLst/>
+              <a:uFillTx/>
+              <a:latin typeface="Aptos"/>
+            </a:endParaRPr>
+          </a:p>
+        </p:txBody>
+      </p:sp>
+      <p:sp>
+        <p:nvSpPr>
+          <p:cNvPr id="52" name="PlaceHolder 4"/>
+          <p:cNvSpPr>
+            <a:spLocks noGrp="1"/>
+          </p:cNvSpPr>
+          <p:nvPr>
+            <p:ph type="body"/>
+          </p:nvPr>
+        </p:nvSpPr>
+        <p:spPr>
+          <a:xfrm>
+            <a:off x="6172200" y="1681200"/>
+            <a:ext cx="5182560" cy="823320"/>
+          </a:xfrm>
+          <a:prstGeom prst="rect">
+            <a:avLst/>
+          </a:prstGeom>
+          <a:noFill/>
+          <a:ln w="0">
+            <a:noFill/>
+          </a:ln>
+        </p:spPr>
+        <p:txBody>
+          <a:bodyPr lIns="91440" tIns="45720" rIns="91440" bIns="45720" anchor="b">
+            <a:noAutofit/>
+          </a:bodyPr>
+          <a:lstStyle>
+            <a:lvl1pPr indent="0" algn="l" defTabSz="914400">
+              <a:lnSpc>
+                <a:spcPct val="90000"/>
+              </a:lnSpc>
+              <a:spcBef>
+                <a:spcPts val="1001"/>
+              </a:spcBef>
+              <a:buNone/>
+              <a:tabLst>
+                <a:tab pos="0" algn="l"/>
+              </a:tabLst>
+              <a:defRPr lang="en-US" sz="2400" b="1" u="none" strike="noStrike">
+                <a:solidFill>
+                  <a:schemeClr val="dk1"/>
+                </a:solidFill>
+                <a:effectLst/>
+                <a:uFillTx/>
+                <a:latin typeface="Aptos"/>
+              </a:defRPr>
+            </a:lvl1pPr>
+          </a:lstStyle>
+          <a:p>
+            <a:pPr indent="0" algn="l" defTabSz="914400">
+              <a:lnSpc>
+                <a:spcPct val="90000"/>
+              </a:lnSpc>
+              <a:spcBef>
+                <a:spcPts val="1001"/>
+              </a:spcBef>
+              <a:buNone/>
+              <a:tabLst>
+                <a:tab pos="0" algn="l"/>
+              </a:tabLst>
+            </a:pPr>
+            <a:r>
+              <a:rPr lang="en-US" sz="2400" b="1" u="none" strike="noStrike">
+                <a:solidFill>
+                  <a:schemeClr val="dk1"/>
+                </a:solidFill>
+                <a:effectLst/>
+                <a:uFillTx/>
+                <a:latin typeface="Aptos"/>
+              </a:rPr>
+              <a:t>Click to edit Master text styles</a:t>
+            </a:r>
+            <a:endParaRPr lang="en-US" sz="2400" b="0" u="none" strike="noStrike">
+              <a:solidFill>
+                <a:schemeClr val="dk1"/>
+              </a:solidFill>
+              <a:effectLst/>
+              <a:uFillTx/>
+              <a:latin typeface="Aptos"/>
+            </a:endParaRPr>
+          </a:p>
+        </p:txBody>
+      </p:sp>
+      <p:sp>
+        <p:nvSpPr>
+          <p:cNvPr id="53" name="PlaceHolder 5"/>
+          <p:cNvSpPr>
+            <a:spLocks noGrp="1"/>
+          </p:cNvSpPr>
+          <p:nvPr>
+            <p:ph type="body"/>
+          </p:nvPr>
+        </p:nvSpPr>
+        <p:spPr>
+          <a:xfrm>
+            <a:off x="6172200" y="2505240"/>
+            <a:ext cx="5182560" cy="3683880"/>
+          </a:xfrm>
+          <a:prstGeom prst="rect">
+            <a:avLst/>
+          </a:prstGeom>
+          <a:noFill/>
+          <a:ln w="0">
+            <a:noFill/>
+          </a:ln>
+        </p:spPr>
+        <p:txBody>
+          <a:bodyPr lIns="91440" tIns="45720" rIns="91440" bIns="45720" anchor="t">
+            <a:noAutofit/>
+          </a:bodyPr>
+          <a:lstStyle>
+            <a:lvl1pPr algn="l" defTabSz="914400">
+              <a:lnSpc>
+                <a:spcPct val="90000"/>
+              </a:lnSpc>
+              <a:spcBef>
+                <a:spcPts val="1001"/>
+              </a:spcBef>
+              <a:buClr>
+                <a:srgbClr val="000000"/>
+              </a:buClr>
+              <a:buFont typeface="Arial"/>
+              <a:buChar char="•"/>
+              <a:tabLst>
+                <a:tab pos="0" algn="l"/>
+              </a:tabLst>
+              <a:defRPr lang="en-US" sz="2800" b="0" u="none" strike="noStrike">
+                <a:solidFill>
+                  <a:schemeClr val="dk1"/>
+                </a:solidFill>
+                <a:effectLst/>
+                <a:uFillTx/>
+                <a:latin typeface="Aptos"/>
+              </a:defRPr>
+            </a:lvl1pPr>
+            <a:lvl2pPr lvl="1" algn="l" defTabSz="914400">
+              <a:lnSpc>
+                <a:spcPct val="90000"/>
+              </a:lnSpc>
+              <a:spcBef>
+                <a:spcPts val="499"/>
+              </a:spcBef>
+              <a:buClr>
+                <a:srgbClr val="000000"/>
+              </a:buClr>
+              <a:buFont typeface="Arial"/>
+              <a:buChar char="•"/>
+              <a:tabLst>
+                <a:tab pos="0" algn="l"/>
+              </a:tabLst>
+              <a:defRPr lang="en-US" sz="2400" b="0" u="none" strike="noStrike">
+                <a:solidFill>
+                  <a:schemeClr val="dk1"/>
+                </a:solidFill>
+                <a:effectLst/>
+                <a:uFillTx/>
+                <a:latin typeface="Aptos"/>
+              </a:defRPr>
+            </a:lvl2pPr>
+            <a:lvl3pPr lvl="2" algn="l" defTabSz="914400">
+              <a:lnSpc>
+                <a:spcPct val="90000"/>
+              </a:lnSpc>
+              <a:spcBef>
+                <a:spcPts val="499"/>
+              </a:spcBef>
+              <a:buClr>
+                <a:srgbClr val="000000"/>
+              </a:buClr>
+              <a:buFont typeface="Arial"/>
+              <a:buChar char="•"/>
+              <a:tabLst>
+                <a:tab pos="0" algn="l"/>
+              </a:tabLst>
+              <a:defRPr lang="en-US" sz="2000" b="0" u="none" strike="noStrike">
+                <a:solidFill>
+                  <a:schemeClr val="dk1"/>
+                </a:solidFill>
+                <a:effectLst/>
+                <a:uFillTx/>
+                <a:latin typeface="Aptos"/>
+              </a:defRPr>
+            </a:lvl3pPr>
+            <a:lvl4pPr lvl="3" algn="l" defTabSz="914400">
+              <a:lnSpc>
+                <a:spcPct val="90000"/>
+              </a:lnSpc>
+              <a:spcBef>
+                <a:spcPts val="499"/>
+              </a:spcBef>
+              <a:buClr>
+                <a:srgbClr val="000000"/>
+              </a:buClr>
+              <a:buFont typeface="Arial"/>
+              <a:buChar char="•"/>
+              <a:tabLst>
+                <a:tab pos="0" algn="l"/>
+              </a:tabLst>
+              <a:defRPr lang="en-US" sz="1800" b="0" u="none" strike="noStrike">
+                <a:solidFill>
+                  <a:schemeClr val="dk1"/>
+                </a:solidFill>
+                <a:effectLst/>
+                <a:uFillTx/>
+                <a:latin typeface="Aptos"/>
+              </a:defRPr>
+            </a:lvl4pPr>
+            <a:lvl5pPr lvl="4" algn="l" defTabSz="914400">
+              <a:lnSpc>
+                <a:spcPct val="90000"/>
+              </a:lnSpc>
+              <a:spcBef>
+                <a:spcPts val="499"/>
+              </a:spcBef>
+              <a:buClr>
+                <a:srgbClr val="000000"/>
+              </a:buClr>
+              <a:buFont typeface="Arial"/>
+              <a:buChar char="•"/>
+              <a:tabLst>
+                <a:tab pos="0" algn="l"/>
+              </a:tabLst>
+              <a:defRPr lang="en-US" sz="1800" b="0" u="none" strike="noStrike">
+                <a:solidFill>
+                  <a:schemeClr val="dk1"/>
+                </a:solidFill>
+                <a:effectLst/>
+                <a:uFillTx/>
+                <a:latin typeface="Aptos"/>
+              </a:defRPr>
+            </a:lvl5pPr>
+          </a:lstStyle>
+          <a:p>
+            <a:pPr marL="228600" indent="-228600" algn="l" defTabSz="914400">
+              <a:lnSpc>
+                <a:spcPct val="90000"/>
+              </a:lnSpc>
+              <a:spcBef>
+                <a:spcPts val="1001"/>
+              </a:spcBef>
+              <a:buClr>
+                <a:srgbClr val="000000"/>
+              </a:buClr>
+              <a:buFont typeface="Arial"/>
+              <a:buChar char="•"/>
+              <a:tabLst>
+                <a:tab pos="0" algn="l"/>
+              </a:tabLst>
+            </a:pPr>
+            <a:r>
+              <a:rPr lang="en-US" sz="2800" b="0" u="none" strike="noStrike">
+                <a:solidFill>
+                  <a:schemeClr val="dk1"/>
+                </a:solidFill>
+                <a:effectLst/>
+                <a:uFillTx/>
+                <a:latin typeface="Aptos"/>
+              </a:rPr>
+              <a:t>Click to edit Master text styles</a:t>
+            </a:r>
+            <a:endParaRPr lang="en-US" sz="2800" b="0" u="none" strike="noStrike">
+              <a:solidFill>
+                <a:schemeClr val="dk1"/>
+              </a:solidFill>
+              <a:effectLst/>
+              <a:uFillTx/>
+              <a:latin typeface="Aptos"/>
+            </a:endParaRPr>
+          </a:p>
+          <a:p>
+            <a:pPr marL="685800" lvl="1" indent="-228600" algn="l" defTabSz="914400">
+              <a:lnSpc>
+                <a:spcPct val="90000"/>
+              </a:lnSpc>
+              <a:spcBef>
+                <a:spcPts val="499"/>
+              </a:spcBef>
+              <a:buClr>
+                <a:srgbClr val="000000"/>
+              </a:buClr>
+              <a:buFont typeface="Arial"/>
+              <a:buChar char="•"/>
+              <a:tabLst>
+                <a:tab pos="0" algn="l"/>
+              </a:tabLst>
+            </a:pPr>
+            <a:r>
+              <a:rPr lang="en-US" sz="2400" b="0" u="none" strike="noStrike">
+                <a:solidFill>
+                  <a:schemeClr val="dk1"/>
+                </a:solidFill>
+                <a:effectLst/>
+                <a:uFillTx/>
+                <a:latin typeface="Aptos"/>
+              </a:rPr>
+              <a:t>Second level</a:t>
+            </a:r>
+            <a:endParaRPr lang="en-US" sz="2400" b="0" u="none" strike="noStrike">
+              <a:solidFill>
+                <a:schemeClr val="dk1"/>
+              </a:solidFill>
+              <a:effectLst/>
+              <a:uFillTx/>
+              <a:latin typeface="Aptos"/>
+            </a:endParaRPr>
+          </a:p>
+          <a:p>
+            <a:pPr marL="1143000" lvl="2" indent="-228600" algn="l" defTabSz="914400">
+              <a:lnSpc>
+                <a:spcPct val="90000"/>
+              </a:lnSpc>
+              <a:spcBef>
+                <a:spcPts val="499"/>
+              </a:spcBef>
+              <a:buClr>
+                <a:srgbClr val="000000"/>
+              </a:buClr>
+              <a:buFont typeface="Arial"/>
+              <a:buChar char="•"/>
+              <a:tabLst>
+                <a:tab pos="0" algn="l"/>
+              </a:tabLst>
+            </a:pPr>
+            <a:r>
+              <a:rPr lang="en-US" sz="2000" b="0" u="none" strike="noStrike">
+                <a:solidFill>
+                  <a:schemeClr val="dk1"/>
+                </a:solidFill>
+                <a:effectLst/>
+                <a:uFillTx/>
+                <a:latin typeface="Aptos"/>
+              </a:rPr>
+              <a:t>Third level</a:t>
+            </a:r>
+            <a:endParaRPr lang="en-US" sz="2000" b="0" u="none" strike="noStrike">
+              <a:solidFill>
+                <a:schemeClr val="dk1"/>
+              </a:solidFill>
+              <a:effectLst/>
+              <a:uFillTx/>
+              <a:latin typeface="Aptos"/>
+            </a:endParaRPr>
+          </a:p>
+          <a:p>
+            <a:pPr marL="1600200" lvl="3" indent="-228600" algn="l" defTabSz="914400">
+              <a:lnSpc>
+                <a:spcPct val="90000"/>
+              </a:lnSpc>
+              <a:spcBef>
+                <a:spcPts val="499"/>
+              </a:spcBef>
+              <a:buClr>
+                <a:srgbClr val="000000"/>
+              </a:buClr>
+              <a:buFont typeface="Arial"/>
+              <a:buChar char="•"/>
+              <a:tabLst>
+                <a:tab pos="0" algn="l"/>
+              </a:tabLst>
+            </a:pPr>
+            <a:r>
+              <a:rPr lang="en-US" sz="1800" b="0" u="none" strike="noStrike">
+                <a:solidFill>
+                  <a:schemeClr val="dk1"/>
+                </a:solidFill>
+                <a:effectLst/>
+                <a:uFillTx/>
+                <a:latin typeface="Aptos"/>
+              </a:rPr>
+              <a:t>Fourth level</a:t>
+            </a:r>
+            <a:endParaRPr lang="en-US" sz="1800" b="0" u="none" strike="noStrike">
+              <a:solidFill>
+                <a:schemeClr val="dk1"/>
+              </a:solidFill>
+              <a:effectLst/>
+              <a:uFillTx/>
+              <a:latin typeface="Aptos"/>
+            </a:endParaRPr>
+          </a:p>
+          <a:p>
+            <a:pPr marL="2057400" lvl="4" indent="-228600" algn="l" defTabSz="914400">
+              <a:lnSpc>
+                <a:spcPct val="90000"/>
+              </a:lnSpc>
+              <a:spcBef>
+                <a:spcPts val="499"/>
+              </a:spcBef>
+              <a:buClr>
+                <a:srgbClr val="000000"/>
+              </a:buClr>
+              <a:buFont typeface="Arial"/>
+              <a:buChar char="•"/>
+              <a:tabLst>
+                <a:tab pos="0" algn="l"/>
+              </a:tabLst>
+            </a:pPr>
+            <a:r>
+              <a:rPr lang="en-US" sz="1800" b="0" u="none" strike="noStrike">
+                <a:solidFill>
+                  <a:schemeClr val="dk1"/>
+                </a:solidFill>
+                <a:effectLst/>
+                <a:uFillTx/>
+                <a:latin typeface="Aptos"/>
+              </a:rPr>
+              <a:t>Fifth level</a:t>
+            </a:r>
+            <a:endParaRPr lang="en-US" sz="1800" b="0" u="none" strike="noStrike">
+              <a:solidFill>
+                <a:schemeClr val="dk1"/>
+              </a:solidFill>
+              <a:effectLst/>
+              <a:uFillTx/>
+              <a:latin typeface="Aptos"/>
+            </a:endParaRPr>
+          </a:p>
+        </p:txBody>
+      </p:sp>
+      <p:sp>
+        <p:nvSpPr>
+          <p:cNvPr id="54" name="PlaceHolder 6"/>
+          <p:cNvSpPr>
+            <a:spLocks noGrp="1"/>
+          </p:cNvSpPr>
+          <p:nvPr>
+            <p:ph type="dt" idx="28"/>
+          </p:nvPr>
+        </p:nvSpPr>
+        <p:spPr>
+          <a:xfrm>
+            <a:off x="838080" y="6356520"/>
+            <a:ext cx="2742480" cy="364320"/>
+          </a:xfrm>
+          <a:prstGeom prst="rect">
+            <a:avLst/>
+          </a:prstGeom>
+          <a:noFill/>
+          <a:ln w="0">
+            <a:noFill/>
+          </a:ln>
+        </p:spPr>
+        <p:txBody>
+          <a:bodyPr lIns="91440" tIns="45720" rIns="91440" bIns="45720" anchor="ctr">
+            <a:noAutofit/>
+          </a:bodyPr>
+          <a:lstStyle>
+            <a:lvl1pPr indent="0" algn="l" defTabSz="914400">
+              <a:lnSpc>
+                <a:spcPct val="100000"/>
+              </a:lnSpc>
+              <a:buNone/>
+              <a:tabLst>
+                <a:tab pos="0" algn="l"/>
+              </a:tabLst>
+              <a:defRPr lang="en-US" sz="1200" b="0" u="none" strike="noStrike">
+                <a:solidFill>
+                  <a:schemeClr val="dk1">
+                    <a:tint val="82000"/>
+                  </a:schemeClr>
+                </a:solidFill>
+                <a:effectLst/>
+                <a:uFillTx/>
+                <a:latin typeface="Aptos"/>
+              </a:defRPr>
+            </a:lvl1pPr>
+          </a:lstStyle>
+          <a:p>
+            <a:pPr indent="0" algn="l" defTabSz="914400">
+              <a:lnSpc>
+                <a:spcPct val="100000"/>
+              </a:lnSpc>
+              <a:buNone/>
+              <a:tabLst>
+                <a:tab pos="0" algn="l"/>
+              </a:tabLst>
+            </a:pPr>
+            <a:r>
+              <a:rPr lang="en-US" sz="1200" b="0" u="none" strike="noStrike">
+                <a:solidFill>
+                  <a:schemeClr val="dk1">
+                    <a:tint val="82000"/>
+                  </a:schemeClr>
+                </a:solidFill>
+                <a:effectLst/>
+                <a:uFillTx/>
+                <a:latin typeface="Aptos"/>
+              </a:rPr>
+              <a:t>&lt;date/time&gt;</a:t>
+            </a:r>
+            <a:endParaRPr lang="en-US" sz="1200" b="0" u="none" strike="noStrike">
+              <a:solidFill>
+                <a:srgbClr val="000000"/>
+              </a:solidFill>
+              <a:effectLst/>
+              <a:uFillTx/>
+              <a:latin typeface="Times New Roman"/>
+            </a:endParaRPr>
+          </a:p>
+        </p:txBody>
+      </p:sp>
+      <p:sp>
+        <p:nvSpPr>
+          <p:cNvPr id="55" name="PlaceHolder 7"/>
+          <p:cNvSpPr>
+            <a:spLocks noGrp="1"/>
+          </p:cNvSpPr>
+          <p:nvPr>
+            <p:ph type="ftr" idx="29"/>
+          </p:nvPr>
+        </p:nvSpPr>
+        <p:spPr>
+          <a:xfrm>
+            <a:off x="4038480" y="6356520"/>
+            <a:ext cx="4114080" cy="364320"/>
+          </a:xfrm>
+          <a:prstGeom prst="rect">
+            <a:avLst/>
+          </a:prstGeom>
+          <a:noFill/>
+          <a:ln w="0">
+            <a:noFill/>
+          </a:ln>
+        </p:spPr>
+        <p:txBody>
+          <a:bodyPr lIns="91440" tIns="45720" rIns="91440" bIns="45720" anchor="ctr">
+            <a:noAutofit/>
+          </a:bodyPr>
+          <a:lstStyle>
+            <a:lvl1pPr indent="0" algn="ctr">
+              <a:lnSpc>
+                <a:spcPct val="100000"/>
+              </a:lnSpc>
+              <a:buNone/>
+              <a:tabLst>
+                <a:tab pos="0" algn="l"/>
+              </a:tabLst>
+              <a:defRPr lang="en-US" sz="1400" b="0" u="none" strike="noStrike">
+                <a:solidFill>
+                  <a:srgbClr val="000000"/>
+                </a:solidFill>
+                <a:effectLst/>
+                <a:uFillTx/>
+                <a:latin typeface="Times New Roman"/>
+              </a:defRPr>
+            </a:lvl1pPr>
+          </a:lstStyle>
+          <a:p>
+            <a:pPr indent="0" algn="ctr">
+              <a:lnSpc>
+                <a:spcPct val="100000"/>
+              </a:lnSpc>
+              <a:buNone/>
+              <a:tabLst>
+                <a:tab pos="0" algn="l"/>
+              </a:tabLst>
+            </a:pPr>
+            <a:r>
+              <a:rPr lang="en-US" sz="1400" b="0" u="none" strike="noStrike">
+                <a:solidFill>
+                  <a:srgbClr val="000000"/>
+                </a:solidFill>
+                <a:effectLst/>
+                <a:uFillTx/>
+                <a:latin typeface="Times New Roman"/>
+              </a:rPr>
+              <a:t>&lt;footer&gt;</a:t>
+            </a:r>
+            <a:endParaRPr lang="en-US" sz="1400" b="0" u="none" strike="noStrike">
+              <a:solidFill>
+                <a:srgbClr val="000000"/>
+              </a:solidFill>
+              <a:effectLst/>
+              <a:uFillTx/>
+              <a:latin typeface="Times New Roman"/>
+            </a:endParaRPr>
+          </a:p>
+        </p:txBody>
+      </p:sp>
+      <p:sp>
+        <p:nvSpPr>
+          <p:cNvPr id="56" name="PlaceHolder 8"/>
+          <p:cNvSpPr>
+            <a:spLocks noGrp="1"/>
+          </p:cNvSpPr>
+          <p:nvPr>
+            <p:ph type="sldNum" idx="30"/>
+          </p:nvPr>
+        </p:nvSpPr>
+        <p:spPr>
+          <a:xfrm>
+            <a:off x="8610480" y="6356520"/>
+            <a:ext cx="2742480" cy="364320"/>
+          </a:xfrm>
+          <a:prstGeom prst="rect">
+            <a:avLst/>
+          </a:prstGeom>
+          <a:noFill/>
+          <a:ln w="0">
+            <a:noFill/>
+          </a:ln>
+        </p:spPr>
+        <p:txBody>
+          <a:bodyPr lIns="91440" tIns="45720" rIns="91440" bIns="45720" anchor="ctr">
+            <a:noAutofit/>
+          </a:bodyPr>
+          <a:lstStyle>
+            <a:lvl1pPr indent="0" algn="r" defTabSz="914400">
+              <a:lnSpc>
+                <a:spcPct val="100000"/>
+              </a:lnSpc>
+              <a:buNone/>
+              <a:tabLst>
+                <a:tab pos="0" algn="l"/>
+              </a:tabLst>
+              <a:defRPr lang="en-US" sz="1200" b="0" u="none" strike="noStrike">
+                <a:solidFill>
+                  <a:schemeClr val="dk1">
+                    <a:tint val="82000"/>
+                  </a:schemeClr>
+                </a:solidFill>
+                <a:effectLst/>
+                <a:uFillTx/>
+                <a:latin typeface="Aptos"/>
+              </a:defRPr>
+            </a:lvl1pPr>
+          </a:lstStyle>
+          <a:p>
+            <a:pPr indent="0" algn="r" defTabSz="914400">
+              <a:lnSpc>
+                <a:spcPct val="100000"/>
+              </a:lnSpc>
+              <a:buNone/>
+              <a:tabLst>
+                <a:tab pos="0" algn="l"/>
+              </a:tabLst>
+            </a:pPr>
+            <a:fld id="{8BD94EA7-7C82-4183-9EA4-6E9A192ED86A}" type="slidenum">
+              <a:rPr lang="en-US" sz="1200" b="0" u="none" strike="noStrike">
+                <a:solidFill>
+                  <a:schemeClr val="dk1">
+                    <a:tint val="82000"/>
+                  </a:schemeClr>
+                </a:solidFill>
+                <a:effectLst/>
+                <a:uFillTx/>
+                <a:latin typeface="Aptos"/>
+              </a:rPr>
+              <a:t>&lt;number&gt;</a:t>
+            </a:fld>
+            <a:endParaRPr lang="en-US" sz="1200" b="0" u="none" strike="noStrike">
+              <a:solidFill>
+                <a:srgbClr val="000000"/>
+              </a:solidFill>
+              <a:effectLst/>
+              <a:uFillTx/>
+              <a:latin typeface="Times New Roman"/>
+            </a:endParaRPr>
+          </a:p>
+        </p:txBody>
+      </p:sp>
+    </p:spTree>
+  </p:cSld>
+</p:sldLayout>
+</file>
+
+<file path=ppt/slideLayouts/slideLayout11.xml><?xml version="1.0" encoding="utf-8"?>
+<p:sldLayout xmlns:a="http://schemas.openxmlformats.org/drawingml/2006/main" xmlns:p="http://schemas.openxmlformats.org/presentationml/2006/main" xmlns:r="http://schemas.openxmlformats.org/officeDocument/2006/relationships" xmlns:p14="http://schemas.microsoft.com/office/powerpoint/2010/main" xmlns:p15="http://schemas.microsoft.com/office/powerpoint/2012/main" xmlns:mc="http://schemas.openxmlformats.org/markup-compatibility/2006" type="titleOnly" preserve="1">
+  <p:cSld name="Title Only">
+    <p:bg>
+      <p:bgPr>
+        <a:solidFill>
+          <a:srgbClr val="FFFFFF"/>
+        </a:solidFill>
+      </p:bgPr>
+    </p:bg>
+    <p:spTree>
+      <p:nvGrpSpPr>
+        <p:cNvPr id="1" name=""/>
+        <p:cNvGrpSpPr/>
+        <p:nvPr/>
+      </p:nvGrpSpPr>
+      <p:grpSpPr>
+        <a:xfrm>
+          <a:off x="0" y="0"/>
+          <a:ext cx="0" cy="0"/>
+          <a:chOff x="0" y="0"/>
+          <a:chExt cx="0" cy="0"/>
+        </a:xfrm>
+      </p:grpSpPr>
+      <p:sp>
+        <p:nvSpPr>
+          <p:cNvPr id="57" name="PlaceHolder 1"/>
+          <p:cNvSpPr>
+            <a:spLocks noGrp="1"/>
+          </p:cNvSpPr>
+          <p:nvPr>
+            <p:ph type="title"/>
+          </p:nvPr>
+        </p:nvSpPr>
+        <p:spPr>
+          <a:xfrm>
+            <a:off x="838080" y="365040"/>
+            <a:ext cx="10514880" cy="1324800"/>
+          </a:xfrm>
+          <a:prstGeom prst="rect">
+            <a:avLst/>
+          </a:prstGeom>
+          <a:noFill/>
+          <a:ln w="0">
+            <a:noFill/>
+          </a:ln>
+        </p:spPr>
+        <p:txBody>
+          <a:bodyPr lIns="91440" tIns="45720" rIns="91440" bIns="45720" anchor="ctr">
+            <a:noAutofit/>
+          </a:bodyPr>
+          <a:lstStyle>
+            <a:lvl1pPr indent="0" algn="l" defTabSz="914400">
+              <a:lnSpc>
+                <a:spcPct val="90000"/>
+              </a:lnSpc>
+              <a:buNone/>
+              <a:tabLst>
+                <a:tab pos="0" algn="l"/>
+              </a:tabLst>
+              <a:defRPr lang="en-US" sz="4400" b="0" u="none" strike="noStrike">
+                <a:solidFill>
+                  <a:schemeClr val="dk1"/>
+                </a:solidFill>
+                <a:effectLst/>
+                <a:uFillTx/>
+                <a:latin typeface="Aptos Display"/>
+              </a:defRPr>
+            </a:lvl1pPr>
+          </a:lstStyle>
+          <a:p>
+            <a:pPr indent="0" algn="l" defTabSz="914400">
+              <a:lnSpc>
+                <a:spcPct val="90000"/>
+              </a:lnSpc>
+              <a:buNone/>
+              <a:tabLst>
+                <a:tab pos="0" algn="l"/>
+              </a:tabLst>
+            </a:pPr>
+            <a:r>
+              <a:rPr lang="en-US" sz="4400" b="0" u="none" strike="noStrike">
+                <a:solidFill>
+                  <a:schemeClr val="dk1"/>
+                </a:solidFill>
+                <a:effectLst/>
+                <a:uFillTx/>
+                <a:latin typeface="Aptos Display"/>
+              </a:rPr>
+              <a:t>Click to edit Master title style</a:t>
+            </a:r>
+            <a:endParaRPr lang="en-US" sz="4400" b="0" u="none" strike="noStrike">
+              <a:solidFill>
+                <a:schemeClr val="dk1"/>
+              </a:solidFill>
+              <a:effectLst/>
+              <a:uFillTx/>
+              <a:latin typeface="Aptos Display"/>
+            </a:endParaRPr>
+          </a:p>
+        </p:txBody>
+      </p:sp>
+      <p:sp>
+        <p:nvSpPr>
+          <p:cNvPr id="58" name="PlaceHolder 2"/>
+          <p:cNvSpPr>
+            <a:spLocks noGrp="1"/>
+          </p:cNvSpPr>
+          <p:nvPr>
+            <p:ph type="dt" idx="31"/>
+          </p:nvPr>
+        </p:nvSpPr>
+        <p:spPr>
+          <a:xfrm>
+            <a:off x="838080" y="6356520"/>
+            <a:ext cx="2742480" cy="364320"/>
+          </a:xfrm>
+          <a:prstGeom prst="rect">
+            <a:avLst/>
+          </a:prstGeom>
+          <a:noFill/>
+          <a:ln w="0">
+            <a:noFill/>
+          </a:ln>
+        </p:spPr>
+        <p:txBody>
+          <a:bodyPr lIns="91440" tIns="45720" rIns="91440" bIns="45720" anchor="ctr">
+            <a:noAutofit/>
+          </a:bodyPr>
+          <a:lstStyle>
+            <a:lvl1pPr indent="0" algn="l" defTabSz="914400">
+              <a:lnSpc>
+                <a:spcPct val="100000"/>
+              </a:lnSpc>
+              <a:buNone/>
+              <a:tabLst>
+                <a:tab pos="0" algn="l"/>
+              </a:tabLst>
+              <a:defRPr lang="en-US" sz="1200" b="0" u="none" strike="noStrike">
+                <a:solidFill>
+                  <a:schemeClr val="dk1">
+                    <a:tint val="82000"/>
+                  </a:schemeClr>
+                </a:solidFill>
+                <a:effectLst/>
+                <a:uFillTx/>
+                <a:latin typeface="Aptos"/>
+              </a:defRPr>
+            </a:lvl1pPr>
+          </a:lstStyle>
+          <a:p>
+            <a:pPr indent="0" algn="l" defTabSz="914400">
+              <a:lnSpc>
+                <a:spcPct val="100000"/>
+              </a:lnSpc>
+              <a:buNone/>
+              <a:tabLst>
+                <a:tab pos="0" algn="l"/>
+              </a:tabLst>
+            </a:pPr>
+            <a:r>
+              <a:rPr lang="en-US" sz="1200" b="0" u="none" strike="noStrike">
+                <a:solidFill>
+                  <a:schemeClr val="dk1">
+                    <a:tint val="82000"/>
+                  </a:schemeClr>
+                </a:solidFill>
+                <a:effectLst/>
+                <a:uFillTx/>
+                <a:latin typeface="Aptos"/>
+              </a:rPr>
+              <a:t>&lt;date/time&gt;</a:t>
+            </a:r>
+            <a:endParaRPr lang="en-US" sz="1200" b="0" u="none" strike="noStrike">
+              <a:solidFill>
+                <a:srgbClr val="000000"/>
+              </a:solidFill>
+              <a:effectLst/>
+              <a:uFillTx/>
+              <a:latin typeface="Times New Roman"/>
+            </a:endParaRPr>
+          </a:p>
+        </p:txBody>
+      </p:sp>
+      <p:sp>
+        <p:nvSpPr>
+          <p:cNvPr id="59" name="PlaceHolder 3"/>
+          <p:cNvSpPr>
+            <a:spLocks noGrp="1"/>
+          </p:cNvSpPr>
+          <p:nvPr>
+            <p:ph type="ftr" idx="32"/>
+          </p:nvPr>
+        </p:nvSpPr>
+        <p:spPr>
+          <a:xfrm>
+            <a:off x="4038480" y="6356520"/>
+            <a:ext cx="4114080" cy="364320"/>
+          </a:xfrm>
+          <a:prstGeom prst="rect">
+            <a:avLst/>
+          </a:prstGeom>
+          <a:noFill/>
+          <a:ln w="0">
+            <a:noFill/>
+          </a:ln>
+        </p:spPr>
+        <p:txBody>
+          <a:bodyPr lIns="91440" tIns="45720" rIns="91440" bIns="45720" anchor="ctr">
+            <a:noAutofit/>
+          </a:bodyPr>
+          <a:lstStyle>
+            <a:lvl1pPr indent="0" algn="ctr">
+              <a:lnSpc>
+                <a:spcPct val="100000"/>
+              </a:lnSpc>
+              <a:buNone/>
+              <a:tabLst>
+                <a:tab pos="0" algn="l"/>
+              </a:tabLst>
+              <a:defRPr lang="en-US" sz="1400" b="0" u="none" strike="noStrike">
+                <a:solidFill>
+                  <a:srgbClr val="000000"/>
+                </a:solidFill>
+                <a:effectLst/>
+                <a:uFillTx/>
+                <a:latin typeface="Times New Roman"/>
+              </a:defRPr>
+            </a:lvl1pPr>
+          </a:lstStyle>
+          <a:p>
+            <a:pPr indent="0" algn="ctr">
+              <a:lnSpc>
+                <a:spcPct val="100000"/>
+              </a:lnSpc>
+              <a:buNone/>
+              <a:tabLst>
+                <a:tab pos="0" algn="l"/>
+              </a:tabLst>
+            </a:pPr>
+            <a:r>
+              <a:rPr lang="en-US" sz="1400" b="0" u="none" strike="noStrike">
+                <a:solidFill>
+                  <a:srgbClr val="000000"/>
+                </a:solidFill>
+                <a:effectLst/>
+                <a:uFillTx/>
+                <a:latin typeface="Times New Roman"/>
+              </a:rPr>
+              <a:t>&lt;footer&gt;</a:t>
+            </a:r>
+            <a:endParaRPr lang="en-US" sz="1400" b="0" u="none" strike="noStrike">
+              <a:solidFill>
+                <a:srgbClr val="000000"/>
+              </a:solidFill>
+              <a:effectLst/>
+              <a:uFillTx/>
+              <a:latin typeface="Times New Roman"/>
+            </a:endParaRPr>
+          </a:p>
+        </p:txBody>
+      </p:sp>
+      <p:sp>
+        <p:nvSpPr>
+          <p:cNvPr id="60" name="PlaceHolder 4"/>
+          <p:cNvSpPr>
+            <a:spLocks noGrp="1"/>
+          </p:cNvSpPr>
+          <p:nvPr>
+            <p:ph type="sldNum" idx="33"/>
+          </p:nvPr>
+        </p:nvSpPr>
+        <p:spPr>
+          <a:xfrm>
+            <a:off x="8610480" y="6356520"/>
+            <a:ext cx="2742480" cy="364320"/>
+          </a:xfrm>
+          <a:prstGeom prst="rect">
+            <a:avLst/>
+          </a:prstGeom>
+          <a:noFill/>
+          <a:ln w="0">
+            <a:noFill/>
+          </a:ln>
+        </p:spPr>
+        <p:txBody>
+          <a:bodyPr lIns="91440" tIns="45720" rIns="91440" bIns="45720" anchor="ctr">
+            <a:noAutofit/>
+          </a:bodyPr>
+          <a:lstStyle>
+            <a:lvl1pPr indent="0" algn="r" defTabSz="914400">
+              <a:lnSpc>
+                <a:spcPct val="100000"/>
+              </a:lnSpc>
+              <a:buNone/>
+              <a:tabLst>
+                <a:tab pos="0" algn="l"/>
+              </a:tabLst>
+              <a:defRPr lang="en-US" sz="1200" b="0" u="none" strike="noStrike">
+                <a:solidFill>
+                  <a:schemeClr val="dk1">
+                    <a:tint val="82000"/>
+                  </a:schemeClr>
+                </a:solidFill>
+                <a:effectLst/>
+                <a:uFillTx/>
+                <a:latin typeface="Aptos"/>
+              </a:defRPr>
+            </a:lvl1pPr>
+          </a:lstStyle>
+          <a:p>
+            <a:pPr indent="0" algn="r" defTabSz="914400">
+              <a:lnSpc>
+                <a:spcPct val="100000"/>
+              </a:lnSpc>
+              <a:buNone/>
+              <a:tabLst>
+                <a:tab pos="0" algn="l"/>
+              </a:tabLst>
+            </a:pPr>
+            <a:fld id="{6B04F810-7918-41BB-B365-D838989FDE9C}" type="slidenum">
+              <a:rPr lang="en-US" sz="1200" b="0" u="none" strike="noStrike">
+                <a:solidFill>
+                  <a:schemeClr val="dk1">
+                    <a:tint val="82000"/>
+                  </a:schemeClr>
+                </a:solidFill>
+                <a:effectLst/>
+                <a:uFillTx/>
+                <a:latin typeface="Aptos"/>
+              </a:rPr>
+              <a:t>&lt;number&gt;</a:t>
+            </a:fld>
+            <a:endParaRPr lang="en-US" sz="1200" b="0" u="none" strike="noStrike">
+              <a:solidFill>
+                <a:srgbClr val="000000"/>
+              </a:solidFill>
+              <a:effectLst/>
+              <a:uFillTx/>
+              <a:latin typeface="Times New Roman"/>
+            </a:endParaRPr>
+          </a:p>
+        </p:txBody>
+      </p:sp>
+    </p:spTree>
+  </p:cSld>
+</p:sldLayout>
+</file>
+
+<file path=ppt/slideLayouts/slideLayout2.xml><?xml version="1.0" encoding="utf-8"?>
 <p:sldLayout xmlns:a="http://schemas.openxmlformats.org/drawingml/2006/main" xmlns:p="http://schemas.openxmlformats.org/presentationml/2006/main" xmlns:r="http://schemas.openxmlformats.org/officeDocument/2006/relationships" xmlns:p14="http://schemas.microsoft.com/office/powerpoint/2010/main" xmlns:p15="http://schemas.microsoft.com/office/powerpoint/2012/main" xmlns:mc="http://schemas.openxmlformats.org/markup-compatibility/2006" type="blank" preserve="1">
   <p:cSld name="Content with Caption">
     <p:bg>
@@ -359,7 +2302,7 @@
       </p:grpSpPr>
       <p:sp>
         <p:nvSpPr>
-          <p:cNvPr id="47" name="PlaceHolder 1"/>
+          <p:cNvPr id="7" name="PlaceHolder 1"/>
           <p:cNvSpPr>
             <a:spLocks noGrp="1"/>
           </p:cNvSpPr>
@@ -370,7 +2313,7 @@
         <p:spPr>
           <a:xfrm>
             <a:off x="839880" y="457200"/>
-            <a:ext cx="3931920" cy="1599840"/>
+            <a:ext cx="3931560" cy="1599480"/>
           </a:xfrm>
           <a:prstGeom prst="rect">
             <a:avLst/>
@@ -390,6 +2333,9 @@
                 <a:spcPct val="90000"/>
               </a:lnSpc>
               <a:buNone/>
+              <a:tabLst>
+                <a:tab pos="0" algn="l"/>
+              </a:tabLst>
               <a:defRPr lang="en-US" sz="3200" b="0" u="none" strike="noStrike">
                 <a:solidFill>
                   <a:schemeClr val="dk1"/>
@@ -406,6 +2352,9 @@
                 <a:spcPct val="90000"/>
               </a:lnSpc>
               <a:buNone/>
+              <a:tabLst>
+                <a:tab pos="0" algn="l"/>
+              </a:tabLst>
             </a:pPr>
             <a:r>
               <a:rPr lang="en-US" sz="3200" b="0" u="none" strike="noStrike">
@@ -431,7 +2380,7 @@
       </p:sp>
       <p:sp>
         <p:nvSpPr>
-          <p:cNvPr id="48" name="PlaceHolder 2"/>
+          <p:cNvPr id="8" name="PlaceHolder 2"/>
           <p:cNvSpPr>
             <a:spLocks noGrp="1"/>
           </p:cNvSpPr>
@@ -442,7 +2391,7 @@
         <p:spPr>
           <a:xfrm>
             <a:off x="5183280" y="987480"/>
-            <a:ext cx="6171840" cy="4873320"/>
+            <a:ext cx="6171480" cy="4872960"/>
           </a:xfrm>
           <a:prstGeom prst="rect">
             <a:avLst/>
@@ -737,7 +2686,7 @@
       </p:sp>
       <p:sp>
         <p:nvSpPr>
-          <p:cNvPr id="49" name="PlaceHolder 3"/>
+          <p:cNvPr id="9" name="PlaceHolder 3"/>
           <p:cNvSpPr>
             <a:spLocks noGrp="1"/>
           </p:cNvSpPr>
@@ -748,7 +2697,7 @@
         <p:spPr>
           <a:xfrm>
             <a:off x="839880" y="2057400"/>
-            <a:ext cx="3931920" cy="3811320"/>
+            <a:ext cx="3931560" cy="3810960"/>
           </a:xfrm>
           <a:prstGeom prst="rect">
             <a:avLst/>
@@ -821,18 +2770,18 @@
       </p:sp>
       <p:sp>
         <p:nvSpPr>
-          <p:cNvPr id="50" name="PlaceHolder 4"/>
+          <p:cNvPr id="10" name="PlaceHolder 4"/>
           <p:cNvSpPr>
             <a:spLocks noGrp="1"/>
           </p:cNvSpPr>
           <p:nvPr>
-            <p:ph type="dt" idx="28"/>
+            <p:ph type="dt" idx="4"/>
           </p:nvPr>
         </p:nvSpPr>
         <p:spPr>
           <a:xfrm>
             <a:off x="838080" y="6356520"/>
-            <a:ext cx="2742840" cy="364680"/>
+            <a:ext cx="2742480" cy="364320"/>
           </a:xfrm>
           <a:prstGeom prst="rect">
             <a:avLst/>
@@ -852,6 +2801,9 @@
                 <a:spcPct val="100000"/>
               </a:lnSpc>
               <a:buNone/>
+              <a:tabLst>
+                <a:tab pos="0" algn="l"/>
+              </a:tabLst>
               <a:defRPr lang="en-US" sz="1200" b="0" u="none" strike="noStrike">
                 <a:solidFill>
                   <a:schemeClr val="dk1">
@@ -870,6 +2822,9 @@
                 <a:spcPct val="100000"/>
               </a:lnSpc>
               <a:buNone/>
+              <a:tabLst>
+                <a:tab pos="0" algn="l"/>
+              </a:tabLst>
             </a:pPr>
             <a:r>
               <a:rPr lang="en-US" sz="1200" b="0" u="none" strike="noStrike">
@@ -897,18 +2852,18 @@
       </p:sp>
       <p:sp>
         <p:nvSpPr>
-          <p:cNvPr id="51" name="PlaceHolder 5"/>
+          <p:cNvPr id="11" name="PlaceHolder 5"/>
           <p:cNvSpPr>
             <a:spLocks noGrp="1"/>
           </p:cNvSpPr>
           <p:nvPr>
-            <p:ph type="ftr" idx="29"/>
+            <p:ph type="ftr" idx="5"/>
           </p:nvPr>
         </p:nvSpPr>
         <p:spPr>
           <a:xfrm>
             <a:off x="4038480" y="6356520"/>
-            <a:ext cx="4114440" cy="364680"/>
+            <a:ext cx="4114080" cy="364320"/>
           </a:xfrm>
           <a:prstGeom prst="rect">
             <a:avLst/>
@@ -924,7 +2879,13 @@
           </a:bodyPr>
           <a:lstStyle>
             <a:lvl1pPr indent="0" algn="ctr">
-              <a:buNone/>
+              <a:lnSpc>
+                <a:spcPct val="100000"/>
+              </a:lnSpc>
+              <a:buNone/>
+              <a:tabLst>
+                <a:tab pos="0" algn="l"/>
+              </a:tabLst>
               <a:defRPr lang="en-US" sz="1400" b="0" u="none" strike="noStrike">
                 <a:solidFill>
                   <a:srgbClr val="000000"/>
@@ -937,7 +2898,13 @@
           </a:lstStyle>
           <a:p>
             <a:pPr indent="0" algn="ctr">
-              <a:buNone/>
+              <a:lnSpc>
+                <a:spcPct val="100000"/>
+              </a:lnSpc>
+              <a:buNone/>
+              <a:tabLst>
+                <a:tab pos="0" algn="l"/>
+              </a:tabLst>
             </a:pPr>
             <a:r>
               <a:rPr lang="en-US" sz="1400" b="0" u="none" strike="noStrike">
@@ -963,18 +2930,18 @@
       </p:sp>
       <p:sp>
         <p:nvSpPr>
-          <p:cNvPr id="52" name="PlaceHolder 6"/>
+          <p:cNvPr id="12" name="PlaceHolder 6"/>
           <p:cNvSpPr>
             <a:spLocks noGrp="1"/>
           </p:cNvSpPr>
           <p:nvPr>
-            <p:ph type="sldNum" idx="30"/>
+            <p:ph type="sldNum" idx="6"/>
           </p:nvPr>
         </p:nvSpPr>
         <p:spPr>
           <a:xfrm>
             <a:off x="8610480" y="6356520"/>
-            <a:ext cx="2742840" cy="364680"/>
+            <a:ext cx="2742480" cy="364320"/>
           </a:xfrm>
           <a:prstGeom prst="rect">
             <a:avLst/>
@@ -994,6 +2961,9 @@
                 <a:spcPct val="100000"/>
               </a:lnSpc>
               <a:buNone/>
+              <a:tabLst>
+                <a:tab pos="0" algn="l"/>
+              </a:tabLst>
               <a:defRPr lang="en-US" sz="1200" b="0" u="none" strike="noStrike">
                 <a:solidFill>
                   <a:schemeClr val="dk1">
@@ -1012,8 +2982,11 @@
                 <a:spcPct val="100000"/>
               </a:lnSpc>
               <a:buNone/>
-            </a:pPr>
-            <a:fld id="{635C8A21-16A3-4F31-AB88-F1B99F0599D9}" type="slidenum">
+              <a:tabLst>
+                <a:tab pos="0" algn="l"/>
+              </a:tabLst>
+            </a:pPr>
+            <a:fld id="{0779BAF2-6815-4967-863B-027A4F2A9A56}" type="slidenum">
               <a:rPr lang="en-US" sz="1200" b="0" u="none" strike="noStrike">
                 <a:solidFill>
                   <a:schemeClr val="dk1">
@@ -1042,7 +3015,7 @@
 </p:sldLayout>
 </file>
 
-<file path=ppt/slideLayouts/slideLayout11.xml><?xml version="1.0" encoding="utf-8"?>
+<file path=ppt/slideLayouts/slideLayout3.xml><?xml version="1.0" encoding="utf-8"?>
 <p:sldLayout xmlns:a="http://schemas.openxmlformats.org/drawingml/2006/main" xmlns:p="http://schemas.openxmlformats.org/presentationml/2006/main" xmlns:r="http://schemas.openxmlformats.org/officeDocument/2006/relationships" xmlns:p14="http://schemas.microsoft.com/office/powerpoint/2010/main" xmlns:p15="http://schemas.microsoft.com/office/powerpoint/2012/main" xmlns:mc="http://schemas.openxmlformats.org/markup-compatibility/2006" type="blank" preserve="1">
   <p:cSld name="Picture with Caption">
     <p:bg>
@@ -1068,7 +3041,7 @@
       </p:grpSpPr>
       <p:sp>
         <p:nvSpPr>
-          <p:cNvPr id="53" name="PlaceHolder 1"/>
+          <p:cNvPr id="13" name="PlaceHolder 1"/>
           <p:cNvSpPr>
             <a:spLocks noGrp="1"/>
           </p:cNvSpPr>
@@ -1079,7 +3052,7 @@
         <p:spPr>
           <a:xfrm>
             <a:off x="839880" y="457200"/>
-            <a:ext cx="3931920" cy="1599840"/>
+            <a:ext cx="3931560" cy="1599480"/>
           </a:xfrm>
           <a:prstGeom prst="rect">
             <a:avLst/>
@@ -1099,6 +3072,9 @@
                 <a:spcPct val="90000"/>
               </a:lnSpc>
               <a:buNone/>
+              <a:tabLst>
+                <a:tab pos="0" algn="l"/>
+              </a:tabLst>
               <a:defRPr lang="en-US" sz="3200" b="0" u="none" strike="noStrike">
                 <a:solidFill>
                   <a:schemeClr val="dk1"/>
@@ -1115,6 +3091,9 @@
                 <a:spcPct val="90000"/>
               </a:lnSpc>
               <a:buNone/>
+              <a:tabLst>
+                <a:tab pos="0" algn="l"/>
+              </a:tabLst>
             </a:pPr>
             <a:r>
               <a:rPr lang="en-US" sz="3200" b="0" u="none" strike="noStrike">
@@ -1140,7 +3119,7 @@
       </p:sp>
       <p:sp>
         <p:nvSpPr>
-          <p:cNvPr id="54" name="PlaceHolder 2"/>
+          <p:cNvPr id="14" name="PlaceHolder 2"/>
           <p:cNvSpPr>
             <a:spLocks noGrp="1"/>
           </p:cNvSpPr>
@@ -1151,7 +3130,7 @@
         <p:spPr>
           <a:xfrm>
             <a:off x="5183280" y="987480"/>
-            <a:ext cx="6171840" cy="4873320"/>
+            <a:ext cx="6171480" cy="4872960"/>
           </a:xfrm>
           <a:prstGeom prst="rect">
             <a:avLst/>
@@ -1203,6 +3182,9 @@
               <a:buSzPct val="75000"/>
               <a:buFont typeface="Symbol" charset="2"/>
               <a:buChar char=""/>
+              <a:tabLst>
+                <a:tab pos="0" algn="l"/>
+              </a:tabLst>
               <a:defRPr lang="en-US" sz="3200" b="0" u="none" strike="noStrike">
                 <a:solidFill>
                   <a:schemeClr val="dk1"/>
@@ -1225,6 +3207,9 @@
               <a:buSzPct val="45000"/>
               <a:buFont typeface="Wingdings" charset="2"/>
               <a:buChar char=""/>
+              <a:tabLst>
+                <a:tab pos="0" algn="l"/>
+              </a:tabLst>
               <a:defRPr lang="en-US" sz="3200" b="0" u="none" strike="noStrike">
                 <a:solidFill>
                   <a:schemeClr val="dk1"/>
@@ -1247,6 +3232,9 @@
               <a:buSzPct val="75000"/>
               <a:buFont typeface="Symbol" charset="2"/>
               <a:buChar char=""/>
+              <a:tabLst>
+                <a:tab pos="0" algn="l"/>
+              </a:tabLst>
               <a:defRPr lang="en-US" sz="3200" b="0" u="none" strike="noStrike">
                 <a:solidFill>
                   <a:schemeClr val="dk1"/>
@@ -1269,6 +3257,9 @@
               <a:buSzPct val="45000"/>
               <a:buFont typeface="Wingdings" charset="2"/>
               <a:buChar char=""/>
+              <a:tabLst>
+                <a:tab pos="0" algn="l"/>
+              </a:tabLst>
               <a:defRPr lang="en-US" sz="3200" b="0" u="none" strike="noStrike">
                 <a:solidFill>
                   <a:schemeClr val="dk1"/>
@@ -1291,6 +3282,9 @@
               <a:buSzPct val="45000"/>
               <a:buFont typeface="Wingdings" charset="2"/>
               <a:buChar char=""/>
+              <a:tabLst>
+                <a:tab pos="0" algn="l"/>
+              </a:tabLst>
               <a:defRPr lang="en-US" sz="3200" b="0" u="none" strike="noStrike">
                 <a:solidFill>
                   <a:schemeClr val="dk1"/>
@@ -1313,6 +3307,9 @@
               <a:buSzPct val="45000"/>
               <a:buFont typeface="Wingdings" charset="2"/>
               <a:buChar char=""/>
+              <a:tabLst>
+                <a:tab pos="0" algn="l"/>
+              </a:tabLst>
               <a:defRPr lang="en-US" sz="3200" b="0" u="none" strike="noStrike">
                 <a:solidFill>
                   <a:schemeClr val="dk1"/>
@@ -1324,7 +3321,7 @@
             </a:lvl7pPr>
           </a:lstStyle>
           <a:p>
-            <a:pPr algn="l" defTabSz="914400">
+            <a:pPr marL="432000" indent="-324000" algn="l" defTabSz="914400">
               <a:lnSpc>
                 <a:spcPct val="90000"/>
               </a:lnSpc>
@@ -1361,7 +3358,7 @@
             </a:endParaRPr>
           </a:p>
           <a:p>
-            <a:pPr marL="457200" lvl="1" algn="l" defTabSz="914400">
+            <a:pPr marL="457200" lvl="1" indent="-324000" algn="l" defTabSz="914400">
               <a:lnSpc>
                 <a:spcPct val="90000"/>
               </a:lnSpc>
@@ -1374,6 +3371,9 @@
               <a:buSzPct val="75000"/>
               <a:buFont typeface="Symbol" charset="2"/>
               <a:buChar char=""/>
+              <a:tabLst>
+                <a:tab pos="0" algn="l"/>
+              </a:tabLst>
             </a:pPr>
             <a:r>
               <a:rPr lang="en-US" sz="3200" b="0" u="none" strike="noStrike">
@@ -1396,7 +3396,7 @@
             </a:endParaRPr>
           </a:p>
           <a:p>
-            <a:pPr marL="914400" lvl="2" algn="l" defTabSz="914400">
+            <a:pPr marL="914400" lvl="2" indent="-288000" algn="l" defTabSz="914400">
               <a:lnSpc>
                 <a:spcPct val="90000"/>
               </a:lnSpc>
@@ -1409,6 +3409,9 @@
               <a:buSzPct val="45000"/>
               <a:buFont typeface="Wingdings" charset="2"/>
               <a:buChar char=""/>
+              <a:tabLst>
+                <a:tab pos="0" algn="l"/>
+              </a:tabLst>
             </a:pPr>
             <a:r>
               <a:rPr lang="en-US" sz="3200" b="0" u="none" strike="noStrike">
@@ -1431,7 +3434,7 @@
             </a:endParaRPr>
           </a:p>
           <a:p>
-            <a:pPr marL="1371600" lvl="3" algn="l" defTabSz="914400">
+            <a:pPr marL="1371600" lvl="3" indent="-216000" algn="l" defTabSz="914400">
               <a:lnSpc>
                 <a:spcPct val="90000"/>
               </a:lnSpc>
@@ -1444,6 +3447,9 @@
               <a:buSzPct val="75000"/>
               <a:buFont typeface="Symbol" charset="2"/>
               <a:buChar char=""/>
+              <a:tabLst>
+                <a:tab pos="0" algn="l"/>
+              </a:tabLst>
             </a:pPr>
             <a:r>
               <a:rPr lang="en-US" sz="3200" b="0" u="none" strike="noStrike">
@@ -1466,7 +3472,7 @@
             </a:endParaRPr>
           </a:p>
           <a:p>
-            <a:pPr marL="1828800" lvl="4" algn="l" defTabSz="914400">
+            <a:pPr marL="1828800" lvl="4" indent="-216000" algn="l" defTabSz="914400">
               <a:lnSpc>
                 <a:spcPct val="90000"/>
               </a:lnSpc>
@@ -1479,6 +3485,9 @@
               <a:buSzPct val="45000"/>
               <a:buFont typeface="Wingdings" charset="2"/>
               <a:buChar char=""/>
+              <a:tabLst>
+                <a:tab pos="0" algn="l"/>
+              </a:tabLst>
             </a:pPr>
             <a:r>
               <a:rPr lang="en-US" sz="3200" b="0" u="none" strike="noStrike">
@@ -1501,7 +3510,7 @@
             </a:endParaRPr>
           </a:p>
           <a:p>
-            <a:pPr marL="2286000" lvl="5" algn="l" defTabSz="914400">
+            <a:pPr marL="2286000" lvl="5" indent="-216000" algn="l" defTabSz="914400">
               <a:lnSpc>
                 <a:spcPct val="90000"/>
               </a:lnSpc>
@@ -1514,6 +3523,9 @@
               <a:buSzPct val="45000"/>
               <a:buFont typeface="Wingdings" charset="2"/>
               <a:buChar char=""/>
+              <a:tabLst>
+                <a:tab pos="0" algn="l"/>
+              </a:tabLst>
             </a:pPr>
             <a:r>
               <a:rPr lang="en-US" sz="3200" b="0" u="none" strike="noStrike">
@@ -1536,7 +3548,7 @@
             </a:endParaRPr>
           </a:p>
           <a:p>
-            <a:pPr marL="2743200" lvl="6" algn="l" defTabSz="914400">
+            <a:pPr marL="2743200" lvl="6" indent="-216000" algn="l" defTabSz="914400">
               <a:lnSpc>
                 <a:spcPct val="90000"/>
               </a:lnSpc>
@@ -1549,6 +3561,9 @@
               <a:buSzPct val="45000"/>
               <a:buFont typeface="Wingdings" charset="2"/>
               <a:buChar char=""/>
+              <a:tabLst>
+                <a:tab pos="0" algn="l"/>
+              </a:tabLst>
             </a:pPr>
             <a:r>
               <a:rPr lang="en-US" sz="3200" b="0" u="none" strike="noStrike">
@@ -1574,7 +3589,7 @@
       </p:sp>
       <p:sp>
         <p:nvSpPr>
-          <p:cNvPr id="55" name="PlaceHolder 3"/>
+          <p:cNvPr id="15" name="PlaceHolder 3"/>
           <p:cNvSpPr>
             <a:spLocks noGrp="1"/>
           </p:cNvSpPr>
@@ -1585,7 +3600,7 @@
         <p:spPr>
           <a:xfrm>
             <a:off x="839880" y="2057400"/>
-            <a:ext cx="3931920" cy="3811320"/>
+            <a:ext cx="3931560" cy="3810960"/>
           </a:xfrm>
           <a:prstGeom prst="rect">
             <a:avLst/>
@@ -1658,18 +3673,18 @@
       </p:sp>
       <p:sp>
         <p:nvSpPr>
-          <p:cNvPr id="56" name="PlaceHolder 4"/>
+          <p:cNvPr id="16" name="PlaceHolder 4"/>
           <p:cNvSpPr>
             <a:spLocks noGrp="1"/>
           </p:cNvSpPr>
           <p:nvPr>
-            <p:ph type="dt" idx="31"/>
+            <p:ph type="dt" idx="7"/>
           </p:nvPr>
         </p:nvSpPr>
         <p:spPr>
           <a:xfrm>
             <a:off x="838080" y="6356520"/>
-            <a:ext cx="2742840" cy="364680"/>
+            <a:ext cx="2742480" cy="364320"/>
           </a:xfrm>
           <a:prstGeom prst="rect">
             <a:avLst/>
@@ -1689,6 +3704,9 @@
                 <a:spcPct val="100000"/>
               </a:lnSpc>
               <a:buNone/>
+              <a:tabLst>
+                <a:tab pos="0" algn="l"/>
+              </a:tabLst>
               <a:defRPr lang="en-US" sz="1200" b="0" u="none" strike="noStrike">
                 <a:solidFill>
                   <a:schemeClr val="dk1">
@@ -1707,6 +3725,9 @@
                 <a:spcPct val="100000"/>
               </a:lnSpc>
               <a:buNone/>
+              <a:tabLst>
+                <a:tab pos="0" algn="l"/>
+              </a:tabLst>
             </a:pPr>
             <a:r>
               <a:rPr lang="en-US" sz="1200" b="0" u="none" strike="noStrike">
@@ -1734,18 +3755,18 @@
       </p:sp>
       <p:sp>
         <p:nvSpPr>
-          <p:cNvPr id="57" name="PlaceHolder 5"/>
+          <p:cNvPr id="17" name="PlaceHolder 5"/>
           <p:cNvSpPr>
             <a:spLocks noGrp="1"/>
           </p:cNvSpPr>
           <p:nvPr>
-            <p:ph type="ftr" idx="32"/>
+            <p:ph type="ftr" idx="8"/>
           </p:nvPr>
         </p:nvSpPr>
         <p:spPr>
           <a:xfrm>
             <a:off x="4038480" y="6356520"/>
-            <a:ext cx="4114440" cy="364680"/>
+            <a:ext cx="4114080" cy="364320"/>
           </a:xfrm>
           <a:prstGeom prst="rect">
             <a:avLst/>
@@ -1761,7 +3782,13 @@
           </a:bodyPr>
           <a:lstStyle>
             <a:lvl1pPr indent="0" algn="ctr">
-              <a:buNone/>
+              <a:lnSpc>
+                <a:spcPct val="100000"/>
+              </a:lnSpc>
+              <a:buNone/>
+              <a:tabLst>
+                <a:tab pos="0" algn="l"/>
+              </a:tabLst>
               <a:defRPr lang="en-US" sz="1400" b="0" u="none" strike="noStrike">
                 <a:solidFill>
                   <a:srgbClr val="000000"/>
@@ -1774,7 +3801,13 @@
           </a:lstStyle>
           <a:p>
             <a:pPr indent="0" algn="ctr">
-              <a:buNone/>
+              <a:lnSpc>
+                <a:spcPct val="100000"/>
+              </a:lnSpc>
+              <a:buNone/>
+              <a:tabLst>
+                <a:tab pos="0" algn="l"/>
+              </a:tabLst>
             </a:pPr>
             <a:r>
               <a:rPr lang="en-US" sz="1400" b="0" u="none" strike="noStrike">
@@ -1800,18 +3833,18 @@
       </p:sp>
       <p:sp>
         <p:nvSpPr>
-          <p:cNvPr id="58" name="PlaceHolder 6"/>
+          <p:cNvPr id="18" name="PlaceHolder 6"/>
           <p:cNvSpPr>
             <a:spLocks noGrp="1"/>
           </p:cNvSpPr>
           <p:nvPr>
-            <p:ph type="sldNum" idx="33"/>
+            <p:ph type="sldNum" idx="9"/>
           </p:nvPr>
         </p:nvSpPr>
         <p:spPr>
           <a:xfrm>
             <a:off x="8610480" y="6356520"/>
-            <a:ext cx="2742840" cy="364680"/>
+            <a:ext cx="2742480" cy="364320"/>
           </a:xfrm>
           <a:prstGeom prst="rect">
             <a:avLst/>
@@ -1831,6 +3864,9 @@
                 <a:spcPct val="100000"/>
               </a:lnSpc>
               <a:buNone/>
+              <a:tabLst>
+                <a:tab pos="0" algn="l"/>
+              </a:tabLst>
               <a:defRPr lang="en-US" sz="1200" b="0" u="none" strike="noStrike">
                 <a:solidFill>
                   <a:schemeClr val="dk1">
@@ -1849,8 +3885,11 @@
                 <a:spcPct val="100000"/>
               </a:lnSpc>
               <a:buNone/>
-            </a:pPr>
-            <a:fld id="{AFC652AB-CF84-4962-ACF0-55A321EBA964}" type="slidenum">
+              <a:tabLst>
+                <a:tab pos="0" algn="l"/>
+              </a:tabLst>
+            </a:pPr>
+            <a:fld id="{D886256C-A48D-4131-A5BB-5FD4F23F54CF}" type="slidenum">
               <a:rPr lang="en-US" sz="1200" b="0" u="none" strike="noStrike">
                 <a:solidFill>
                   <a:schemeClr val="dk1">
@@ -1879,7 +3918,356 @@
 </p:sldLayout>
 </file>
 
-<file path=ppt/slideLayouts/slideLayout2.xml><?xml version="1.0" encoding="utf-8"?>
+<file path=ppt/slideLayouts/slideLayout4.xml><?xml version="1.0" encoding="utf-8"?>
+<p:sldLayout xmlns:a="http://schemas.openxmlformats.org/drawingml/2006/main" xmlns:p="http://schemas.openxmlformats.org/presentationml/2006/main" xmlns:r="http://schemas.openxmlformats.org/officeDocument/2006/relationships" xmlns:p14="http://schemas.microsoft.com/office/powerpoint/2010/main" xmlns:p15="http://schemas.microsoft.com/office/powerpoint/2012/main" xmlns:mc="http://schemas.openxmlformats.org/markup-compatibility/2006" type="title" preserve="1">
+  <p:cSld name="Title Slide">
+    <p:bg>
+      <p:bgPr>
+        <a:solidFill>
+          <a:srgbClr val="FFFFFF"/>
+        </a:solidFill>
+      </p:bgPr>
+    </p:bg>
+    <p:spTree>
+      <p:nvGrpSpPr>
+        <p:cNvPr id="1" name=""/>
+        <p:cNvGrpSpPr/>
+        <p:nvPr/>
+      </p:nvGrpSpPr>
+      <p:grpSpPr>
+        <a:xfrm>
+          <a:off x="0" y="0"/>
+          <a:ext cx="0" cy="0"/>
+          <a:chOff x="0" y="0"/>
+          <a:chExt cx="0" cy="0"/>
+        </a:xfrm>
+      </p:grpSpPr>
+      <p:sp>
+        <p:nvSpPr>
+          <p:cNvPr id="19" name="PlaceHolder 1"/>
+          <p:cNvSpPr>
+            <a:spLocks noGrp="1"/>
+          </p:cNvSpPr>
+          <p:nvPr>
+            <p:ph type="title"/>
+          </p:nvPr>
+        </p:nvSpPr>
+        <p:spPr>
+          <a:xfrm>
+            <a:off x="1523880" y="1122480"/>
+            <a:ext cx="9143280" cy="2386800"/>
+          </a:xfrm>
+          <a:prstGeom prst="rect">
+            <a:avLst/>
+          </a:prstGeom>
+          <a:noFill/>
+          <a:ln w="0">
+            <a:noFill/>
+          </a:ln>
+        </p:spPr>
+        <p:txBody>
+          <a:bodyPr lIns="91440" tIns="45720" rIns="91440" bIns="45720" anchor="b">
+            <a:noAutofit/>
+          </a:bodyPr>
+          <a:lstStyle>
+            <a:lvl1pPr indent="0" algn="ctr" defTabSz="914400">
+              <a:lnSpc>
+                <a:spcPct val="90000"/>
+              </a:lnSpc>
+              <a:buNone/>
+              <a:tabLst>
+                <a:tab pos="0" algn="l"/>
+              </a:tabLst>
+              <a:defRPr lang="en-US" sz="6000" b="0" u="none" strike="noStrike">
+                <a:solidFill>
+                  <a:schemeClr val="dk1"/>
+                </a:solidFill>
+                <a:effectLst/>
+                <a:uFillTx/>
+                <a:latin typeface="Aptos Display"/>
+              </a:defRPr>
+            </a:lvl1pPr>
+          </a:lstStyle>
+          <a:p>
+            <a:pPr indent="0" algn="ctr" defTabSz="914400">
+              <a:lnSpc>
+                <a:spcPct val="90000"/>
+              </a:lnSpc>
+              <a:buNone/>
+              <a:tabLst>
+                <a:tab pos="0" algn="l"/>
+              </a:tabLst>
+            </a:pPr>
+            <a:r>
+              <a:rPr lang="en-US" sz="6000" b="0" u="none" strike="noStrike">
+                <a:solidFill>
+                  <a:schemeClr val="dk1"/>
+                </a:solidFill>
+                <a:effectLst/>
+                <a:uFillTx/>
+                <a:latin typeface="Aptos Display"/>
+              </a:rPr>
+              <a:t>Click to edit Master title style</a:t>
+            </a:r>
+            <a:endParaRPr lang="en-US" sz="6000" b="0" u="none" strike="noStrike">
+              <a:solidFill>
+                <a:schemeClr val="dk1"/>
+              </a:solidFill>
+              <a:effectLst/>
+              <a:uFillTx/>
+              <a:latin typeface="Aptos Display"/>
+            </a:endParaRPr>
+          </a:p>
+        </p:txBody>
+      </p:sp>
+      <p:sp>
+        <p:nvSpPr>
+          <p:cNvPr id="20" name="PlaceHolder 2"/>
+          <p:cNvSpPr>
+            <a:spLocks noGrp="1"/>
+          </p:cNvSpPr>
+          <p:nvPr>
+            <p:ph type="dt" idx="10"/>
+          </p:nvPr>
+        </p:nvSpPr>
+        <p:spPr>
+          <a:xfrm>
+            <a:off x="838080" y="6356520"/>
+            <a:ext cx="2742480" cy="364320"/>
+          </a:xfrm>
+          <a:prstGeom prst="rect">
+            <a:avLst/>
+          </a:prstGeom>
+          <a:noFill/>
+          <a:ln w="0">
+            <a:noFill/>
+          </a:ln>
+        </p:spPr>
+        <p:txBody>
+          <a:bodyPr lIns="91440" tIns="45720" rIns="91440" bIns="45720" anchor="ctr">
+            <a:noAutofit/>
+          </a:bodyPr>
+          <a:lstStyle>
+            <a:lvl1pPr indent="0" algn="l" defTabSz="914400">
+              <a:lnSpc>
+                <a:spcPct val="100000"/>
+              </a:lnSpc>
+              <a:buNone/>
+              <a:tabLst>
+                <a:tab pos="0" algn="l"/>
+              </a:tabLst>
+              <a:defRPr lang="en-US" sz="1200" b="0" u="none" strike="noStrike">
+                <a:solidFill>
+                  <a:schemeClr val="dk1">
+                    <a:tint val="82000"/>
+                  </a:schemeClr>
+                </a:solidFill>
+                <a:effectLst/>
+                <a:uFillTx/>
+                <a:latin typeface="Aptos"/>
+              </a:defRPr>
+            </a:lvl1pPr>
+          </a:lstStyle>
+          <a:p>
+            <a:pPr indent="0" algn="l" defTabSz="914400">
+              <a:lnSpc>
+                <a:spcPct val="100000"/>
+              </a:lnSpc>
+              <a:buNone/>
+              <a:tabLst>
+                <a:tab pos="0" algn="l"/>
+              </a:tabLst>
+            </a:pPr>
+            <a:r>
+              <a:rPr lang="en-US" sz="1200" b="0" u="none" strike="noStrike">
+                <a:solidFill>
+                  <a:schemeClr val="dk1">
+                    <a:tint val="82000"/>
+                  </a:schemeClr>
+                </a:solidFill>
+                <a:effectLst/>
+                <a:uFillTx/>
+                <a:latin typeface="Aptos"/>
+              </a:rPr>
+              <a:t>&lt;date/time&gt;</a:t>
+            </a:r>
+            <a:endParaRPr lang="en-US" sz="1200" b="0" u="none" strike="noStrike">
+              <a:solidFill>
+                <a:srgbClr val="000000"/>
+              </a:solidFill>
+              <a:effectLst/>
+              <a:uFillTx/>
+              <a:latin typeface="Times New Roman"/>
+            </a:endParaRPr>
+          </a:p>
+        </p:txBody>
+      </p:sp>
+      <p:sp>
+        <p:nvSpPr>
+          <p:cNvPr id="21" name="PlaceHolder 3"/>
+          <p:cNvSpPr>
+            <a:spLocks noGrp="1"/>
+          </p:cNvSpPr>
+          <p:nvPr>
+            <p:ph type="ftr" idx="11"/>
+          </p:nvPr>
+        </p:nvSpPr>
+        <p:spPr>
+          <a:xfrm>
+            <a:off x="4038480" y="6356520"/>
+            <a:ext cx="4114080" cy="364320"/>
+          </a:xfrm>
+          <a:prstGeom prst="rect">
+            <a:avLst/>
+          </a:prstGeom>
+          <a:noFill/>
+          <a:ln w="0">
+            <a:noFill/>
+          </a:ln>
+        </p:spPr>
+        <p:txBody>
+          <a:bodyPr lIns="91440" tIns="45720" rIns="91440" bIns="45720" anchor="ctr">
+            <a:noAutofit/>
+          </a:bodyPr>
+          <a:lstStyle>
+            <a:lvl1pPr indent="0" algn="ctr">
+              <a:lnSpc>
+                <a:spcPct val="100000"/>
+              </a:lnSpc>
+              <a:buNone/>
+              <a:tabLst>
+                <a:tab pos="0" algn="l"/>
+              </a:tabLst>
+              <a:defRPr lang="en-US" sz="1400" b="0" u="none" strike="noStrike">
+                <a:solidFill>
+                  <a:srgbClr val="000000"/>
+                </a:solidFill>
+                <a:effectLst/>
+                <a:uFillTx/>
+                <a:latin typeface="Times New Roman"/>
+              </a:defRPr>
+            </a:lvl1pPr>
+          </a:lstStyle>
+          <a:p>
+            <a:pPr indent="0" algn="ctr">
+              <a:lnSpc>
+                <a:spcPct val="100000"/>
+              </a:lnSpc>
+              <a:buNone/>
+              <a:tabLst>
+                <a:tab pos="0" algn="l"/>
+              </a:tabLst>
+            </a:pPr>
+            <a:r>
+              <a:rPr lang="en-US" sz="1400" b="0" u="none" strike="noStrike">
+                <a:solidFill>
+                  <a:srgbClr val="000000"/>
+                </a:solidFill>
+                <a:effectLst/>
+                <a:uFillTx/>
+                <a:latin typeface="Times New Roman"/>
+              </a:rPr>
+              <a:t>&lt;footer&gt;</a:t>
+            </a:r>
+            <a:endParaRPr lang="en-US" sz="1400" b="0" u="none" strike="noStrike">
+              <a:solidFill>
+                <a:srgbClr val="000000"/>
+              </a:solidFill>
+              <a:effectLst/>
+              <a:uFillTx/>
+              <a:latin typeface="Times New Roman"/>
+            </a:endParaRPr>
+          </a:p>
+        </p:txBody>
+      </p:sp>
+      <p:sp>
+        <p:nvSpPr>
+          <p:cNvPr id="22" name="PlaceHolder 4"/>
+          <p:cNvSpPr>
+            <a:spLocks noGrp="1"/>
+          </p:cNvSpPr>
+          <p:nvPr>
+            <p:ph type="sldNum" idx="12"/>
+          </p:nvPr>
+        </p:nvSpPr>
+        <p:spPr>
+          <a:xfrm>
+            <a:off x="8610480" y="6356520"/>
+            <a:ext cx="2742480" cy="364320"/>
+          </a:xfrm>
+          <a:prstGeom prst="rect">
+            <a:avLst/>
+          </a:prstGeom>
+          <a:noFill/>
+          <a:ln w="0">
+            <a:noFill/>
+          </a:ln>
+        </p:spPr>
+        <p:txBody>
+          <a:bodyPr lIns="91440" tIns="45720" rIns="91440" bIns="45720" anchor="ctr">
+            <a:noAutofit/>
+          </a:bodyPr>
+          <a:lstStyle>
+            <a:lvl1pPr indent="0" algn="r" defTabSz="914400">
+              <a:lnSpc>
+                <a:spcPct val="100000"/>
+              </a:lnSpc>
+              <a:buNone/>
+              <a:tabLst>
+                <a:tab pos="0" algn="l"/>
+              </a:tabLst>
+              <a:defRPr lang="en-US" sz="1200" b="0" u="none" strike="noStrike">
+                <a:solidFill>
+                  <a:schemeClr val="dk1">
+                    <a:tint val="82000"/>
+                  </a:schemeClr>
+                </a:solidFill>
+                <a:effectLst/>
+                <a:uFillTx/>
+                <a:latin typeface="Aptos"/>
+              </a:defRPr>
+            </a:lvl1pPr>
+          </a:lstStyle>
+          <a:p>
+            <a:pPr indent="0" algn="r" defTabSz="914400">
+              <a:lnSpc>
+                <a:spcPct val="100000"/>
+              </a:lnSpc>
+              <a:buNone/>
+              <a:tabLst>
+                <a:tab pos="0" algn="l"/>
+              </a:tabLst>
+            </a:pPr>
+            <a:fld id="{2245D782-B630-4D4E-8A82-83DAE56A40DC}" type="slidenum">
+              <a:rPr lang="en-US" sz="1200" b="0" u="none" strike="noStrike">
+                <a:solidFill>
+                  <a:schemeClr val="dk1">
+                    <a:tint val="82000"/>
+                  </a:schemeClr>
+                </a:solidFill>
+                <a:effectLst/>
+                <a:uFillTx/>
+                <a:latin typeface="Aptos"/>
+              </a:rPr>
+              <a:t>&lt;number&gt;</a:t>
+            </a:fld>
+            <a:endParaRPr lang="en-US" sz="1200" b="0" u="none" strike="noStrike">
+              <a:solidFill>
+                <a:srgbClr val="000000"/>
+              </a:solidFill>
+              <a:effectLst/>
+              <a:uFillTx/>
+              <a:latin typeface="Times New Roman"/>
+            </a:endParaRPr>
+          </a:p>
+        </p:txBody>
+      </p:sp>
+    </p:spTree>
+  </p:cSld>
+</p:sldLayout>
+</file>
+
+<file path=ppt/slideLayouts/slideLayout5.xml><?xml version="1.0" encoding="utf-8"?>
 <p:sldLayout xmlns:a="http://schemas.openxmlformats.org/drawingml/2006/main" xmlns:p="http://schemas.openxmlformats.org/presentationml/2006/main" xmlns:r="http://schemas.openxmlformats.org/officeDocument/2006/relationships" xmlns:p14="http://schemas.microsoft.com/office/powerpoint/2010/main" xmlns:p15="http://schemas.microsoft.com/office/powerpoint/2012/main" xmlns:mc="http://schemas.openxmlformats.org/markup-compatibility/2006" type="vertTx" preserve="1">
   <p:cSld name="Title and Vertical Text">
     <p:bg>
@@ -1905,7 +4293,7 @@
       </p:grpSpPr>
       <p:sp>
         <p:nvSpPr>
-          <p:cNvPr id="6" name="PlaceHolder 1"/>
+          <p:cNvPr id="23" name="PlaceHolder 1"/>
           <p:cNvSpPr>
             <a:spLocks noGrp="1"/>
           </p:cNvSpPr>
@@ -1916,7 +4304,7 @@
         <p:spPr>
           <a:xfrm>
             <a:off x="838080" y="365040"/>
-            <a:ext cx="10515240" cy="1325160"/>
+            <a:ext cx="10514880" cy="1324800"/>
           </a:xfrm>
           <a:prstGeom prst="rect">
             <a:avLst/>
@@ -1936,6 +4324,9 @@
                 <a:spcPct val="90000"/>
               </a:lnSpc>
               <a:buNone/>
+              <a:tabLst>
+                <a:tab pos="0" algn="l"/>
+              </a:tabLst>
               <a:defRPr lang="en-US" sz="4400" b="0" u="none" strike="noStrike">
                 <a:solidFill>
                   <a:schemeClr val="dk1"/>
@@ -1952,6 +4343,9 @@
                 <a:spcPct val="90000"/>
               </a:lnSpc>
               <a:buNone/>
+              <a:tabLst>
+                <a:tab pos="0" algn="l"/>
+              </a:tabLst>
             </a:pPr>
             <a:r>
               <a:rPr lang="en-US" sz="4400" b="0" u="none" strike="noStrike">
@@ -1977,7 +4371,7 @@
       </p:sp>
       <p:sp>
         <p:nvSpPr>
-          <p:cNvPr id="7" name="PlaceHolder 2"/>
+          <p:cNvPr id="24" name="PlaceHolder 2"/>
           <p:cNvSpPr>
             <a:spLocks noGrp="1"/>
           </p:cNvSpPr>
@@ -1988,7 +4382,7 @@
         <p:spPr>
           <a:xfrm>
             <a:off x="838080" y="1825560"/>
-            <a:ext cx="10515240" cy="4350960"/>
+            <a:ext cx="10514880" cy="4350600"/>
           </a:xfrm>
           <a:prstGeom prst="rect">
             <a:avLst/>
@@ -2283,18 +4677,18 @@
       </p:sp>
       <p:sp>
         <p:nvSpPr>
-          <p:cNvPr id="8" name="PlaceHolder 3"/>
+          <p:cNvPr id="25" name="PlaceHolder 3"/>
           <p:cNvSpPr>
             <a:spLocks noGrp="1"/>
           </p:cNvSpPr>
           <p:nvPr>
-            <p:ph type="dt" idx="4"/>
+            <p:ph type="dt" idx="13"/>
           </p:nvPr>
         </p:nvSpPr>
         <p:spPr>
           <a:xfrm>
             <a:off x="838080" y="6356520"/>
-            <a:ext cx="2742840" cy="364680"/>
+            <a:ext cx="2742480" cy="364320"/>
           </a:xfrm>
           <a:prstGeom prst="rect">
             <a:avLst/>
@@ -2314,6 +4708,9 @@
                 <a:spcPct val="100000"/>
               </a:lnSpc>
               <a:buNone/>
+              <a:tabLst>
+                <a:tab pos="0" algn="l"/>
+              </a:tabLst>
               <a:defRPr lang="en-US" sz="1200" b="0" u="none" strike="noStrike">
                 <a:solidFill>
                   <a:schemeClr val="dk1">
@@ -2332,6 +4729,9 @@
                 <a:spcPct val="100000"/>
               </a:lnSpc>
               <a:buNone/>
+              <a:tabLst>
+                <a:tab pos="0" algn="l"/>
+              </a:tabLst>
             </a:pPr>
             <a:r>
               <a:rPr lang="en-US" sz="1200" b="0" u="none" strike="noStrike">
@@ -2359,18 +4759,18 @@
       </p:sp>
       <p:sp>
         <p:nvSpPr>
-          <p:cNvPr id="9" name="PlaceHolder 4"/>
+          <p:cNvPr id="26" name="PlaceHolder 4"/>
           <p:cNvSpPr>
             <a:spLocks noGrp="1"/>
           </p:cNvSpPr>
           <p:nvPr>
-            <p:ph type="ftr" idx="5"/>
+            <p:ph type="ftr" idx="14"/>
           </p:nvPr>
         </p:nvSpPr>
         <p:spPr>
           <a:xfrm>
             <a:off x="4038480" y="6356520"/>
-            <a:ext cx="4114440" cy="364680"/>
+            <a:ext cx="4114080" cy="364320"/>
           </a:xfrm>
           <a:prstGeom prst="rect">
             <a:avLst/>
@@ -2386,7 +4786,13 @@
           </a:bodyPr>
           <a:lstStyle>
             <a:lvl1pPr indent="0" algn="ctr">
-              <a:buNone/>
+              <a:lnSpc>
+                <a:spcPct val="100000"/>
+              </a:lnSpc>
+              <a:buNone/>
+              <a:tabLst>
+                <a:tab pos="0" algn="l"/>
+              </a:tabLst>
               <a:defRPr lang="en-US" sz="1400" b="0" u="none" strike="noStrike">
                 <a:solidFill>
                   <a:srgbClr val="000000"/>
@@ -2399,7 +4805,13 @@
           </a:lstStyle>
           <a:p>
             <a:pPr indent="0" algn="ctr">
-              <a:buNone/>
+              <a:lnSpc>
+                <a:spcPct val="100000"/>
+              </a:lnSpc>
+              <a:buNone/>
+              <a:tabLst>
+                <a:tab pos="0" algn="l"/>
+              </a:tabLst>
             </a:pPr>
             <a:r>
               <a:rPr lang="en-US" sz="1400" b="0" u="none" strike="noStrike">
@@ -2425,18 +4837,18 @@
       </p:sp>
       <p:sp>
         <p:nvSpPr>
-          <p:cNvPr id="10" name="PlaceHolder 5"/>
+          <p:cNvPr id="27" name="PlaceHolder 5"/>
           <p:cNvSpPr>
             <a:spLocks noGrp="1"/>
           </p:cNvSpPr>
           <p:nvPr>
-            <p:ph type="sldNum" idx="6"/>
+            <p:ph type="sldNum" idx="15"/>
           </p:nvPr>
         </p:nvSpPr>
         <p:spPr>
           <a:xfrm>
             <a:off x="8610480" y="6356520"/>
-            <a:ext cx="2742840" cy="364680"/>
+            <a:ext cx="2742480" cy="364320"/>
           </a:xfrm>
           <a:prstGeom prst="rect">
             <a:avLst/>
@@ -2456,6 +4868,9 @@
                 <a:spcPct val="100000"/>
               </a:lnSpc>
               <a:buNone/>
+              <a:tabLst>
+                <a:tab pos="0" algn="l"/>
+              </a:tabLst>
               <a:defRPr lang="en-US" sz="1200" b="0" u="none" strike="noStrike">
                 <a:solidFill>
                   <a:schemeClr val="dk1">
@@ -2474,8 +4889,11 @@
                 <a:spcPct val="100000"/>
               </a:lnSpc>
               <a:buNone/>
-            </a:pPr>
-            <a:fld id="{CAB29E10-1B6F-49A2-A173-F830BF8C664F}" type="slidenum">
+              <a:tabLst>
+                <a:tab pos="0" algn="l"/>
+              </a:tabLst>
+            </a:pPr>
+            <a:fld id="{4D96530C-D960-4E4F-BD18-769F31B0248B}" type="slidenum">
               <a:rPr lang="en-US" sz="1200" b="0" u="none" strike="noStrike">
                 <a:solidFill>
                   <a:schemeClr val="dk1">
@@ -2504,7 +4922,7 @@
 </p:sldLayout>
 </file>
 
-<file path=ppt/slideLayouts/slideLayout3.xml><?xml version="1.0" encoding="utf-8"?>
+<file path=ppt/slideLayouts/slideLayout6.xml><?xml version="1.0" encoding="utf-8"?>
 <p:sldLayout xmlns:a="http://schemas.openxmlformats.org/drawingml/2006/main" xmlns:p="http://schemas.openxmlformats.org/presentationml/2006/main" xmlns:r="http://schemas.openxmlformats.org/officeDocument/2006/relationships" xmlns:p14="http://schemas.microsoft.com/office/powerpoint/2010/main" xmlns:p15="http://schemas.microsoft.com/office/powerpoint/2012/main" xmlns:mc="http://schemas.openxmlformats.org/markup-compatibility/2006" type="vertTitleAndTx" preserve="1">
   <p:cSld name="Vertical Title and Text">
     <p:bg>
@@ -2530,7 +4948,7 @@
       </p:grpSpPr>
       <p:sp>
         <p:nvSpPr>
-          <p:cNvPr id="11" name="PlaceHolder 1"/>
+          <p:cNvPr id="28" name="PlaceHolder 1"/>
           <p:cNvSpPr>
             <a:spLocks noGrp="1"/>
           </p:cNvSpPr>
@@ -2541,7 +4959,7 @@
         <p:spPr>
           <a:xfrm>
             <a:off x="8724960" y="365040"/>
-            <a:ext cx="2628720" cy="5811480"/>
+            <a:ext cx="2628360" cy="5811120"/>
           </a:xfrm>
           <a:prstGeom prst="rect">
             <a:avLst/>
@@ -2561,6 +4979,9 @@
                 <a:spcPct val="90000"/>
               </a:lnSpc>
               <a:buNone/>
+              <a:tabLst>
+                <a:tab pos="0" algn="l"/>
+              </a:tabLst>
               <a:defRPr lang="en-US" sz="4400" b="0" u="none" strike="noStrike">
                 <a:solidFill>
                   <a:schemeClr val="dk1"/>
@@ -2577,6 +4998,9 @@
                 <a:spcPct val="90000"/>
               </a:lnSpc>
               <a:buNone/>
+              <a:tabLst>
+                <a:tab pos="0" algn="l"/>
+              </a:tabLst>
             </a:pPr>
             <a:r>
               <a:rPr lang="en-US" sz="4400" b="0" u="none" strike="noStrike">
@@ -2602,7 +5026,7 @@
       </p:sp>
       <p:sp>
         <p:nvSpPr>
-          <p:cNvPr id="12" name="PlaceHolder 2"/>
+          <p:cNvPr id="29" name="PlaceHolder 2"/>
           <p:cNvSpPr>
             <a:spLocks noGrp="1"/>
           </p:cNvSpPr>
@@ -2613,7 +5037,7 @@
         <p:spPr>
           <a:xfrm>
             <a:off x="838080" y="365040"/>
-            <a:ext cx="7733880" cy="5811480"/>
+            <a:ext cx="7733520" cy="5811120"/>
           </a:xfrm>
           <a:prstGeom prst="rect">
             <a:avLst/>
@@ -2908,18 +5332,18 @@
       </p:sp>
       <p:sp>
         <p:nvSpPr>
-          <p:cNvPr id="13" name="PlaceHolder 3"/>
+          <p:cNvPr id="30" name="PlaceHolder 3"/>
           <p:cNvSpPr>
             <a:spLocks noGrp="1"/>
           </p:cNvSpPr>
           <p:nvPr>
-            <p:ph type="dt" idx="7"/>
+            <p:ph type="dt" idx="16"/>
           </p:nvPr>
         </p:nvSpPr>
         <p:spPr>
           <a:xfrm>
             <a:off x="838080" y="6356520"/>
-            <a:ext cx="2742840" cy="364680"/>
+            <a:ext cx="2742480" cy="364320"/>
           </a:xfrm>
           <a:prstGeom prst="rect">
             <a:avLst/>
@@ -2939,6 +5363,9 @@
                 <a:spcPct val="100000"/>
               </a:lnSpc>
               <a:buNone/>
+              <a:tabLst>
+                <a:tab pos="0" algn="l"/>
+              </a:tabLst>
               <a:defRPr lang="en-US" sz="1200" b="0" u="none" strike="noStrike">
                 <a:solidFill>
                   <a:schemeClr val="dk1">
@@ -2957,6 +5384,9 @@
                 <a:spcPct val="100000"/>
               </a:lnSpc>
               <a:buNone/>
+              <a:tabLst>
+                <a:tab pos="0" algn="l"/>
+              </a:tabLst>
             </a:pPr>
             <a:r>
               <a:rPr lang="en-US" sz="1200" b="0" u="none" strike="noStrike">
@@ -2984,18 +5414,18 @@
       </p:sp>
       <p:sp>
         <p:nvSpPr>
-          <p:cNvPr id="14" name="PlaceHolder 4"/>
+          <p:cNvPr id="31" name="PlaceHolder 4"/>
           <p:cNvSpPr>
             <a:spLocks noGrp="1"/>
           </p:cNvSpPr>
           <p:nvPr>
-            <p:ph type="ftr" idx="8"/>
+            <p:ph type="ftr" idx="17"/>
           </p:nvPr>
         </p:nvSpPr>
         <p:spPr>
           <a:xfrm>
             <a:off x="4038480" y="6356520"/>
-            <a:ext cx="4114440" cy="364680"/>
+            <a:ext cx="4114080" cy="364320"/>
           </a:xfrm>
           <a:prstGeom prst="rect">
             <a:avLst/>
@@ -3011,7 +5441,13 @@
           </a:bodyPr>
           <a:lstStyle>
             <a:lvl1pPr indent="0" algn="ctr">
-              <a:buNone/>
+              <a:lnSpc>
+                <a:spcPct val="100000"/>
+              </a:lnSpc>
+              <a:buNone/>
+              <a:tabLst>
+                <a:tab pos="0" algn="l"/>
+              </a:tabLst>
               <a:defRPr lang="en-US" sz="1400" b="0" u="none" strike="noStrike">
                 <a:solidFill>
                   <a:srgbClr val="000000"/>
@@ -3024,7 +5460,13 @@
           </a:lstStyle>
           <a:p>
             <a:pPr indent="0" algn="ctr">
-              <a:buNone/>
+              <a:lnSpc>
+                <a:spcPct val="100000"/>
+              </a:lnSpc>
+              <a:buNone/>
+              <a:tabLst>
+                <a:tab pos="0" algn="l"/>
+              </a:tabLst>
             </a:pPr>
             <a:r>
               <a:rPr lang="en-US" sz="1400" b="0" u="none" strike="noStrike">
@@ -3050,18 +5492,18 @@
       </p:sp>
       <p:sp>
         <p:nvSpPr>
-          <p:cNvPr id="15" name="PlaceHolder 5"/>
+          <p:cNvPr id="32" name="PlaceHolder 5"/>
           <p:cNvSpPr>
             <a:spLocks noGrp="1"/>
           </p:cNvSpPr>
           <p:nvPr>
-            <p:ph type="sldNum" idx="9"/>
+            <p:ph type="sldNum" idx="18"/>
           </p:nvPr>
         </p:nvSpPr>
         <p:spPr>
           <a:xfrm>
             <a:off x="8610480" y="6356520"/>
-            <a:ext cx="2742840" cy="364680"/>
+            <a:ext cx="2742480" cy="364320"/>
           </a:xfrm>
           <a:prstGeom prst="rect">
             <a:avLst/>
@@ -3081,6 +5523,9 @@
                 <a:spcPct val="100000"/>
               </a:lnSpc>
               <a:buNone/>
+              <a:tabLst>
+                <a:tab pos="0" algn="l"/>
+              </a:tabLst>
               <a:defRPr lang="en-US" sz="1200" b="0" u="none" strike="noStrike">
                 <a:solidFill>
                   <a:schemeClr val="dk1">
@@ -3099,8 +5544,11 @@
                 <a:spcPct val="100000"/>
               </a:lnSpc>
               <a:buNone/>
-            </a:pPr>
-            <a:fld id="{B2E990C8-5C37-42B9-8D8D-DAEA273D2F59}" type="slidenum">
+              <a:tabLst>
+                <a:tab pos="0" algn="l"/>
+              </a:tabLst>
+            </a:pPr>
+            <a:fld id="{02B2E503-C6EA-4E5E-87DA-763543BA5956}" type="slidenum">
               <a:rPr lang="en-US" sz="1200" b="0" u="none" strike="noStrike">
                 <a:solidFill>
                   <a:schemeClr val="dk1">
@@ -3129,7 +5577,7 @@
 </p:sldLayout>
 </file>
 
-<file path=ppt/slideLayouts/slideLayout4.xml><?xml version="1.0" encoding="utf-8"?>
+<file path=ppt/slideLayouts/slideLayout7.xml><?xml version="1.0" encoding="utf-8"?>
 <p:sldLayout xmlns:a="http://schemas.openxmlformats.org/drawingml/2006/main" xmlns:p="http://schemas.openxmlformats.org/presentationml/2006/main" xmlns:r="http://schemas.openxmlformats.org/officeDocument/2006/relationships" xmlns:p14="http://schemas.microsoft.com/office/powerpoint/2010/main" xmlns:p15="http://schemas.microsoft.com/office/powerpoint/2012/main" xmlns:mc="http://schemas.openxmlformats.org/markup-compatibility/2006" type="obj" preserve="1">
   <p:cSld name="Title and Content">
     <p:bg>
@@ -3155,7 +5603,7 @@
       </p:grpSpPr>
       <p:sp>
         <p:nvSpPr>
-          <p:cNvPr id="16" name="PlaceHolder 1"/>
+          <p:cNvPr id="33" name="PlaceHolder 1"/>
           <p:cNvSpPr>
             <a:spLocks noGrp="1"/>
           </p:cNvSpPr>
@@ -3166,7 +5614,7 @@
         <p:spPr>
           <a:xfrm>
             <a:off x="838080" y="365040"/>
-            <a:ext cx="10515240" cy="1325160"/>
+            <a:ext cx="10514880" cy="1324800"/>
           </a:xfrm>
           <a:prstGeom prst="rect">
             <a:avLst/>
@@ -3186,6 +5634,9 @@
                 <a:spcPct val="90000"/>
               </a:lnSpc>
               <a:buNone/>
+              <a:tabLst>
+                <a:tab pos="0" algn="l"/>
+              </a:tabLst>
               <a:defRPr lang="en-US" sz="4400" b="0" u="none" strike="noStrike">
                 <a:solidFill>
                   <a:schemeClr val="dk1"/>
@@ -3202,6 +5653,9 @@
                 <a:spcPct val="90000"/>
               </a:lnSpc>
               <a:buNone/>
+              <a:tabLst>
+                <a:tab pos="0" algn="l"/>
+              </a:tabLst>
             </a:pPr>
             <a:r>
               <a:rPr lang="en-US" sz="4400" b="0" u="none" strike="noStrike">
@@ -3227,7 +5681,7 @@
       </p:sp>
       <p:sp>
         <p:nvSpPr>
-          <p:cNvPr id="17" name="PlaceHolder 2"/>
+          <p:cNvPr id="34" name="PlaceHolder 2"/>
           <p:cNvSpPr>
             <a:spLocks noGrp="1"/>
           </p:cNvSpPr>
@@ -3238,7 +5692,7 @@
         <p:spPr>
           <a:xfrm>
             <a:off x="838080" y="1825560"/>
-            <a:ext cx="10515240" cy="4350960"/>
+            <a:ext cx="10514880" cy="4350600"/>
           </a:xfrm>
           <a:prstGeom prst="rect">
             <a:avLst/>
@@ -3533,18 +5987,18 @@
       </p:sp>
       <p:sp>
         <p:nvSpPr>
-          <p:cNvPr id="18" name="PlaceHolder 3"/>
+          <p:cNvPr id="35" name="PlaceHolder 3"/>
           <p:cNvSpPr>
             <a:spLocks noGrp="1"/>
           </p:cNvSpPr>
           <p:nvPr>
-            <p:ph type="dt" idx="10"/>
+            <p:ph type="dt" idx="19"/>
           </p:nvPr>
         </p:nvSpPr>
         <p:spPr>
           <a:xfrm>
             <a:off x="838080" y="6356520"/>
-            <a:ext cx="2742840" cy="364680"/>
+            <a:ext cx="2742480" cy="364320"/>
           </a:xfrm>
           <a:prstGeom prst="rect">
             <a:avLst/>
@@ -3564,6 +6018,9 @@
                 <a:spcPct val="100000"/>
               </a:lnSpc>
               <a:buNone/>
+              <a:tabLst>
+                <a:tab pos="0" algn="l"/>
+              </a:tabLst>
               <a:defRPr lang="en-US" sz="1200" b="0" u="none" strike="noStrike">
                 <a:solidFill>
                   <a:schemeClr val="dk1">
@@ -3582,6 +6039,9 @@
                 <a:spcPct val="100000"/>
               </a:lnSpc>
               <a:buNone/>
+              <a:tabLst>
+                <a:tab pos="0" algn="l"/>
+              </a:tabLst>
             </a:pPr>
             <a:r>
               <a:rPr lang="en-US" sz="1200" b="0" u="none" strike="noStrike">
@@ -3609,18 +6069,18 @@
       </p:sp>
       <p:sp>
         <p:nvSpPr>
-          <p:cNvPr id="19" name="PlaceHolder 4"/>
+          <p:cNvPr id="36" name="PlaceHolder 4"/>
           <p:cNvSpPr>
             <a:spLocks noGrp="1"/>
           </p:cNvSpPr>
           <p:nvPr>
-            <p:ph type="ftr" idx="11"/>
+            <p:ph type="ftr" idx="20"/>
           </p:nvPr>
         </p:nvSpPr>
         <p:spPr>
           <a:xfrm>
             <a:off x="4038480" y="6356520"/>
-            <a:ext cx="4114440" cy="364680"/>
+            <a:ext cx="4114080" cy="364320"/>
           </a:xfrm>
           <a:prstGeom prst="rect">
             <a:avLst/>
@@ -3636,7 +6096,13 @@
           </a:bodyPr>
           <a:lstStyle>
             <a:lvl1pPr indent="0" algn="ctr">
-              <a:buNone/>
+              <a:lnSpc>
+                <a:spcPct val="100000"/>
+              </a:lnSpc>
+              <a:buNone/>
+              <a:tabLst>
+                <a:tab pos="0" algn="l"/>
+              </a:tabLst>
               <a:defRPr lang="en-US" sz="1400" b="0" u="none" strike="noStrike">
                 <a:solidFill>
                   <a:srgbClr val="000000"/>
@@ -3649,7 +6115,13 @@
           </a:lstStyle>
           <a:p>
             <a:pPr indent="0" algn="ctr">
-              <a:buNone/>
+              <a:lnSpc>
+                <a:spcPct val="100000"/>
+              </a:lnSpc>
+              <a:buNone/>
+              <a:tabLst>
+                <a:tab pos="0" algn="l"/>
+              </a:tabLst>
             </a:pPr>
             <a:r>
               <a:rPr lang="en-US" sz="1400" b="0" u="none" strike="noStrike">
@@ -3675,18 +6147,18 @@
       </p:sp>
       <p:sp>
         <p:nvSpPr>
-          <p:cNvPr id="20" name="PlaceHolder 5"/>
+          <p:cNvPr id="37" name="PlaceHolder 5"/>
           <p:cNvSpPr>
             <a:spLocks noGrp="1"/>
           </p:cNvSpPr>
           <p:nvPr>
-            <p:ph type="sldNum" idx="12"/>
+            <p:ph type="sldNum" idx="21"/>
           </p:nvPr>
         </p:nvSpPr>
         <p:spPr>
           <a:xfrm>
             <a:off x="8610480" y="6356520"/>
-            <a:ext cx="2742840" cy="364680"/>
+            <a:ext cx="2742480" cy="364320"/>
           </a:xfrm>
           <a:prstGeom prst="rect">
             <a:avLst/>
@@ -3706,6 +6178,9 @@
                 <a:spcPct val="100000"/>
               </a:lnSpc>
               <a:buNone/>
+              <a:tabLst>
+                <a:tab pos="0" algn="l"/>
+              </a:tabLst>
               <a:defRPr lang="en-US" sz="1200" b="0" u="none" strike="noStrike">
                 <a:solidFill>
                   <a:schemeClr val="dk1">
@@ -3724,8 +6199,11 @@
                 <a:spcPct val="100000"/>
               </a:lnSpc>
               <a:buNone/>
-            </a:pPr>
-            <a:fld id="{D1552279-ED33-4153-9144-0D41B8A93017}" type="slidenum">
+              <a:tabLst>
+                <a:tab pos="0" algn="l"/>
+              </a:tabLst>
+            </a:pPr>
+            <a:fld id="{5BBF7DDA-5B9B-4081-B278-D94D3925C75A}" type="slidenum">
               <a:rPr lang="en-US" sz="1200" b="0" u="none" strike="noStrike">
                 <a:solidFill>
                   <a:schemeClr val="dk1">
@@ -3754,7 +6232,7 @@
 </p:sldLayout>
 </file>
 
-<file path=ppt/slideLayouts/slideLayout5.xml><?xml version="1.0" encoding="utf-8"?>
+<file path=ppt/slideLayouts/slideLayout8.xml><?xml version="1.0" encoding="utf-8"?>
 <p:sldLayout xmlns:a="http://schemas.openxmlformats.org/drawingml/2006/main" xmlns:p="http://schemas.openxmlformats.org/presentationml/2006/main" xmlns:r="http://schemas.openxmlformats.org/officeDocument/2006/relationships" xmlns:p14="http://schemas.microsoft.com/office/powerpoint/2010/main" xmlns:p15="http://schemas.microsoft.com/office/powerpoint/2012/main" xmlns:mc="http://schemas.openxmlformats.org/markup-compatibility/2006" type="blank" preserve="1">
   <p:cSld name="Section Header">
     <p:bg>
@@ -3780,7 +6258,7 @@
       </p:grpSpPr>
       <p:sp>
         <p:nvSpPr>
-          <p:cNvPr id="21" name="PlaceHolder 1"/>
+          <p:cNvPr id="38" name="PlaceHolder 1"/>
           <p:cNvSpPr>
             <a:spLocks noGrp="1"/>
           </p:cNvSpPr>
@@ -3791,7 +6269,7 @@
         <p:spPr>
           <a:xfrm>
             <a:off x="831960" y="1709640"/>
-            <a:ext cx="10515240" cy="2852280"/>
+            <a:ext cx="10514880" cy="2851920"/>
           </a:xfrm>
           <a:prstGeom prst="rect">
             <a:avLst/>
@@ -3811,6 +6289,9 @@
                 <a:spcPct val="90000"/>
               </a:lnSpc>
               <a:buNone/>
+              <a:tabLst>
+                <a:tab pos="0" algn="l"/>
+              </a:tabLst>
               <a:defRPr lang="en-US" sz="6000" b="0" u="none" strike="noStrike">
                 <a:solidFill>
                   <a:schemeClr val="dk1"/>
@@ -3827,6 +6308,9 @@
                 <a:spcPct val="90000"/>
               </a:lnSpc>
               <a:buNone/>
+              <a:tabLst>
+                <a:tab pos="0" algn="l"/>
+              </a:tabLst>
             </a:pPr>
             <a:r>
               <a:rPr lang="en-US" sz="6000" b="0" u="none" strike="noStrike">
@@ -3852,7 +6336,7 @@
       </p:sp>
       <p:sp>
         <p:nvSpPr>
-          <p:cNvPr id="22" name="PlaceHolder 2"/>
+          <p:cNvPr id="39" name="PlaceHolder 2"/>
           <p:cNvSpPr>
             <a:spLocks noGrp="1"/>
           </p:cNvSpPr>
@@ -3863,7 +6347,7 @@
         <p:spPr>
           <a:xfrm>
             <a:off x="831960" y="4589640"/>
-            <a:ext cx="10515240" cy="1499760"/>
+            <a:ext cx="10514880" cy="1499400"/>
           </a:xfrm>
           <a:prstGeom prst="rect">
             <a:avLst/>
@@ -3942,18 +6426,18 @@
       </p:sp>
       <p:sp>
         <p:nvSpPr>
-          <p:cNvPr id="23" name="PlaceHolder 3"/>
+          <p:cNvPr id="40" name="PlaceHolder 3"/>
           <p:cNvSpPr>
             <a:spLocks noGrp="1"/>
           </p:cNvSpPr>
           <p:nvPr>
-            <p:ph type="dt" idx="13"/>
+            <p:ph type="dt" idx="22"/>
           </p:nvPr>
         </p:nvSpPr>
         <p:spPr>
           <a:xfrm>
             <a:off x="838080" y="6356520"/>
-            <a:ext cx="2742840" cy="364680"/>
+            <a:ext cx="2742480" cy="364320"/>
           </a:xfrm>
           <a:prstGeom prst="rect">
             <a:avLst/>
@@ -3973,6 +6457,9 @@
                 <a:spcPct val="100000"/>
               </a:lnSpc>
               <a:buNone/>
+              <a:tabLst>
+                <a:tab pos="0" algn="l"/>
+              </a:tabLst>
               <a:defRPr lang="en-US" sz="1200" b="0" u="none" strike="noStrike">
                 <a:solidFill>
                   <a:schemeClr val="dk1">
@@ -3991,6 +6478,9 @@
                 <a:spcPct val="100000"/>
               </a:lnSpc>
               <a:buNone/>
+              <a:tabLst>
+                <a:tab pos="0" algn="l"/>
+              </a:tabLst>
             </a:pPr>
             <a:r>
               <a:rPr lang="en-US" sz="1200" b="0" u="none" strike="noStrike">
@@ -4018,18 +6508,18 @@
       </p:sp>
       <p:sp>
         <p:nvSpPr>
-          <p:cNvPr id="24" name="PlaceHolder 4"/>
+          <p:cNvPr id="41" name="PlaceHolder 4"/>
           <p:cNvSpPr>
             <a:spLocks noGrp="1"/>
           </p:cNvSpPr>
           <p:nvPr>
-            <p:ph type="ftr" idx="14"/>
+            <p:ph type="ftr" idx="23"/>
           </p:nvPr>
         </p:nvSpPr>
         <p:spPr>
           <a:xfrm>
             <a:off x="4038480" y="6356520"/>
-            <a:ext cx="4114440" cy="364680"/>
+            <a:ext cx="4114080" cy="364320"/>
           </a:xfrm>
           <a:prstGeom prst="rect">
             <a:avLst/>
@@ -4045,7 +6535,13 @@
           </a:bodyPr>
           <a:lstStyle>
             <a:lvl1pPr indent="0" algn="ctr">
-              <a:buNone/>
+              <a:lnSpc>
+                <a:spcPct val="100000"/>
+              </a:lnSpc>
+              <a:buNone/>
+              <a:tabLst>
+                <a:tab pos="0" algn="l"/>
+              </a:tabLst>
               <a:defRPr lang="en-US" sz="1400" b="0" u="none" strike="noStrike">
                 <a:solidFill>
                   <a:srgbClr val="000000"/>
@@ -4058,7 +6554,13 @@
           </a:lstStyle>
           <a:p>
             <a:pPr indent="0" algn="ctr">
-              <a:buNone/>
+              <a:lnSpc>
+                <a:spcPct val="100000"/>
+              </a:lnSpc>
+              <a:buNone/>
+              <a:tabLst>
+                <a:tab pos="0" algn="l"/>
+              </a:tabLst>
             </a:pPr>
             <a:r>
               <a:rPr lang="en-US" sz="1400" b="0" u="none" strike="noStrike">
@@ -4084,18 +6586,18 @@
       </p:sp>
       <p:sp>
         <p:nvSpPr>
-          <p:cNvPr id="25" name="PlaceHolder 5"/>
+          <p:cNvPr id="42" name="PlaceHolder 5"/>
           <p:cNvSpPr>
             <a:spLocks noGrp="1"/>
           </p:cNvSpPr>
           <p:nvPr>
-            <p:ph type="sldNum" idx="15"/>
+            <p:ph type="sldNum" idx="24"/>
           </p:nvPr>
         </p:nvSpPr>
         <p:spPr>
           <a:xfrm>
             <a:off x="8610480" y="6356520"/>
-            <a:ext cx="2742840" cy="364680"/>
+            <a:ext cx="2742480" cy="364320"/>
           </a:xfrm>
           <a:prstGeom prst="rect">
             <a:avLst/>
@@ -4115,6 +6617,9 @@
                 <a:spcPct val="100000"/>
               </a:lnSpc>
               <a:buNone/>
+              <a:tabLst>
+                <a:tab pos="0" algn="l"/>
+              </a:tabLst>
               <a:defRPr lang="en-US" sz="1200" b="0" u="none" strike="noStrike">
                 <a:solidFill>
                   <a:schemeClr val="dk1">
@@ -4133,8 +6638,11 @@
                 <a:spcPct val="100000"/>
               </a:lnSpc>
               <a:buNone/>
-            </a:pPr>
-            <a:fld id="{DFB17CC6-0635-4B8A-8C8B-C72BE46DDAE8}" type="slidenum">
+              <a:tabLst>
+                <a:tab pos="0" algn="l"/>
+              </a:tabLst>
+            </a:pPr>
+            <a:fld id="{EA348D3D-D91D-47BE-B648-72AF9DCB7CF2}" type="slidenum">
               <a:rPr lang="en-US" sz="1200" b="0" u="none" strike="noStrike">
                 <a:solidFill>
                   <a:schemeClr val="dk1">
@@ -4163,7 +6671,7 @@
 </p:sldLayout>
 </file>
 
-<file path=ppt/slideLayouts/slideLayout6.xml><?xml version="1.0" encoding="utf-8"?>
+<file path=ppt/slideLayouts/slideLayout9.xml><?xml version="1.0" encoding="utf-8"?>
 <p:sldLayout xmlns:a="http://schemas.openxmlformats.org/drawingml/2006/main" xmlns:p="http://schemas.openxmlformats.org/presentationml/2006/main" xmlns:r="http://schemas.openxmlformats.org/officeDocument/2006/relationships" xmlns:p14="http://schemas.microsoft.com/office/powerpoint/2010/main" xmlns:p15="http://schemas.microsoft.com/office/powerpoint/2012/main" xmlns:mc="http://schemas.openxmlformats.org/markup-compatibility/2006" type="twoObj" preserve="1">
   <p:cSld name="Two Content">
     <p:bg>
@@ -4189,7 +6697,7 @@
       </p:grpSpPr>
       <p:sp>
         <p:nvSpPr>
-          <p:cNvPr id="26" name="PlaceHolder 1"/>
+          <p:cNvPr id="43" name="PlaceHolder 1"/>
           <p:cNvSpPr>
             <a:spLocks noGrp="1"/>
           </p:cNvSpPr>
@@ -4200,7 +6708,7 @@
         <p:spPr>
           <a:xfrm>
             <a:off x="838080" y="365040"/>
-            <a:ext cx="10515240" cy="1325160"/>
+            <a:ext cx="10514880" cy="1324800"/>
           </a:xfrm>
           <a:prstGeom prst="rect">
             <a:avLst/>
@@ -4220,6 +6728,9 @@
                 <a:spcPct val="90000"/>
               </a:lnSpc>
               <a:buNone/>
+              <a:tabLst>
+                <a:tab pos="0" algn="l"/>
+              </a:tabLst>
               <a:defRPr lang="en-US" sz="4400" b="0" u="none" strike="noStrike">
                 <a:solidFill>
                   <a:schemeClr val="dk1"/>
@@ -4236,6 +6747,9 @@
                 <a:spcPct val="90000"/>
               </a:lnSpc>
               <a:buNone/>
+              <a:tabLst>
+                <a:tab pos="0" algn="l"/>
+              </a:tabLst>
             </a:pPr>
             <a:r>
               <a:rPr lang="en-US" sz="4400" b="0" u="none" strike="noStrike">
@@ -4261,7 +6775,7 @@
       </p:sp>
       <p:sp>
         <p:nvSpPr>
-          <p:cNvPr id="27" name="PlaceHolder 2"/>
+          <p:cNvPr id="44" name="PlaceHolder 2"/>
           <p:cNvSpPr>
             <a:spLocks noGrp="1"/>
           </p:cNvSpPr>
@@ -4272,7 +6786,7 @@
         <p:spPr>
           <a:xfrm>
             <a:off x="838080" y="1825560"/>
-            <a:ext cx="5181120" cy="4350960"/>
+            <a:ext cx="5180760" cy="4350600"/>
           </a:xfrm>
           <a:prstGeom prst="rect">
             <a:avLst/>
@@ -4567,7 +7081,7 @@
       </p:sp>
       <p:sp>
         <p:nvSpPr>
-          <p:cNvPr id="28" name="PlaceHolder 3"/>
+          <p:cNvPr id="45" name="PlaceHolder 3"/>
           <p:cNvSpPr>
             <a:spLocks noGrp="1"/>
           </p:cNvSpPr>
@@ -4578,7 +7092,7 @@
         <p:spPr>
           <a:xfrm>
             <a:off x="6172200" y="1825560"/>
-            <a:ext cx="5181120" cy="4350960"/>
+            <a:ext cx="5180760" cy="4350600"/>
           </a:xfrm>
           <a:prstGeom prst="rect">
             <a:avLst/>
@@ -4873,18 +7387,18 @@
       </p:sp>
       <p:sp>
         <p:nvSpPr>
-          <p:cNvPr id="29" name="PlaceHolder 4"/>
+          <p:cNvPr id="46" name="PlaceHolder 4"/>
           <p:cNvSpPr>
             <a:spLocks noGrp="1"/>
           </p:cNvSpPr>
           <p:nvPr>
-            <p:ph type="dt" idx="16"/>
+            <p:ph type="dt" idx="25"/>
           </p:nvPr>
         </p:nvSpPr>
         <p:spPr>
           <a:xfrm>
             <a:off x="838080" y="6356520"/>
-            <a:ext cx="2742840" cy="364680"/>
+            <a:ext cx="2742480" cy="364320"/>
           </a:xfrm>
           <a:prstGeom prst="rect">
             <a:avLst/>
@@ -4904,6 +7418,9 @@
                 <a:spcPct val="100000"/>
               </a:lnSpc>
               <a:buNone/>
+              <a:tabLst>
+                <a:tab pos="0" algn="l"/>
+              </a:tabLst>
               <a:defRPr lang="en-US" sz="1200" b="0" u="none" strike="noStrike">
                 <a:solidFill>
                   <a:schemeClr val="dk1">
@@ -4922,6 +7439,9 @@
                 <a:spcPct val="100000"/>
               </a:lnSpc>
               <a:buNone/>
+              <a:tabLst>
+                <a:tab pos="0" algn="l"/>
+              </a:tabLst>
             </a:pPr>
             <a:r>
               <a:rPr lang="en-US" sz="1200" b="0" u="none" strike="noStrike">
@@ -4949,18 +7469,18 @@
       </p:sp>
       <p:sp>
         <p:nvSpPr>
-          <p:cNvPr id="30" name="PlaceHolder 5"/>
+          <p:cNvPr id="47" name="PlaceHolder 5"/>
           <p:cNvSpPr>
             <a:spLocks noGrp="1"/>
           </p:cNvSpPr>
           <p:nvPr>
-            <p:ph type="ftr" idx="17"/>
+            <p:ph type="ftr" idx="26"/>
           </p:nvPr>
         </p:nvSpPr>
         <p:spPr>
           <a:xfrm>
             <a:off x="4038480" y="6356520"/>
-            <a:ext cx="4114440" cy="364680"/>
+            <a:ext cx="4114080" cy="364320"/>
           </a:xfrm>
           <a:prstGeom prst="rect">
             <a:avLst/>
@@ -4976,7 +7496,13 @@
           </a:bodyPr>
           <a:lstStyle>
             <a:lvl1pPr indent="0" algn="ctr">
-              <a:buNone/>
+              <a:lnSpc>
+                <a:spcPct val="100000"/>
+              </a:lnSpc>
+              <a:buNone/>
+              <a:tabLst>
+                <a:tab pos="0" algn="l"/>
+              </a:tabLst>
               <a:defRPr lang="en-US" sz="1400" b="0" u="none" strike="noStrike">
                 <a:solidFill>
                   <a:srgbClr val="000000"/>
@@ -4989,7 +7515,13 @@
           </a:lstStyle>
           <a:p>
             <a:pPr indent="0" algn="ctr">
-              <a:buNone/>
+              <a:lnSpc>
+                <a:spcPct val="100000"/>
+              </a:lnSpc>
+              <a:buNone/>
+              <a:tabLst>
+                <a:tab pos="0" algn="l"/>
+              </a:tabLst>
             </a:pPr>
             <a:r>
               <a:rPr lang="en-US" sz="1400" b="0" u="none" strike="noStrike">
@@ -5015,18 +7547,18 @@
       </p:sp>
       <p:sp>
         <p:nvSpPr>
-          <p:cNvPr id="31" name="PlaceHolder 6"/>
+          <p:cNvPr id="48" name="PlaceHolder 6"/>
           <p:cNvSpPr>
             <a:spLocks noGrp="1"/>
           </p:cNvSpPr>
           <p:nvPr>
-            <p:ph type="sldNum" idx="18"/>
+            <p:ph type="sldNum" idx="27"/>
           </p:nvPr>
         </p:nvSpPr>
         <p:spPr>
           <a:xfrm>
             <a:off x="8610480" y="6356520"/>
-            <a:ext cx="2742840" cy="364680"/>
+            <a:ext cx="2742480" cy="364320"/>
           </a:xfrm>
           <a:prstGeom prst="rect">
             <a:avLst/>
@@ -5046,6 +7578,9 @@
                 <a:spcPct val="100000"/>
               </a:lnSpc>
               <a:buNone/>
+              <a:tabLst>
+                <a:tab pos="0" algn="l"/>
+              </a:tabLst>
               <a:defRPr lang="en-US" sz="1200" b="0" u="none" strike="noStrike">
                 <a:solidFill>
                   <a:schemeClr val="dk1">
@@ -5064,1733 +7599,11 @@
                 <a:spcPct val="100000"/>
               </a:lnSpc>
               <a:buNone/>
-            </a:pPr>
-            <a:fld id="{0D41C6C9-3341-42FD-96AA-73DB99B61257}" type="slidenum">
-              <a:rPr lang="en-US" sz="1200" b="0" u="none" strike="noStrike">
-                <a:solidFill>
-                  <a:schemeClr val="dk1">
-                    <a:tint val="82000"/>
-                  </a:schemeClr>
-                </a:solidFill>
-                <a:effectLst/>
-                <a:uFillTx/>
-                <a:latin typeface="Aptos"/>
-              </a:rPr>
-              <a:t>&lt;number&gt;</a:t>
-            </a:fld>
-            <a:endParaRPr lang="en-US" sz="1200" b="0" u="none" strike="noStrike">
-              <a:solidFill>
-                <a:srgbClr val="000000"/>
-              </a:solidFill>
-              <a:effectLst/>
-              <a:uFillTx/>
-              <a:latin typeface="Times New Roman"/>
-            </a:endParaRPr>
-          </a:p>
-        </p:txBody>
-      </p:sp>
-    </p:spTree>
-  </p:cSld>
-</p:sldLayout>
-</file>
-
-<file path=ppt/slideLayouts/slideLayout7.xml><?xml version="1.0" encoding="utf-8"?>
-<p:sldLayout xmlns:a="http://schemas.openxmlformats.org/drawingml/2006/main" xmlns:p="http://schemas.openxmlformats.org/presentationml/2006/main" xmlns:r="http://schemas.openxmlformats.org/officeDocument/2006/relationships" xmlns:p14="http://schemas.microsoft.com/office/powerpoint/2010/main" xmlns:p15="http://schemas.microsoft.com/office/powerpoint/2012/main" xmlns:mc="http://schemas.openxmlformats.org/markup-compatibility/2006" type="blank" preserve="1">
-  <p:cSld name="Comparison">
-    <p:bg>
-      <p:bgPr>
-        <a:solidFill>
-          <a:srgbClr val="FFFFFF"/>
-        </a:solidFill>
-      </p:bgPr>
-    </p:bg>
-    <p:spTree>
-      <p:nvGrpSpPr>
-        <p:cNvPr id="1" name=""/>
-        <p:cNvGrpSpPr/>
-        <p:nvPr/>
-      </p:nvGrpSpPr>
-      <p:grpSpPr>
-        <a:xfrm>
-          <a:off x="0" y="0"/>
-          <a:ext cx="0" cy="0"/>
-          <a:chOff x="0" y="0"/>
-          <a:chExt cx="0" cy="0"/>
-        </a:xfrm>
-      </p:grpSpPr>
-      <p:sp>
-        <p:nvSpPr>
-          <p:cNvPr id="32" name="PlaceHolder 1"/>
-          <p:cNvSpPr>
-            <a:spLocks noGrp="1"/>
-          </p:cNvSpPr>
-          <p:nvPr>
-            <p:ph type="title"/>
-          </p:nvPr>
-        </p:nvSpPr>
-        <p:spPr>
-          <a:xfrm>
-            <a:off x="839880" y="365040"/>
-            <a:ext cx="10515240" cy="1325160"/>
-          </a:xfrm>
-          <a:prstGeom prst="rect">
-            <a:avLst/>
-          </a:prstGeom>
-          <a:noFill/>
-          <a:ln w="0">
-            <a:noFill/>
-          </a:ln>
-        </p:spPr>
-        <p:txBody>
-          <a:bodyPr lIns="91440" tIns="45720" rIns="91440" bIns="45720" anchor="ctr">
-            <a:noAutofit/>
-          </a:bodyPr>
-          <a:lstStyle>
-            <a:lvl1pPr indent="0" algn="l" defTabSz="914400">
-              <a:lnSpc>
-                <a:spcPct val="90000"/>
-              </a:lnSpc>
-              <a:buNone/>
-              <a:defRPr lang="en-US" sz="4400" b="0" u="none" strike="noStrike">
-                <a:solidFill>
-                  <a:schemeClr val="dk1"/>
-                </a:solidFill>
-                <a:effectLst/>
-                <a:uFillTx/>
-                <a:latin typeface="Aptos Display"/>
-              </a:defRPr>
-            </a:lvl1pPr>
-          </a:lstStyle>
-          <a:p>
-            <a:pPr indent="0" algn="l" defTabSz="914400">
-              <a:lnSpc>
-                <a:spcPct val="90000"/>
-              </a:lnSpc>
-              <a:buNone/>
-            </a:pPr>
-            <a:r>
-              <a:rPr lang="en-US" sz="4400" b="0" u="none" strike="noStrike">
-                <a:solidFill>
-                  <a:schemeClr val="dk1"/>
-                </a:solidFill>
-                <a:effectLst/>
-                <a:uFillTx/>
-                <a:latin typeface="Aptos Display"/>
-              </a:rPr>
-              <a:t>Click to edit Master title style</a:t>
-            </a:r>
-            <a:endParaRPr lang="en-US" sz="4400" b="0" u="none" strike="noStrike">
-              <a:solidFill>
-                <a:schemeClr val="dk1"/>
-              </a:solidFill>
-              <a:effectLst/>
-              <a:uFillTx/>
-              <a:latin typeface="Aptos Display"/>
-            </a:endParaRPr>
-          </a:p>
-        </p:txBody>
-      </p:sp>
-      <p:sp>
-        <p:nvSpPr>
-          <p:cNvPr id="33" name="PlaceHolder 2"/>
-          <p:cNvSpPr>
-            <a:spLocks noGrp="1"/>
-          </p:cNvSpPr>
-          <p:nvPr>
-            <p:ph type="body"/>
-          </p:nvPr>
-        </p:nvSpPr>
-        <p:spPr>
-          <a:xfrm>
-            <a:off x="839880" y="1681200"/>
-            <a:ext cx="5157360" cy="823680"/>
-          </a:xfrm>
-          <a:prstGeom prst="rect">
-            <a:avLst/>
-          </a:prstGeom>
-          <a:noFill/>
-          <a:ln w="0">
-            <a:noFill/>
-          </a:ln>
-        </p:spPr>
-        <p:txBody>
-          <a:bodyPr lIns="91440" tIns="45720" rIns="91440" bIns="45720" anchor="b">
-            <a:noAutofit/>
-          </a:bodyPr>
-          <a:lstStyle>
-            <a:lvl1pPr indent="0" algn="l" defTabSz="914400">
-              <a:lnSpc>
-                <a:spcPct val="90000"/>
-              </a:lnSpc>
-              <a:spcBef>
-                <a:spcPts val="1001"/>
-              </a:spcBef>
-              <a:buNone/>
-              <a:tabLst>
-                <a:tab pos="0" algn="l"/>
-              </a:tabLst>
-              <a:defRPr lang="en-US" sz="2400" b="1" u="none" strike="noStrike">
-                <a:solidFill>
-                  <a:schemeClr val="dk1"/>
-                </a:solidFill>
-                <a:effectLst/>
-                <a:uFillTx/>
-                <a:latin typeface="Aptos"/>
-              </a:defRPr>
-            </a:lvl1pPr>
-          </a:lstStyle>
-          <a:p>
-            <a:pPr indent="0" algn="l" defTabSz="914400">
-              <a:lnSpc>
-                <a:spcPct val="90000"/>
-              </a:lnSpc>
-              <a:spcBef>
-                <a:spcPts val="1001"/>
-              </a:spcBef>
-              <a:buNone/>
-              <a:tabLst>
-                <a:tab pos="0" algn="l"/>
-              </a:tabLst>
-            </a:pPr>
-            <a:r>
-              <a:rPr lang="en-US" sz="2400" b="1" u="none" strike="noStrike">
-                <a:solidFill>
-                  <a:schemeClr val="dk1"/>
-                </a:solidFill>
-                <a:effectLst/>
-                <a:uFillTx/>
-                <a:latin typeface="Aptos"/>
-              </a:rPr>
-              <a:t>Click to edit Master text styles</a:t>
-            </a:r>
-            <a:endParaRPr lang="en-US" sz="2400" b="0" u="none" strike="noStrike">
-              <a:solidFill>
-                <a:schemeClr val="dk1"/>
-              </a:solidFill>
-              <a:effectLst/>
-              <a:uFillTx/>
-              <a:latin typeface="Aptos"/>
-            </a:endParaRPr>
-          </a:p>
-        </p:txBody>
-      </p:sp>
-      <p:sp>
-        <p:nvSpPr>
-          <p:cNvPr id="34" name="PlaceHolder 3"/>
-          <p:cNvSpPr>
-            <a:spLocks noGrp="1"/>
-          </p:cNvSpPr>
-          <p:nvPr>
-            <p:ph type="body"/>
-          </p:nvPr>
-        </p:nvSpPr>
-        <p:spPr>
-          <a:xfrm>
-            <a:off x="839880" y="2505240"/>
-            <a:ext cx="5157360" cy="3684240"/>
-          </a:xfrm>
-          <a:prstGeom prst="rect">
-            <a:avLst/>
-          </a:prstGeom>
-          <a:noFill/>
-          <a:ln w="0">
-            <a:noFill/>
-          </a:ln>
-        </p:spPr>
-        <p:txBody>
-          <a:bodyPr lIns="91440" tIns="45720" rIns="91440" bIns="45720" anchor="t">
-            <a:noAutofit/>
-          </a:bodyPr>
-          <a:lstStyle>
-            <a:lvl1pPr algn="l" defTabSz="914400">
-              <a:lnSpc>
-                <a:spcPct val="90000"/>
-              </a:lnSpc>
-              <a:spcBef>
-                <a:spcPts val="1001"/>
-              </a:spcBef>
-              <a:buClr>
-                <a:srgbClr val="000000"/>
-              </a:buClr>
-              <a:buFont typeface="Arial"/>
-              <a:buChar char="•"/>
-              <a:tabLst>
-                <a:tab pos="0" algn="l"/>
-              </a:tabLst>
-              <a:defRPr lang="en-US" sz="2800" b="0" u="none" strike="noStrike">
-                <a:solidFill>
-                  <a:schemeClr val="dk1"/>
-                </a:solidFill>
-                <a:effectLst/>
-                <a:uFillTx/>
-                <a:latin typeface="Aptos"/>
-              </a:defRPr>
-            </a:lvl1pPr>
-            <a:lvl2pPr lvl="1" algn="l" defTabSz="914400">
-              <a:lnSpc>
-                <a:spcPct val="90000"/>
-              </a:lnSpc>
-              <a:spcBef>
-                <a:spcPts val="499"/>
-              </a:spcBef>
-              <a:buClr>
-                <a:srgbClr val="000000"/>
-              </a:buClr>
-              <a:buFont typeface="Arial"/>
-              <a:buChar char="•"/>
-              <a:tabLst>
-                <a:tab pos="0" algn="l"/>
-              </a:tabLst>
-              <a:defRPr lang="en-US" sz="2400" b="0" u="none" strike="noStrike">
-                <a:solidFill>
-                  <a:schemeClr val="dk1"/>
-                </a:solidFill>
-                <a:effectLst/>
-                <a:uFillTx/>
-                <a:latin typeface="Aptos"/>
-              </a:defRPr>
-            </a:lvl2pPr>
-            <a:lvl3pPr lvl="2" algn="l" defTabSz="914400">
-              <a:lnSpc>
-                <a:spcPct val="90000"/>
-              </a:lnSpc>
-              <a:spcBef>
-                <a:spcPts val="499"/>
-              </a:spcBef>
-              <a:buClr>
-                <a:srgbClr val="000000"/>
-              </a:buClr>
-              <a:buFont typeface="Arial"/>
-              <a:buChar char="•"/>
-              <a:tabLst>
-                <a:tab pos="0" algn="l"/>
-              </a:tabLst>
-              <a:defRPr lang="en-US" sz="2000" b="0" u="none" strike="noStrike">
-                <a:solidFill>
-                  <a:schemeClr val="dk1"/>
-                </a:solidFill>
-                <a:effectLst/>
-                <a:uFillTx/>
-                <a:latin typeface="Aptos"/>
-              </a:defRPr>
-            </a:lvl3pPr>
-            <a:lvl4pPr lvl="3" algn="l" defTabSz="914400">
-              <a:lnSpc>
-                <a:spcPct val="90000"/>
-              </a:lnSpc>
-              <a:spcBef>
-                <a:spcPts val="499"/>
-              </a:spcBef>
-              <a:buClr>
-                <a:srgbClr val="000000"/>
-              </a:buClr>
-              <a:buFont typeface="Arial"/>
-              <a:buChar char="•"/>
-              <a:tabLst>
-                <a:tab pos="0" algn="l"/>
-              </a:tabLst>
-              <a:defRPr lang="en-US" sz="1800" b="0" u="none" strike="noStrike">
-                <a:solidFill>
-                  <a:schemeClr val="dk1"/>
-                </a:solidFill>
-                <a:effectLst/>
-                <a:uFillTx/>
-                <a:latin typeface="Aptos"/>
-              </a:defRPr>
-            </a:lvl4pPr>
-            <a:lvl5pPr lvl="4" algn="l" defTabSz="914400">
-              <a:lnSpc>
-                <a:spcPct val="90000"/>
-              </a:lnSpc>
-              <a:spcBef>
-                <a:spcPts val="499"/>
-              </a:spcBef>
-              <a:buClr>
-                <a:srgbClr val="000000"/>
-              </a:buClr>
-              <a:buFont typeface="Arial"/>
-              <a:buChar char="•"/>
-              <a:tabLst>
-                <a:tab pos="0" algn="l"/>
-              </a:tabLst>
-              <a:defRPr lang="en-US" sz="1800" b="0" u="none" strike="noStrike">
-                <a:solidFill>
-                  <a:schemeClr val="dk1"/>
-                </a:solidFill>
-                <a:effectLst/>
-                <a:uFillTx/>
-                <a:latin typeface="Aptos"/>
-              </a:defRPr>
-            </a:lvl5pPr>
-          </a:lstStyle>
-          <a:p>
-            <a:pPr marL="228600" indent="-228600" algn="l" defTabSz="914400">
-              <a:lnSpc>
-                <a:spcPct val="90000"/>
-              </a:lnSpc>
-              <a:spcBef>
-                <a:spcPts val="1001"/>
-              </a:spcBef>
-              <a:buClr>
-                <a:srgbClr val="000000"/>
-              </a:buClr>
-              <a:buFont typeface="Arial"/>
-              <a:buChar char="•"/>
-              <a:tabLst>
-                <a:tab pos="0" algn="l"/>
-              </a:tabLst>
-            </a:pPr>
-            <a:r>
-              <a:rPr lang="en-US" sz="2800" b="0" u="none" strike="noStrike">
-                <a:solidFill>
-                  <a:schemeClr val="dk1"/>
-                </a:solidFill>
-                <a:effectLst/>
-                <a:uFillTx/>
-                <a:latin typeface="Aptos"/>
-              </a:rPr>
-              <a:t>Click to edit Master text styles</a:t>
-            </a:r>
-            <a:endParaRPr lang="en-US" sz="2800" b="0" u="none" strike="noStrike">
-              <a:solidFill>
-                <a:schemeClr val="dk1"/>
-              </a:solidFill>
-              <a:effectLst/>
-              <a:uFillTx/>
-              <a:latin typeface="Aptos"/>
-            </a:endParaRPr>
-          </a:p>
-          <a:p>
-            <a:pPr marL="685800" lvl="1" indent="-228600" algn="l" defTabSz="914400">
-              <a:lnSpc>
-                <a:spcPct val="90000"/>
-              </a:lnSpc>
-              <a:spcBef>
-                <a:spcPts val="499"/>
-              </a:spcBef>
-              <a:buClr>
-                <a:srgbClr val="000000"/>
-              </a:buClr>
-              <a:buFont typeface="Arial"/>
-              <a:buChar char="•"/>
-              <a:tabLst>
-                <a:tab pos="0" algn="l"/>
-              </a:tabLst>
-            </a:pPr>
-            <a:r>
-              <a:rPr lang="en-US" sz="2400" b="0" u="none" strike="noStrike">
-                <a:solidFill>
-                  <a:schemeClr val="dk1"/>
-                </a:solidFill>
-                <a:effectLst/>
-                <a:uFillTx/>
-                <a:latin typeface="Aptos"/>
-              </a:rPr>
-              <a:t>Second level</a:t>
-            </a:r>
-            <a:endParaRPr lang="en-US" sz="2400" b="0" u="none" strike="noStrike">
-              <a:solidFill>
-                <a:schemeClr val="dk1"/>
-              </a:solidFill>
-              <a:effectLst/>
-              <a:uFillTx/>
-              <a:latin typeface="Aptos"/>
-            </a:endParaRPr>
-          </a:p>
-          <a:p>
-            <a:pPr marL="1143000" lvl="2" indent="-228600" algn="l" defTabSz="914400">
-              <a:lnSpc>
-                <a:spcPct val="90000"/>
-              </a:lnSpc>
-              <a:spcBef>
-                <a:spcPts val="499"/>
-              </a:spcBef>
-              <a:buClr>
-                <a:srgbClr val="000000"/>
-              </a:buClr>
-              <a:buFont typeface="Arial"/>
-              <a:buChar char="•"/>
-              <a:tabLst>
-                <a:tab pos="0" algn="l"/>
-              </a:tabLst>
-            </a:pPr>
-            <a:r>
-              <a:rPr lang="en-US" sz="2000" b="0" u="none" strike="noStrike">
-                <a:solidFill>
-                  <a:schemeClr val="dk1"/>
-                </a:solidFill>
-                <a:effectLst/>
-                <a:uFillTx/>
-                <a:latin typeface="Aptos"/>
-              </a:rPr>
-              <a:t>Third level</a:t>
-            </a:r>
-            <a:endParaRPr lang="en-US" sz="2000" b="0" u="none" strike="noStrike">
-              <a:solidFill>
-                <a:schemeClr val="dk1"/>
-              </a:solidFill>
-              <a:effectLst/>
-              <a:uFillTx/>
-              <a:latin typeface="Aptos"/>
-            </a:endParaRPr>
-          </a:p>
-          <a:p>
-            <a:pPr marL="1600200" lvl="3" indent="-228600" algn="l" defTabSz="914400">
-              <a:lnSpc>
-                <a:spcPct val="90000"/>
-              </a:lnSpc>
-              <a:spcBef>
-                <a:spcPts val="499"/>
-              </a:spcBef>
-              <a:buClr>
-                <a:srgbClr val="000000"/>
-              </a:buClr>
-              <a:buFont typeface="Arial"/>
-              <a:buChar char="•"/>
-              <a:tabLst>
-                <a:tab pos="0" algn="l"/>
-              </a:tabLst>
-            </a:pPr>
-            <a:r>
-              <a:rPr lang="en-US" sz="1800" b="0" u="none" strike="noStrike">
-                <a:solidFill>
-                  <a:schemeClr val="dk1"/>
-                </a:solidFill>
-                <a:effectLst/>
-                <a:uFillTx/>
-                <a:latin typeface="Aptos"/>
-              </a:rPr>
-              <a:t>Fourth level</a:t>
-            </a:r>
-            <a:endParaRPr lang="en-US" sz="1800" b="0" u="none" strike="noStrike">
-              <a:solidFill>
-                <a:schemeClr val="dk1"/>
-              </a:solidFill>
-              <a:effectLst/>
-              <a:uFillTx/>
-              <a:latin typeface="Aptos"/>
-            </a:endParaRPr>
-          </a:p>
-          <a:p>
-            <a:pPr marL="2057400" lvl="4" indent="-228600" algn="l" defTabSz="914400">
-              <a:lnSpc>
-                <a:spcPct val="90000"/>
-              </a:lnSpc>
-              <a:spcBef>
-                <a:spcPts val="499"/>
-              </a:spcBef>
-              <a:buClr>
-                <a:srgbClr val="000000"/>
-              </a:buClr>
-              <a:buFont typeface="Arial"/>
-              <a:buChar char="•"/>
-              <a:tabLst>
-                <a:tab pos="0" algn="l"/>
-              </a:tabLst>
-            </a:pPr>
-            <a:r>
-              <a:rPr lang="en-US" sz="1800" b="0" u="none" strike="noStrike">
-                <a:solidFill>
-                  <a:schemeClr val="dk1"/>
-                </a:solidFill>
-                <a:effectLst/>
-                <a:uFillTx/>
-                <a:latin typeface="Aptos"/>
-              </a:rPr>
-              <a:t>Fifth level</a:t>
-            </a:r>
-            <a:endParaRPr lang="en-US" sz="1800" b="0" u="none" strike="noStrike">
-              <a:solidFill>
-                <a:schemeClr val="dk1"/>
-              </a:solidFill>
-              <a:effectLst/>
-              <a:uFillTx/>
-              <a:latin typeface="Aptos"/>
-            </a:endParaRPr>
-          </a:p>
-        </p:txBody>
-      </p:sp>
-      <p:sp>
-        <p:nvSpPr>
-          <p:cNvPr id="35" name="PlaceHolder 4"/>
-          <p:cNvSpPr>
-            <a:spLocks noGrp="1"/>
-          </p:cNvSpPr>
-          <p:nvPr>
-            <p:ph type="body"/>
-          </p:nvPr>
-        </p:nvSpPr>
-        <p:spPr>
-          <a:xfrm>
-            <a:off x="6172200" y="1681200"/>
-            <a:ext cx="5182920" cy="823680"/>
-          </a:xfrm>
-          <a:prstGeom prst="rect">
-            <a:avLst/>
-          </a:prstGeom>
-          <a:noFill/>
-          <a:ln w="0">
-            <a:noFill/>
-          </a:ln>
-        </p:spPr>
-        <p:txBody>
-          <a:bodyPr lIns="91440" tIns="45720" rIns="91440" bIns="45720" anchor="b">
-            <a:noAutofit/>
-          </a:bodyPr>
-          <a:lstStyle>
-            <a:lvl1pPr indent="0" algn="l" defTabSz="914400">
-              <a:lnSpc>
-                <a:spcPct val="90000"/>
-              </a:lnSpc>
-              <a:spcBef>
-                <a:spcPts val="1001"/>
-              </a:spcBef>
-              <a:buNone/>
-              <a:tabLst>
-                <a:tab pos="0" algn="l"/>
-              </a:tabLst>
-              <a:defRPr lang="en-US" sz="2400" b="1" u="none" strike="noStrike">
-                <a:solidFill>
-                  <a:schemeClr val="dk1"/>
-                </a:solidFill>
-                <a:effectLst/>
-                <a:uFillTx/>
-                <a:latin typeface="Aptos"/>
-              </a:defRPr>
-            </a:lvl1pPr>
-          </a:lstStyle>
-          <a:p>
-            <a:pPr indent="0" algn="l" defTabSz="914400">
-              <a:lnSpc>
-                <a:spcPct val="90000"/>
-              </a:lnSpc>
-              <a:spcBef>
-                <a:spcPts val="1001"/>
-              </a:spcBef>
-              <a:buNone/>
-              <a:tabLst>
-                <a:tab pos="0" algn="l"/>
-              </a:tabLst>
-            </a:pPr>
-            <a:r>
-              <a:rPr lang="en-US" sz="2400" b="1" u="none" strike="noStrike">
-                <a:solidFill>
-                  <a:schemeClr val="dk1"/>
-                </a:solidFill>
-                <a:effectLst/>
-                <a:uFillTx/>
-                <a:latin typeface="Aptos"/>
-              </a:rPr>
-              <a:t>Click to edit Master text styles</a:t>
-            </a:r>
-            <a:endParaRPr lang="en-US" sz="2400" b="0" u="none" strike="noStrike">
-              <a:solidFill>
-                <a:schemeClr val="dk1"/>
-              </a:solidFill>
-              <a:effectLst/>
-              <a:uFillTx/>
-              <a:latin typeface="Aptos"/>
-            </a:endParaRPr>
-          </a:p>
-        </p:txBody>
-      </p:sp>
-      <p:sp>
-        <p:nvSpPr>
-          <p:cNvPr id="36" name="PlaceHolder 5"/>
-          <p:cNvSpPr>
-            <a:spLocks noGrp="1"/>
-          </p:cNvSpPr>
-          <p:nvPr>
-            <p:ph type="body"/>
-          </p:nvPr>
-        </p:nvSpPr>
-        <p:spPr>
-          <a:xfrm>
-            <a:off x="6172200" y="2505240"/>
-            <a:ext cx="5182920" cy="3684240"/>
-          </a:xfrm>
-          <a:prstGeom prst="rect">
-            <a:avLst/>
-          </a:prstGeom>
-          <a:noFill/>
-          <a:ln w="0">
-            <a:noFill/>
-          </a:ln>
-        </p:spPr>
-        <p:txBody>
-          <a:bodyPr lIns="91440" tIns="45720" rIns="91440" bIns="45720" anchor="t">
-            <a:noAutofit/>
-          </a:bodyPr>
-          <a:lstStyle>
-            <a:lvl1pPr algn="l" defTabSz="914400">
-              <a:lnSpc>
-                <a:spcPct val="90000"/>
-              </a:lnSpc>
-              <a:spcBef>
-                <a:spcPts val="1001"/>
-              </a:spcBef>
-              <a:buClr>
-                <a:srgbClr val="000000"/>
-              </a:buClr>
-              <a:buFont typeface="Arial"/>
-              <a:buChar char="•"/>
-              <a:tabLst>
-                <a:tab pos="0" algn="l"/>
-              </a:tabLst>
-              <a:defRPr lang="en-US" sz="2800" b="0" u="none" strike="noStrike">
-                <a:solidFill>
-                  <a:schemeClr val="dk1"/>
-                </a:solidFill>
-                <a:effectLst/>
-                <a:uFillTx/>
-                <a:latin typeface="Aptos"/>
-              </a:defRPr>
-            </a:lvl1pPr>
-            <a:lvl2pPr lvl="1" algn="l" defTabSz="914400">
-              <a:lnSpc>
-                <a:spcPct val="90000"/>
-              </a:lnSpc>
-              <a:spcBef>
-                <a:spcPts val="499"/>
-              </a:spcBef>
-              <a:buClr>
-                <a:srgbClr val="000000"/>
-              </a:buClr>
-              <a:buFont typeface="Arial"/>
-              <a:buChar char="•"/>
-              <a:tabLst>
-                <a:tab pos="0" algn="l"/>
-              </a:tabLst>
-              <a:defRPr lang="en-US" sz="2400" b="0" u="none" strike="noStrike">
-                <a:solidFill>
-                  <a:schemeClr val="dk1"/>
-                </a:solidFill>
-                <a:effectLst/>
-                <a:uFillTx/>
-                <a:latin typeface="Aptos"/>
-              </a:defRPr>
-            </a:lvl2pPr>
-            <a:lvl3pPr lvl="2" algn="l" defTabSz="914400">
-              <a:lnSpc>
-                <a:spcPct val="90000"/>
-              </a:lnSpc>
-              <a:spcBef>
-                <a:spcPts val="499"/>
-              </a:spcBef>
-              <a:buClr>
-                <a:srgbClr val="000000"/>
-              </a:buClr>
-              <a:buFont typeface="Arial"/>
-              <a:buChar char="•"/>
-              <a:tabLst>
-                <a:tab pos="0" algn="l"/>
-              </a:tabLst>
-              <a:defRPr lang="en-US" sz="2000" b="0" u="none" strike="noStrike">
-                <a:solidFill>
-                  <a:schemeClr val="dk1"/>
-                </a:solidFill>
-                <a:effectLst/>
-                <a:uFillTx/>
-                <a:latin typeface="Aptos"/>
-              </a:defRPr>
-            </a:lvl3pPr>
-            <a:lvl4pPr lvl="3" algn="l" defTabSz="914400">
-              <a:lnSpc>
-                <a:spcPct val="90000"/>
-              </a:lnSpc>
-              <a:spcBef>
-                <a:spcPts val="499"/>
-              </a:spcBef>
-              <a:buClr>
-                <a:srgbClr val="000000"/>
-              </a:buClr>
-              <a:buFont typeface="Arial"/>
-              <a:buChar char="•"/>
-              <a:tabLst>
-                <a:tab pos="0" algn="l"/>
-              </a:tabLst>
-              <a:defRPr lang="en-US" sz="1800" b="0" u="none" strike="noStrike">
-                <a:solidFill>
-                  <a:schemeClr val="dk1"/>
-                </a:solidFill>
-                <a:effectLst/>
-                <a:uFillTx/>
-                <a:latin typeface="Aptos"/>
-              </a:defRPr>
-            </a:lvl4pPr>
-            <a:lvl5pPr lvl="4" algn="l" defTabSz="914400">
-              <a:lnSpc>
-                <a:spcPct val="90000"/>
-              </a:lnSpc>
-              <a:spcBef>
-                <a:spcPts val="499"/>
-              </a:spcBef>
-              <a:buClr>
-                <a:srgbClr val="000000"/>
-              </a:buClr>
-              <a:buFont typeface="Arial"/>
-              <a:buChar char="•"/>
-              <a:tabLst>
-                <a:tab pos="0" algn="l"/>
-              </a:tabLst>
-              <a:defRPr lang="en-US" sz="1800" b="0" u="none" strike="noStrike">
-                <a:solidFill>
-                  <a:schemeClr val="dk1"/>
-                </a:solidFill>
-                <a:effectLst/>
-                <a:uFillTx/>
-                <a:latin typeface="Aptos"/>
-              </a:defRPr>
-            </a:lvl5pPr>
-          </a:lstStyle>
-          <a:p>
-            <a:pPr marL="228600" indent="-228600" algn="l" defTabSz="914400">
-              <a:lnSpc>
-                <a:spcPct val="90000"/>
-              </a:lnSpc>
-              <a:spcBef>
-                <a:spcPts val="1001"/>
-              </a:spcBef>
-              <a:buClr>
-                <a:srgbClr val="000000"/>
-              </a:buClr>
-              <a:buFont typeface="Arial"/>
-              <a:buChar char="•"/>
-              <a:tabLst>
-                <a:tab pos="0" algn="l"/>
-              </a:tabLst>
-            </a:pPr>
-            <a:r>
-              <a:rPr lang="en-US" sz="2800" b="0" u="none" strike="noStrike">
-                <a:solidFill>
-                  <a:schemeClr val="dk1"/>
-                </a:solidFill>
-                <a:effectLst/>
-                <a:uFillTx/>
-                <a:latin typeface="Aptos"/>
-              </a:rPr>
-              <a:t>Click to edit Master text styles</a:t>
-            </a:r>
-            <a:endParaRPr lang="en-US" sz="2800" b="0" u="none" strike="noStrike">
-              <a:solidFill>
-                <a:schemeClr val="dk1"/>
-              </a:solidFill>
-              <a:effectLst/>
-              <a:uFillTx/>
-              <a:latin typeface="Aptos"/>
-            </a:endParaRPr>
-          </a:p>
-          <a:p>
-            <a:pPr marL="685800" lvl="1" indent="-228600" algn="l" defTabSz="914400">
-              <a:lnSpc>
-                <a:spcPct val="90000"/>
-              </a:lnSpc>
-              <a:spcBef>
-                <a:spcPts val="499"/>
-              </a:spcBef>
-              <a:buClr>
-                <a:srgbClr val="000000"/>
-              </a:buClr>
-              <a:buFont typeface="Arial"/>
-              <a:buChar char="•"/>
-              <a:tabLst>
-                <a:tab pos="0" algn="l"/>
-              </a:tabLst>
-            </a:pPr>
-            <a:r>
-              <a:rPr lang="en-US" sz="2400" b="0" u="none" strike="noStrike">
-                <a:solidFill>
-                  <a:schemeClr val="dk1"/>
-                </a:solidFill>
-                <a:effectLst/>
-                <a:uFillTx/>
-                <a:latin typeface="Aptos"/>
-              </a:rPr>
-              <a:t>Second level</a:t>
-            </a:r>
-            <a:endParaRPr lang="en-US" sz="2400" b="0" u="none" strike="noStrike">
-              <a:solidFill>
-                <a:schemeClr val="dk1"/>
-              </a:solidFill>
-              <a:effectLst/>
-              <a:uFillTx/>
-              <a:latin typeface="Aptos"/>
-            </a:endParaRPr>
-          </a:p>
-          <a:p>
-            <a:pPr marL="1143000" lvl="2" indent="-228600" algn="l" defTabSz="914400">
-              <a:lnSpc>
-                <a:spcPct val="90000"/>
-              </a:lnSpc>
-              <a:spcBef>
-                <a:spcPts val="499"/>
-              </a:spcBef>
-              <a:buClr>
-                <a:srgbClr val="000000"/>
-              </a:buClr>
-              <a:buFont typeface="Arial"/>
-              <a:buChar char="•"/>
-              <a:tabLst>
-                <a:tab pos="0" algn="l"/>
-              </a:tabLst>
-            </a:pPr>
-            <a:r>
-              <a:rPr lang="en-US" sz="2000" b="0" u="none" strike="noStrike">
-                <a:solidFill>
-                  <a:schemeClr val="dk1"/>
-                </a:solidFill>
-                <a:effectLst/>
-                <a:uFillTx/>
-                <a:latin typeface="Aptos"/>
-              </a:rPr>
-              <a:t>Third level</a:t>
-            </a:r>
-            <a:endParaRPr lang="en-US" sz="2000" b="0" u="none" strike="noStrike">
-              <a:solidFill>
-                <a:schemeClr val="dk1"/>
-              </a:solidFill>
-              <a:effectLst/>
-              <a:uFillTx/>
-              <a:latin typeface="Aptos"/>
-            </a:endParaRPr>
-          </a:p>
-          <a:p>
-            <a:pPr marL="1600200" lvl="3" indent="-228600" algn="l" defTabSz="914400">
-              <a:lnSpc>
-                <a:spcPct val="90000"/>
-              </a:lnSpc>
-              <a:spcBef>
-                <a:spcPts val="499"/>
-              </a:spcBef>
-              <a:buClr>
-                <a:srgbClr val="000000"/>
-              </a:buClr>
-              <a:buFont typeface="Arial"/>
-              <a:buChar char="•"/>
-              <a:tabLst>
-                <a:tab pos="0" algn="l"/>
-              </a:tabLst>
-            </a:pPr>
-            <a:r>
-              <a:rPr lang="en-US" sz="1800" b="0" u="none" strike="noStrike">
-                <a:solidFill>
-                  <a:schemeClr val="dk1"/>
-                </a:solidFill>
-                <a:effectLst/>
-                <a:uFillTx/>
-                <a:latin typeface="Aptos"/>
-              </a:rPr>
-              <a:t>Fourth level</a:t>
-            </a:r>
-            <a:endParaRPr lang="en-US" sz="1800" b="0" u="none" strike="noStrike">
-              <a:solidFill>
-                <a:schemeClr val="dk1"/>
-              </a:solidFill>
-              <a:effectLst/>
-              <a:uFillTx/>
-              <a:latin typeface="Aptos"/>
-            </a:endParaRPr>
-          </a:p>
-          <a:p>
-            <a:pPr marL="2057400" lvl="4" indent="-228600" algn="l" defTabSz="914400">
-              <a:lnSpc>
-                <a:spcPct val="90000"/>
-              </a:lnSpc>
-              <a:spcBef>
-                <a:spcPts val="499"/>
-              </a:spcBef>
-              <a:buClr>
-                <a:srgbClr val="000000"/>
-              </a:buClr>
-              <a:buFont typeface="Arial"/>
-              <a:buChar char="•"/>
-              <a:tabLst>
-                <a:tab pos="0" algn="l"/>
-              </a:tabLst>
-            </a:pPr>
-            <a:r>
-              <a:rPr lang="en-US" sz="1800" b="0" u="none" strike="noStrike">
-                <a:solidFill>
-                  <a:schemeClr val="dk1"/>
-                </a:solidFill>
-                <a:effectLst/>
-                <a:uFillTx/>
-                <a:latin typeface="Aptos"/>
-              </a:rPr>
-              <a:t>Fifth level</a:t>
-            </a:r>
-            <a:endParaRPr lang="en-US" sz="1800" b="0" u="none" strike="noStrike">
-              <a:solidFill>
-                <a:schemeClr val="dk1"/>
-              </a:solidFill>
-              <a:effectLst/>
-              <a:uFillTx/>
-              <a:latin typeface="Aptos"/>
-            </a:endParaRPr>
-          </a:p>
-        </p:txBody>
-      </p:sp>
-      <p:sp>
-        <p:nvSpPr>
-          <p:cNvPr id="37" name="PlaceHolder 6"/>
-          <p:cNvSpPr>
-            <a:spLocks noGrp="1"/>
-          </p:cNvSpPr>
-          <p:nvPr>
-            <p:ph type="dt" idx="19"/>
-          </p:nvPr>
-        </p:nvSpPr>
-        <p:spPr>
-          <a:xfrm>
-            <a:off x="838080" y="6356520"/>
-            <a:ext cx="2742840" cy="364680"/>
-          </a:xfrm>
-          <a:prstGeom prst="rect">
-            <a:avLst/>
-          </a:prstGeom>
-          <a:noFill/>
-          <a:ln w="0">
-            <a:noFill/>
-          </a:ln>
-        </p:spPr>
-        <p:txBody>
-          <a:bodyPr lIns="91440" tIns="45720" rIns="91440" bIns="45720" anchor="ctr">
-            <a:noAutofit/>
-          </a:bodyPr>
-          <a:lstStyle>
-            <a:lvl1pPr indent="0" algn="l" defTabSz="914400">
-              <a:lnSpc>
-                <a:spcPct val="100000"/>
-              </a:lnSpc>
-              <a:buNone/>
-              <a:defRPr lang="en-US" sz="1200" b="0" u="none" strike="noStrike">
-                <a:solidFill>
-                  <a:schemeClr val="dk1">
-                    <a:tint val="82000"/>
-                  </a:schemeClr>
-                </a:solidFill>
-                <a:effectLst/>
-                <a:uFillTx/>
-                <a:latin typeface="Aptos"/>
-              </a:defRPr>
-            </a:lvl1pPr>
-          </a:lstStyle>
-          <a:p>
-            <a:pPr indent="0" algn="l" defTabSz="914400">
-              <a:lnSpc>
-                <a:spcPct val="100000"/>
-              </a:lnSpc>
-              <a:buNone/>
-            </a:pPr>
-            <a:r>
-              <a:rPr lang="en-US" sz="1200" b="0" u="none" strike="noStrike">
-                <a:solidFill>
-                  <a:schemeClr val="dk1">
-                    <a:tint val="82000"/>
-                  </a:schemeClr>
-                </a:solidFill>
-                <a:effectLst/>
-                <a:uFillTx/>
-                <a:latin typeface="Aptos"/>
-              </a:rPr>
-              <a:t>&lt;date/time&gt;</a:t>
-            </a:r>
-            <a:endParaRPr lang="en-US" sz="1200" b="0" u="none" strike="noStrike">
-              <a:solidFill>
-                <a:srgbClr val="000000"/>
-              </a:solidFill>
-              <a:effectLst/>
-              <a:uFillTx/>
-              <a:latin typeface="Times New Roman"/>
-            </a:endParaRPr>
-          </a:p>
-        </p:txBody>
-      </p:sp>
-      <p:sp>
-        <p:nvSpPr>
-          <p:cNvPr id="38" name="PlaceHolder 7"/>
-          <p:cNvSpPr>
-            <a:spLocks noGrp="1"/>
-          </p:cNvSpPr>
-          <p:nvPr>
-            <p:ph type="ftr" idx="20"/>
-          </p:nvPr>
-        </p:nvSpPr>
-        <p:spPr>
-          <a:xfrm>
-            <a:off x="4038480" y="6356520"/>
-            <a:ext cx="4114440" cy="364680"/>
-          </a:xfrm>
-          <a:prstGeom prst="rect">
-            <a:avLst/>
-          </a:prstGeom>
-          <a:noFill/>
-          <a:ln w="0">
-            <a:noFill/>
-          </a:ln>
-        </p:spPr>
-        <p:txBody>
-          <a:bodyPr lIns="91440" tIns="45720" rIns="91440" bIns="45720" anchor="ctr">
-            <a:noAutofit/>
-          </a:bodyPr>
-          <a:lstStyle>
-            <a:lvl1pPr indent="0" algn="ctr">
-              <a:buNone/>
-              <a:defRPr lang="en-US" sz="1400" b="0" u="none" strike="noStrike">
-                <a:solidFill>
-                  <a:srgbClr val="000000"/>
-                </a:solidFill>
-                <a:effectLst/>
-                <a:uFillTx/>
-                <a:latin typeface="Times New Roman"/>
-              </a:defRPr>
-            </a:lvl1pPr>
-          </a:lstStyle>
-          <a:p>
-            <a:pPr indent="0" algn="ctr">
-              <a:buNone/>
-            </a:pPr>
-            <a:r>
-              <a:rPr lang="en-US" sz="1400" b="0" u="none" strike="noStrike">
-                <a:solidFill>
-                  <a:srgbClr val="000000"/>
-                </a:solidFill>
-                <a:effectLst/>
-                <a:uFillTx/>
-                <a:latin typeface="Times New Roman"/>
-              </a:rPr>
-              <a:t>&lt;footer&gt;</a:t>
-            </a:r>
-            <a:endParaRPr lang="en-US" sz="1400" b="0" u="none" strike="noStrike">
-              <a:solidFill>
-                <a:srgbClr val="000000"/>
-              </a:solidFill>
-              <a:effectLst/>
-              <a:uFillTx/>
-              <a:latin typeface="Times New Roman"/>
-            </a:endParaRPr>
-          </a:p>
-        </p:txBody>
-      </p:sp>
-      <p:sp>
-        <p:nvSpPr>
-          <p:cNvPr id="39" name="PlaceHolder 8"/>
-          <p:cNvSpPr>
-            <a:spLocks noGrp="1"/>
-          </p:cNvSpPr>
-          <p:nvPr>
-            <p:ph type="sldNum" idx="21"/>
-          </p:nvPr>
-        </p:nvSpPr>
-        <p:spPr>
-          <a:xfrm>
-            <a:off x="8610480" y="6356520"/>
-            <a:ext cx="2742840" cy="364680"/>
-          </a:xfrm>
-          <a:prstGeom prst="rect">
-            <a:avLst/>
-          </a:prstGeom>
-          <a:noFill/>
-          <a:ln w="0">
-            <a:noFill/>
-          </a:ln>
-        </p:spPr>
-        <p:txBody>
-          <a:bodyPr lIns="91440" tIns="45720" rIns="91440" bIns="45720" anchor="ctr">
-            <a:noAutofit/>
-          </a:bodyPr>
-          <a:lstStyle>
-            <a:lvl1pPr indent="0" algn="r" defTabSz="914400">
-              <a:lnSpc>
-                <a:spcPct val="100000"/>
-              </a:lnSpc>
-              <a:buNone/>
-              <a:defRPr lang="en-US" sz="1200" b="0" u="none" strike="noStrike">
-                <a:solidFill>
-                  <a:schemeClr val="dk1">
-                    <a:tint val="82000"/>
-                  </a:schemeClr>
-                </a:solidFill>
-                <a:effectLst/>
-                <a:uFillTx/>
-                <a:latin typeface="Aptos"/>
-              </a:defRPr>
-            </a:lvl1pPr>
-          </a:lstStyle>
-          <a:p>
-            <a:pPr indent="0" algn="r" defTabSz="914400">
-              <a:lnSpc>
-                <a:spcPct val="100000"/>
-              </a:lnSpc>
-              <a:buNone/>
-            </a:pPr>
-            <a:fld id="{4B49F0E5-5FC5-4D90-B5C6-A2C44AE4CE63}" type="slidenum">
-              <a:rPr lang="en-US" sz="1200" b="0" u="none" strike="noStrike">
-                <a:solidFill>
-                  <a:schemeClr val="dk1">
-                    <a:tint val="82000"/>
-                  </a:schemeClr>
-                </a:solidFill>
-                <a:effectLst/>
-                <a:uFillTx/>
-                <a:latin typeface="Aptos"/>
-              </a:rPr>
-              <a:t>&lt;number&gt;</a:t>
-            </a:fld>
-            <a:endParaRPr lang="en-US" sz="1200" b="0" u="none" strike="noStrike">
-              <a:solidFill>
-                <a:srgbClr val="000000"/>
-              </a:solidFill>
-              <a:effectLst/>
-              <a:uFillTx/>
-              <a:latin typeface="Times New Roman"/>
-            </a:endParaRPr>
-          </a:p>
-        </p:txBody>
-      </p:sp>
-    </p:spTree>
-  </p:cSld>
-</p:sldLayout>
-</file>
-
-<file path=ppt/slideLayouts/slideLayout8.xml><?xml version="1.0" encoding="utf-8"?>
-<p:sldLayout xmlns:a="http://schemas.openxmlformats.org/drawingml/2006/main" xmlns:p="http://schemas.openxmlformats.org/presentationml/2006/main" xmlns:r="http://schemas.openxmlformats.org/officeDocument/2006/relationships" xmlns:p14="http://schemas.microsoft.com/office/powerpoint/2010/main" xmlns:p15="http://schemas.microsoft.com/office/powerpoint/2012/main" xmlns:mc="http://schemas.openxmlformats.org/markup-compatibility/2006" type="titleOnly" preserve="1">
-  <p:cSld name="Title Only">
-    <p:bg>
-      <p:bgPr>
-        <a:solidFill>
-          <a:srgbClr val="FFFFFF"/>
-        </a:solidFill>
-      </p:bgPr>
-    </p:bg>
-    <p:spTree>
-      <p:nvGrpSpPr>
-        <p:cNvPr id="1" name=""/>
-        <p:cNvGrpSpPr/>
-        <p:nvPr/>
-      </p:nvGrpSpPr>
-      <p:grpSpPr>
-        <a:xfrm>
-          <a:off x="0" y="0"/>
-          <a:ext cx="0" cy="0"/>
-          <a:chOff x="0" y="0"/>
-          <a:chExt cx="0" cy="0"/>
-        </a:xfrm>
-      </p:grpSpPr>
-      <p:sp>
-        <p:nvSpPr>
-          <p:cNvPr id="40" name="PlaceHolder 1"/>
-          <p:cNvSpPr>
-            <a:spLocks noGrp="1"/>
-          </p:cNvSpPr>
-          <p:nvPr>
-            <p:ph type="title"/>
-          </p:nvPr>
-        </p:nvSpPr>
-        <p:spPr>
-          <a:xfrm>
-            <a:off x="838080" y="365040"/>
-            <a:ext cx="10515240" cy="1325160"/>
-          </a:xfrm>
-          <a:prstGeom prst="rect">
-            <a:avLst/>
-          </a:prstGeom>
-          <a:noFill/>
-          <a:ln w="0">
-            <a:noFill/>
-          </a:ln>
-        </p:spPr>
-        <p:txBody>
-          <a:bodyPr lIns="91440" tIns="45720" rIns="91440" bIns="45720" anchor="ctr">
-            <a:noAutofit/>
-          </a:bodyPr>
-          <a:lstStyle>
-            <a:lvl1pPr indent="0" algn="l" defTabSz="914400">
-              <a:lnSpc>
-                <a:spcPct val="90000"/>
-              </a:lnSpc>
-              <a:buNone/>
-              <a:defRPr lang="en-US" sz="4400" b="0" u="none" strike="noStrike">
-                <a:solidFill>
-                  <a:schemeClr val="dk1"/>
-                </a:solidFill>
-                <a:effectLst/>
-                <a:uFillTx/>
-                <a:latin typeface="Aptos Display"/>
-              </a:defRPr>
-            </a:lvl1pPr>
-          </a:lstStyle>
-          <a:p>
-            <a:pPr indent="0" algn="l" defTabSz="914400">
-              <a:lnSpc>
-                <a:spcPct val="90000"/>
-              </a:lnSpc>
-              <a:buNone/>
-            </a:pPr>
-            <a:r>
-              <a:rPr lang="en-US" sz="4400" b="0" u="none" strike="noStrike">
-                <a:solidFill>
-                  <a:schemeClr val="dk1"/>
-                </a:solidFill>
-                <a:effectLst/>
-                <a:uFillTx/>
-                <a:latin typeface="Aptos Display"/>
-              </a:rPr>
-              <a:t>Click to edit Master title style</a:t>
-            </a:r>
-            <a:endParaRPr lang="en-US" sz="4400" b="0" u="none" strike="noStrike">
-              <a:solidFill>
-                <a:schemeClr val="dk1"/>
-              </a:solidFill>
-              <a:effectLst/>
-              <a:uFillTx/>
-              <a:latin typeface="Aptos Display"/>
-            </a:endParaRPr>
-          </a:p>
-        </p:txBody>
-      </p:sp>
-      <p:sp>
-        <p:nvSpPr>
-          <p:cNvPr id="41" name="PlaceHolder 2"/>
-          <p:cNvSpPr>
-            <a:spLocks noGrp="1"/>
-          </p:cNvSpPr>
-          <p:nvPr>
-            <p:ph type="dt" idx="22"/>
-          </p:nvPr>
-        </p:nvSpPr>
-        <p:spPr>
-          <a:xfrm>
-            <a:off x="838080" y="6356520"/>
-            <a:ext cx="2742840" cy="364680"/>
-          </a:xfrm>
-          <a:prstGeom prst="rect">
-            <a:avLst/>
-          </a:prstGeom>
-          <a:noFill/>
-          <a:ln w="0">
-            <a:noFill/>
-          </a:ln>
-        </p:spPr>
-        <p:txBody>
-          <a:bodyPr lIns="91440" tIns="45720" rIns="91440" bIns="45720" anchor="ctr">
-            <a:noAutofit/>
-          </a:bodyPr>
-          <a:lstStyle>
-            <a:lvl1pPr indent="0" algn="l" defTabSz="914400">
-              <a:lnSpc>
-                <a:spcPct val="100000"/>
-              </a:lnSpc>
-              <a:buNone/>
-              <a:defRPr lang="en-US" sz="1200" b="0" u="none" strike="noStrike">
-                <a:solidFill>
-                  <a:schemeClr val="dk1">
-                    <a:tint val="82000"/>
-                  </a:schemeClr>
-                </a:solidFill>
-                <a:effectLst/>
-                <a:uFillTx/>
-                <a:latin typeface="Aptos"/>
-              </a:defRPr>
-            </a:lvl1pPr>
-          </a:lstStyle>
-          <a:p>
-            <a:pPr indent="0" algn="l" defTabSz="914400">
-              <a:lnSpc>
-                <a:spcPct val="100000"/>
-              </a:lnSpc>
-              <a:buNone/>
-            </a:pPr>
-            <a:r>
-              <a:rPr lang="en-US" sz="1200" b="0" u="none" strike="noStrike">
-                <a:solidFill>
-                  <a:schemeClr val="dk1">
-                    <a:tint val="82000"/>
-                  </a:schemeClr>
-                </a:solidFill>
-                <a:effectLst/>
-                <a:uFillTx/>
-                <a:latin typeface="Aptos"/>
-              </a:rPr>
-              <a:t>&lt;date/time&gt;</a:t>
-            </a:r>
-            <a:endParaRPr lang="en-US" sz="1200" b="0" u="none" strike="noStrike">
-              <a:solidFill>
-                <a:srgbClr val="000000"/>
-              </a:solidFill>
-              <a:effectLst/>
-              <a:uFillTx/>
-              <a:latin typeface="Times New Roman"/>
-            </a:endParaRPr>
-          </a:p>
-        </p:txBody>
-      </p:sp>
-      <p:sp>
-        <p:nvSpPr>
-          <p:cNvPr id="42" name="PlaceHolder 3"/>
-          <p:cNvSpPr>
-            <a:spLocks noGrp="1"/>
-          </p:cNvSpPr>
-          <p:nvPr>
-            <p:ph type="ftr" idx="23"/>
-          </p:nvPr>
-        </p:nvSpPr>
-        <p:spPr>
-          <a:xfrm>
-            <a:off x="4038480" y="6356520"/>
-            <a:ext cx="4114440" cy="364680"/>
-          </a:xfrm>
-          <a:prstGeom prst="rect">
-            <a:avLst/>
-          </a:prstGeom>
-          <a:noFill/>
-          <a:ln w="0">
-            <a:noFill/>
-          </a:ln>
-        </p:spPr>
-        <p:txBody>
-          <a:bodyPr lIns="91440" tIns="45720" rIns="91440" bIns="45720" anchor="ctr">
-            <a:noAutofit/>
-          </a:bodyPr>
-          <a:lstStyle>
-            <a:lvl1pPr indent="0" algn="ctr">
-              <a:buNone/>
-              <a:defRPr lang="en-US" sz="1400" b="0" u="none" strike="noStrike">
-                <a:solidFill>
-                  <a:srgbClr val="000000"/>
-                </a:solidFill>
-                <a:effectLst/>
-                <a:uFillTx/>
-                <a:latin typeface="Times New Roman"/>
-              </a:defRPr>
-            </a:lvl1pPr>
-          </a:lstStyle>
-          <a:p>
-            <a:pPr indent="0" algn="ctr">
-              <a:buNone/>
-            </a:pPr>
-            <a:r>
-              <a:rPr lang="en-US" sz="1400" b="0" u="none" strike="noStrike">
-                <a:solidFill>
-                  <a:srgbClr val="000000"/>
-                </a:solidFill>
-                <a:effectLst/>
-                <a:uFillTx/>
-                <a:latin typeface="Times New Roman"/>
-              </a:rPr>
-              <a:t>&lt;footer&gt;</a:t>
-            </a:r>
-            <a:endParaRPr lang="en-US" sz="1400" b="0" u="none" strike="noStrike">
-              <a:solidFill>
-                <a:srgbClr val="000000"/>
-              </a:solidFill>
-              <a:effectLst/>
-              <a:uFillTx/>
-              <a:latin typeface="Times New Roman"/>
-            </a:endParaRPr>
-          </a:p>
-        </p:txBody>
-      </p:sp>
-      <p:sp>
-        <p:nvSpPr>
-          <p:cNvPr id="43" name="PlaceHolder 4"/>
-          <p:cNvSpPr>
-            <a:spLocks noGrp="1"/>
-          </p:cNvSpPr>
-          <p:nvPr>
-            <p:ph type="sldNum" idx="24"/>
-          </p:nvPr>
-        </p:nvSpPr>
-        <p:spPr>
-          <a:xfrm>
-            <a:off x="8610480" y="6356520"/>
-            <a:ext cx="2742840" cy="364680"/>
-          </a:xfrm>
-          <a:prstGeom prst="rect">
-            <a:avLst/>
-          </a:prstGeom>
-          <a:noFill/>
-          <a:ln w="0">
-            <a:noFill/>
-          </a:ln>
-        </p:spPr>
-        <p:txBody>
-          <a:bodyPr lIns="91440" tIns="45720" rIns="91440" bIns="45720" anchor="ctr">
-            <a:noAutofit/>
-          </a:bodyPr>
-          <a:lstStyle>
-            <a:lvl1pPr indent="0" algn="r" defTabSz="914400">
-              <a:lnSpc>
-                <a:spcPct val="100000"/>
-              </a:lnSpc>
-              <a:buNone/>
-              <a:defRPr lang="en-US" sz="1200" b="0" u="none" strike="noStrike">
-                <a:solidFill>
-                  <a:schemeClr val="dk1">
-                    <a:tint val="82000"/>
-                  </a:schemeClr>
-                </a:solidFill>
-                <a:effectLst/>
-                <a:uFillTx/>
-                <a:latin typeface="Aptos"/>
-              </a:defRPr>
-            </a:lvl1pPr>
-          </a:lstStyle>
-          <a:p>
-            <a:pPr indent="0" algn="r" defTabSz="914400">
-              <a:lnSpc>
-                <a:spcPct val="100000"/>
-              </a:lnSpc>
-              <a:buNone/>
-            </a:pPr>
-            <a:fld id="{516CCBE6-6919-4CC6-A1F7-AF3EC55F3392}" type="slidenum">
-              <a:rPr lang="en-US" sz="1200" b="0" u="none" strike="noStrike">
-                <a:solidFill>
-                  <a:schemeClr val="dk1">
-                    <a:tint val="82000"/>
-                  </a:schemeClr>
-                </a:solidFill>
-                <a:effectLst/>
-                <a:uFillTx/>
-                <a:latin typeface="Aptos"/>
-              </a:rPr>
-              <a:t>&lt;number&gt;</a:t>
-            </a:fld>
-            <a:endParaRPr lang="en-US" sz="1200" b="0" u="none" strike="noStrike">
-              <a:solidFill>
-                <a:srgbClr val="000000"/>
-              </a:solidFill>
-              <a:effectLst/>
-              <a:uFillTx/>
-              <a:latin typeface="Times New Roman"/>
-            </a:endParaRPr>
-          </a:p>
-        </p:txBody>
-      </p:sp>
-    </p:spTree>
-  </p:cSld>
-</p:sldLayout>
-</file>
-
-<file path=ppt/slideLayouts/slideLayout9.xml><?xml version="1.0" encoding="utf-8"?>
-<p:sldLayout xmlns:a="http://schemas.openxmlformats.org/drawingml/2006/main" xmlns:p="http://schemas.openxmlformats.org/presentationml/2006/main" xmlns:r="http://schemas.openxmlformats.org/officeDocument/2006/relationships" xmlns:p14="http://schemas.microsoft.com/office/powerpoint/2010/main" xmlns:p15="http://schemas.microsoft.com/office/powerpoint/2012/main" xmlns:mc="http://schemas.openxmlformats.org/markup-compatibility/2006" type="blank" preserve="1">
-  <p:cSld name="Blank">
-    <p:bg>
-      <p:bgPr>
-        <a:solidFill>
-          <a:srgbClr val="FFFFFF"/>
-        </a:solidFill>
-      </p:bgPr>
-    </p:bg>
-    <p:spTree>
-      <p:nvGrpSpPr>
-        <p:cNvPr id="1" name=""/>
-        <p:cNvGrpSpPr/>
-        <p:nvPr/>
-      </p:nvGrpSpPr>
-      <p:grpSpPr>
-        <a:xfrm>
-          <a:off x="0" y="0"/>
-          <a:ext cx="0" cy="0"/>
-          <a:chOff x="0" y="0"/>
-          <a:chExt cx="0" cy="0"/>
-        </a:xfrm>
-      </p:grpSpPr>
-      <p:sp>
-        <p:nvSpPr>
-          <p:cNvPr id="44" name="PlaceHolder 1"/>
-          <p:cNvSpPr>
-            <a:spLocks noGrp="1"/>
-          </p:cNvSpPr>
-          <p:nvPr>
-            <p:ph type="dt" idx="25"/>
-          </p:nvPr>
-        </p:nvSpPr>
-        <p:spPr>
-          <a:xfrm>
-            <a:off x="838080" y="6356520"/>
-            <a:ext cx="2742840" cy="364680"/>
-          </a:xfrm>
-          <a:prstGeom prst="rect">
-            <a:avLst/>
-          </a:prstGeom>
-          <a:noFill/>
-          <a:ln w="0">
-            <a:noFill/>
-          </a:ln>
-        </p:spPr>
-        <p:txBody>
-          <a:bodyPr lIns="91440" tIns="45720" rIns="91440" bIns="45720" anchor="ctr">
-            <a:noAutofit/>
-          </a:bodyPr>
-          <a:lstStyle>
-            <a:lvl1pPr indent="0" algn="l" defTabSz="914400">
-              <a:lnSpc>
-                <a:spcPct val="100000"/>
-              </a:lnSpc>
-              <a:buNone/>
-              <a:defRPr lang="en-US" sz="1200" b="0" u="none" strike="noStrike">
-                <a:solidFill>
-                  <a:schemeClr val="dk1">
-                    <a:tint val="82000"/>
-                  </a:schemeClr>
-                </a:solidFill>
-                <a:effectLst/>
-                <a:uFillTx/>
-                <a:latin typeface="Aptos"/>
-              </a:defRPr>
-            </a:lvl1pPr>
-          </a:lstStyle>
-          <a:p>
-            <a:pPr indent="0" algn="l" defTabSz="914400">
-              <a:lnSpc>
-                <a:spcPct val="100000"/>
-              </a:lnSpc>
-              <a:buNone/>
-            </a:pPr>
-            <a:r>
-              <a:rPr lang="en-US" sz="1200" b="0" u="none" strike="noStrike">
-                <a:solidFill>
-                  <a:schemeClr val="dk1">
-                    <a:tint val="82000"/>
-                  </a:schemeClr>
-                </a:solidFill>
-                <a:effectLst/>
-                <a:uFillTx/>
-                <a:latin typeface="Aptos"/>
-              </a:rPr>
-              <a:t>&lt;date/time&gt;</a:t>
-            </a:r>
-            <a:endParaRPr lang="en-US" sz="1200" b="0" u="none" strike="noStrike">
-              <a:solidFill>
-                <a:srgbClr val="000000"/>
-              </a:solidFill>
-              <a:effectLst/>
-              <a:uFillTx/>
-              <a:latin typeface="Times New Roman"/>
-            </a:endParaRPr>
-          </a:p>
-        </p:txBody>
-      </p:sp>
-      <p:sp>
-        <p:nvSpPr>
-          <p:cNvPr id="45" name="PlaceHolder 2"/>
-          <p:cNvSpPr>
-            <a:spLocks noGrp="1"/>
-          </p:cNvSpPr>
-          <p:nvPr>
-            <p:ph type="ftr" idx="26"/>
-          </p:nvPr>
-        </p:nvSpPr>
-        <p:spPr>
-          <a:xfrm>
-            <a:off x="4038480" y="6356520"/>
-            <a:ext cx="4114440" cy="364680"/>
-          </a:xfrm>
-          <a:prstGeom prst="rect">
-            <a:avLst/>
-          </a:prstGeom>
-          <a:noFill/>
-          <a:ln w="0">
-            <a:noFill/>
-          </a:ln>
-        </p:spPr>
-        <p:txBody>
-          <a:bodyPr lIns="91440" tIns="45720" rIns="91440" bIns="45720" anchor="ctr">
-            <a:noAutofit/>
-          </a:bodyPr>
-          <a:lstStyle>
-            <a:lvl1pPr indent="0" algn="ctr">
-              <a:buNone/>
-              <a:defRPr lang="en-US" sz="1400" b="0" u="none" strike="noStrike">
-                <a:solidFill>
-                  <a:srgbClr val="000000"/>
-                </a:solidFill>
-                <a:effectLst/>
-                <a:uFillTx/>
-                <a:latin typeface="Times New Roman"/>
-              </a:defRPr>
-            </a:lvl1pPr>
-          </a:lstStyle>
-          <a:p>
-            <a:pPr indent="0" algn="ctr">
-              <a:buNone/>
-            </a:pPr>
-            <a:r>
-              <a:rPr lang="en-US" sz="1400" b="0" u="none" strike="noStrike">
-                <a:solidFill>
-                  <a:srgbClr val="000000"/>
-                </a:solidFill>
-                <a:effectLst/>
-                <a:uFillTx/>
-                <a:latin typeface="Times New Roman"/>
-              </a:rPr>
-              <a:t>&lt;footer&gt;</a:t>
-            </a:r>
-            <a:endParaRPr lang="en-US" sz="1400" b="0" u="none" strike="noStrike">
-              <a:solidFill>
-                <a:srgbClr val="000000"/>
-              </a:solidFill>
-              <a:effectLst/>
-              <a:uFillTx/>
-              <a:latin typeface="Times New Roman"/>
-            </a:endParaRPr>
-          </a:p>
-        </p:txBody>
-      </p:sp>
-      <p:sp>
-        <p:nvSpPr>
-          <p:cNvPr id="46" name="PlaceHolder 3"/>
-          <p:cNvSpPr>
-            <a:spLocks noGrp="1"/>
-          </p:cNvSpPr>
-          <p:nvPr>
-            <p:ph type="sldNum" idx="27"/>
-          </p:nvPr>
-        </p:nvSpPr>
-        <p:spPr>
-          <a:xfrm>
-            <a:off x="8610480" y="6356520"/>
-            <a:ext cx="2742840" cy="364680"/>
-          </a:xfrm>
-          <a:prstGeom prst="rect">
-            <a:avLst/>
-          </a:prstGeom>
-          <a:noFill/>
-          <a:ln w="0">
-            <a:noFill/>
-          </a:ln>
-        </p:spPr>
-        <p:txBody>
-          <a:bodyPr lIns="91440" tIns="45720" rIns="91440" bIns="45720" anchor="ctr">
-            <a:noAutofit/>
-          </a:bodyPr>
-          <a:lstStyle>
-            <a:lvl1pPr indent="0" algn="r" defTabSz="914400">
-              <a:lnSpc>
-                <a:spcPct val="100000"/>
-              </a:lnSpc>
-              <a:buNone/>
-              <a:defRPr lang="en-US" sz="1200" b="0" u="none" strike="noStrike">
-                <a:solidFill>
-                  <a:schemeClr val="dk1">
-                    <a:tint val="82000"/>
-                  </a:schemeClr>
-                </a:solidFill>
-                <a:effectLst/>
-                <a:uFillTx/>
-                <a:latin typeface="Aptos"/>
-              </a:defRPr>
-            </a:lvl1pPr>
-          </a:lstStyle>
-          <a:p>
-            <a:pPr indent="0" algn="r" defTabSz="914400">
-              <a:lnSpc>
-                <a:spcPct val="100000"/>
-              </a:lnSpc>
-              <a:buNone/>
-            </a:pPr>
-            <a:fld id="{5F4DB814-D278-489D-9822-B827336714DC}" type="slidenum">
+              <a:tabLst>
+                <a:tab pos="0" algn="l"/>
+              </a:tabLst>
+            </a:pPr>
+            <a:fld id="{B58DA0B4-8E80-4ABE-A23D-24C96D795D40}" type="slidenum">
               <a:rPr lang="en-US" sz="1200" b="0" u="none" strike="noStrike">
                 <a:solidFill>
                   <a:schemeClr val="dk1">
@@ -6874,7 +7687,7 @@
       </p:grpSpPr>
       <p:sp>
         <p:nvSpPr>
-          <p:cNvPr id="59" name="PlaceHolder 1"/>
+          <p:cNvPr id="61" name="PlaceHolder 1"/>
           <p:cNvSpPr>
             <a:spLocks noGrp="1"/>
           </p:cNvSpPr>
@@ -6885,7 +7698,7 @@
         <p:spPr>
           <a:xfrm>
             <a:off x="838080" y="365040"/>
-            <a:ext cx="10515240" cy="1325160"/>
+            <a:ext cx="10514880" cy="1324800"/>
           </a:xfrm>
           <a:prstGeom prst="rect">
             <a:avLst/>
@@ -6905,6 +7718,9 @@
                 <a:spcPct val="90000"/>
               </a:lnSpc>
               <a:buNone/>
+              <a:tabLst>
+                <a:tab pos="0" algn="l"/>
+              </a:tabLst>
             </a:pPr>
             <a:r>
               <a:rPr lang="en-US" sz="4400" b="0" u="none" strike="noStrike">
@@ -6930,7 +7746,7 @@
       </p:sp>
       <p:sp>
         <p:nvSpPr>
-          <p:cNvPr id="60" name="PlaceHolder 2"/>
+          <p:cNvPr id="62" name="PlaceHolder 2"/>
           <p:cNvSpPr>
             <a:spLocks noGrp="1"/>
           </p:cNvSpPr>
@@ -6941,7 +7757,7 @@
         <p:spPr>
           <a:xfrm>
             <a:off x="838080" y="1825560"/>
-            <a:ext cx="10515240" cy="4350960"/>
+            <a:ext cx="10514880" cy="4350600"/>
           </a:xfrm>
           <a:prstGeom prst="rect">
             <a:avLst/>
@@ -7012,7 +7828,7 @@
                 <a:uFillTx/>
                 <a:latin typeface="Aptos"/>
               </a:rPr>
-              <a:t>OpenCV Learning and Testing</a:t>
+              <a:t>OpenCV testing and implementation</a:t>
             </a:r>
             <a:endParaRPr lang="en-US" sz="2400" b="0" u="none" strike="noStrike">
               <a:solidFill>
@@ -7024,6 +7840,40 @@
             </a:endParaRPr>
           </a:p>
           <a:p>
+            <a:pPr marL="228600" indent="-228600" algn="l" defTabSz="914400">
+              <a:lnSpc>
+                <a:spcPct val="90000"/>
+              </a:lnSpc>
+              <a:spcBef>
+                <a:spcPts val="1001"/>
+              </a:spcBef>
+              <a:buClr>
+                <a:srgbClr val="000000"/>
+              </a:buClr>
+              <a:buFont typeface="Arial"/>
+              <a:buChar char="•"/>
+            </a:pPr>
+            <a:r>
+              <a:rPr lang="en-US" sz="2800" b="1" u="none" strike="noStrike">
+                <a:solidFill>
+                  <a:schemeClr val="dk1"/>
+                </a:solidFill>
+                <a:effectLst/>
+                <a:uFillTx/>
+                <a:latin typeface="Aptos"/>
+              </a:rPr>
+              <a:t>Progress for the week</a:t>
+            </a:r>
+            <a:endParaRPr lang="en-US" sz="2800" b="0" u="none" strike="noStrike">
+              <a:solidFill>
+                <a:schemeClr val="dk1"/>
+              </a:solidFill>
+              <a:effectLst/>
+              <a:uFillTx/>
+              <a:latin typeface="Aptos"/>
+            </a:endParaRPr>
+          </a:p>
+          <a:p>
             <a:pPr marL="685800" lvl="1" indent="-228600" algn="l" defTabSz="914400">
               <a:lnSpc>
                 <a:spcPct val="90000"/>
@@ -7046,7 +7896,7 @@
                 <a:uFillTx/>
                 <a:latin typeface="Aptos"/>
               </a:rPr>
-              <a:t>Test vehicle components together </a:t>
+              <a:t>OpenCV testing through Laptop Webcam</a:t>
             </a:r>
             <a:endParaRPr lang="en-US" sz="2400" b="0" u="none" strike="noStrike">
               <a:solidFill>
@@ -7058,6 +7908,74 @@
             </a:endParaRPr>
           </a:p>
           <a:p>
+            <a:pPr marL="685800" lvl="1" indent="-228600" algn="l" defTabSz="914400">
+              <a:lnSpc>
+                <a:spcPct val="90000"/>
+              </a:lnSpc>
+              <a:spcBef>
+                <a:spcPts val="499"/>
+              </a:spcBef>
+              <a:buClr>
+                <a:srgbClr val="000000"/>
+              </a:buClr>
+              <a:buFont typeface="Arial"/>
+              <a:buChar char="•"/>
+            </a:pPr>
+            <a:r>
+              <a:rPr lang="en-US" sz="2400" b="0" u="none" strike="noStrike">
+                <a:solidFill>
+                  <a:schemeClr val="dk1"/>
+                </a:solidFill>
+                <a:effectLst/>
+                <a:uFillTx/>
+                <a:latin typeface="Aptos"/>
+              </a:rPr>
+              <a:t>Implement OpenCV to RaspberryPi</a:t>
+            </a:r>
+            <a:endParaRPr lang="en-US" sz="2400" b="0" u="none" strike="noStrike">
+              <a:solidFill>
+                <a:schemeClr val="dk1"/>
+              </a:solidFill>
+              <a:effectLst/>
+              <a:uFillTx/>
+              <a:latin typeface="Aptos"/>
+            </a:endParaRPr>
+          </a:p>
+          <a:p>
+            <a:pPr marL="685800" lvl="1" indent="-228600" algn="l" defTabSz="914400">
+              <a:lnSpc>
+                <a:spcPct val="90000"/>
+              </a:lnSpc>
+              <a:spcBef>
+                <a:spcPts val="499"/>
+              </a:spcBef>
+              <a:buClr>
+                <a:srgbClr val="000000"/>
+              </a:buClr>
+              <a:buFont typeface="Arial"/>
+              <a:buChar char="•"/>
+            </a:pPr>
+            <a:r>
+              <a:rPr lang="en-US" sz="2400" b="0" u="none" strike="noStrike">
+                <a:solidFill>
+                  <a:schemeClr val="dk1"/>
+                </a:solidFill>
+                <a:effectLst/>
+                <a:uFillTx/>
+                <a:latin typeface="Aptos"/>
+              </a:rPr>
+              <a:t>Tested all components</a:t>
+            </a:r>
+            <a:endParaRPr lang="en-US" sz="2400" b="0" u="none" strike="noStrike">
+              <a:solidFill>
+                <a:schemeClr val="dk1"/>
+              </a:solidFill>
+              <a:effectLst/>
+              <a:uFillTx/>
+              <a:latin typeface="Aptos"/>
+            </a:endParaRPr>
+          </a:p>
+          <a:p>
             <a:pPr marL="228600" indent="-228600" algn="l" defTabSz="914400">
               <a:lnSpc>
                 <a:spcPct val="90000"/>
@@ -7080,7 +7998,7 @@
                 <a:uFillTx/>
                 <a:latin typeface="Aptos"/>
               </a:rPr>
-              <a:t>Progress for the week</a:t>
+              <a:t>Goals for next week</a:t>
             </a:r>
             <a:endParaRPr lang="en-US" sz="2800" b="0" u="none" strike="noStrike">
               <a:solidFill>
@@ -7114,7 +8032,7 @@
                 <a:uFillTx/>
                 <a:latin typeface="Aptos"/>
               </a:rPr>
-              <a:t>OpenCV testing on Webcam</a:t>
+              <a:t>Fine tune OpenCV for RaspberryPi</a:t>
             </a:r>
             <a:endParaRPr lang="en-US" sz="2400" b="0" u="none" strike="noStrike">
               <a:solidFill>
@@ -7126,6 +8044,40 @@
             </a:endParaRPr>
           </a:p>
           <a:p>
+            <a:pPr marL="228600" indent="-228600" algn="l" defTabSz="914400">
+              <a:lnSpc>
+                <a:spcPct val="90000"/>
+              </a:lnSpc>
+              <a:spcBef>
+                <a:spcPts val="1001"/>
+              </a:spcBef>
+              <a:buClr>
+                <a:srgbClr val="000000"/>
+              </a:buClr>
+              <a:buFont typeface="Arial"/>
+              <a:buChar char="•"/>
+            </a:pPr>
+            <a:r>
+              <a:rPr lang="en-US" sz="2800" b="1" u="none" strike="noStrike">
+                <a:solidFill>
+                  <a:schemeClr val="dk1"/>
+                </a:solidFill>
+                <a:effectLst/>
+                <a:uFillTx/>
+                <a:latin typeface="Aptos"/>
+              </a:rPr>
+              <a:t>Hours spent on progress</a:t>
+            </a:r>
+            <a:endParaRPr lang="en-US" sz="2800" b="0" u="none" strike="noStrike">
+              <a:solidFill>
+                <a:schemeClr val="dk1"/>
+              </a:solidFill>
+              <a:effectLst/>
+              <a:uFillTx/>
+              <a:latin typeface="Aptos"/>
+            </a:endParaRPr>
+          </a:p>
+          <a:p>
             <a:pPr marL="685800" lvl="1" indent="-228600" algn="l" defTabSz="914400">
               <a:lnSpc>
                 <a:spcPct val="90000"/>
@@ -7148,143 +8100,7 @@
                 <a:uFillTx/>
                 <a:latin typeface="Aptos"/>
               </a:rPr>
-              <a:t>Ordered Chassis to test components</a:t>
-            </a:r>
-            <a:endParaRPr lang="en-US" sz="2400" b="0" u="none" strike="noStrike">
-              <a:solidFill>
-                <a:schemeClr val="dk1"/>
-              </a:solidFill>
-              <a:effectLst/>
-              <a:uFillTx/>
-              <a:latin typeface="Aptos"/>
-            </a:endParaRPr>
-          </a:p>
-          <a:p>
-            <a:pPr marL="228600" indent="-228600" algn="l" defTabSz="914400">
-              <a:lnSpc>
-                <a:spcPct val="90000"/>
-              </a:lnSpc>
-              <a:spcBef>
-                <a:spcPts val="1001"/>
-              </a:spcBef>
-              <a:buClr>
-                <a:srgbClr val="000000"/>
-              </a:buClr>
-              <a:buFont typeface="Arial"/>
-              <a:buChar char="•"/>
-            </a:pPr>
-            <a:r>
-              <a:rPr lang="en-US" sz="2800" b="1" u="none" strike="noStrike">
-                <a:solidFill>
-                  <a:schemeClr val="dk1"/>
-                </a:solidFill>
-                <a:effectLst/>
-                <a:uFillTx/>
-                <a:latin typeface="Aptos"/>
-              </a:rPr>
-              <a:t>Goals for next week</a:t>
-            </a:r>
-            <a:endParaRPr lang="en-US" sz="2800" b="0" u="none" strike="noStrike">
-              <a:solidFill>
-                <a:schemeClr val="dk1"/>
-              </a:solidFill>
-              <a:effectLst/>
-              <a:uFillTx/>
-              <a:latin typeface="Aptos"/>
-            </a:endParaRPr>
-          </a:p>
-          <a:p>
-            <a:pPr marL="685800" lvl="1" indent="-228600" algn="l" defTabSz="914400">
-              <a:lnSpc>
-                <a:spcPct val="90000"/>
-              </a:lnSpc>
-              <a:spcBef>
-                <a:spcPts val="499"/>
-              </a:spcBef>
-              <a:buClr>
-                <a:srgbClr val="000000"/>
-              </a:buClr>
-              <a:buFont typeface="Arial"/>
-              <a:buChar char="•"/>
-            </a:pPr>
-            <a:r>
-              <a:rPr lang="en-US" sz="2400" b="0" u="none" strike="noStrike">
-                <a:solidFill>
-                  <a:schemeClr val="dk1"/>
-                </a:solidFill>
-                <a:effectLst/>
-                <a:uFillTx/>
-                <a:latin typeface="Aptos"/>
-              </a:rPr>
-              <a:t>Implement OpenCV with RaspberryPi Camera</a:t>
-            </a:r>
-            <a:endParaRPr lang="en-US" sz="2400" b="0" u="none" strike="noStrike">
-              <a:solidFill>
-                <a:schemeClr val="dk1"/>
-              </a:solidFill>
-              <a:effectLst/>
-              <a:uFillTx/>
-              <a:latin typeface="Aptos"/>
-            </a:endParaRPr>
-          </a:p>
-          <a:p>
-            <a:pPr marL="228600" indent="-228600" algn="l" defTabSz="914400">
-              <a:lnSpc>
-                <a:spcPct val="90000"/>
-              </a:lnSpc>
-              <a:spcBef>
-                <a:spcPts val="1001"/>
-              </a:spcBef>
-              <a:buClr>
-                <a:srgbClr val="000000"/>
-              </a:buClr>
-              <a:buFont typeface="Arial"/>
-              <a:buChar char="•"/>
-            </a:pPr>
-            <a:r>
-              <a:rPr lang="en-US" sz="2800" b="1" u="none" strike="noStrike">
-                <a:solidFill>
-                  <a:schemeClr val="dk1"/>
-                </a:solidFill>
-                <a:effectLst/>
-                <a:uFillTx/>
-                <a:latin typeface="Aptos"/>
-              </a:rPr>
-              <a:t>Hours spent on progress</a:t>
-            </a:r>
-            <a:endParaRPr lang="en-US" sz="2800" b="0" u="none" strike="noStrike">
-              <a:solidFill>
-                <a:schemeClr val="dk1"/>
-              </a:solidFill>
-              <a:effectLst/>
-              <a:uFillTx/>
-              <a:latin typeface="Aptos"/>
-            </a:endParaRPr>
-          </a:p>
-          <a:p>
-            <a:pPr marL="685800" lvl="1" indent="-228600" algn="l" defTabSz="914400">
-              <a:lnSpc>
-                <a:spcPct val="90000"/>
-              </a:lnSpc>
-              <a:spcBef>
-                <a:spcPts val="499"/>
-              </a:spcBef>
-              <a:buClr>
-                <a:srgbClr val="000000"/>
-              </a:buClr>
-              <a:buFont typeface="Arial"/>
-              <a:buChar char="•"/>
-            </a:pPr>
-            <a:r>
-              <a:rPr lang="en-US" sz="2400" b="0" u="none" strike="noStrike">
-                <a:solidFill>
-                  <a:schemeClr val="dk1"/>
-                </a:solidFill>
-                <a:effectLst/>
-                <a:uFillTx/>
-                <a:latin typeface="Aptos"/>
-              </a:rPr>
-              <a:t>6 hours.</a:t>
+              <a:t>7 hours.</a:t>
             </a:r>
             <a:endParaRPr lang="en-US" sz="2400" b="0" u="none" strike="noStrike">
               <a:solidFill>
@@ -7313,13 +8129,6 @@
 <file path=ppt/slides/slide2.xml><?xml version="1.0" encoding="utf-8"?>
 <p:sld xmlns:a="http://schemas.openxmlformats.org/drawingml/2006/main" xmlns:p="http://schemas.openxmlformats.org/presentationml/2006/main" xmlns:r="http://schemas.openxmlformats.org/officeDocument/2006/relationships" xmlns:p14="http://schemas.microsoft.com/office/powerpoint/2010/main" xmlns:p15="http://schemas.microsoft.com/office/powerpoint/2012/main" xmlns:mc="http://schemas.openxmlformats.org/markup-compatibility/2006">
   <p:cSld>
-    <p:bg>
-      <p:bgPr>
-        <a:solidFill>
-          <a:schemeClr val="lt1"/>
-        </a:solidFill>
-      </p:bgPr>
-    </p:bg>
     <p:spTree>
       <p:nvGrpSpPr>
         <p:cNvPr id="1" name=""/>
@@ -7334,63 +8143,9 @@
           <a:chExt cx="0" cy="0"/>
         </a:xfrm>
       </p:grpSpPr>
-      <p:sp useBgFill="1">
-        <p:nvSpPr>
-          <p:cNvPr id="61" name="Rectangle 11">
-            <a:extLst>
-              <a:ext uri="{C183D7F6-B498-43B3-948B-1728B52AA6E4}">
-                <adec:decorative xmlns:adec="http://schemas.microsoft.com/office/drawing/2017/decorative" val="1"/>
-              </a:ext>
-            </a:extLst>
-          </p:cNvPr>
-          <p:cNvSpPr/>
-          <p:nvPr/>
-        </p:nvSpPr>
-        <p:spPr>
-          <a:xfrm>
-            <a:off x="0" y="0"/>
-            <a:ext cx="12188520" cy="6857640"/>
-          </a:xfrm>
-          <a:prstGeom prst="rect">
-            <a:avLst/>
-          </a:prstGeom>
-          <a:ln>
-            <a:noFill/>
-          </a:ln>
-        </p:spPr>
-        <p:style>
-          <a:lnRef idx="2">
-            <a:schemeClr val="accent1">
-              <a:shade val="50000"/>
-            </a:schemeClr>
-          </a:lnRef>
-          <a:fillRef idx="1">
-            <a:schemeClr val="accent1"/>
-          </a:fillRef>
-          <a:effectRef idx="0">
-            <a:schemeClr val="accent1"/>
-          </a:effectRef>
-          <a:fontRef idx="minor"/>
-        </p:style>
-        <p:txBody>
-          <a:bodyPr lIns="90000" tIns="45000" rIns="90000" bIns="45000" anchor="ctr">
-            <a:noAutofit/>
-          </a:bodyPr>
-          <a:p>
-            <a:endParaRPr lang="en-US" sz="1800" b="0" u="none" strike="noStrike">
-              <a:solidFill>
-                <a:schemeClr val="lt1"/>
-              </a:solidFill>
-              <a:effectLst/>
-              <a:uFillTx/>
-              <a:latin typeface="Aptos"/>
-            </a:endParaRPr>
-          </a:p>
-        </p:txBody>
-      </p:sp>
       <p:sp>
         <p:nvSpPr>
-          <p:cNvPr id="62" name="PlaceHolder 1"/>
+          <p:cNvPr id="63" name="PlaceHolder 1"/>
           <p:cNvSpPr>
             <a:spLocks noGrp="1"/>
           </p:cNvSpPr>
@@ -7400,8 +8155,8 @@
         </p:nvSpPr>
         <p:spPr>
           <a:xfrm>
-            <a:off x="640080" y="325440"/>
-            <a:ext cx="4368240" cy="1956600"/>
+            <a:off x="838080" y="365040"/>
+            <a:ext cx="10514880" cy="1324800"/>
           </a:xfrm>
           <a:prstGeom prst="rect">
             <a:avLst/>
@@ -7412,8 +8167,8 @@
           </a:ln>
         </p:spPr>
         <p:txBody>
-          <a:bodyPr lIns="91440" tIns="45720" rIns="91440" bIns="45720" anchor="b">
-            <a:normAutofit/>
+          <a:bodyPr lIns="0" tIns="0" rIns="0" bIns="0" anchor="ctr">
+            <a:spAutoFit/>
           </a:bodyPr>
           <a:p>
             <a:pPr indent="0" algn="l" defTabSz="914400">
@@ -7421,19 +8176,11 @@
                 <a:spcPct val="90000"/>
               </a:lnSpc>
               <a:buNone/>
-            </a:pPr>
-            <a:r>
-              <a:rPr lang="en-US" sz="5400" b="0" u="none" strike="noStrike">
-                <a:solidFill>
-                  <a:schemeClr val="dk1"/>
-                </a:solidFill>
-                <a:effectLst/>
-                <a:uFillTx/>
-                <a:latin typeface="Aptos Display"/>
-              </a:rPr>
-              <a:t>Test Chassis</a:t>
-            </a:r>
-            <a:endParaRPr lang="en-US" sz="5400" b="0" u="none" strike="noStrike">
+              <a:tabLst>
+                <a:tab pos="0" algn="l"/>
+              </a:tabLst>
+            </a:pPr>
+            <a:endParaRPr lang="en-US" sz="4400" b="0" u="none" strike="noStrike">
               <a:solidFill>
                 <a:schemeClr val="dk1"/>
               </a:solidFill>
@@ -7444,289 +8191,20 @@
           </a:p>
         </p:txBody>
       </p:sp>
-      <p:sp>
-        <p:nvSpPr>
-          <p:cNvPr id="63" name="sketchy line">
-            <a:extLst>
-              <a:ext uri="{C183D7F6-B498-43B3-948B-1728B52AA6E4}">
-                <adec:decorative xmlns:adec="http://schemas.microsoft.com/office/drawing/2017/decorative" val="1"/>
-              </a:ext>
-            </a:extLst>
-          </p:cNvPr>
-          <p:cNvSpPr/>
+      <p:pic>
+        <p:nvPicPr>
+          <p:cNvPr id="64" name=""/>
+          <p:cNvPicPr/>
           <p:nvPr/>
-        </p:nvSpPr>
+        </p:nvPicPr>
+        <p:blipFill>
+          <a:blip r:embed="rId1"/>
+          <a:stretch/>
+        </p:blipFill>
         <p:spPr>
           <a:xfrm>
-            <a:off x="640080" y="2586960"/>
-            <a:ext cx="3474360" cy="18000"/>
-          </a:xfrm>
-          <a:custGeom>
-            <a:avLst/>
-            <a:gdLst>
-              <a:gd name="textAreaLeft" fmla="*/ 0 w 3474360"/>
-              <a:gd name="textAreaRight" fmla="*/ 3474720 w 3474360"/>
-              <a:gd name="textAreaTop" fmla="*/ 0 h 18000"/>
-              <a:gd name="textAreaBottom" fmla="*/ 18360 h 18000"/>
-              <a:gd name="GluePoint1X" fmla="*/ 0 w 3474720"/>
-              <a:gd name="GluePoint1Y" fmla="*/ 0 h 18288"/>
-              <a:gd name="GluePoint2X" fmla="*/ 694944 w 3474720"/>
-              <a:gd name="GluePoint2Y" fmla="*/ 0 h 18288"/>
-              <a:gd name="GluePoint3X" fmla="*/ 1355141 w 3474720"/>
-              <a:gd name="GluePoint3Y" fmla="*/ 0 h 18288"/>
-              <a:gd name="GluePoint4X" fmla="*/ 2015338 w 3474720"/>
-              <a:gd name="GluePoint4Y" fmla="*/ 0 h 18288"/>
-              <a:gd name="GluePoint5X" fmla="*/ 2779776 w 3474720"/>
-              <a:gd name="GluePoint5Y" fmla="*/ 0 h 18288"/>
-              <a:gd name="GluePoint6X" fmla="*/ 3474720 w 3474720"/>
-              <a:gd name="GluePoint6Y" fmla="*/ 0 h 18288"/>
-              <a:gd name="GluePoint7X" fmla="*/ 3474720 w 3474720"/>
-              <a:gd name="GluePoint7Y" fmla="*/ 18288 h 18288"/>
-              <a:gd name="GluePoint8X" fmla="*/ 2779776 w 3474720"/>
-              <a:gd name="GluePoint8Y" fmla="*/ 18288 h 18288"/>
-              <a:gd name="GluePoint9X" fmla="*/ 2189074 w 3474720"/>
-              <a:gd name="GluePoint9Y" fmla="*/ 18288 h 18288"/>
-              <a:gd name="GluePoint10X" fmla="*/ 1528877 w 3474720"/>
-              <a:gd name="GluePoint10Y" fmla="*/ 18288 h 18288"/>
-              <a:gd name="GluePoint11X" fmla="*/ 868680 w 3474720"/>
-              <a:gd name="GluePoint11Y" fmla="*/ 18288 h 18288"/>
-              <a:gd name="GluePoint12X" fmla="*/ 0 w 3474720"/>
-              <a:gd name="GluePoint12Y" fmla="*/ 18288 h 18288"/>
-              <a:gd name="GluePoint13X" fmla="*/ 0 w 3474720"/>
-              <a:gd name="GluePoint13Y" fmla="*/ 0 h 18288"/>
-            </a:gdLst>
-            <a:ahLst/>
-            <a:cxnLst>
-              <a:cxn ang="0">
-                <a:pos x="GluePoint1X" y="GluePoint1Y"/>
-              </a:cxn>
-              <a:cxn ang="0">
-                <a:pos x="GluePoint2X" y="GluePoint2Y"/>
-              </a:cxn>
-              <a:cxn ang="0">
-                <a:pos x="GluePoint3X" y="GluePoint3Y"/>
-              </a:cxn>
-              <a:cxn ang="0">
-                <a:pos x="GluePoint4X" y="GluePoint4Y"/>
-              </a:cxn>
-              <a:cxn ang="0">
-                <a:pos x="GluePoint5X" y="GluePoint5Y"/>
-              </a:cxn>
-              <a:cxn ang="0">
-                <a:pos x="GluePoint6X" y="GluePoint6Y"/>
-              </a:cxn>
-              <a:cxn ang="0">
-                <a:pos x="GluePoint7X" y="GluePoint7Y"/>
-              </a:cxn>
-              <a:cxn ang="0">
-                <a:pos x="GluePoint8X" y="GluePoint8Y"/>
-              </a:cxn>
-              <a:cxn ang="0">
-                <a:pos x="GluePoint9X" y="GluePoint9Y"/>
-              </a:cxn>
-              <a:cxn ang="0">
-                <a:pos x="GluePoint10X" y="GluePoint10Y"/>
-              </a:cxn>
-              <a:cxn ang="0">
-                <a:pos x="GluePoint11X" y="GluePoint11Y"/>
-              </a:cxn>
-              <a:cxn ang="0">
-                <a:pos x="GluePoint12X" y="GluePoint12Y"/>
-              </a:cxn>
-              <a:cxn ang="0">
-                <a:pos x="GluePoint13X" y="GluePoint13Y"/>
-              </a:cxn>
-            </a:cxnLst>
-            <a:rect l="textAreaLeft" t="textAreaTop" r="textAreaRight" b="textAreaBottom"/>
-            <a:pathLst>
-              <a:path fill="none" w="3474720" h="18288">
-                <a:moveTo>
-                  <a:pt x="0" y="0"/>
-                </a:moveTo>
-                <a:cubicBezTo>
-                  <a:pt x="224454" y="-14544"/>
-                  <a:pt x="495407" y="26540"/>
-                  <a:pt x="694944" y="0"/>
-                </a:cubicBezTo>
-                <a:cubicBezTo>
-                  <a:pt x="894481" y="-26540"/>
-                  <a:pt x="1130063" y="24713"/>
-                  <a:pt x="1355141" y="0"/>
-                </a:cubicBezTo>
-                <a:cubicBezTo>
-                  <a:pt x="1580219" y="-24713"/>
-                  <a:pt x="1820099" y="26695"/>
-                  <a:pt x="2015338" y="0"/>
-                </a:cubicBezTo>
-                <a:cubicBezTo>
-                  <a:pt x="2210577" y="-26695"/>
-                  <a:pt x="2402045" y="165"/>
-                  <a:pt x="2779776" y="0"/>
-                </a:cubicBezTo>
-                <a:cubicBezTo>
-                  <a:pt x="3157507" y="-165"/>
-                  <a:pt x="3286859" y="-15571"/>
-                  <a:pt x="3474720" y="0"/>
-                </a:cubicBezTo>
-                <a:cubicBezTo>
-                  <a:pt x="3474286" y="7551"/>
-                  <a:pt x="3474253" y="9822"/>
-                  <a:pt x="3474720" y="18288"/>
-                </a:cubicBezTo>
-                <a:cubicBezTo>
-                  <a:pt x="3233904" y="29845"/>
-                  <a:pt x="2945134" y="-5256"/>
-                  <a:pt x="2779776" y="18288"/>
-                </a:cubicBezTo>
-                <a:cubicBezTo>
-                  <a:pt x="2614418" y="41832"/>
-                  <a:pt x="2339768" y="22709"/>
-                  <a:pt x="2189074" y="18288"/>
-                </a:cubicBezTo>
-                <a:cubicBezTo>
-                  <a:pt x="2038380" y="13867"/>
-                  <a:pt x="1817434" y="-4947"/>
-                  <a:pt x="1528877" y="18288"/>
-                </a:cubicBezTo>
-                <a:cubicBezTo>
-                  <a:pt x="1240320" y="41523"/>
-                  <a:pt x="1042447" y="37198"/>
-                  <a:pt x="868680" y="18288"/>
-                </a:cubicBezTo>
-                <a:cubicBezTo>
-                  <a:pt x="694913" y="-622"/>
-                  <a:pt x="233232" y="44909"/>
-                  <a:pt x="0" y="18288"/>
-                </a:cubicBezTo>
-                <a:cubicBezTo>
-                  <a:pt x="60" y="11696"/>
-                  <a:pt x="66" y="3758"/>
-                  <a:pt x="0" y="0"/>
-                </a:cubicBezTo>
-                <a:close/>
-              </a:path>
-              <a:path stroke="0" w="3474720" h="18288">
-                <a:moveTo>
-                  <a:pt x="0" y="0"/>
-                </a:moveTo>
-                <a:cubicBezTo>
-                  <a:pt x="202328" y="-14716"/>
-                  <a:pt x="332722" y="-11499"/>
-                  <a:pt x="625450" y="0"/>
-                </a:cubicBezTo>
-                <a:cubicBezTo>
-                  <a:pt x="918178" y="11499"/>
-                  <a:pt x="1096688" y="5123"/>
-                  <a:pt x="1389888" y="0"/>
-                </a:cubicBezTo>
-                <a:cubicBezTo>
-                  <a:pt x="1683088" y="-5123"/>
-                  <a:pt x="1835981" y="-14038"/>
-                  <a:pt x="1980590" y="0"/>
-                </a:cubicBezTo>
-                <a:cubicBezTo>
-                  <a:pt x="2125199" y="14038"/>
-                  <a:pt x="2396099" y="-7203"/>
-                  <a:pt x="2571293" y="0"/>
-                </a:cubicBezTo>
-                <a:cubicBezTo>
-                  <a:pt x="2746487" y="7203"/>
-                  <a:pt x="3041609" y="-12036"/>
-                  <a:pt x="3474720" y="0"/>
-                </a:cubicBezTo>
-                <a:cubicBezTo>
-                  <a:pt x="3474638" y="4406"/>
-                  <a:pt x="3474631" y="9982"/>
-                  <a:pt x="3474720" y="18288"/>
-                </a:cubicBezTo>
-                <a:cubicBezTo>
-                  <a:pt x="3324873" y="21876"/>
-                  <a:pt x="3136771" y="12587"/>
-                  <a:pt x="2814523" y="18288"/>
-                </a:cubicBezTo>
-                <a:cubicBezTo>
-                  <a:pt x="2492275" y="23989"/>
-                  <a:pt x="2294402" y="47111"/>
-                  <a:pt x="2154326" y="18288"/>
-                </a:cubicBezTo>
-                <a:cubicBezTo>
-                  <a:pt x="2014250" y="-10535"/>
-                  <a:pt x="1820317" y="33903"/>
-                  <a:pt x="1494130" y="18288"/>
-                </a:cubicBezTo>
-                <a:cubicBezTo>
-                  <a:pt x="1167943" y="2673"/>
-                  <a:pt x="948432" y="14868"/>
-                  <a:pt x="729691" y="18288"/>
-                </a:cubicBezTo>
-                <a:cubicBezTo>
-                  <a:pt x="510950" y="21708"/>
-                  <a:pt x="264032" y="24354"/>
-                  <a:pt x="0" y="18288"/>
-                </a:cubicBezTo>
-                <a:cubicBezTo>
-                  <a:pt x="189" y="14288"/>
-                  <a:pt x="-703" y="3747"/>
-                  <a:pt x="0" y="0"/>
-                </a:cubicBezTo>
-                <a:close/>
-              </a:path>
-            </a:pathLst>
-          </a:custGeom>
-          <a:solidFill>
-            <a:schemeClr val="accent2"/>
-          </a:solidFill>
-          <a:ln cap="rnd" w="44450">
-            <a:solidFill>
-              <a:srgbClr val="E97132"/>
-            </a:solidFill>
-            <a:round/>
-          </a:ln>
-        </p:spPr>
-        <p:style>
-          <a:lnRef idx="2">
-            <a:schemeClr val="accent1">
-              <a:shade val="50000"/>
-            </a:schemeClr>
-          </a:lnRef>
-          <a:fillRef idx="1">
-            <a:schemeClr val="accent1"/>
-          </a:fillRef>
-          <a:effectRef idx="0">
-            <a:schemeClr val="accent1"/>
-          </a:effectRef>
-          <a:fontRef idx="minor"/>
-        </p:style>
-        <p:txBody>
-          <a:bodyPr lIns="90000" tIns="-26640" rIns="90000" bIns="-26640" anchor="ctr">
-            <a:noAutofit/>
-          </a:bodyPr>
-          <a:p>
-            <a:endParaRPr lang="en-US" sz="1800" b="0" u="none" strike="noStrike">
-              <a:solidFill>
-                <a:schemeClr val="lt1"/>
-              </a:solidFill>
-              <a:effectLst/>
-              <a:uFillTx/>
-              <a:latin typeface="Aptos"/>
-            </a:endParaRPr>
-          </a:p>
-        </p:txBody>
-      </p:sp>
-      <p:sp>
-        <p:nvSpPr>
-          <p:cNvPr id="64" name="PlaceHolder 2"/>
-          <p:cNvSpPr>
-            <a:spLocks noGrp="1"/>
-          </p:cNvSpPr>
-          <p:nvPr>
-            <p:ph/>
-          </p:nvPr>
-        </p:nvSpPr>
-        <p:spPr>
-          <a:xfrm>
-            <a:off x="640080" y="2872800"/>
-            <a:ext cx="4243320" cy="3320280"/>
+            <a:off x="-360" y="20880"/>
+            <a:ext cx="8617680" cy="3657600"/>
           </a:xfrm>
           <a:prstGeom prst="rect">
             <a:avLst/>
@@ -7736,193 +8214,31 @@
             <a:noFill/>
           </a:ln>
         </p:spPr>
-        <p:txBody>
-          <a:bodyPr lIns="91440" tIns="45720" rIns="91440" bIns="45720" anchor="t">
-            <a:normAutofit/>
-          </a:bodyPr>
-          <a:p>
-            <a:pPr indent="0" algn="l" defTabSz="914400">
-              <a:lnSpc>
-                <a:spcPct val="90000"/>
-              </a:lnSpc>
-              <a:spcBef>
-                <a:spcPts val="1001"/>
-              </a:spcBef>
-              <a:buNone/>
-            </a:pPr>
-            <a:endParaRPr lang="en-US" sz="2800" b="0" u="none" strike="noStrike">
-              <a:solidFill>
-                <a:schemeClr val="dk1"/>
-              </a:solidFill>
-              <a:effectLst/>
-              <a:uFillTx/>
-              <a:latin typeface="Aptos"/>
-            </a:endParaRPr>
-          </a:p>
-        </p:txBody>
-      </p:sp>
-      <p:sp>
-        <p:nvSpPr>
-          <p:cNvPr id="65" name="Content Placeholder 4"/>
-          <p:cNvSpPr/>
+      </p:pic>
+      <p:pic>
+        <p:nvPicPr>
+          <p:cNvPr id="65" name=""/>
+          <p:cNvPicPr/>
           <p:nvPr/>
-        </p:nvSpPr>
+        </p:nvPicPr>
+        <p:blipFill>
+          <a:blip r:embed="rId2"/>
+          <a:stretch/>
+        </p:blipFill>
         <p:spPr>
           <a:xfrm>
-            <a:off x="5311800" y="0"/>
-            <a:ext cx="6878520" cy="6857640"/>
+            <a:off x="2984400" y="2933280"/>
+            <a:ext cx="9207720" cy="3924720"/>
           </a:xfrm>
-          <a:custGeom>
+          <a:prstGeom prst="rect">
             <a:avLst/>
-            <a:gdLst>
-              <a:gd name="textAreaLeft" fmla="*/ 0 w 6878520"/>
-              <a:gd name="textAreaRight" fmla="*/ 6878880 w 6878520"/>
-              <a:gd name="textAreaTop" fmla="*/ 0 h 6857640"/>
-              <a:gd name="textAreaBottom" fmla="*/ 6858000 h 6857640"/>
-            </a:gdLst>
-            <a:ahLst/>
-            <a:cxnLst/>
-            <a:rect l="textAreaLeft" t="textAreaTop" r="textAreaRight" b="textAreaBottom"/>
-            <a:pathLst>
-              <a:path w="6878775" h="6858000">
-                <a:moveTo>
-                  <a:pt x="1102973" y="0"/>
-                </a:moveTo>
-                <a:lnTo>
-                  <a:pt x="1160688" y="0"/>
-                </a:lnTo>
-                <a:lnTo>
-                  <a:pt x="983189" y="331786"/>
-                </a:lnTo>
-                <a:cubicBezTo>
-                  <a:pt x="914866" y="469145"/>
-                  <a:pt x="850355" y="608712"/>
-                  <a:pt x="789261" y="750263"/>
-                </a:cubicBezTo>
-                <a:cubicBezTo>
-                  <a:pt x="774307" y="784928"/>
-                  <a:pt x="759992" y="819849"/>
-                  <a:pt x="745295" y="854514"/>
-                </a:cubicBezTo>
-                <a:cubicBezTo>
-                  <a:pt x="756682" y="845393"/>
-                  <a:pt x="765489" y="833492"/>
-                  <a:pt x="770857" y="819975"/>
-                </a:cubicBezTo>
-                <a:cubicBezTo>
-                  <a:pt x="879943" y="589569"/>
-                  <a:pt x="999605" y="365513"/>
-                  <a:pt x="1131329" y="148742"/>
-                </a:cubicBezTo>
-                <a:lnTo>
-                  <a:pt x="1227589" y="0"/>
-                </a:lnTo>
-                <a:lnTo>
-                  <a:pt x="6878775" y="0"/>
-                </a:lnTo>
-                <a:lnTo>
-                  <a:pt x="6878775" y="6858000"/>
-                </a:lnTo>
-                <a:lnTo>
-                  <a:pt x="713521" y="6858000"/>
-                </a:lnTo>
-                <a:lnTo>
-                  <a:pt x="625642" y="6670527"/>
-                </a:lnTo>
-                <a:cubicBezTo>
-                  <a:pt x="507232" y="6398531"/>
-                  <a:pt x="403083" y="6118381"/>
-                  <a:pt x="312785" y="5830359"/>
-                </a:cubicBezTo>
-                <a:cubicBezTo>
-                  <a:pt x="278149" y="5719759"/>
-                  <a:pt x="248879" y="5607635"/>
-                  <a:pt x="212198" y="5480401"/>
-                </a:cubicBezTo>
-                <a:cubicBezTo>
-                  <a:pt x="212208" y="5491601"/>
-                  <a:pt x="212803" y="5502788"/>
-                  <a:pt x="213988" y="5513923"/>
-                </a:cubicBezTo>
-                <a:cubicBezTo>
-                  <a:pt x="264089" y="5723695"/>
-                  <a:pt x="307290" y="5935370"/>
-                  <a:pt x="365826" y="6142729"/>
-                </a:cubicBezTo>
-                <a:cubicBezTo>
-                  <a:pt x="433152" y="6380817"/>
-                  <a:pt x="510068" y="6614016"/>
-                  <a:pt x="597975" y="6841549"/>
-                </a:cubicBezTo>
-                <a:lnTo>
-                  <a:pt x="604824" y="6858000"/>
-                </a:lnTo>
-                <a:lnTo>
-                  <a:pt x="552056" y="6858000"/>
-                </a:lnTo>
-                <a:lnTo>
-                  <a:pt x="539576" y="6828295"/>
-                </a:lnTo>
-                <a:cubicBezTo>
-                  <a:pt x="380597" y="6414594"/>
-                  <a:pt x="260223" y="5988893"/>
-                  <a:pt x="171555" y="5552906"/>
-                </a:cubicBezTo>
-                <a:cubicBezTo>
-                  <a:pt x="91163" y="5157998"/>
-                  <a:pt x="43746" y="4758899"/>
-                  <a:pt x="12305" y="4357388"/>
-                </a:cubicBezTo>
-                <a:cubicBezTo>
-                  <a:pt x="-14281" y="4013908"/>
-                  <a:pt x="4507" y="3672965"/>
-                  <a:pt x="46684" y="3331516"/>
-                </a:cubicBezTo>
-                <a:cubicBezTo>
-                  <a:pt x="127203" y="2664286"/>
-                  <a:pt x="277819" y="2007265"/>
-                  <a:pt x="496065" y="1371196"/>
-                </a:cubicBezTo>
-                <a:cubicBezTo>
-                  <a:pt x="636273" y="966066"/>
-                  <a:pt x="800445" y="573253"/>
-                  <a:pt x="995723" y="196614"/>
-                </a:cubicBezTo>
-                <a:close/>
-              </a:path>
-            </a:pathLst>
-          </a:custGeom>
-          <a:blipFill rotWithShape="0">
-            <a:blip r:embed="rId1"/>
-            <a:srcRect/>
-            <a:stretch/>
-          </a:blipFill>
+          </a:prstGeom>
+          <a:noFill/>
           <a:ln w="0">
             <a:noFill/>
           </a:ln>
         </p:spPr>
-        <p:style>
-          <a:lnRef idx="0"/>
-          <a:fillRef idx="0"/>
-          <a:effectRef idx="0"/>
-          <a:fontRef idx="minor"/>
-        </p:style>
-        <p:txBody>
-          <a:bodyPr lIns="90000" tIns="45000" rIns="90000" bIns="45000" anchor="t">
-            <a:noAutofit/>
-          </a:bodyPr>
-          <a:p>
-            <a:endParaRPr lang="en-US" sz="1800" b="0" u="none" strike="noStrike">
-              <a:solidFill>
-                <a:srgbClr val="000000"/>
-              </a:solidFill>
-              <a:effectLst/>
-              <a:uFillTx/>
-              <a:latin typeface="Arial"/>
-            </a:endParaRPr>
-          </a:p>
-        </p:txBody>
-      </p:sp>
+      </p:pic>
     </p:spTree>
   </p:cSld>
   <mc:AlternateContent>
@@ -7933,48 +8249,6 @@
       <p:transition spd="slow"/>
     </mc:Fallback>
   </mc:AlternateContent>
-</p:sld>
-</file>
-
-<file path=ppt/slides/slide3.xml><?xml version="1.0" encoding="utf-8"?>
-<p:sld xmlns:a="http://schemas.openxmlformats.org/drawingml/2006/main" xmlns:p="http://schemas.openxmlformats.org/presentationml/2006/main" xmlns:r="http://schemas.openxmlformats.org/officeDocument/2006/relationships">
-  <p:cSld>
-    <p:spTree>
-      <p:nvGrpSpPr>
-        <p:cNvPr id="1" name=""/>
-        <p:cNvGrpSpPr/>
-        <p:nvPr/>
-      </p:nvGrpSpPr>
-      <p:grpSpPr/>
-      <p:pic>
-        <p:nvPicPr>
-          <p:cNvPr id="2" name="Picture 1" descr="1.jpg"/>
-          <p:cNvPicPr>
-            <a:picLocks noChangeAspect="1"/>
-          </p:cNvPicPr>
-          <p:nvPr/>
-        </p:nvPicPr>
-        <p:blipFill>
-          <a:blip r:embed="rId2"/>
-          <a:stretch>
-            <a:fillRect/>
-          </a:stretch>
-        </p:blipFill>
-        <p:spPr>
-          <a:xfrm>
-            <a:off x="943483" y="0"/>
-            <a:ext cx="10305033" cy="6858000"/>
-          </a:xfrm>
-          <a:prstGeom prst="rect">
-            <a:avLst/>
-          </a:prstGeom>
-        </p:spPr>
-      </p:pic>
-    </p:spTree>
-  </p:cSld>
-  <p:clrMapOvr>
-    <a:masterClrMapping/>
-  </p:clrMapOvr>
 </p:sld>
 </file>
 

--- a/Weekly Reports/slides/2-alexis-perez.pptx
+++ b/Weekly Reports/slides/2-alexis-perez.pptx
@@ -14,8 +14,8 @@
 </file>
 
 <file path=ppt/slideLayouts/slideLayout1.xml><?xml version="1.0" encoding="utf-8"?>
-<p:sldLayout xmlns:a="http://schemas.openxmlformats.org/drawingml/2006/main" xmlns:p="http://schemas.openxmlformats.org/presentationml/2006/main" xmlns:r="http://schemas.openxmlformats.org/officeDocument/2006/relationships" xmlns:p14="http://schemas.microsoft.com/office/powerpoint/2010/main" xmlns:p15="http://schemas.microsoft.com/office/powerpoint/2012/main" xmlns:mc="http://schemas.openxmlformats.org/markup-compatibility/2006" type="blank" preserve="1">
-  <p:cSld name="Blank">
+<p:sldLayout xmlns:a="http://schemas.openxmlformats.org/drawingml/2006/main" xmlns:p="http://schemas.openxmlformats.org/presentationml/2006/main" xmlns:r="http://schemas.openxmlformats.org/officeDocument/2006/relationships" xmlns:p14="http://schemas.microsoft.com/office/powerpoint/2010/main" xmlns:p15="http://schemas.microsoft.com/office/powerpoint/2012/main" xmlns:mc="http://schemas.openxmlformats.org/markup-compatibility/2006" type="twoObj" preserve="1">
+  <p:cSld name="Two Content">
     <p:bg>
       <p:bgPr>
         <a:solidFill>
@@ -44,13 +44,13 @@
             <a:spLocks noGrp="1"/>
           </p:cNvSpPr>
           <p:nvPr>
-            <p:ph type="dt" idx="1"/>
+            <p:ph type="title"/>
           </p:nvPr>
         </p:nvSpPr>
         <p:spPr>
           <a:xfrm>
-            <a:off x="838080" y="6356520"/>
-            <a:ext cx="2742480" cy="364320"/>
+            <a:off x="838080" y="365040"/>
+            <a:ext cx="10514520" cy="1324440"/>
           </a:xfrm>
           <a:prstGeom prst="rect">
             <a:avLst/>
@@ -67,54 +67,50 @@
           <a:lstStyle>
             <a:lvl1pPr indent="0" algn="l" defTabSz="914400">
               <a:lnSpc>
-                <a:spcPct val="100000"/>
-              </a:lnSpc>
-              <a:buNone/>
-              <a:tabLst>
-                <a:tab pos="0" algn="l"/>
-              </a:tabLst>
-              <a:defRPr lang="en-US" sz="1200" b="0" u="none" strike="noStrike">
-                <a:solidFill>
-                  <a:schemeClr val="dk1">
-                    <a:tint val="82000"/>
-                  </a:schemeClr>
-                </a:solidFill>
-                <a:effectLst/>
-                <a:uFillTx/>
-                <a:latin typeface="Aptos"/>
+                <a:spcPct val="90000"/>
+              </a:lnSpc>
+              <a:buNone/>
+              <a:tabLst>
+                <a:tab pos="0" algn="l"/>
+              </a:tabLst>
+              <a:defRPr lang="en-US" sz="4400" b="0" u="none" strike="noStrike">
+                <a:solidFill>
+                  <a:schemeClr val="dk1"/>
+                </a:solidFill>
+                <a:effectLst/>
+                <a:uFillTx/>
+                <a:latin typeface="Aptos Display"/>
               </a:defRPr>
             </a:lvl1pPr>
           </a:lstStyle>
           <a:p>
             <a:pPr indent="0" algn="l" defTabSz="914400">
               <a:lnSpc>
-                <a:spcPct val="100000"/>
-              </a:lnSpc>
-              <a:buNone/>
-              <a:tabLst>
-                <a:tab pos="0" algn="l"/>
-              </a:tabLst>
-            </a:pPr>
-            <a:r>
-              <a:rPr lang="en-US" sz="1200" b="0" u="none" strike="noStrike">
-                <a:solidFill>
-                  <a:schemeClr val="dk1">
-                    <a:tint val="82000"/>
-                  </a:schemeClr>
-                </a:solidFill>
-                <a:effectLst/>
-                <a:uFillTx/>
-                <a:latin typeface="Aptos"/>
-              </a:rPr>
-              <a:t>&lt;date/time&gt;</a:t>
-            </a:r>
-            <a:endParaRPr lang="en-US" sz="1200" b="0" u="none" strike="noStrike">
-              <a:solidFill>
-                <a:srgbClr val="000000"/>
-              </a:solidFill>
-              <a:effectLst/>
-              <a:uFillTx/>
-              <a:latin typeface="Times New Roman"/>
+                <a:spcPct val="90000"/>
+              </a:lnSpc>
+              <a:buNone/>
+              <a:tabLst>
+                <a:tab pos="0" algn="l"/>
+              </a:tabLst>
+            </a:pPr>
+            <a:r>
+              <a:rPr lang="en-US" sz="4400" b="0" u="none" strike="noStrike">
+                <a:solidFill>
+                  <a:schemeClr val="dk1"/>
+                </a:solidFill>
+                <a:effectLst/>
+                <a:uFillTx/>
+                <a:latin typeface="Aptos Display"/>
+              </a:rPr>
+              <a:t>Click to edit Master title style</a:t>
+            </a:r>
+            <a:endParaRPr lang="en-US" sz="4400" b="0" u="none" strike="noStrike">
+              <a:solidFill>
+                <a:schemeClr val="dk1"/>
+              </a:solidFill>
+              <a:effectLst/>
+              <a:uFillTx/>
+              <a:latin typeface="Aptos Display"/>
             </a:endParaRPr>
           </a:p>
         </p:txBody>
@@ -122,6 +118,700 @@
       <p:sp>
         <p:nvSpPr>
           <p:cNvPr id="3" name="PlaceHolder 2"/>
+          <p:cNvSpPr>
+            <a:spLocks noGrp="1"/>
+          </p:cNvSpPr>
+          <p:nvPr>
+            <p:ph type="body"/>
+          </p:nvPr>
+        </p:nvSpPr>
+        <p:spPr>
+          <a:xfrm>
+            <a:off x="838080" y="1825560"/>
+            <a:ext cx="5180400" cy="4350240"/>
+          </a:xfrm>
+          <a:prstGeom prst="rect">
+            <a:avLst/>
+          </a:prstGeom>
+          <a:noFill/>
+          <a:ln w="0">
+            <a:noFill/>
+          </a:ln>
+        </p:spPr>
+        <p:txBody>
+          <a:bodyPr lIns="91440" tIns="45720" rIns="91440" bIns="45720" anchor="t">
+            <a:noAutofit/>
+          </a:bodyPr>
+          <a:lstStyle>
+            <a:lvl1pPr algn="l" defTabSz="914400">
+              <a:lnSpc>
+                <a:spcPct val="90000"/>
+              </a:lnSpc>
+              <a:spcBef>
+                <a:spcPts val="1001"/>
+              </a:spcBef>
+              <a:buClr>
+                <a:srgbClr val="000000"/>
+              </a:buClr>
+              <a:buFont typeface="Arial"/>
+              <a:buChar char="•"/>
+              <a:defRPr lang="en-US" sz="2800" b="0" u="none" strike="noStrike">
+                <a:solidFill>
+                  <a:schemeClr val="dk1"/>
+                </a:solidFill>
+                <a:effectLst/>
+                <a:uFillTx/>
+                <a:latin typeface="Aptos"/>
+              </a:defRPr>
+            </a:lvl1pPr>
+            <a:lvl2pPr lvl="1" algn="l" defTabSz="914400">
+              <a:lnSpc>
+                <a:spcPct val="90000"/>
+              </a:lnSpc>
+              <a:spcBef>
+                <a:spcPts val="499"/>
+              </a:spcBef>
+              <a:buClr>
+                <a:srgbClr val="000000"/>
+              </a:buClr>
+              <a:buFont typeface="Arial"/>
+              <a:buChar char="•"/>
+              <a:defRPr lang="en-US" sz="2400" b="0" u="none" strike="noStrike">
+                <a:solidFill>
+                  <a:schemeClr val="dk1"/>
+                </a:solidFill>
+                <a:effectLst/>
+                <a:uFillTx/>
+                <a:latin typeface="Aptos"/>
+              </a:defRPr>
+            </a:lvl2pPr>
+            <a:lvl3pPr lvl="2" algn="l" defTabSz="914400">
+              <a:lnSpc>
+                <a:spcPct val="90000"/>
+              </a:lnSpc>
+              <a:spcBef>
+                <a:spcPts val="499"/>
+              </a:spcBef>
+              <a:buClr>
+                <a:srgbClr val="000000"/>
+              </a:buClr>
+              <a:buFont typeface="Arial"/>
+              <a:buChar char="•"/>
+              <a:defRPr lang="en-US" sz="2000" b="0" u="none" strike="noStrike">
+                <a:solidFill>
+                  <a:schemeClr val="dk1"/>
+                </a:solidFill>
+                <a:effectLst/>
+                <a:uFillTx/>
+                <a:latin typeface="Aptos"/>
+              </a:defRPr>
+            </a:lvl3pPr>
+            <a:lvl4pPr lvl="3" algn="l" defTabSz="914400">
+              <a:lnSpc>
+                <a:spcPct val="90000"/>
+              </a:lnSpc>
+              <a:spcBef>
+                <a:spcPts val="499"/>
+              </a:spcBef>
+              <a:buClr>
+                <a:srgbClr val="000000"/>
+              </a:buClr>
+              <a:buFont typeface="Arial"/>
+              <a:buChar char="•"/>
+              <a:defRPr lang="en-US" sz="1800" b="0" u="none" strike="noStrike">
+                <a:solidFill>
+                  <a:schemeClr val="dk1"/>
+                </a:solidFill>
+                <a:effectLst/>
+                <a:uFillTx/>
+                <a:latin typeface="Aptos"/>
+              </a:defRPr>
+            </a:lvl4pPr>
+            <a:lvl5pPr lvl="4" algn="l" defTabSz="914400">
+              <a:lnSpc>
+                <a:spcPct val="90000"/>
+              </a:lnSpc>
+              <a:spcBef>
+                <a:spcPts val="499"/>
+              </a:spcBef>
+              <a:buClr>
+                <a:srgbClr val="000000"/>
+              </a:buClr>
+              <a:buFont typeface="Arial"/>
+              <a:buChar char="•"/>
+              <a:defRPr lang="en-US" sz="1800" b="0" u="none" strike="noStrike">
+                <a:solidFill>
+                  <a:schemeClr val="dk1"/>
+                </a:solidFill>
+                <a:effectLst/>
+                <a:uFillTx/>
+                <a:latin typeface="Aptos"/>
+              </a:defRPr>
+            </a:lvl5pPr>
+          </a:lstStyle>
+          <a:p>
+            <a:pPr marL="228600" indent="-228600" algn="l" defTabSz="914400">
+              <a:lnSpc>
+                <a:spcPct val="90000"/>
+              </a:lnSpc>
+              <a:spcBef>
+                <a:spcPts val="1001"/>
+              </a:spcBef>
+              <a:buClr>
+                <a:srgbClr val="000000"/>
+              </a:buClr>
+              <a:buFont typeface="Arial"/>
+              <a:buChar char="•"/>
+            </a:pPr>
+            <a:r>
+              <a:rPr lang="en-US" sz="2800" b="0" u="none" strike="noStrike">
+                <a:solidFill>
+                  <a:schemeClr val="dk1"/>
+                </a:solidFill>
+                <a:effectLst/>
+                <a:uFillTx/>
+                <a:latin typeface="Aptos"/>
+              </a:rPr>
+              <a:t>Click to edit Master text styles</a:t>
+            </a:r>
+            <a:endParaRPr lang="en-US" sz="2800" b="0" u="none" strike="noStrike">
+              <a:solidFill>
+                <a:schemeClr val="dk1"/>
+              </a:solidFill>
+              <a:effectLst/>
+              <a:uFillTx/>
+              <a:latin typeface="Aptos"/>
+            </a:endParaRPr>
+          </a:p>
+          <a:p>
+            <a:pPr marL="685800" lvl="1" indent="-228600" algn="l" defTabSz="914400">
+              <a:lnSpc>
+                <a:spcPct val="90000"/>
+              </a:lnSpc>
+              <a:spcBef>
+                <a:spcPts val="499"/>
+              </a:spcBef>
+              <a:buClr>
+                <a:srgbClr val="000000"/>
+              </a:buClr>
+              <a:buFont typeface="Arial"/>
+              <a:buChar char="•"/>
+            </a:pPr>
+            <a:r>
+              <a:rPr lang="en-US" sz="2400" b="0" u="none" strike="noStrike">
+                <a:solidFill>
+                  <a:schemeClr val="dk1"/>
+                </a:solidFill>
+                <a:effectLst/>
+                <a:uFillTx/>
+                <a:latin typeface="Aptos"/>
+              </a:rPr>
+              <a:t>Second level</a:t>
+            </a:r>
+            <a:endParaRPr lang="en-US" sz="2400" b="0" u="none" strike="noStrike">
+              <a:solidFill>
+                <a:schemeClr val="dk1"/>
+              </a:solidFill>
+              <a:effectLst/>
+              <a:uFillTx/>
+              <a:latin typeface="Aptos"/>
+            </a:endParaRPr>
+          </a:p>
+          <a:p>
+            <a:pPr marL="1143000" lvl="2" indent="-228600" algn="l" defTabSz="914400">
+              <a:lnSpc>
+                <a:spcPct val="90000"/>
+              </a:lnSpc>
+              <a:spcBef>
+                <a:spcPts val="499"/>
+              </a:spcBef>
+              <a:buClr>
+                <a:srgbClr val="000000"/>
+              </a:buClr>
+              <a:buFont typeface="Arial"/>
+              <a:buChar char="•"/>
+            </a:pPr>
+            <a:r>
+              <a:rPr lang="en-US" sz="2000" b="0" u="none" strike="noStrike">
+                <a:solidFill>
+                  <a:schemeClr val="dk1"/>
+                </a:solidFill>
+                <a:effectLst/>
+                <a:uFillTx/>
+                <a:latin typeface="Aptos"/>
+              </a:rPr>
+              <a:t>Third level</a:t>
+            </a:r>
+            <a:endParaRPr lang="en-US" sz="2000" b="0" u="none" strike="noStrike">
+              <a:solidFill>
+                <a:schemeClr val="dk1"/>
+              </a:solidFill>
+              <a:effectLst/>
+              <a:uFillTx/>
+              <a:latin typeface="Aptos"/>
+            </a:endParaRPr>
+          </a:p>
+          <a:p>
+            <a:pPr marL="1600200" lvl="3" indent="-228600" algn="l" defTabSz="914400">
+              <a:lnSpc>
+                <a:spcPct val="90000"/>
+              </a:lnSpc>
+              <a:spcBef>
+                <a:spcPts val="499"/>
+              </a:spcBef>
+              <a:buClr>
+                <a:srgbClr val="000000"/>
+              </a:buClr>
+              <a:buFont typeface="Arial"/>
+              <a:buChar char="•"/>
+            </a:pPr>
+            <a:r>
+              <a:rPr lang="en-US" sz="1800" b="0" u="none" strike="noStrike">
+                <a:solidFill>
+                  <a:schemeClr val="dk1"/>
+                </a:solidFill>
+                <a:effectLst/>
+                <a:uFillTx/>
+                <a:latin typeface="Aptos"/>
+              </a:rPr>
+              <a:t>Fourth level</a:t>
+            </a:r>
+            <a:endParaRPr lang="en-US" sz="1800" b="0" u="none" strike="noStrike">
+              <a:solidFill>
+                <a:schemeClr val="dk1"/>
+              </a:solidFill>
+              <a:effectLst/>
+              <a:uFillTx/>
+              <a:latin typeface="Aptos"/>
+            </a:endParaRPr>
+          </a:p>
+          <a:p>
+            <a:pPr marL="2057400" lvl="4" indent="-228600" algn="l" defTabSz="914400">
+              <a:lnSpc>
+                <a:spcPct val="90000"/>
+              </a:lnSpc>
+              <a:spcBef>
+                <a:spcPts val="499"/>
+              </a:spcBef>
+              <a:buClr>
+                <a:srgbClr val="000000"/>
+              </a:buClr>
+              <a:buFont typeface="Arial"/>
+              <a:buChar char="•"/>
+            </a:pPr>
+            <a:r>
+              <a:rPr lang="en-US" sz="1800" b="0" u="none" strike="noStrike">
+                <a:solidFill>
+                  <a:schemeClr val="dk1"/>
+                </a:solidFill>
+                <a:effectLst/>
+                <a:uFillTx/>
+                <a:latin typeface="Aptos"/>
+              </a:rPr>
+              <a:t>Fifth level</a:t>
+            </a:r>
+            <a:endParaRPr lang="en-US" sz="1800" b="0" u="none" strike="noStrike">
+              <a:solidFill>
+                <a:schemeClr val="dk1"/>
+              </a:solidFill>
+              <a:effectLst/>
+              <a:uFillTx/>
+              <a:latin typeface="Aptos"/>
+            </a:endParaRPr>
+          </a:p>
+        </p:txBody>
+      </p:sp>
+      <p:sp>
+        <p:nvSpPr>
+          <p:cNvPr id="4" name="PlaceHolder 3"/>
+          <p:cNvSpPr>
+            <a:spLocks noGrp="1"/>
+          </p:cNvSpPr>
+          <p:nvPr>
+            <p:ph type="body"/>
+          </p:nvPr>
+        </p:nvSpPr>
+        <p:spPr>
+          <a:xfrm>
+            <a:off x="6172200" y="1825560"/>
+            <a:ext cx="5180400" cy="4350240"/>
+          </a:xfrm>
+          <a:prstGeom prst="rect">
+            <a:avLst/>
+          </a:prstGeom>
+          <a:noFill/>
+          <a:ln w="0">
+            <a:noFill/>
+          </a:ln>
+        </p:spPr>
+        <p:txBody>
+          <a:bodyPr lIns="91440" tIns="45720" rIns="91440" bIns="45720" anchor="t">
+            <a:noAutofit/>
+          </a:bodyPr>
+          <a:lstStyle>
+            <a:lvl1pPr algn="l" defTabSz="914400">
+              <a:lnSpc>
+                <a:spcPct val="90000"/>
+              </a:lnSpc>
+              <a:spcBef>
+                <a:spcPts val="1001"/>
+              </a:spcBef>
+              <a:buClr>
+                <a:srgbClr val="000000"/>
+              </a:buClr>
+              <a:buFont typeface="Arial"/>
+              <a:buChar char="•"/>
+              <a:defRPr lang="en-US" sz="2800" b="0" u="none" strike="noStrike">
+                <a:solidFill>
+                  <a:schemeClr val="dk1"/>
+                </a:solidFill>
+                <a:effectLst/>
+                <a:uFillTx/>
+                <a:latin typeface="Aptos"/>
+              </a:defRPr>
+            </a:lvl1pPr>
+            <a:lvl2pPr lvl="1" algn="l" defTabSz="914400">
+              <a:lnSpc>
+                <a:spcPct val="90000"/>
+              </a:lnSpc>
+              <a:spcBef>
+                <a:spcPts val="499"/>
+              </a:spcBef>
+              <a:buClr>
+                <a:srgbClr val="000000"/>
+              </a:buClr>
+              <a:buFont typeface="Arial"/>
+              <a:buChar char="•"/>
+              <a:defRPr lang="en-US" sz="2400" b="0" u="none" strike="noStrike">
+                <a:solidFill>
+                  <a:schemeClr val="dk1"/>
+                </a:solidFill>
+                <a:effectLst/>
+                <a:uFillTx/>
+                <a:latin typeface="Aptos"/>
+              </a:defRPr>
+            </a:lvl2pPr>
+            <a:lvl3pPr lvl="2" algn="l" defTabSz="914400">
+              <a:lnSpc>
+                <a:spcPct val="90000"/>
+              </a:lnSpc>
+              <a:spcBef>
+                <a:spcPts val="499"/>
+              </a:spcBef>
+              <a:buClr>
+                <a:srgbClr val="000000"/>
+              </a:buClr>
+              <a:buFont typeface="Arial"/>
+              <a:buChar char="•"/>
+              <a:defRPr lang="en-US" sz="2000" b="0" u="none" strike="noStrike">
+                <a:solidFill>
+                  <a:schemeClr val="dk1"/>
+                </a:solidFill>
+                <a:effectLst/>
+                <a:uFillTx/>
+                <a:latin typeface="Aptos"/>
+              </a:defRPr>
+            </a:lvl3pPr>
+            <a:lvl4pPr lvl="3" algn="l" defTabSz="914400">
+              <a:lnSpc>
+                <a:spcPct val="90000"/>
+              </a:lnSpc>
+              <a:spcBef>
+                <a:spcPts val="499"/>
+              </a:spcBef>
+              <a:buClr>
+                <a:srgbClr val="000000"/>
+              </a:buClr>
+              <a:buFont typeface="Arial"/>
+              <a:buChar char="•"/>
+              <a:defRPr lang="en-US" sz="1800" b="0" u="none" strike="noStrike">
+                <a:solidFill>
+                  <a:schemeClr val="dk1"/>
+                </a:solidFill>
+                <a:effectLst/>
+                <a:uFillTx/>
+                <a:latin typeface="Aptos"/>
+              </a:defRPr>
+            </a:lvl4pPr>
+            <a:lvl5pPr lvl="4" algn="l" defTabSz="914400">
+              <a:lnSpc>
+                <a:spcPct val="90000"/>
+              </a:lnSpc>
+              <a:spcBef>
+                <a:spcPts val="499"/>
+              </a:spcBef>
+              <a:buClr>
+                <a:srgbClr val="000000"/>
+              </a:buClr>
+              <a:buFont typeface="Arial"/>
+              <a:buChar char="•"/>
+              <a:defRPr lang="en-US" sz="1800" b="0" u="none" strike="noStrike">
+                <a:solidFill>
+                  <a:schemeClr val="dk1"/>
+                </a:solidFill>
+                <a:effectLst/>
+                <a:uFillTx/>
+                <a:latin typeface="Aptos"/>
+              </a:defRPr>
+            </a:lvl5pPr>
+          </a:lstStyle>
+          <a:p>
+            <a:pPr marL="228600" indent="-228600" algn="l" defTabSz="914400">
+              <a:lnSpc>
+                <a:spcPct val="90000"/>
+              </a:lnSpc>
+              <a:spcBef>
+                <a:spcPts val="1001"/>
+              </a:spcBef>
+              <a:buClr>
+                <a:srgbClr val="000000"/>
+              </a:buClr>
+              <a:buFont typeface="Arial"/>
+              <a:buChar char="•"/>
+            </a:pPr>
+            <a:r>
+              <a:rPr lang="en-US" sz="2800" b="0" u="none" strike="noStrike">
+                <a:solidFill>
+                  <a:schemeClr val="dk1"/>
+                </a:solidFill>
+                <a:effectLst/>
+                <a:uFillTx/>
+                <a:latin typeface="Aptos"/>
+              </a:rPr>
+              <a:t>Click to edit Master text styles</a:t>
+            </a:r>
+            <a:endParaRPr lang="en-US" sz="2800" b="0" u="none" strike="noStrike">
+              <a:solidFill>
+                <a:schemeClr val="dk1"/>
+              </a:solidFill>
+              <a:effectLst/>
+              <a:uFillTx/>
+              <a:latin typeface="Aptos"/>
+            </a:endParaRPr>
+          </a:p>
+          <a:p>
+            <a:pPr marL="685800" lvl="1" indent="-228600" algn="l" defTabSz="914400">
+              <a:lnSpc>
+                <a:spcPct val="90000"/>
+              </a:lnSpc>
+              <a:spcBef>
+                <a:spcPts val="499"/>
+              </a:spcBef>
+              <a:buClr>
+                <a:srgbClr val="000000"/>
+              </a:buClr>
+              <a:buFont typeface="Arial"/>
+              <a:buChar char="•"/>
+            </a:pPr>
+            <a:r>
+              <a:rPr lang="en-US" sz="2400" b="0" u="none" strike="noStrike">
+                <a:solidFill>
+                  <a:schemeClr val="dk1"/>
+                </a:solidFill>
+                <a:effectLst/>
+                <a:uFillTx/>
+                <a:latin typeface="Aptos"/>
+              </a:rPr>
+              <a:t>Second level</a:t>
+            </a:r>
+            <a:endParaRPr lang="en-US" sz="2400" b="0" u="none" strike="noStrike">
+              <a:solidFill>
+                <a:schemeClr val="dk1"/>
+              </a:solidFill>
+              <a:effectLst/>
+              <a:uFillTx/>
+              <a:latin typeface="Aptos"/>
+            </a:endParaRPr>
+          </a:p>
+          <a:p>
+            <a:pPr marL="1143000" lvl="2" indent="-228600" algn="l" defTabSz="914400">
+              <a:lnSpc>
+                <a:spcPct val="90000"/>
+              </a:lnSpc>
+              <a:spcBef>
+                <a:spcPts val="499"/>
+              </a:spcBef>
+              <a:buClr>
+                <a:srgbClr val="000000"/>
+              </a:buClr>
+              <a:buFont typeface="Arial"/>
+              <a:buChar char="•"/>
+            </a:pPr>
+            <a:r>
+              <a:rPr lang="en-US" sz="2000" b="0" u="none" strike="noStrike">
+                <a:solidFill>
+                  <a:schemeClr val="dk1"/>
+                </a:solidFill>
+                <a:effectLst/>
+                <a:uFillTx/>
+                <a:latin typeface="Aptos"/>
+              </a:rPr>
+              <a:t>Third level</a:t>
+            </a:r>
+            <a:endParaRPr lang="en-US" sz="2000" b="0" u="none" strike="noStrike">
+              <a:solidFill>
+                <a:schemeClr val="dk1"/>
+              </a:solidFill>
+              <a:effectLst/>
+              <a:uFillTx/>
+              <a:latin typeface="Aptos"/>
+            </a:endParaRPr>
+          </a:p>
+          <a:p>
+            <a:pPr marL="1600200" lvl="3" indent="-228600" algn="l" defTabSz="914400">
+              <a:lnSpc>
+                <a:spcPct val="90000"/>
+              </a:lnSpc>
+              <a:spcBef>
+                <a:spcPts val="499"/>
+              </a:spcBef>
+              <a:buClr>
+                <a:srgbClr val="000000"/>
+              </a:buClr>
+              <a:buFont typeface="Arial"/>
+              <a:buChar char="•"/>
+            </a:pPr>
+            <a:r>
+              <a:rPr lang="en-US" sz="1800" b="0" u="none" strike="noStrike">
+                <a:solidFill>
+                  <a:schemeClr val="dk1"/>
+                </a:solidFill>
+                <a:effectLst/>
+                <a:uFillTx/>
+                <a:latin typeface="Aptos"/>
+              </a:rPr>
+              <a:t>Fourth level</a:t>
+            </a:r>
+            <a:endParaRPr lang="en-US" sz="1800" b="0" u="none" strike="noStrike">
+              <a:solidFill>
+                <a:schemeClr val="dk1"/>
+              </a:solidFill>
+              <a:effectLst/>
+              <a:uFillTx/>
+              <a:latin typeface="Aptos"/>
+            </a:endParaRPr>
+          </a:p>
+          <a:p>
+            <a:pPr marL="2057400" lvl="4" indent="-228600" algn="l" defTabSz="914400">
+              <a:lnSpc>
+                <a:spcPct val="90000"/>
+              </a:lnSpc>
+              <a:spcBef>
+                <a:spcPts val="499"/>
+              </a:spcBef>
+              <a:buClr>
+                <a:srgbClr val="000000"/>
+              </a:buClr>
+              <a:buFont typeface="Arial"/>
+              <a:buChar char="•"/>
+            </a:pPr>
+            <a:r>
+              <a:rPr lang="en-US" sz="1800" b="0" u="none" strike="noStrike">
+                <a:solidFill>
+                  <a:schemeClr val="dk1"/>
+                </a:solidFill>
+                <a:effectLst/>
+                <a:uFillTx/>
+                <a:latin typeface="Aptos"/>
+              </a:rPr>
+              <a:t>Fifth level</a:t>
+            </a:r>
+            <a:endParaRPr lang="en-US" sz="1800" b="0" u="none" strike="noStrike">
+              <a:solidFill>
+                <a:schemeClr val="dk1"/>
+              </a:solidFill>
+              <a:effectLst/>
+              <a:uFillTx/>
+              <a:latin typeface="Aptos"/>
+            </a:endParaRPr>
+          </a:p>
+        </p:txBody>
+      </p:sp>
+      <p:sp>
+        <p:nvSpPr>
+          <p:cNvPr id="5" name="PlaceHolder 4"/>
+          <p:cNvSpPr>
+            <a:spLocks noGrp="1"/>
+          </p:cNvSpPr>
+          <p:nvPr>
+            <p:ph type="dt" idx="1"/>
+          </p:nvPr>
+        </p:nvSpPr>
+        <p:spPr>
+          <a:xfrm>
+            <a:off x="838080" y="6356520"/>
+            <a:ext cx="2742120" cy="363960"/>
+          </a:xfrm>
+          <a:prstGeom prst="rect">
+            <a:avLst/>
+          </a:prstGeom>
+          <a:noFill/>
+          <a:ln w="0">
+            <a:noFill/>
+          </a:ln>
+        </p:spPr>
+        <p:txBody>
+          <a:bodyPr lIns="91440" tIns="45720" rIns="91440" bIns="45720" anchor="ctr">
+            <a:noAutofit/>
+          </a:bodyPr>
+          <a:lstStyle>
+            <a:lvl1pPr indent="0" algn="l" defTabSz="914400">
+              <a:lnSpc>
+                <a:spcPct val="100000"/>
+              </a:lnSpc>
+              <a:buNone/>
+              <a:tabLst>
+                <a:tab pos="0" algn="l"/>
+              </a:tabLst>
+              <a:defRPr lang="en-US" sz="1200" b="0" u="none" strike="noStrike">
+                <a:solidFill>
+                  <a:schemeClr val="dk1">
+                    <a:tint val="82000"/>
+                  </a:schemeClr>
+                </a:solidFill>
+                <a:effectLst/>
+                <a:uFillTx/>
+                <a:latin typeface="Aptos"/>
+              </a:defRPr>
+            </a:lvl1pPr>
+          </a:lstStyle>
+          <a:p>
+            <a:pPr indent="0" algn="l" defTabSz="914400">
+              <a:lnSpc>
+                <a:spcPct val="100000"/>
+              </a:lnSpc>
+              <a:buNone/>
+              <a:tabLst>
+                <a:tab pos="0" algn="l"/>
+              </a:tabLst>
+            </a:pPr>
+            <a:r>
+              <a:rPr lang="en-US" sz="1200" b="0" u="none" strike="noStrike">
+                <a:solidFill>
+                  <a:schemeClr val="dk1">
+                    <a:tint val="82000"/>
+                  </a:schemeClr>
+                </a:solidFill>
+                <a:effectLst/>
+                <a:uFillTx/>
+                <a:latin typeface="Aptos"/>
+              </a:rPr>
+              <a:t>&lt;date/time&gt;</a:t>
+            </a:r>
+            <a:endParaRPr lang="en-US" sz="1200" b="0" u="none" strike="noStrike">
+              <a:solidFill>
+                <a:srgbClr val="000000"/>
+              </a:solidFill>
+              <a:effectLst/>
+              <a:uFillTx/>
+              <a:latin typeface="Times New Roman"/>
+            </a:endParaRPr>
+          </a:p>
+        </p:txBody>
+      </p:sp>
+      <p:sp>
+        <p:nvSpPr>
+          <p:cNvPr id="6" name="PlaceHolder 5"/>
           <p:cNvSpPr>
             <a:spLocks noGrp="1"/>
           </p:cNvSpPr>
@@ -132,7 +822,7 @@
         <p:spPr>
           <a:xfrm>
             <a:off x="4038480" y="6356520"/>
-            <a:ext cx="4114080" cy="364320"/>
+            <a:ext cx="4113720" cy="363960"/>
           </a:xfrm>
           <a:prstGeom prst="rect">
             <a:avLst/>
@@ -199,7 +889,7 @@
       </p:sp>
       <p:sp>
         <p:nvSpPr>
-          <p:cNvPr id="4" name="PlaceHolder 3"/>
+          <p:cNvPr id="7" name="PlaceHolder 6"/>
           <p:cNvSpPr>
             <a:spLocks noGrp="1"/>
           </p:cNvSpPr>
@@ -210,7 +900,7 @@
         <p:spPr>
           <a:xfrm>
             <a:off x="8610480" y="6356520"/>
-            <a:ext cx="2742480" cy="364320"/>
+            <a:ext cx="2742120" cy="363960"/>
           </a:xfrm>
           <a:prstGeom prst="rect">
             <a:avLst/>
@@ -255,7 +945,7 @@
                 <a:tab pos="0" algn="l"/>
               </a:tabLst>
             </a:pPr>
-            <a:fld id="{CE490F9B-8A9B-4F5E-8EBF-893E22BC8FD3}" type="slidenum">
+            <a:fld id="{00F15A92-2754-4A83-8048-BD0637B937EE}" type="slidenum">
               <a:rPr lang="en-US" sz="1200" b="0" u="none" strike="noStrike">
                 <a:solidFill>
                   <a:schemeClr val="dk1">
@@ -279,9 +969,38 @@
           </a:p>
         </p:txBody>
       </p:sp>
+    </p:spTree>
+  </p:cSld>
+</p:sldLayout>
+</file>
+
+<file path=ppt/slideLayouts/slideLayout10.xml><?xml version="1.0" encoding="utf-8"?>
+<p:sldLayout xmlns:a="http://schemas.openxmlformats.org/drawingml/2006/main" xmlns:p="http://schemas.openxmlformats.org/presentationml/2006/main" xmlns:r="http://schemas.openxmlformats.org/officeDocument/2006/relationships" xmlns:p14="http://schemas.microsoft.com/office/powerpoint/2010/main" xmlns:p15="http://schemas.microsoft.com/office/powerpoint/2012/main" xmlns:mc="http://schemas.openxmlformats.org/markup-compatibility/2006" type="obj" preserve="1">
+  <p:cSld name="Title and Content">
+    <p:bg>
+      <p:bgPr>
+        <a:solidFill>
+          <a:srgbClr val="FFFFFF"/>
+        </a:solidFill>
+      </p:bgPr>
+    </p:bg>
+    <p:spTree>
+      <p:nvGrpSpPr>
+        <p:cNvPr id="1" name=""/>
+        <p:cNvGrpSpPr/>
+        <p:nvPr/>
+      </p:nvGrpSpPr>
+      <p:grpSpPr>
+        <a:xfrm>
+          <a:off x="0" y="0"/>
+          <a:ext cx="0" cy="0"/>
+          <a:chOff x="0" y="0"/>
+          <a:chExt cx="0" cy="0"/>
+        </a:xfrm>
+      </p:grpSpPr>
       <p:sp>
         <p:nvSpPr>
-          <p:cNvPr id="5" name="PlaceHolder 4"/>
+          <p:cNvPr id="51" name="PlaceHolder 1"/>
           <p:cNvSpPr>
             <a:spLocks noGrp="1"/>
           </p:cNvSpPr>
@@ -291,8 +1010,8 @@
         </p:nvSpPr>
         <p:spPr>
           <a:xfrm>
-            <a:off x="609480" y="273600"/>
-            <a:ext cx="10972440" cy="1144800"/>
+            <a:off x="838080" y="365040"/>
+            <a:ext cx="10514520" cy="1324440"/>
           </a:xfrm>
           <a:prstGeom prst="rect">
             <a:avLst/>
@@ -303,51 +1022,63 @@
           </a:ln>
         </p:spPr>
         <p:txBody>
-          <a:bodyPr lIns="0" tIns="0" rIns="0" bIns="0" anchor="ctr">
+          <a:bodyPr lIns="91440" tIns="45720" rIns="91440" bIns="45720" anchor="ctr">
             <a:noAutofit/>
           </a:bodyPr>
           <a:lstStyle>
-            <a:lvl1pPr indent="0" algn="ctr">
-              <a:buNone/>
+            <a:lvl1pPr indent="0" algn="l" defTabSz="914400">
+              <a:lnSpc>
+                <a:spcPct val="90000"/>
+              </a:lnSpc>
+              <a:buNone/>
+              <a:tabLst>
+                <a:tab pos="0" algn="l"/>
+              </a:tabLst>
               <a:defRPr lang="en-US" sz="4400" b="0" u="none" strike="noStrike">
                 <a:solidFill>
-                  <a:srgbClr val="000000"/>
-                </a:solidFill>
-                <a:effectLst/>
-                <a:uFillTx/>
-                <a:latin typeface="Arial"/>
+                  <a:schemeClr val="dk1"/>
+                </a:solidFill>
+                <a:effectLst/>
+                <a:uFillTx/>
+                <a:latin typeface="Aptos Display"/>
               </a:defRPr>
             </a:lvl1pPr>
           </a:lstStyle>
           <a:p>
-            <a:pPr indent="0" algn="ctr">
-              <a:buNone/>
+            <a:pPr indent="0" algn="l" defTabSz="914400">
+              <a:lnSpc>
+                <a:spcPct val="90000"/>
+              </a:lnSpc>
+              <a:buNone/>
+              <a:tabLst>
+                <a:tab pos="0" algn="l"/>
+              </a:tabLst>
             </a:pPr>
             <a:r>
               <a:rPr lang="en-US" sz="4400" b="0" u="none" strike="noStrike">
                 <a:solidFill>
-                  <a:srgbClr val="000000"/>
-                </a:solidFill>
-                <a:effectLst/>
-                <a:uFillTx/>
-                <a:latin typeface="Arial"/>
-              </a:rPr>
-              <a:t>Click to edit the title text format</a:t>
+                  <a:schemeClr val="dk1"/>
+                </a:solidFill>
+                <a:effectLst/>
+                <a:uFillTx/>
+                <a:latin typeface="Aptos Display"/>
+              </a:rPr>
+              <a:t>Click to edit Master title style</a:t>
             </a:r>
             <a:endParaRPr lang="en-US" sz="4400" b="0" u="none" strike="noStrike">
               <a:solidFill>
-                <a:srgbClr val="000000"/>
-              </a:solidFill>
-              <a:effectLst/>
-              <a:uFillTx/>
-              <a:latin typeface="Arial"/>
+                <a:schemeClr val="dk1"/>
+              </a:solidFill>
+              <a:effectLst/>
+              <a:uFillTx/>
+              <a:latin typeface="Aptos Display"/>
             </a:endParaRPr>
           </a:p>
         </p:txBody>
       </p:sp>
       <p:sp>
         <p:nvSpPr>
-          <p:cNvPr id="6" name="PlaceHolder 5"/>
+          <p:cNvPr id="52" name="PlaceHolder 2"/>
           <p:cNvSpPr>
             <a:spLocks noGrp="1"/>
           </p:cNvSpPr>
@@ -357,8 +1088,8 @@
         </p:nvSpPr>
         <p:spPr>
           <a:xfrm>
-            <a:off x="609480" y="1604520"/>
-            <a:ext cx="10972440" cy="3977280"/>
+            <a:off x="838080" y="1825560"/>
+            <a:ext cx="10514520" cy="4350240"/>
           </a:xfrm>
           <a:prstGeom prst="rect">
             <a:avLst/>
@@ -369,366 +1100,526 @@
           </a:ln>
         </p:spPr>
         <p:txBody>
-          <a:bodyPr lIns="0" tIns="0" rIns="0" bIns="0" anchor="t">
-            <a:normAutofit/>
+          <a:bodyPr lIns="91440" tIns="45720" rIns="91440" bIns="45720" anchor="t">
+            <a:noAutofit/>
           </a:bodyPr>
           <a:lstStyle>
-            <a:lvl1pPr algn="l">
-              <a:spcBef>
-                <a:spcPts val="1417"/>
-              </a:spcBef>
-              <a:buClr>
-                <a:srgbClr val="000000"/>
-              </a:buClr>
-              <a:buSzPct val="45000"/>
-              <a:buFont typeface="Wingdings" charset="2"/>
-              <a:buChar char=""/>
-              <a:defRPr lang="en-US" sz="3200" b="0" u="none" strike="noStrike">
+            <a:lvl1pPr algn="l" defTabSz="914400">
+              <a:lnSpc>
+                <a:spcPct val="90000"/>
+              </a:lnSpc>
+              <a:spcBef>
+                <a:spcPts val="1001"/>
+              </a:spcBef>
+              <a:buClr>
+                <a:srgbClr val="000000"/>
+              </a:buClr>
+              <a:buFont typeface="Arial"/>
+              <a:buChar char="•"/>
+              <a:defRPr lang="en-US" sz="2800" b="0" u="none" strike="noStrike">
+                <a:solidFill>
+                  <a:schemeClr val="dk1"/>
+                </a:solidFill>
+                <a:effectLst/>
+                <a:uFillTx/>
+                <a:latin typeface="Aptos"/>
+              </a:defRPr>
+            </a:lvl1pPr>
+            <a:lvl2pPr lvl="1" algn="l" defTabSz="914400">
+              <a:lnSpc>
+                <a:spcPct val="90000"/>
+              </a:lnSpc>
+              <a:spcBef>
+                <a:spcPts val="499"/>
+              </a:spcBef>
+              <a:buClr>
+                <a:srgbClr val="000000"/>
+              </a:buClr>
+              <a:buFont typeface="Arial"/>
+              <a:buChar char="•"/>
+              <a:defRPr lang="en-US" sz="2400" b="0" u="none" strike="noStrike">
+                <a:solidFill>
+                  <a:schemeClr val="dk1"/>
+                </a:solidFill>
+                <a:effectLst/>
+                <a:uFillTx/>
+                <a:latin typeface="Aptos"/>
+              </a:defRPr>
+            </a:lvl2pPr>
+            <a:lvl3pPr lvl="2" algn="l" defTabSz="914400">
+              <a:lnSpc>
+                <a:spcPct val="90000"/>
+              </a:lnSpc>
+              <a:spcBef>
+                <a:spcPts val="499"/>
+              </a:spcBef>
+              <a:buClr>
+                <a:srgbClr val="000000"/>
+              </a:buClr>
+              <a:buFont typeface="Arial"/>
+              <a:buChar char="•"/>
+              <a:defRPr lang="en-US" sz="2000" b="0" u="none" strike="noStrike">
+                <a:solidFill>
+                  <a:schemeClr val="dk1"/>
+                </a:solidFill>
+                <a:effectLst/>
+                <a:uFillTx/>
+                <a:latin typeface="Aptos"/>
+              </a:defRPr>
+            </a:lvl3pPr>
+            <a:lvl4pPr lvl="3" algn="l" defTabSz="914400">
+              <a:lnSpc>
+                <a:spcPct val="90000"/>
+              </a:lnSpc>
+              <a:spcBef>
+                <a:spcPts val="499"/>
+              </a:spcBef>
+              <a:buClr>
+                <a:srgbClr val="000000"/>
+              </a:buClr>
+              <a:buFont typeface="Arial"/>
+              <a:buChar char="•"/>
+              <a:defRPr lang="en-US" sz="1800" b="0" u="none" strike="noStrike">
+                <a:solidFill>
+                  <a:schemeClr val="dk1"/>
+                </a:solidFill>
+                <a:effectLst/>
+                <a:uFillTx/>
+                <a:latin typeface="Aptos"/>
+              </a:defRPr>
+            </a:lvl4pPr>
+            <a:lvl5pPr lvl="4" algn="l" defTabSz="914400">
+              <a:lnSpc>
+                <a:spcPct val="90000"/>
+              </a:lnSpc>
+              <a:spcBef>
+                <a:spcPts val="499"/>
+              </a:spcBef>
+              <a:buClr>
+                <a:srgbClr val="000000"/>
+              </a:buClr>
+              <a:buFont typeface="Arial"/>
+              <a:buChar char="•"/>
+              <a:defRPr lang="en-US" sz="1800" b="0" u="none" strike="noStrike">
+                <a:solidFill>
+                  <a:schemeClr val="dk1"/>
+                </a:solidFill>
+                <a:effectLst/>
+                <a:uFillTx/>
+                <a:latin typeface="Aptos"/>
+              </a:defRPr>
+            </a:lvl5pPr>
+          </a:lstStyle>
+          <a:p>
+            <a:pPr marL="228600" indent="-228600" algn="l" defTabSz="914400">
+              <a:lnSpc>
+                <a:spcPct val="90000"/>
+              </a:lnSpc>
+              <a:spcBef>
+                <a:spcPts val="1001"/>
+              </a:spcBef>
+              <a:buClr>
+                <a:srgbClr val="000000"/>
+              </a:buClr>
+              <a:buFont typeface="Arial"/>
+              <a:buChar char="•"/>
+            </a:pPr>
+            <a:r>
+              <a:rPr lang="en-US" sz="2800" b="0" u="none" strike="noStrike">
+                <a:solidFill>
+                  <a:schemeClr val="dk1"/>
+                </a:solidFill>
+                <a:effectLst/>
+                <a:uFillTx/>
+                <a:latin typeface="Aptos"/>
+              </a:rPr>
+              <a:t>Click to edit Master text styles</a:t>
+            </a:r>
+            <a:endParaRPr lang="en-US" sz="2800" b="0" u="none" strike="noStrike">
+              <a:solidFill>
+                <a:schemeClr val="dk1"/>
+              </a:solidFill>
+              <a:effectLst/>
+              <a:uFillTx/>
+              <a:latin typeface="Aptos"/>
+            </a:endParaRPr>
+          </a:p>
+          <a:p>
+            <a:pPr marL="685800" lvl="1" indent="-228600" algn="l" defTabSz="914400">
+              <a:lnSpc>
+                <a:spcPct val="90000"/>
+              </a:lnSpc>
+              <a:spcBef>
+                <a:spcPts val="499"/>
+              </a:spcBef>
+              <a:buClr>
+                <a:srgbClr val="000000"/>
+              </a:buClr>
+              <a:buFont typeface="Arial"/>
+              <a:buChar char="•"/>
+            </a:pPr>
+            <a:r>
+              <a:rPr lang="en-US" sz="2400" b="0" u="none" strike="noStrike">
+                <a:solidFill>
+                  <a:schemeClr val="dk1"/>
+                </a:solidFill>
+                <a:effectLst/>
+                <a:uFillTx/>
+                <a:latin typeface="Aptos"/>
+              </a:rPr>
+              <a:t>Second level</a:t>
+            </a:r>
+            <a:endParaRPr lang="en-US" sz="2400" b="0" u="none" strike="noStrike">
+              <a:solidFill>
+                <a:schemeClr val="dk1"/>
+              </a:solidFill>
+              <a:effectLst/>
+              <a:uFillTx/>
+              <a:latin typeface="Aptos"/>
+            </a:endParaRPr>
+          </a:p>
+          <a:p>
+            <a:pPr marL="1143000" lvl="2" indent="-228600" algn="l" defTabSz="914400">
+              <a:lnSpc>
+                <a:spcPct val="90000"/>
+              </a:lnSpc>
+              <a:spcBef>
+                <a:spcPts val="499"/>
+              </a:spcBef>
+              <a:buClr>
+                <a:srgbClr val="000000"/>
+              </a:buClr>
+              <a:buFont typeface="Arial"/>
+              <a:buChar char="•"/>
+            </a:pPr>
+            <a:r>
+              <a:rPr lang="en-US" sz="2000" b="0" u="none" strike="noStrike">
+                <a:solidFill>
+                  <a:schemeClr val="dk1"/>
+                </a:solidFill>
+                <a:effectLst/>
+                <a:uFillTx/>
+                <a:latin typeface="Aptos"/>
+              </a:rPr>
+              <a:t>Third level</a:t>
+            </a:r>
+            <a:endParaRPr lang="en-US" sz="2000" b="0" u="none" strike="noStrike">
+              <a:solidFill>
+                <a:schemeClr val="dk1"/>
+              </a:solidFill>
+              <a:effectLst/>
+              <a:uFillTx/>
+              <a:latin typeface="Aptos"/>
+            </a:endParaRPr>
+          </a:p>
+          <a:p>
+            <a:pPr marL="1600200" lvl="3" indent="-228600" algn="l" defTabSz="914400">
+              <a:lnSpc>
+                <a:spcPct val="90000"/>
+              </a:lnSpc>
+              <a:spcBef>
+                <a:spcPts val="499"/>
+              </a:spcBef>
+              <a:buClr>
+                <a:srgbClr val="000000"/>
+              </a:buClr>
+              <a:buFont typeface="Arial"/>
+              <a:buChar char="•"/>
+            </a:pPr>
+            <a:r>
+              <a:rPr lang="en-US" sz="1800" b="0" u="none" strike="noStrike">
+                <a:solidFill>
+                  <a:schemeClr val="dk1"/>
+                </a:solidFill>
+                <a:effectLst/>
+                <a:uFillTx/>
+                <a:latin typeface="Aptos"/>
+              </a:rPr>
+              <a:t>Fourth level</a:t>
+            </a:r>
+            <a:endParaRPr lang="en-US" sz="1800" b="0" u="none" strike="noStrike">
+              <a:solidFill>
+                <a:schemeClr val="dk1"/>
+              </a:solidFill>
+              <a:effectLst/>
+              <a:uFillTx/>
+              <a:latin typeface="Aptos"/>
+            </a:endParaRPr>
+          </a:p>
+          <a:p>
+            <a:pPr marL="2057400" lvl="4" indent="-228600" algn="l" defTabSz="914400">
+              <a:lnSpc>
+                <a:spcPct val="90000"/>
+              </a:lnSpc>
+              <a:spcBef>
+                <a:spcPts val="499"/>
+              </a:spcBef>
+              <a:buClr>
+                <a:srgbClr val="000000"/>
+              </a:buClr>
+              <a:buFont typeface="Arial"/>
+              <a:buChar char="•"/>
+            </a:pPr>
+            <a:r>
+              <a:rPr lang="en-US" sz="1800" b="0" u="none" strike="noStrike">
+                <a:solidFill>
+                  <a:schemeClr val="dk1"/>
+                </a:solidFill>
+                <a:effectLst/>
+                <a:uFillTx/>
+                <a:latin typeface="Aptos"/>
+              </a:rPr>
+              <a:t>Fifth level</a:t>
+            </a:r>
+            <a:endParaRPr lang="en-US" sz="1800" b="0" u="none" strike="noStrike">
+              <a:solidFill>
+                <a:schemeClr val="dk1"/>
+              </a:solidFill>
+              <a:effectLst/>
+              <a:uFillTx/>
+              <a:latin typeface="Aptos"/>
+            </a:endParaRPr>
+          </a:p>
+        </p:txBody>
+      </p:sp>
+      <p:sp>
+        <p:nvSpPr>
+          <p:cNvPr id="53" name="PlaceHolder 3"/>
+          <p:cNvSpPr>
+            <a:spLocks noGrp="1"/>
+          </p:cNvSpPr>
+          <p:nvPr>
+            <p:ph type="dt" idx="28"/>
+          </p:nvPr>
+        </p:nvSpPr>
+        <p:spPr>
+          <a:xfrm>
+            <a:off x="838080" y="6356520"/>
+            <a:ext cx="2742120" cy="363960"/>
+          </a:xfrm>
+          <a:prstGeom prst="rect">
+            <a:avLst/>
+          </a:prstGeom>
+          <a:noFill/>
+          <a:ln w="0">
+            <a:noFill/>
+          </a:ln>
+        </p:spPr>
+        <p:txBody>
+          <a:bodyPr lIns="91440" tIns="45720" rIns="91440" bIns="45720" anchor="ctr">
+            <a:noAutofit/>
+          </a:bodyPr>
+          <a:lstStyle>
+            <a:lvl1pPr indent="0" algn="l" defTabSz="914400">
+              <a:lnSpc>
+                <a:spcPct val="100000"/>
+              </a:lnSpc>
+              <a:buNone/>
+              <a:tabLst>
+                <a:tab pos="0" algn="l"/>
+              </a:tabLst>
+              <a:defRPr lang="en-US" sz="1200" b="0" u="none" strike="noStrike">
+                <a:solidFill>
+                  <a:schemeClr val="dk1">
+                    <a:tint val="82000"/>
+                  </a:schemeClr>
+                </a:solidFill>
+                <a:effectLst/>
+                <a:uFillTx/>
+                <a:latin typeface="Aptos"/>
+              </a:defRPr>
+            </a:lvl1pPr>
+          </a:lstStyle>
+          <a:p>
+            <a:pPr indent="0" algn="l" defTabSz="914400">
+              <a:lnSpc>
+                <a:spcPct val="100000"/>
+              </a:lnSpc>
+              <a:buNone/>
+              <a:tabLst>
+                <a:tab pos="0" algn="l"/>
+              </a:tabLst>
+            </a:pPr>
+            <a:r>
+              <a:rPr lang="en-US" sz="1200" b="0" u="none" strike="noStrike">
+                <a:solidFill>
+                  <a:schemeClr val="dk1">
+                    <a:tint val="82000"/>
+                  </a:schemeClr>
+                </a:solidFill>
+                <a:effectLst/>
+                <a:uFillTx/>
+                <a:latin typeface="Aptos"/>
+              </a:rPr>
+              <a:t>&lt;date/time&gt;</a:t>
+            </a:r>
+            <a:endParaRPr lang="en-US" sz="1200" b="0" u="none" strike="noStrike">
+              <a:solidFill>
+                <a:srgbClr val="000000"/>
+              </a:solidFill>
+              <a:effectLst/>
+              <a:uFillTx/>
+              <a:latin typeface="Times New Roman"/>
+            </a:endParaRPr>
+          </a:p>
+        </p:txBody>
+      </p:sp>
+      <p:sp>
+        <p:nvSpPr>
+          <p:cNvPr id="54" name="PlaceHolder 4"/>
+          <p:cNvSpPr>
+            <a:spLocks noGrp="1"/>
+          </p:cNvSpPr>
+          <p:nvPr>
+            <p:ph type="ftr" idx="29"/>
+          </p:nvPr>
+        </p:nvSpPr>
+        <p:spPr>
+          <a:xfrm>
+            <a:off x="4038480" y="6356520"/>
+            <a:ext cx="4113720" cy="363960"/>
+          </a:xfrm>
+          <a:prstGeom prst="rect">
+            <a:avLst/>
+          </a:prstGeom>
+          <a:noFill/>
+          <a:ln w="0">
+            <a:noFill/>
+          </a:ln>
+        </p:spPr>
+        <p:txBody>
+          <a:bodyPr lIns="91440" tIns="45720" rIns="91440" bIns="45720" anchor="ctr">
+            <a:noAutofit/>
+          </a:bodyPr>
+          <a:lstStyle>
+            <a:lvl1pPr indent="0" algn="ctr">
+              <a:lnSpc>
+                <a:spcPct val="100000"/>
+              </a:lnSpc>
+              <a:buNone/>
+              <a:tabLst>
+                <a:tab pos="0" algn="l"/>
+              </a:tabLst>
+              <a:defRPr lang="en-US" sz="1400" b="0" u="none" strike="noStrike">
                 <a:solidFill>
                   <a:srgbClr val="000000"/>
                 </a:solidFill>
                 <a:effectLst/>
                 <a:uFillTx/>
-                <a:latin typeface="Arial"/>
+                <a:latin typeface="Times New Roman"/>
               </a:defRPr>
             </a:lvl1pPr>
-            <a:lvl2pPr lvl="1" algn="l">
-              <a:spcBef>
-                <a:spcPts val="1134"/>
-              </a:spcBef>
-              <a:buClr>
-                <a:srgbClr val="000000"/>
-              </a:buClr>
-              <a:buSzPct val="75000"/>
-              <a:buFont typeface="Symbol" charset="2"/>
-              <a:buChar char=""/>
-              <a:defRPr lang="en-US" sz="2800" b="0" u="none" strike="noStrike">
+          </a:lstStyle>
+          <a:p>
+            <a:pPr indent="0" algn="ctr">
+              <a:lnSpc>
+                <a:spcPct val="100000"/>
+              </a:lnSpc>
+              <a:buNone/>
+              <a:tabLst>
+                <a:tab pos="0" algn="l"/>
+              </a:tabLst>
+            </a:pPr>
+            <a:r>
+              <a:rPr lang="en-US" sz="1400" b="0" u="none" strike="noStrike">
                 <a:solidFill>
                   <a:srgbClr val="000000"/>
                 </a:solidFill>
                 <a:effectLst/>
                 <a:uFillTx/>
-                <a:latin typeface="Arial"/>
-              </a:defRPr>
-            </a:lvl2pPr>
-            <a:lvl3pPr lvl="2" algn="l">
-              <a:spcBef>
-                <a:spcPts val="850"/>
-              </a:spcBef>
-              <a:buClr>
-                <a:srgbClr val="000000"/>
-              </a:buClr>
-              <a:buSzPct val="45000"/>
-              <a:buFont typeface="Wingdings" charset="2"/>
-              <a:buChar char=""/>
-              <a:defRPr lang="en-US" sz="2400" b="0" u="none" strike="noStrike">
-                <a:solidFill>
-                  <a:srgbClr val="000000"/>
-                </a:solidFill>
-                <a:effectLst/>
-                <a:uFillTx/>
-                <a:latin typeface="Arial"/>
-              </a:defRPr>
-            </a:lvl3pPr>
-            <a:lvl4pPr lvl="3" algn="l">
-              <a:spcBef>
-                <a:spcPts val="567"/>
-              </a:spcBef>
-              <a:buClr>
-                <a:srgbClr val="000000"/>
-              </a:buClr>
-              <a:buSzPct val="75000"/>
-              <a:buFont typeface="Symbol" charset="2"/>
-              <a:buChar char=""/>
-              <a:defRPr lang="en-US" sz="2000" b="0" u="none" strike="noStrike">
-                <a:solidFill>
-                  <a:srgbClr val="000000"/>
-                </a:solidFill>
-                <a:effectLst/>
-                <a:uFillTx/>
-                <a:latin typeface="Arial"/>
-              </a:defRPr>
-            </a:lvl4pPr>
-            <a:lvl5pPr lvl="4" algn="l">
-              <a:spcBef>
-                <a:spcPts val="283"/>
-              </a:spcBef>
-              <a:buClr>
-                <a:srgbClr val="000000"/>
-              </a:buClr>
-              <a:buSzPct val="45000"/>
-              <a:buFont typeface="Wingdings" charset="2"/>
-              <a:buChar char=""/>
-              <a:defRPr lang="en-US" sz="2000" b="0" u="none" strike="noStrike">
-                <a:solidFill>
-                  <a:srgbClr val="000000"/>
-                </a:solidFill>
-                <a:effectLst/>
-                <a:uFillTx/>
-                <a:latin typeface="Arial"/>
-              </a:defRPr>
-            </a:lvl5pPr>
-            <a:lvl6pPr lvl="5" algn="l">
-              <a:spcBef>
-                <a:spcPts val="283"/>
-              </a:spcBef>
-              <a:buClr>
-                <a:srgbClr val="000000"/>
-              </a:buClr>
-              <a:buSzPct val="45000"/>
-              <a:buFont typeface="Wingdings" charset="2"/>
-              <a:buChar char=""/>
-              <a:defRPr lang="en-US" sz="2000" b="0" u="none" strike="noStrike">
-                <a:solidFill>
-                  <a:srgbClr val="000000"/>
-                </a:solidFill>
-                <a:effectLst/>
-                <a:uFillTx/>
-                <a:latin typeface="Arial"/>
-              </a:defRPr>
-            </a:lvl6pPr>
-            <a:lvl7pPr lvl="6" algn="l">
-              <a:spcBef>
-                <a:spcPts val="283"/>
-              </a:spcBef>
-              <a:buClr>
-                <a:srgbClr val="000000"/>
-              </a:buClr>
-              <a:buSzPct val="45000"/>
-              <a:buFont typeface="Wingdings" charset="2"/>
-              <a:buChar char=""/>
-              <a:defRPr lang="en-US" sz="2000" b="0" u="none" strike="noStrike">
-                <a:solidFill>
-                  <a:srgbClr val="000000"/>
-                </a:solidFill>
-                <a:effectLst/>
-                <a:uFillTx/>
-                <a:latin typeface="Arial"/>
-              </a:defRPr>
-            </a:lvl7pPr>
+                <a:latin typeface="Times New Roman"/>
+              </a:rPr>
+              <a:t>&lt;footer&gt;</a:t>
+            </a:r>
+            <a:endParaRPr lang="en-US" sz="1400" b="0" u="none" strike="noStrike">
+              <a:solidFill>
+                <a:srgbClr val="000000"/>
+              </a:solidFill>
+              <a:effectLst/>
+              <a:uFillTx/>
+              <a:latin typeface="Times New Roman"/>
+            </a:endParaRPr>
+          </a:p>
+        </p:txBody>
+      </p:sp>
+      <p:sp>
+        <p:nvSpPr>
+          <p:cNvPr id="55" name="PlaceHolder 5"/>
+          <p:cNvSpPr>
+            <a:spLocks noGrp="1"/>
+          </p:cNvSpPr>
+          <p:nvPr>
+            <p:ph type="sldNum" idx="30"/>
+          </p:nvPr>
+        </p:nvSpPr>
+        <p:spPr>
+          <a:xfrm>
+            <a:off x="8610480" y="6356520"/>
+            <a:ext cx="2742120" cy="363960"/>
+          </a:xfrm>
+          <a:prstGeom prst="rect">
+            <a:avLst/>
+          </a:prstGeom>
+          <a:noFill/>
+          <a:ln w="0">
+            <a:noFill/>
+          </a:ln>
+        </p:spPr>
+        <p:txBody>
+          <a:bodyPr lIns="91440" tIns="45720" rIns="91440" bIns="45720" anchor="ctr">
+            <a:noAutofit/>
+          </a:bodyPr>
+          <a:lstStyle>
+            <a:lvl1pPr indent="0" algn="r" defTabSz="914400">
+              <a:lnSpc>
+                <a:spcPct val="100000"/>
+              </a:lnSpc>
+              <a:buNone/>
+              <a:tabLst>
+                <a:tab pos="0" algn="l"/>
+              </a:tabLst>
+              <a:defRPr lang="en-US" sz="1200" b="0" u="none" strike="noStrike">
+                <a:solidFill>
+                  <a:schemeClr val="dk1">
+                    <a:tint val="82000"/>
+                  </a:schemeClr>
+                </a:solidFill>
+                <a:effectLst/>
+                <a:uFillTx/>
+                <a:latin typeface="Aptos"/>
+              </a:defRPr>
+            </a:lvl1pPr>
           </a:lstStyle>
           <a:p>
-            <a:pPr marL="432000" indent="-324000" algn="l">
-              <a:spcBef>
-                <a:spcPts val="1417"/>
-              </a:spcBef>
-              <a:buClr>
-                <a:srgbClr val="000000"/>
-              </a:buClr>
-              <a:buSzPct val="45000"/>
-              <a:buFont typeface="Wingdings" charset="2"/>
-              <a:buChar char=""/>
-            </a:pPr>
-            <a:r>
-              <a:rPr lang="en-US" sz="3200" b="0" u="none" strike="noStrike">
-                <a:solidFill>
-                  <a:srgbClr val="000000"/>
-                </a:solidFill>
-                <a:effectLst/>
-                <a:uFillTx/>
-                <a:latin typeface="Arial"/>
-              </a:rPr>
-              <a:t>Click to edit the outline text format</a:t>
-            </a:r>
-            <a:endParaRPr lang="en-US" sz="3200" b="0" u="none" strike="noStrike">
-              <a:solidFill>
-                <a:srgbClr val="000000"/>
-              </a:solidFill>
-              <a:effectLst/>
-              <a:uFillTx/>
-              <a:latin typeface="Arial"/>
-            </a:endParaRPr>
-          </a:p>
-          <a:p>
-            <a:pPr marL="864000" lvl="1" indent="-324000" algn="l">
-              <a:spcBef>
-                <a:spcPts val="1134"/>
-              </a:spcBef>
-              <a:buClr>
-                <a:srgbClr val="000000"/>
-              </a:buClr>
-              <a:buSzPct val="75000"/>
-              <a:buFont typeface="Symbol" charset="2"/>
-              <a:buChar char=""/>
-            </a:pPr>
-            <a:r>
-              <a:rPr lang="en-US" sz="2800" b="0" u="none" strike="noStrike">
-                <a:solidFill>
-                  <a:srgbClr val="000000"/>
-                </a:solidFill>
-                <a:effectLst/>
-                <a:uFillTx/>
-                <a:latin typeface="Arial"/>
-              </a:rPr>
-              <a:t>Second Outline Level</a:t>
-            </a:r>
-            <a:endParaRPr lang="en-US" sz="2800" b="0" u="none" strike="noStrike">
-              <a:solidFill>
-                <a:srgbClr val="000000"/>
-              </a:solidFill>
-              <a:effectLst/>
-              <a:uFillTx/>
-              <a:latin typeface="Arial"/>
-            </a:endParaRPr>
-          </a:p>
-          <a:p>
-            <a:pPr marL="1296000" lvl="2" indent="-288000" algn="l">
-              <a:spcBef>
-                <a:spcPts val="850"/>
-              </a:spcBef>
-              <a:buClr>
-                <a:srgbClr val="000000"/>
-              </a:buClr>
-              <a:buSzPct val="45000"/>
-              <a:buFont typeface="Wingdings" charset="2"/>
-              <a:buChar char=""/>
-            </a:pPr>
-            <a:r>
-              <a:rPr lang="en-US" sz="2400" b="0" u="none" strike="noStrike">
-                <a:solidFill>
-                  <a:srgbClr val="000000"/>
-                </a:solidFill>
-                <a:effectLst/>
-                <a:uFillTx/>
-                <a:latin typeface="Arial"/>
-              </a:rPr>
-              <a:t>Third Outline Level</a:t>
-            </a:r>
-            <a:endParaRPr lang="en-US" sz="2400" b="0" u="none" strike="noStrike">
-              <a:solidFill>
-                <a:srgbClr val="000000"/>
-              </a:solidFill>
-              <a:effectLst/>
-              <a:uFillTx/>
-              <a:latin typeface="Arial"/>
-            </a:endParaRPr>
-          </a:p>
-          <a:p>
-            <a:pPr marL="1728000" lvl="3" indent="-216000" algn="l">
-              <a:spcBef>
-                <a:spcPts val="567"/>
-              </a:spcBef>
-              <a:buClr>
-                <a:srgbClr val="000000"/>
-              </a:buClr>
-              <a:buSzPct val="75000"/>
-              <a:buFont typeface="Symbol" charset="2"/>
-              <a:buChar char=""/>
-            </a:pPr>
-            <a:r>
-              <a:rPr lang="en-US" sz="2000" b="0" u="none" strike="noStrike">
-                <a:solidFill>
-                  <a:srgbClr val="000000"/>
-                </a:solidFill>
-                <a:effectLst/>
-                <a:uFillTx/>
-                <a:latin typeface="Arial"/>
-              </a:rPr>
-              <a:t>Fourth Outline Level</a:t>
-            </a:r>
-            <a:endParaRPr lang="en-US" sz="2000" b="0" u="none" strike="noStrike">
-              <a:solidFill>
-                <a:srgbClr val="000000"/>
-              </a:solidFill>
-              <a:effectLst/>
-              <a:uFillTx/>
-              <a:latin typeface="Arial"/>
-            </a:endParaRPr>
-          </a:p>
-          <a:p>
-            <a:pPr marL="2160000" lvl="4" indent="-216000" algn="l">
-              <a:spcBef>
-                <a:spcPts val="283"/>
-              </a:spcBef>
-              <a:buClr>
-                <a:srgbClr val="000000"/>
-              </a:buClr>
-              <a:buSzPct val="45000"/>
-              <a:buFont typeface="Wingdings" charset="2"/>
-              <a:buChar char=""/>
-            </a:pPr>
-            <a:r>
-              <a:rPr lang="en-US" sz="2000" b="0" u="none" strike="noStrike">
-                <a:solidFill>
-                  <a:srgbClr val="000000"/>
-                </a:solidFill>
-                <a:effectLst/>
-                <a:uFillTx/>
-                <a:latin typeface="Arial"/>
-              </a:rPr>
-              <a:t>Fifth Outline Level</a:t>
-            </a:r>
-            <a:endParaRPr lang="en-US" sz="2000" b="0" u="none" strike="noStrike">
-              <a:solidFill>
-                <a:srgbClr val="000000"/>
-              </a:solidFill>
-              <a:effectLst/>
-              <a:uFillTx/>
-              <a:latin typeface="Arial"/>
-            </a:endParaRPr>
-          </a:p>
-          <a:p>
-            <a:pPr marL="2592000" lvl="5" indent="-216000" algn="l">
-              <a:spcBef>
-                <a:spcPts val="283"/>
-              </a:spcBef>
-              <a:buClr>
-                <a:srgbClr val="000000"/>
-              </a:buClr>
-              <a:buSzPct val="45000"/>
-              <a:buFont typeface="Wingdings" charset="2"/>
-              <a:buChar char=""/>
-            </a:pPr>
-            <a:r>
-              <a:rPr lang="en-US" sz="2000" b="0" u="none" strike="noStrike">
-                <a:solidFill>
-                  <a:srgbClr val="000000"/>
-                </a:solidFill>
-                <a:effectLst/>
-                <a:uFillTx/>
-                <a:latin typeface="Arial"/>
-              </a:rPr>
-              <a:t>Sixth Outline Level</a:t>
-            </a:r>
-            <a:endParaRPr lang="en-US" sz="2000" b="0" u="none" strike="noStrike">
-              <a:solidFill>
-                <a:srgbClr val="000000"/>
-              </a:solidFill>
-              <a:effectLst/>
-              <a:uFillTx/>
-              <a:latin typeface="Arial"/>
-            </a:endParaRPr>
-          </a:p>
-          <a:p>
-            <a:pPr marL="3024000" lvl="6" indent="-216000" algn="l">
-              <a:spcBef>
-                <a:spcPts val="283"/>
-              </a:spcBef>
-              <a:buClr>
-                <a:srgbClr val="000000"/>
-              </a:buClr>
-              <a:buSzPct val="45000"/>
-              <a:buFont typeface="Wingdings" charset="2"/>
-              <a:buChar char=""/>
-            </a:pPr>
-            <a:r>
-              <a:rPr lang="en-US" sz="2000" b="0" u="none" strike="noStrike">
-                <a:solidFill>
-                  <a:srgbClr val="000000"/>
-                </a:solidFill>
-                <a:effectLst/>
-                <a:uFillTx/>
-                <a:latin typeface="Arial"/>
-              </a:rPr>
-              <a:t>Seventh Outline Level</a:t>
-            </a:r>
-            <a:endParaRPr lang="en-US" sz="2000" b="0" u="none" strike="noStrike">
-              <a:solidFill>
-                <a:srgbClr val="000000"/>
-              </a:solidFill>
-              <a:effectLst/>
-              <a:uFillTx/>
-              <a:latin typeface="Arial"/>
+            <a:pPr indent="0" algn="r" defTabSz="914400">
+              <a:lnSpc>
+                <a:spcPct val="100000"/>
+              </a:lnSpc>
+              <a:buNone/>
+              <a:tabLst>
+                <a:tab pos="0" algn="l"/>
+              </a:tabLst>
+            </a:pPr>
+            <a:fld id="{AC7CFCE5-4038-4CFD-BE33-7F57C2C870C7}" type="slidenum">
+              <a:rPr lang="en-US" sz="1200" b="0" u="none" strike="noStrike">
+                <a:solidFill>
+                  <a:schemeClr val="dk1">
+                    <a:tint val="82000"/>
+                  </a:schemeClr>
+                </a:solidFill>
+                <a:effectLst/>
+                <a:uFillTx/>
+                <a:latin typeface="Aptos"/>
+              </a:rPr>
+              <a:t>&lt;number&gt;</a:t>
+            </a:fld>
+            <a:endParaRPr lang="en-US" sz="1200" b="0" u="none" strike="noStrike">
+              <a:solidFill>
+                <a:srgbClr val="000000"/>
+              </a:solidFill>
+              <a:effectLst/>
+              <a:uFillTx/>
+              <a:latin typeface="Times New Roman"/>
             </a:endParaRPr>
           </a:p>
         </p:txBody>
@@ -738,7 +1629,446 @@
 </p:sldLayout>
 </file>
 
-<file path=ppt/slideLayouts/slideLayout10.xml><?xml version="1.0" encoding="utf-8"?>
+<file path=ppt/slideLayouts/slideLayout11.xml><?xml version="1.0" encoding="utf-8"?>
+<p:sldLayout xmlns:a="http://schemas.openxmlformats.org/drawingml/2006/main" xmlns:p="http://schemas.openxmlformats.org/presentationml/2006/main" xmlns:r="http://schemas.openxmlformats.org/officeDocument/2006/relationships" xmlns:p14="http://schemas.microsoft.com/office/powerpoint/2010/main" xmlns:p15="http://schemas.microsoft.com/office/powerpoint/2012/main" xmlns:mc="http://schemas.openxmlformats.org/markup-compatibility/2006" type="blank" preserve="1">
+  <p:cSld name="Section Header">
+    <p:bg>
+      <p:bgPr>
+        <a:solidFill>
+          <a:srgbClr val="FFFFFF"/>
+        </a:solidFill>
+      </p:bgPr>
+    </p:bg>
+    <p:spTree>
+      <p:nvGrpSpPr>
+        <p:cNvPr id="1" name=""/>
+        <p:cNvGrpSpPr/>
+        <p:nvPr/>
+      </p:nvGrpSpPr>
+      <p:grpSpPr>
+        <a:xfrm>
+          <a:off x="0" y="0"/>
+          <a:ext cx="0" cy="0"/>
+          <a:chOff x="0" y="0"/>
+          <a:chExt cx="0" cy="0"/>
+        </a:xfrm>
+      </p:grpSpPr>
+      <p:sp>
+        <p:nvSpPr>
+          <p:cNvPr id="56" name="PlaceHolder 1"/>
+          <p:cNvSpPr>
+            <a:spLocks noGrp="1"/>
+          </p:cNvSpPr>
+          <p:nvPr>
+            <p:ph type="title"/>
+          </p:nvPr>
+        </p:nvSpPr>
+        <p:spPr>
+          <a:xfrm>
+            <a:off x="831960" y="1709640"/>
+            <a:ext cx="10514520" cy="2851560"/>
+          </a:xfrm>
+          <a:prstGeom prst="rect">
+            <a:avLst/>
+          </a:prstGeom>
+          <a:noFill/>
+          <a:ln w="0">
+            <a:noFill/>
+          </a:ln>
+        </p:spPr>
+        <p:txBody>
+          <a:bodyPr lIns="91440" tIns="45720" rIns="91440" bIns="45720" anchor="b">
+            <a:noAutofit/>
+          </a:bodyPr>
+          <a:lstStyle>
+            <a:lvl1pPr indent="0" algn="l" defTabSz="914400">
+              <a:lnSpc>
+                <a:spcPct val="90000"/>
+              </a:lnSpc>
+              <a:buNone/>
+              <a:tabLst>
+                <a:tab pos="0" algn="l"/>
+              </a:tabLst>
+              <a:defRPr lang="en-US" sz="6000" b="0" u="none" strike="noStrike">
+                <a:solidFill>
+                  <a:schemeClr val="dk1"/>
+                </a:solidFill>
+                <a:effectLst/>
+                <a:uFillTx/>
+                <a:latin typeface="Aptos Display"/>
+              </a:defRPr>
+            </a:lvl1pPr>
+          </a:lstStyle>
+          <a:p>
+            <a:pPr indent="0" algn="l" defTabSz="914400">
+              <a:lnSpc>
+                <a:spcPct val="90000"/>
+              </a:lnSpc>
+              <a:buNone/>
+              <a:tabLst>
+                <a:tab pos="0" algn="l"/>
+              </a:tabLst>
+            </a:pPr>
+            <a:r>
+              <a:rPr lang="en-US" sz="6000" b="0" u="none" strike="noStrike">
+                <a:solidFill>
+                  <a:schemeClr val="dk1"/>
+                </a:solidFill>
+                <a:effectLst/>
+                <a:uFillTx/>
+                <a:latin typeface="Aptos Display"/>
+              </a:rPr>
+              <a:t>Click to edit Master title style</a:t>
+            </a:r>
+            <a:endParaRPr lang="en-US" sz="6000" b="0" u="none" strike="noStrike">
+              <a:solidFill>
+                <a:schemeClr val="dk1"/>
+              </a:solidFill>
+              <a:effectLst/>
+              <a:uFillTx/>
+              <a:latin typeface="Aptos Display"/>
+            </a:endParaRPr>
+          </a:p>
+        </p:txBody>
+      </p:sp>
+      <p:sp>
+        <p:nvSpPr>
+          <p:cNvPr id="57" name="PlaceHolder 2"/>
+          <p:cNvSpPr>
+            <a:spLocks noGrp="1"/>
+          </p:cNvSpPr>
+          <p:nvPr>
+            <p:ph type="body"/>
+          </p:nvPr>
+        </p:nvSpPr>
+        <p:spPr>
+          <a:xfrm>
+            <a:off x="831960" y="4589640"/>
+            <a:ext cx="10514520" cy="1499040"/>
+          </a:xfrm>
+          <a:prstGeom prst="rect">
+            <a:avLst/>
+          </a:prstGeom>
+          <a:noFill/>
+          <a:ln w="0">
+            <a:noFill/>
+          </a:ln>
+        </p:spPr>
+        <p:txBody>
+          <a:bodyPr lIns="91440" tIns="45720" rIns="91440" bIns="45720" anchor="t">
+            <a:noAutofit/>
+          </a:bodyPr>
+          <a:lstStyle>
+            <a:lvl1pPr indent="0" algn="l" defTabSz="914400">
+              <a:lnSpc>
+                <a:spcPct val="90000"/>
+              </a:lnSpc>
+              <a:spcBef>
+                <a:spcPts val="1001"/>
+              </a:spcBef>
+              <a:buNone/>
+              <a:tabLst>
+                <a:tab pos="0" algn="l"/>
+              </a:tabLst>
+              <a:defRPr lang="en-US" sz="2400" b="0" u="none" strike="noStrike">
+                <a:solidFill>
+                  <a:schemeClr val="dk1">
+                    <a:tint val="82000"/>
+                  </a:schemeClr>
+                </a:solidFill>
+                <a:effectLst/>
+                <a:uFillTx/>
+                <a:latin typeface="Aptos"/>
+              </a:defRPr>
+            </a:lvl1pPr>
+          </a:lstStyle>
+          <a:p>
+            <a:pPr indent="0" algn="l" defTabSz="914400">
+              <a:lnSpc>
+                <a:spcPct val="90000"/>
+              </a:lnSpc>
+              <a:spcBef>
+                <a:spcPts val="1001"/>
+              </a:spcBef>
+              <a:buNone/>
+              <a:tabLst>
+                <a:tab pos="0" algn="l"/>
+              </a:tabLst>
+            </a:pPr>
+            <a:r>
+              <a:rPr lang="en-US" sz="2400" b="0" u="none" strike="noStrike">
+                <a:solidFill>
+                  <a:schemeClr val="dk1">
+                    <a:tint val="82000"/>
+                  </a:schemeClr>
+                </a:solidFill>
+                <a:effectLst/>
+                <a:uFillTx/>
+                <a:latin typeface="Aptos"/>
+              </a:rPr>
+              <a:t>Click to edit Master text styles</a:t>
+            </a:r>
+            <a:endParaRPr lang="en-US" sz="2400" b="0" u="none" strike="noStrike">
+              <a:solidFill>
+                <a:schemeClr val="dk1">
+                  <a:tint val="82000"/>
+                </a:schemeClr>
+              </a:solidFill>
+              <a:effectLst/>
+              <a:uFillTx/>
+              <a:latin typeface="Aptos"/>
+            </a:endParaRPr>
+          </a:p>
+        </p:txBody>
+      </p:sp>
+      <p:sp>
+        <p:nvSpPr>
+          <p:cNvPr id="58" name="PlaceHolder 3"/>
+          <p:cNvSpPr>
+            <a:spLocks noGrp="1"/>
+          </p:cNvSpPr>
+          <p:nvPr>
+            <p:ph type="dt" idx="31"/>
+          </p:nvPr>
+        </p:nvSpPr>
+        <p:spPr>
+          <a:xfrm>
+            <a:off x="838080" y="6356520"/>
+            <a:ext cx="2742120" cy="363960"/>
+          </a:xfrm>
+          <a:prstGeom prst="rect">
+            <a:avLst/>
+          </a:prstGeom>
+          <a:noFill/>
+          <a:ln w="0">
+            <a:noFill/>
+          </a:ln>
+        </p:spPr>
+        <p:txBody>
+          <a:bodyPr lIns="91440" tIns="45720" rIns="91440" bIns="45720" anchor="ctr">
+            <a:noAutofit/>
+          </a:bodyPr>
+          <a:lstStyle>
+            <a:lvl1pPr indent="0" algn="l" defTabSz="914400">
+              <a:lnSpc>
+                <a:spcPct val="100000"/>
+              </a:lnSpc>
+              <a:buNone/>
+              <a:tabLst>
+                <a:tab pos="0" algn="l"/>
+              </a:tabLst>
+              <a:defRPr lang="en-US" sz="1200" b="0" u="none" strike="noStrike">
+                <a:solidFill>
+                  <a:schemeClr val="dk1">
+                    <a:tint val="82000"/>
+                  </a:schemeClr>
+                </a:solidFill>
+                <a:effectLst/>
+                <a:uFillTx/>
+                <a:latin typeface="Aptos"/>
+              </a:defRPr>
+            </a:lvl1pPr>
+          </a:lstStyle>
+          <a:p>
+            <a:pPr indent="0" algn="l" defTabSz="914400">
+              <a:lnSpc>
+                <a:spcPct val="100000"/>
+              </a:lnSpc>
+              <a:buNone/>
+              <a:tabLst>
+                <a:tab pos="0" algn="l"/>
+              </a:tabLst>
+            </a:pPr>
+            <a:r>
+              <a:rPr lang="en-US" sz="1200" b="0" u="none" strike="noStrike">
+                <a:solidFill>
+                  <a:schemeClr val="dk1">
+                    <a:tint val="82000"/>
+                  </a:schemeClr>
+                </a:solidFill>
+                <a:effectLst/>
+                <a:uFillTx/>
+                <a:latin typeface="Aptos"/>
+              </a:rPr>
+              <a:t>&lt;date/time&gt;</a:t>
+            </a:r>
+            <a:endParaRPr lang="en-US" sz="1200" b="0" u="none" strike="noStrike">
+              <a:solidFill>
+                <a:srgbClr val="000000"/>
+              </a:solidFill>
+              <a:effectLst/>
+              <a:uFillTx/>
+              <a:latin typeface="Times New Roman"/>
+            </a:endParaRPr>
+          </a:p>
+        </p:txBody>
+      </p:sp>
+      <p:sp>
+        <p:nvSpPr>
+          <p:cNvPr id="59" name="PlaceHolder 4"/>
+          <p:cNvSpPr>
+            <a:spLocks noGrp="1"/>
+          </p:cNvSpPr>
+          <p:nvPr>
+            <p:ph type="ftr" idx="32"/>
+          </p:nvPr>
+        </p:nvSpPr>
+        <p:spPr>
+          <a:xfrm>
+            <a:off x="4038480" y="6356520"/>
+            <a:ext cx="4113720" cy="363960"/>
+          </a:xfrm>
+          <a:prstGeom prst="rect">
+            <a:avLst/>
+          </a:prstGeom>
+          <a:noFill/>
+          <a:ln w="0">
+            <a:noFill/>
+          </a:ln>
+        </p:spPr>
+        <p:txBody>
+          <a:bodyPr lIns="91440" tIns="45720" rIns="91440" bIns="45720" anchor="ctr">
+            <a:noAutofit/>
+          </a:bodyPr>
+          <a:lstStyle>
+            <a:lvl1pPr indent="0" algn="ctr">
+              <a:lnSpc>
+                <a:spcPct val="100000"/>
+              </a:lnSpc>
+              <a:buNone/>
+              <a:tabLst>
+                <a:tab pos="0" algn="l"/>
+              </a:tabLst>
+              <a:defRPr lang="en-US" sz="1400" b="0" u="none" strike="noStrike">
+                <a:solidFill>
+                  <a:srgbClr val="000000"/>
+                </a:solidFill>
+                <a:effectLst/>
+                <a:uFillTx/>
+                <a:latin typeface="Times New Roman"/>
+              </a:defRPr>
+            </a:lvl1pPr>
+          </a:lstStyle>
+          <a:p>
+            <a:pPr indent="0" algn="ctr">
+              <a:lnSpc>
+                <a:spcPct val="100000"/>
+              </a:lnSpc>
+              <a:buNone/>
+              <a:tabLst>
+                <a:tab pos="0" algn="l"/>
+              </a:tabLst>
+            </a:pPr>
+            <a:r>
+              <a:rPr lang="en-US" sz="1400" b="0" u="none" strike="noStrike">
+                <a:solidFill>
+                  <a:srgbClr val="000000"/>
+                </a:solidFill>
+                <a:effectLst/>
+                <a:uFillTx/>
+                <a:latin typeface="Times New Roman"/>
+              </a:rPr>
+              <a:t>&lt;footer&gt;</a:t>
+            </a:r>
+            <a:endParaRPr lang="en-US" sz="1400" b="0" u="none" strike="noStrike">
+              <a:solidFill>
+                <a:srgbClr val="000000"/>
+              </a:solidFill>
+              <a:effectLst/>
+              <a:uFillTx/>
+              <a:latin typeface="Times New Roman"/>
+            </a:endParaRPr>
+          </a:p>
+        </p:txBody>
+      </p:sp>
+      <p:sp>
+        <p:nvSpPr>
+          <p:cNvPr id="60" name="PlaceHolder 5"/>
+          <p:cNvSpPr>
+            <a:spLocks noGrp="1"/>
+          </p:cNvSpPr>
+          <p:nvPr>
+            <p:ph type="sldNum" idx="33"/>
+          </p:nvPr>
+        </p:nvSpPr>
+        <p:spPr>
+          <a:xfrm>
+            <a:off x="8610480" y="6356520"/>
+            <a:ext cx="2742120" cy="363960"/>
+          </a:xfrm>
+          <a:prstGeom prst="rect">
+            <a:avLst/>
+          </a:prstGeom>
+          <a:noFill/>
+          <a:ln w="0">
+            <a:noFill/>
+          </a:ln>
+        </p:spPr>
+        <p:txBody>
+          <a:bodyPr lIns="91440" tIns="45720" rIns="91440" bIns="45720" anchor="ctr">
+            <a:noAutofit/>
+          </a:bodyPr>
+          <a:lstStyle>
+            <a:lvl1pPr indent="0" algn="r" defTabSz="914400">
+              <a:lnSpc>
+                <a:spcPct val="100000"/>
+              </a:lnSpc>
+              <a:buNone/>
+              <a:tabLst>
+                <a:tab pos="0" algn="l"/>
+              </a:tabLst>
+              <a:defRPr lang="en-US" sz="1200" b="0" u="none" strike="noStrike">
+                <a:solidFill>
+                  <a:schemeClr val="dk1">
+                    <a:tint val="82000"/>
+                  </a:schemeClr>
+                </a:solidFill>
+                <a:effectLst/>
+                <a:uFillTx/>
+                <a:latin typeface="Aptos"/>
+              </a:defRPr>
+            </a:lvl1pPr>
+          </a:lstStyle>
+          <a:p>
+            <a:pPr indent="0" algn="r" defTabSz="914400">
+              <a:lnSpc>
+                <a:spcPct val="100000"/>
+              </a:lnSpc>
+              <a:buNone/>
+              <a:tabLst>
+                <a:tab pos="0" algn="l"/>
+              </a:tabLst>
+            </a:pPr>
+            <a:fld id="{D3CAD9AA-7888-4B89-BE78-283E2457A1ED}" type="slidenum">
+              <a:rPr lang="en-US" sz="1200" b="0" u="none" strike="noStrike">
+                <a:solidFill>
+                  <a:schemeClr val="dk1">
+                    <a:tint val="82000"/>
+                  </a:schemeClr>
+                </a:solidFill>
+                <a:effectLst/>
+                <a:uFillTx/>
+                <a:latin typeface="Aptos"/>
+              </a:rPr>
+              <a:t>&lt;number&gt;</a:t>
+            </a:fld>
+            <a:endParaRPr lang="en-US" sz="1200" b="0" u="none" strike="noStrike">
+              <a:solidFill>
+                <a:srgbClr val="000000"/>
+              </a:solidFill>
+              <a:effectLst/>
+              <a:uFillTx/>
+              <a:latin typeface="Times New Roman"/>
+            </a:endParaRPr>
+          </a:p>
+        </p:txBody>
+      </p:sp>
+    </p:spTree>
+  </p:cSld>
+</p:sldLayout>
+</file>
+
+<file path=ppt/slideLayouts/slideLayout2.xml><?xml version="1.0" encoding="utf-8"?>
 <p:sldLayout xmlns:a="http://schemas.openxmlformats.org/drawingml/2006/main" xmlns:p="http://schemas.openxmlformats.org/presentationml/2006/main" xmlns:r="http://schemas.openxmlformats.org/officeDocument/2006/relationships" xmlns:p14="http://schemas.microsoft.com/office/powerpoint/2010/main" xmlns:p15="http://schemas.microsoft.com/office/powerpoint/2012/main" xmlns:mc="http://schemas.openxmlformats.org/markup-compatibility/2006" type="blank" preserve="1">
   <p:cSld name="Comparison">
     <p:bg>
@@ -764,7 +2094,7 @@
       </p:grpSpPr>
       <p:sp>
         <p:nvSpPr>
-          <p:cNvPr id="49" name="PlaceHolder 1"/>
+          <p:cNvPr id="8" name="PlaceHolder 1"/>
           <p:cNvSpPr>
             <a:spLocks noGrp="1"/>
           </p:cNvSpPr>
@@ -775,7 +2105,7 @@
         <p:spPr>
           <a:xfrm>
             <a:off x="839880" y="365040"/>
-            <a:ext cx="10514880" cy="1324800"/>
+            <a:ext cx="10514520" cy="1324440"/>
           </a:xfrm>
           <a:prstGeom prst="rect">
             <a:avLst/>
@@ -842,7 +2172,7 @@
       </p:sp>
       <p:sp>
         <p:nvSpPr>
-          <p:cNvPr id="50" name="PlaceHolder 2"/>
+          <p:cNvPr id="9" name="PlaceHolder 2"/>
           <p:cNvSpPr>
             <a:spLocks noGrp="1"/>
           </p:cNvSpPr>
@@ -853,7 +2183,7 @@
         <p:spPr>
           <a:xfrm>
             <a:off x="839880" y="1681200"/>
-            <a:ext cx="5157000" cy="823320"/>
+            <a:ext cx="5156640" cy="822960"/>
           </a:xfrm>
           <a:prstGeom prst="rect">
             <a:avLst/>
@@ -926,7 +2256,7 @@
       </p:sp>
       <p:sp>
         <p:nvSpPr>
-          <p:cNvPr id="51" name="PlaceHolder 3"/>
+          <p:cNvPr id="10" name="PlaceHolder 3"/>
           <p:cNvSpPr>
             <a:spLocks noGrp="1"/>
           </p:cNvSpPr>
@@ -937,7 +2267,7 @@
         <p:spPr>
           <a:xfrm>
             <a:off x="839880" y="2505240"/>
-            <a:ext cx="5157000" cy="3683880"/>
+            <a:ext cx="5156640" cy="3683520"/>
           </a:xfrm>
           <a:prstGeom prst="rect">
             <a:avLst/>
@@ -1262,7 +2592,7 @@
       </p:sp>
       <p:sp>
         <p:nvSpPr>
-          <p:cNvPr id="52" name="PlaceHolder 4"/>
+          <p:cNvPr id="11" name="PlaceHolder 4"/>
           <p:cNvSpPr>
             <a:spLocks noGrp="1"/>
           </p:cNvSpPr>
@@ -1273,7 +2603,7 @@
         <p:spPr>
           <a:xfrm>
             <a:off x="6172200" y="1681200"/>
-            <a:ext cx="5182560" cy="823320"/>
+            <a:ext cx="5182200" cy="822960"/>
           </a:xfrm>
           <a:prstGeom prst="rect">
             <a:avLst/>
@@ -1346,7 +2676,7 @@
       </p:sp>
       <p:sp>
         <p:nvSpPr>
-          <p:cNvPr id="53" name="PlaceHolder 5"/>
+          <p:cNvPr id="12" name="PlaceHolder 5"/>
           <p:cNvSpPr>
             <a:spLocks noGrp="1"/>
           </p:cNvSpPr>
@@ -1357,7 +2687,7 @@
         <p:spPr>
           <a:xfrm>
             <a:off x="6172200" y="2505240"/>
-            <a:ext cx="5182560" cy="3683880"/>
+            <a:ext cx="5182200" cy="3683520"/>
           </a:xfrm>
           <a:prstGeom prst="rect">
             <a:avLst/>
@@ -1682,18 +3012,18 @@
       </p:sp>
       <p:sp>
         <p:nvSpPr>
-          <p:cNvPr id="54" name="PlaceHolder 6"/>
+          <p:cNvPr id="13" name="PlaceHolder 6"/>
           <p:cNvSpPr>
             <a:spLocks noGrp="1"/>
           </p:cNvSpPr>
           <p:nvPr>
-            <p:ph type="dt" idx="28"/>
+            <p:ph type="dt" idx="4"/>
           </p:nvPr>
         </p:nvSpPr>
         <p:spPr>
           <a:xfrm>
             <a:off x="838080" y="6356520"/>
-            <a:ext cx="2742480" cy="364320"/>
+            <a:ext cx="2742120" cy="363960"/>
           </a:xfrm>
           <a:prstGeom prst="rect">
             <a:avLst/>
@@ -1764,18 +3094,18 @@
       </p:sp>
       <p:sp>
         <p:nvSpPr>
-          <p:cNvPr id="55" name="PlaceHolder 7"/>
+          <p:cNvPr id="14" name="PlaceHolder 7"/>
           <p:cNvSpPr>
             <a:spLocks noGrp="1"/>
           </p:cNvSpPr>
           <p:nvPr>
-            <p:ph type="ftr" idx="29"/>
+            <p:ph type="ftr" idx="5"/>
           </p:nvPr>
         </p:nvSpPr>
         <p:spPr>
           <a:xfrm>
             <a:off x="4038480" y="6356520"/>
-            <a:ext cx="4114080" cy="364320"/>
+            <a:ext cx="4113720" cy="363960"/>
           </a:xfrm>
           <a:prstGeom prst="rect">
             <a:avLst/>
@@ -1842,18 +3172,18 @@
       </p:sp>
       <p:sp>
         <p:nvSpPr>
-          <p:cNvPr id="56" name="PlaceHolder 8"/>
+          <p:cNvPr id="15" name="PlaceHolder 8"/>
           <p:cNvSpPr>
             <a:spLocks noGrp="1"/>
           </p:cNvSpPr>
           <p:nvPr>
-            <p:ph type="sldNum" idx="30"/>
+            <p:ph type="sldNum" idx="6"/>
           </p:nvPr>
         </p:nvSpPr>
         <p:spPr>
           <a:xfrm>
             <a:off x="8610480" y="6356520"/>
-            <a:ext cx="2742480" cy="364320"/>
+            <a:ext cx="2742120" cy="363960"/>
           </a:xfrm>
           <a:prstGeom prst="rect">
             <a:avLst/>
@@ -1898,7 +3228,7 @@
                 <a:tab pos="0" algn="l"/>
               </a:tabLst>
             </a:pPr>
-            <a:fld id="{8BD94EA7-7C82-4183-9EA4-6E9A192ED86A}" type="slidenum">
+            <a:fld id="{B75750AC-E9DB-4C72-862E-680F71E1CF87}" type="slidenum">
               <a:rPr lang="en-US" sz="1200" b="0" u="none" strike="noStrike">
                 <a:solidFill>
                   <a:schemeClr val="dk1">
@@ -1927,7 +3257,7 @@
 </p:sldLayout>
 </file>
 
-<file path=ppt/slideLayouts/slideLayout11.xml><?xml version="1.0" encoding="utf-8"?>
+<file path=ppt/slideLayouts/slideLayout3.xml><?xml version="1.0" encoding="utf-8"?>
 <p:sldLayout xmlns:a="http://schemas.openxmlformats.org/drawingml/2006/main" xmlns:p="http://schemas.openxmlformats.org/presentationml/2006/main" xmlns:r="http://schemas.openxmlformats.org/officeDocument/2006/relationships" xmlns:p14="http://schemas.microsoft.com/office/powerpoint/2010/main" xmlns:p15="http://schemas.microsoft.com/office/powerpoint/2012/main" xmlns:mc="http://schemas.openxmlformats.org/markup-compatibility/2006" type="titleOnly" preserve="1">
   <p:cSld name="Title Only">
     <p:bg>
@@ -1953,7 +3283,7 @@
       </p:grpSpPr>
       <p:sp>
         <p:nvSpPr>
-          <p:cNvPr id="57" name="PlaceHolder 1"/>
+          <p:cNvPr id="16" name="PlaceHolder 1"/>
           <p:cNvSpPr>
             <a:spLocks noGrp="1"/>
           </p:cNvSpPr>
@@ -1964,7 +3294,7 @@
         <p:spPr>
           <a:xfrm>
             <a:off x="838080" y="365040"/>
-            <a:ext cx="10514880" cy="1324800"/>
+            <a:ext cx="10514520" cy="1324440"/>
           </a:xfrm>
           <a:prstGeom prst="rect">
             <a:avLst/>
@@ -2031,18 +3361,18 @@
       </p:sp>
       <p:sp>
         <p:nvSpPr>
-          <p:cNvPr id="58" name="PlaceHolder 2"/>
+          <p:cNvPr id="17" name="PlaceHolder 2"/>
           <p:cNvSpPr>
             <a:spLocks noGrp="1"/>
           </p:cNvSpPr>
           <p:nvPr>
-            <p:ph type="dt" idx="31"/>
+            <p:ph type="dt" idx="7"/>
           </p:nvPr>
         </p:nvSpPr>
         <p:spPr>
           <a:xfrm>
             <a:off x="838080" y="6356520"/>
-            <a:ext cx="2742480" cy="364320"/>
+            <a:ext cx="2742120" cy="363960"/>
           </a:xfrm>
           <a:prstGeom prst="rect">
             <a:avLst/>
@@ -2113,18 +3443,18 @@
       </p:sp>
       <p:sp>
         <p:nvSpPr>
-          <p:cNvPr id="59" name="PlaceHolder 3"/>
+          <p:cNvPr id="18" name="PlaceHolder 3"/>
           <p:cNvSpPr>
             <a:spLocks noGrp="1"/>
           </p:cNvSpPr>
           <p:nvPr>
-            <p:ph type="ftr" idx="32"/>
+            <p:ph type="ftr" idx="8"/>
           </p:nvPr>
         </p:nvSpPr>
         <p:spPr>
           <a:xfrm>
             <a:off x="4038480" y="6356520"/>
-            <a:ext cx="4114080" cy="364320"/>
+            <a:ext cx="4113720" cy="363960"/>
           </a:xfrm>
           <a:prstGeom prst="rect">
             <a:avLst/>
@@ -2191,18 +3521,18 @@
       </p:sp>
       <p:sp>
         <p:nvSpPr>
-          <p:cNvPr id="60" name="PlaceHolder 4"/>
+          <p:cNvPr id="19" name="PlaceHolder 4"/>
           <p:cNvSpPr>
             <a:spLocks noGrp="1"/>
           </p:cNvSpPr>
           <p:nvPr>
-            <p:ph type="sldNum" idx="33"/>
+            <p:ph type="sldNum" idx="9"/>
           </p:nvPr>
         </p:nvSpPr>
         <p:spPr>
           <a:xfrm>
             <a:off x="8610480" y="6356520"/>
-            <a:ext cx="2742480" cy="364320"/>
+            <a:ext cx="2742120" cy="363960"/>
           </a:xfrm>
           <a:prstGeom prst="rect">
             <a:avLst/>
@@ -2247,7 +3577,7 @@
                 <a:tab pos="0" algn="l"/>
               </a:tabLst>
             </a:pPr>
-            <a:fld id="{6B04F810-7918-41BB-B365-D838989FDE9C}" type="slidenum">
+            <a:fld id="{9F41D584-09AA-48B2-8894-F3A1A1BBE343}" type="slidenum">
               <a:rPr lang="en-US" sz="1200" b="0" u="none" strike="noStrike">
                 <a:solidFill>
                   <a:schemeClr val="dk1">
@@ -2276,7 +3606,786 @@
 </p:sldLayout>
 </file>
 
-<file path=ppt/slideLayouts/slideLayout2.xml><?xml version="1.0" encoding="utf-8"?>
+<file path=ppt/slideLayouts/slideLayout4.xml><?xml version="1.0" encoding="utf-8"?>
+<p:sldLayout xmlns:a="http://schemas.openxmlformats.org/drawingml/2006/main" xmlns:p="http://schemas.openxmlformats.org/presentationml/2006/main" xmlns:r="http://schemas.openxmlformats.org/officeDocument/2006/relationships" xmlns:p14="http://schemas.microsoft.com/office/powerpoint/2010/main" xmlns:p15="http://schemas.microsoft.com/office/powerpoint/2012/main" xmlns:mc="http://schemas.openxmlformats.org/markup-compatibility/2006" type="blank" preserve="1">
+  <p:cSld name="Blank">
+    <p:bg>
+      <p:bgPr>
+        <a:solidFill>
+          <a:srgbClr val="FFFFFF"/>
+        </a:solidFill>
+      </p:bgPr>
+    </p:bg>
+    <p:spTree>
+      <p:nvGrpSpPr>
+        <p:cNvPr id="1" name=""/>
+        <p:cNvGrpSpPr/>
+        <p:nvPr/>
+      </p:nvGrpSpPr>
+      <p:grpSpPr>
+        <a:xfrm>
+          <a:off x="0" y="0"/>
+          <a:ext cx="0" cy="0"/>
+          <a:chOff x="0" y="0"/>
+          <a:chExt cx="0" cy="0"/>
+        </a:xfrm>
+      </p:grpSpPr>
+      <p:sp>
+        <p:nvSpPr>
+          <p:cNvPr id="20" name="PlaceHolder 1"/>
+          <p:cNvSpPr>
+            <a:spLocks noGrp="1"/>
+          </p:cNvSpPr>
+          <p:nvPr>
+            <p:ph type="dt" idx="10"/>
+          </p:nvPr>
+        </p:nvSpPr>
+        <p:spPr>
+          <a:xfrm>
+            <a:off x="838080" y="6356520"/>
+            <a:ext cx="2742120" cy="363960"/>
+          </a:xfrm>
+          <a:prstGeom prst="rect">
+            <a:avLst/>
+          </a:prstGeom>
+          <a:noFill/>
+          <a:ln w="0">
+            <a:noFill/>
+          </a:ln>
+        </p:spPr>
+        <p:txBody>
+          <a:bodyPr lIns="91440" tIns="45720" rIns="91440" bIns="45720" anchor="ctr">
+            <a:noAutofit/>
+          </a:bodyPr>
+          <a:lstStyle>
+            <a:lvl1pPr indent="0" algn="l" defTabSz="914400">
+              <a:lnSpc>
+                <a:spcPct val="100000"/>
+              </a:lnSpc>
+              <a:buNone/>
+              <a:tabLst>
+                <a:tab pos="0" algn="l"/>
+              </a:tabLst>
+              <a:defRPr lang="en-US" sz="1200" b="0" u="none" strike="noStrike">
+                <a:solidFill>
+                  <a:schemeClr val="dk1">
+                    <a:tint val="82000"/>
+                  </a:schemeClr>
+                </a:solidFill>
+                <a:effectLst/>
+                <a:uFillTx/>
+                <a:latin typeface="Aptos"/>
+              </a:defRPr>
+            </a:lvl1pPr>
+          </a:lstStyle>
+          <a:p>
+            <a:pPr indent="0" algn="l" defTabSz="914400">
+              <a:lnSpc>
+                <a:spcPct val="100000"/>
+              </a:lnSpc>
+              <a:buNone/>
+              <a:tabLst>
+                <a:tab pos="0" algn="l"/>
+              </a:tabLst>
+            </a:pPr>
+            <a:r>
+              <a:rPr lang="en-US" sz="1200" b="0" u="none" strike="noStrike">
+                <a:solidFill>
+                  <a:schemeClr val="dk1">
+                    <a:tint val="82000"/>
+                  </a:schemeClr>
+                </a:solidFill>
+                <a:effectLst/>
+                <a:uFillTx/>
+                <a:latin typeface="Aptos"/>
+              </a:rPr>
+              <a:t>&lt;date/time&gt;</a:t>
+            </a:r>
+            <a:endParaRPr lang="en-US" sz="1200" b="0" u="none" strike="noStrike">
+              <a:solidFill>
+                <a:srgbClr val="000000"/>
+              </a:solidFill>
+              <a:effectLst/>
+              <a:uFillTx/>
+              <a:latin typeface="Times New Roman"/>
+            </a:endParaRPr>
+          </a:p>
+        </p:txBody>
+      </p:sp>
+      <p:sp>
+        <p:nvSpPr>
+          <p:cNvPr id="21" name="PlaceHolder 2"/>
+          <p:cNvSpPr>
+            <a:spLocks noGrp="1"/>
+          </p:cNvSpPr>
+          <p:nvPr>
+            <p:ph type="ftr" idx="11"/>
+          </p:nvPr>
+        </p:nvSpPr>
+        <p:spPr>
+          <a:xfrm>
+            <a:off x="4038480" y="6356520"/>
+            <a:ext cx="4113720" cy="363960"/>
+          </a:xfrm>
+          <a:prstGeom prst="rect">
+            <a:avLst/>
+          </a:prstGeom>
+          <a:noFill/>
+          <a:ln w="0">
+            <a:noFill/>
+          </a:ln>
+        </p:spPr>
+        <p:txBody>
+          <a:bodyPr lIns="91440" tIns="45720" rIns="91440" bIns="45720" anchor="ctr">
+            <a:noAutofit/>
+          </a:bodyPr>
+          <a:lstStyle>
+            <a:lvl1pPr indent="0" algn="ctr">
+              <a:lnSpc>
+                <a:spcPct val="100000"/>
+              </a:lnSpc>
+              <a:buNone/>
+              <a:tabLst>
+                <a:tab pos="0" algn="l"/>
+              </a:tabLst>
+              <a:defRPr lang="en-US" sz="1400" b="0" u="none" strike="noStrike">
+                <a:solidFill>
+                  <a:srgbClr val="000000"/>
+                </a:solidFill>
+                <a:effectLst/>
+                <a:uFillTx/>
+                <a:latin typeface="Times New Roman"/>
+              </a:defRPr>
+            </a:lvl1pPr>
+          </a:lstStyle>
+          <a:p>
+            <a:pPr indent="0" algn="ctr">
+              <a:lnSpc>
+                <a:spcPct val="100000"/>
+              </a:lnSpc>
+              <a:buNone/>
+              <a:tabLst>
+                <a:tab pos="0" algn="l"/>
+              </a:tabLst>
+            </a:pPr>
+            <a:r>
+              <a:rPr lang="en-US" sz="1400" b="0" u="none" strike="noStrike">
+                <a:solidFill>
+                  <a:srgbClr val="000000"/>
+                </a:solidFill>
+                <a:effectLst/>
+                <a:uFillTx/>
+                <a:latin typeface="Times New Roman"/>
+              </a:rPr>
+              <a:t>&lt;footer&gt;</a:t>
+            </a:r>
+            <a:endParaRPr lang="en-US" sz="1400" b="0" u="none" strike="noStrike">
+              <a:solidFill>
+                <a:srgbClr val="000000"/>
+              </a:solidFill>
+              <a:effectLst/>
+              <a:uFillTx/>
+              <a:latin typeface="Times New Roman"/>
+            </a:endParaRPr>
+          </a:p>
+        </p:txBody>
+      </p:sp>
+      <p:sp>
+        <p:nvSpPr>
+          <p:cNvPr id="22" name="PlaceHolder 3"/>
+          <p:cNvSpPr>
+            <a:spLocks noGrp="1"/>
+          </p:cNvSpPr>
+          <p:nvPr>
+            <p:ph type="sldNum" idx="12"/>
+          </p:nvPr>
+        </p:nvSpPr>
+        <p:spPr>
+          <a:xfrm>
+            <a:off x="8610480" y="6356520"/>
+            <a:ext cx="2742120" cy="363960"/>
+          </a:xfrm>
+          <a:prstGeom prst="rect">
+            <a:avLst/>
+          </a:prstGeom>
+          <a:noFill/>
+          <a:ln w="0">
+            <a:noFill/>
+          </a:ln>
+        </p:spPr>
+        <p:txBody>
+          <a:bodyPr lIns="91440" tIns="45720" rIns="91440" bIns="45720" anchor="ctr">
+            <a:noAutofit/>
+          </a:bodyPr>
+          <a:lstStyle>
+            <a:lvl1pPr indent="0" algn="r" defTabSz="914400">
+              <a:lnSpc>
+                <a:spcPct val="100000"/>
+              </a:lnSpc>
+              <a:buNone/>
+              <a:tabLst>
+                <a:tab pos="0" algn="l"/>
+              </a:tabLst>
+              <a:defRPr lang="en-US" sz="1200" b="0" u="none" strike="noStrike">
+                <a:solidFill>
+                  <a:schemeClr val="dk1">
+                    <a:tint val="82000"/>
+                  </a:schemeClr>
+                </a:solidFill>
+                <a:effectLst/>
+                <a:uFillTx/>
+                <a:latin typeface="Aptos"/>
+              </a:defRPr>
+            </a:lvl1pPr>
+          </a:lstStyle>
+          <a:p>
+            <a:pPr indent="0" algn="r" defTabSz="914400">
+              <a:lnSpc>
+                <a:spcPct val="100000"/>
+              </a:lnSpc>
+              <a:buNone/>
+              <a:tabLst>
+                <a:tab pos="0" algn="l"/>
+              </a:tabLst>
+            </a:pPr>
+            <a:fld id="{A382DC4F-FA27-4D1C-A30A-BAAE13F7535A}" type="slidenum">
+              <a:rPr lang="en-US" sz="1200" b="0" u="none" strike="noStrike">
+                <a:solidFill>
+                  <a:schemeClr val="dk1">
+                    <a:tint val="82000"/>
+                  </a:schemeClr>
+                </a:solidFill>
+                <a:effectLst/>
+                <a:uFillTx/>
+                <a:latin typeface="Aptos"/>
+              </a:rPr>
+              <a:t>&lt;number&gt;</a:t>
+            </a:fld>
+            <a:endParaRPr lang="en-US" sz="1200" b="0" u="none" strike="noStrike">
+              <a:solidFill>
+                <a:srgbClr val="000000"/>
+              </a:solidFill>
+              <a:effectLst/>
+              <a:uFillTx/>
+              <a:latin typeface="Times New Roman"/>
+            </a:endParaRPr>
+          </a:p>
+        </p:txBody>
+      </p:sp>
+      <p:sp>
+        <p:nvSpPr>
+          <p:cNvPr id="23" name="PlaceHolder 4"/>
+          <p:cNvSpPr>
+            <a:spLocks noGrp="1"/>
+          </p:cNvSpPr>
+          <p:nvPr>
+            <p:ph type="title"/>
+          </p:nvPr>
+        </p:nvSpPr>
+        <p:spPr>
+          <a:xfrm>
+            <a:off x="609480" y="273600"/>
+            <a:ext cx="10972080" cy="1144440"/>
+          </a:xfrm>
+          <a:prstGeom prst="rect">
+            <a:avLst/>
+          </a:prstGeom>
+          <a:noFill/>
+          <a:ln w="0">
+            <a:noFill/>
+          </a:ln>
+        </p:spPr>
+        <p:txBody>
+          <a:bodyPr lIns="0" tIns="0" rIns="0" bIns="0" anchor="ctr">
+            <a:noAutofit/>
+          </a:bodyPr>
+          <a:lstStyle>
+            <a:lvl1pPr indent="0" algn="ctr">
+              <a:lnSpc>
+                <a:spcPct val="100000"/>
+              </a:lnSpc>
+              <a:buNone/>
+              <a:tabLst>
+                <a:tab pos="0" algn="l"/>
+              </a:tabLst>
+              <a:defRPr lang="en-US" sz="4400" b="0" u="none" strike="noStrike">
+                <a:solidFill>
+                  <a:srgbClr val="000000"/>
+                </a:solidFill>
+                <a:effectLst/>
+                <a:uFillTx/>
+                <a:latin typeface="Arial"/>
+              </a:defRPr>
+            </a:lvl1pPr>
+          </a:lstStyle>
+          <a:p>
+            <a:pPr indent="0" algn="ctr">
+              <a:lnSpc>
+                <a:spcPct val="100000"/>
+              </a:lnSpc>
+              <a:buNone/>
+              <a:tabLst>
+                <a:tab pos="0" algn="l"/>
+              </a:tabLst>
+            </a:pPr>
+            <a:r>
+              <a:rPr lang="en-US" sz="4400" b="0" u="none" strike="noStrike">
+                <a:solidFill>
+                  <a:srgbClr val="000000"/>
+                </a:solidFill>
+                <a:effectLst/>
+                <a:uFillTx/>
+                <a:latin typeface="Arial"/>
+              </a:rPr>
+              <a:t>Click to edit the title text format</a:t>
+            </a:r>
+            <a:endParaRPr lang="en-US" sz="4400" b="0" u="none" strike="noStrike">
+              <a:solidFill>
+                <a:srgbClr val="000000"/>
+              </a:solidFill>
+              <a:effectLst/>
+              <a:uFillTx/>
+              <a:latin typeface="Arial"/>
+            </a:endParaRPr>
+          </a:p>
+        </p:txBody>
+      </p:sp>
+      <p:sp>
+        <p:nvSpPr>
+          <p:cNvPr id="24" name="PlaceHolder 5"/>
+          <p:cNvSpPr>
+            <a:spLocks noGrp="1"/>
+          </p:cNvSpPr>
+          <p:nvPr>
+            <p:ph type="body"/>
+          </p:nvPr>
+        </p:nvSpPr>
+        <p:spPr>
+          <a:xfrm>
+            <a:off x="609480" y="1604520"/>
+            <a:ext cx="10972080" cy="3976920"/>
+          </a:xfrm>
+          <a:prstGeom prst="rect">
+            <a:avLst/>
+          </a:prstGeom>
+          <a:noFill/>
+          <a:ln w="0">
+            <a:noFill/>
+          </a:ln>
+        </p:spPr>
+        <p:txBody>
+          <a:bodyPr lIns="0" tIns="0" rIns="0" bIns="0" anchor="t">
+            <a:normAutofit/>
+          </a:bodyPr>
+          <a:lstStyle>
+            <a:lvl1pPr algn="l">
+              <a:lnSpc>
+                <a:spcPct val="100000"/>
+              </a:lnSpc>
+              <a:spcBef>
+                <a:spcPts val="1417"/>
+              </a:spcBef>
+              <a:buClr>
+                <a:srgbClr val="000000"/>
+              </a:buClr>
+              <a:buSzPct val="45000"/>
+              <a:buFont typeface="Wingdings" charset="2"/>
+              <a:buChar char=""/>
+              <a:defRPr lang="en-US" sz="3200" b="0" u="none" strike="noStrike">
+                <a:solidFill>
+                  <a:srgbClr val="000000"/>
+                </a:solidFill>
+                <a:effectLst/>
+                <a:uFillTx/>
+                <a:latin typeface="Arial"/>
+              </a:defRPr>
+            </a:lvl1pPr>
+            <a:lvl2pPr lvl="1" algn="l">
+              <a:lnSpc>
+                <a:spcPct val="100000"/>
+              </a:lnSpc>
+              <a:spcBef>
+                <a:spcPts val="1134"/>
+              </a:spcBef>
+              <a:buClr>
+                <a:srgbClr val="000000"/>
+              </a:buClr>
+              <a:buSzPct val="75000"/>
+              <a:buFont typeface="Symbol" charset="2"/>
+              <a:buChar char=""/>
+              <a:defRPr lang="en-US" sz="2800" b="0" u="none" strike="noStrike">
+                <a:solidFill>
+                  <a:srgbClr val="000000"/>
+                </a:solidFill>
+                <a:effectLst/>
+                <a:uFillTx/>
+                <a:latin typeface="Arial"/>
+              </a:defRPr>
+            </a:lvl2pPr>
+            <a:lvl3pPr lvl="2" algn="l">
+              <a:lnSpc>
+                <a:spcPct val="100000"/>
+              </a:lnSpc>
+              <a:spcBef>
+                <a:spcPts val="850"/>
+              </a:spcBef>
+              <a:buClr>
+                <a:srgbClr val="000000"/>
+              </a:buClr>
+              <a:buSzPct val="45000"/>
+              <a:buFont typeface="Wingdings" charset="2"/>
+              <a:buChar char=""/>
+              <a:defRPr lang="en-US" sz="2400" b="0" u="none" strike="noStrike">
+                <a:solidFill>
+                  <a:srgbClr val="000000"/>
+                </a:solidFill>
+                <a:effectLst/>
+                <a:uFillTx/>
+                <a:latin typeface="Arial"/>
+              </a:defRPr>
+            </a:lvl3pPr>
+            <a:lvl4pPr lvl="3" algn="l">
+              <a:lnSpc>
+                <a:spcPct val="100000"/>
+              </a:lnSpc>
+              <a:spcBef>
+                <a:spcPts val="567"/>
+              </a:spcBef>
+              <a:buClr>
+                <a:srgbClr val="000000"/>
+              </a:buClr>
+              <a:buSzPct val="75000"/>
+              <a:buFont typeface="Symbol" charset="2"/>
+              <a:buChar char=""/>
+              <a:defRPr lang="en-US" sz="2000" b="0" u="none" strike="noStrike">
+                <a:solidFill>
+                  <a:srgbClr val="000000"/>
+                </a:solidFill>
+                <a:effectLst/>
+                <a:uFillTx/>
+                <a:latin typeface="Arial"/>
+              </a:defRPr>
+            </a:lvl4pPr>
+            <a:lvl5pPr lvl="4" algn="l">
+              <a:lnSpc>
+                <a:spcPct val="100000"/>
+              </a:lnSpc>
+              <a:spcBef>
+                <a:spcPts val="283"/>
+              </a:spcBef>
+              <a:buClr>
+                <a:srgbClr val="000000"/>
+              </a:buClr>
+              <a:buSzPct val="45000"/>
+              <a:buFont typeface="Wingdings" charset="2"/>
+              <a:buChar char=""/>
+              <a:defRPr lang="en-US" sz="2000" b="0" u="none" strike="noStrike">
+                <a:solidFill>
+                  <a:srgbClr val="000000"/>
+                </a:solidFill>
+                <a:effectLst/>
+                <a:uFillTx/>
+                <a:latin typeface="Arial"/>
+              </a:defRPr>
+            </a:lvl5pPr>
+            <a:lvl6pPr lvl="5" algn="l">
+              <a:lnSpc>
+                <a:spcPct val="100000"/>
+              </a:lnSpc>
+              <a:spcBef>
+                <a:spcPts val="283"/>
+              </a:spcBef>
+              <a:buClr>
+                <a:srgbClr val="000000"/>
+              </a:buClr>
+              <a:buSzPct val="45000"/>
+              <a:buFont typeface="Wingdings" charset="2"/>
+              <a:buChar char=""/>
+              <a:defRPr lang="en-US" sz="2000" b="0" u="none" strike="noStrike">
+                <a:solidFill>
+                  <a:srgbClr val="000000"/>
+                </a:solidFill>
+                <a:effectLst/>
+                <a:uFillTx/>
+                <a:latin typeface="Arial"/>
+              </a:defRPr>
+            </a:lvl6pPr>
+            <a:lvl7pPr lvl="6" algn="l">
+              <a:lnSpc>
+                <a:spcPct val="100000"/>
+              </a:lnSpc>
+              <a:spcBef>
+                <a:spcPts val="283"/>
+              </a:spcBef>
+              <a:buClr>
+                <a:srgbClr val="000000"/>
+              </a:buClr>
+              <a:buSzPct val="45000"/>
+              <a:buFont typeface="Wingdings" charset="2"/>
+              <a:buChar char=""/>
+              <a:defRPr lang="en-US" sz="2000" b="0" u="none" strike="noStrike">
+                <a:solidFill>
+                  <a:srgbClr val="000000"/>
+                </a:solidFill>
+                <a:effectLst/>
+                <a:uFillTx/>
+                <a:latin typeface="Arial"/>
+              </a:defRPr>
+            </a:lvl7pPr>
+          </a:lstStyle>
+          <a:p>
+            <a:pPr marL="432000" indent="-324000" algn="l">
+              <a:lnSpc>
+                <a:spcPct val="100000"/>
+              </a:lnSpc>
+              <a:spcBef>
+                <a:spcPts val="1417"/>
+              </a:spcBef>
+              <a:buClr>
+                <a:srgbClr val="000000"/>
+              </a:buClr>
+              <a:buSzPct val="45000"/>
+              <a:buFont typeface="Wingdings" charset="2"/>
+              <a:buChar char=""/>
+            </a:pPr>
+            <a:r>
+              <a:rPr lang="en-US" sz="3200" b="0" u="none" strike="noStrike">
+                <a:solidFill>
+                  <a:srgbClr val="000000"/>
+                </a:solidFill>
+                <a:effectLst/>
+                <a:uFillTx/>
+                <a:latin typeface="Arial"/>
+              </a:rPr>
+              <a:t>Click to edit the outline text format</a:t>
+            </a:r>
+            <a:endParaRPr lang="en-US" sz="3200" b="0" u="none" strike="noStrike">
+              <a:solidFill>
+                <a:srgbClr val="000000"/>
+              </a:solidFill>
+              <a:effectLst/>
+              <a:uFillTx/>
+              <a:latin typeface="Arial"/>
+            </a:endParaRPr>
+          </a:p>
+          <a:p>
+            <a:pPr marL="864000" lvl="1" indent="-324000" algn="l">
+              <a:lnSpc>
+                <a:spcPct val="100000"/>
+              </a:lnSpc>
+              <a:spcBef>
+                <a:spcPts val="1134"/>
+              </a:spcBef>
+              <a:buClr>
+                <a:srgbClr val="000000"/>
+              </a:buClr>
+              <a:buSzPct val="75000"/>
+              <a:buFont typeface="Symbol" charset="2"/>
+              <a:buChar char=""/>
+            </a:pPr>
+            <a:r>
+              <a:rPr lang="en-US" sz="2800" b="0" u="none" strike="noStrike">
+                <a:solidFill>
+                  <a:srgbClr val="000000"/>
+                </a:solidFill>
+                <a:effectLst/>
+                <a:uFillTx/>
+                <a:latin typeface="Arial"/>
+              </a:rPr>
+              <a:t>Second Outline Level</a:t>
+            </a:r>
+            <a:endParaRPr lang="en-US" sz="2800" b="0" u="none" strike="noStrike">
+              <a:solidFill>
+                <a:srgbClr val="000000"/>
+              </a:solidFill>
+              <a:effectLst/>
+              <a:uFillTx/>
+              <a:latin typeface="Arial"/>
+            </a:endParaRPr>
+          </a:p>
+          <a:p>
+            <a:pPr marL="1296000" lvl="2" indent="-288000" algn="l">
+              <a:lnSpc>
+                <a:spcPct val="100000"/>
+              </a:lnSpc>
+              <a:spcBef>
+                <a:spcPts val="850"/>
+              </a:spcBef>
+              <a:buClr>
+                <a:srgbClr val="000000"/>
+              </a:buClr>
+              <a:buSzPct val="45000"/>
+              <a:buFont typeface="Wingdings" charset="2"/>
+              <a:buChar char=""/>
+            </a:pPr>
+            <a:r>
+              <a:rPr lang="en-US" sz="2400" b="0" u="none" strike="noStrike">
+                <a:solidFill>
+                  <a:srgbClr val="000000"/>
+                </a:solidFill>
+                <a:effectLst/>
+                <a:uFillTx/>
+                <a:latin typeface="Arial"/>
+              </a:rPr>
+              <a:t>Third Outline Level</a:t>
+            </a:r>
+            <a:endParaRPr lang="en-US" sz="2400" b="0" u="none" strike="noStrike">
+              <a:solidFill>
+                <a:srgbClr val="000000"/>
+              </a:solidFill>
+              <a:effectLst/>
+              <a:uFillTx/>
+              <a:latin typeface="Arial"/>
+            </a:endParaRPr>
+          </a:p>
+          <a:p>
+            <a:pPr marL="1728000" lvl="3" indent="-216000" algn="l">
+              <a:lnSpc>
+                <a:spcPct val="100000"/>
+              </a:lnSpc>
+              <a:spcBef>
+                <a:spcPts val="567"/>
+              </a:spcBef>
+              <a:buClr>
+                <a:srgbClr val="000000"/>
+              </a:buClr>
+              <a:buSzPct val="75000"/>
+              <a:buFont typeface="Symbol" charset="2"/>
+              <a:buChar char=""/>
+            </a:pPr>
+            <a:r>
+              <a:rPr lang="en-US" sz="2000" b="0" u="none" strike="noStrike">
+                <a:solidFill>
+                  <a:srgbClr val="000000"/>
+                </a:solidFill>
+                <a:effectLst/>
+                <a:uFillTx/>
+                <a:latin typeface="Arial"/>
+              </a:rPr>
+              <a:t>Fourth Outline Level</a:t>
+            </a:r>
+            <a:endParaRPr lang="en-US" sz="2000" b="0" u="none" strike="noStrike">
+              <a:solidFill>
+                <a:srgbClr val="000000"/>
+              </a:solidFill>
+              <a:effectLst/>
+              <a:uFillTx/>
+              <a:latin typeface="Arial"/>
+            </a:endParaRPr>
+          </a:p>
+          <a:p>
+            <a:pPr marL="2160000" lvl="4" indent="-216000" algn="l">
+              <a:lnSpc>
+                <a:spcPct val="100000"/>
+              </a:lnSpc>
+              <a:spcBef>
+                <a:spcPts val="283"/>
+              </a:spcBef>
+              <a:buClr>
+                <a:srgbClr val="000000"/>
+              </a:buClr>
+              <a:buSzPct val="45000"/>
+              <a:buFont typeface="Wingdings" charset="2"/>
+              <a:buChar char=""/>
+            </a:pPr>
+            <a:r>
+              <a:rPr lang="en-US" sz="2000" b="0" u="none" strike="noStrike">
+                <a:solidFill>
+                  <a:srgbClr val="000000"/>
+                </a:solidFill>
+                <a:effectLst/>
+                <a:uFillTx/>
+                <a:latin typeface="Arial"/>
+              </a:rPr>
+              <a:t>Fifth Outline Level</a:t>
+            </a:r>
+            <a:endParaRPr lang="en-US" sz="2000" b="0" u="none" strike="noStrike">
+              <a:solidFill>
+                <a:srgbClr val="000000"/>
+              </a:solidFill>
+              <a:effectLst/>
+              <a:uFillTx/>
+              <a:latin typeface="Arial"/>
+            </a:endParaRPr>
+          </a:p>
+          <a:p>
+            <a:pPr marL="2592000" lvl="5" indent="-216000" algn="l">
+              <a:lnSpc>
+                <a:spcPct val="100000"/>
+              </a:lnSpc>
+              <a:spcBef>
+                <a:spcPts val="283"/>
+              </a:spcBef>
+              <a:buClr>
+                <a:srgbClr val="000000"/>
+              </a:buClr>
+              <a:buSzPct val="45000"/>
+              <a:buFont typeface="Wingdings" charset="2"/>
+              <a:buChar char=""/>
+            </a:pPr>
+            <a:r>
+              <a:rPr lang="en-US" sz="2000" b="0" u="none" strike="noStrike">
+                <a:solidFill>
+                  <a:srgbClr val="000000"/>
+                </a:solidFill>
+                <a:effectLst/>
+                <a:uFillTx/>
+                <a:latin typeface="Arial"/>
+              </a:rPr>
+              <a:t>Sixth Outline Level</a:t>
+            </a:r>
+            <a:endParaRPr lang="en-US" sz="2000" b="0" u="none" strike="noStrike">
+              <a:solidFill>
+                <a:srgbClr val="000000"/>
+              </a:solidFill>
+              <a:effectLst/>
+              <a:uFillTx/>
+              <a:latin typeface="Arial"/>
+            </a:endParaRPr>
+          </a:p>
+          <a:p>
+            <a:pPr marL="3024000" lvl="6" indent="-216000" algn="l">
+              <a:lnSpc>
+                <a:spcPct val="100000"/>
+              </a:lnSpc>
+              <a:spcBef>
+                <a:spcPts val="283"/>
+              </a:spcBef>
+              <a:buClr>
+                <a:srgbClr val="000000"/>
+              </a:buClr>
+              <a:buSzPct val="45000"/>
+              <a:buFont typeface="Wingdings" charset="2"/>
+              <a:buChar char=""/>
+            </a:pPr>
+            <a:r>
+              <a:rPr lang="en-US" sz="2000" b="0" u="none" strike="noStrike">
+                <a:solidFill>
+                  <a:srgbClr val="000000"/>
+                </a:solidFill>
+                <a:effectLst/>
+                <a:uFillTx/>
+                <a:latin typeface="Arial"/>
+              </a:rPr>
+              <a:t>Seventh Outline Level</a:t>
+            </a:r>
+            <a:endParaRPr lang="en-US" sz="2000" b="0" u="none" strike="noStrike">
+              <a:solidFill>
+                <a:srgbClr val="000000"/>
+              </a:solidFill>
+              <a:effectLst/>
+              <a:uFillTx/>
+              <a:latin typeface="Arial"/>
+            </a:endParaRPr>
+          </a:p>
+        </p:txBody>
+      </p:sp>
+    </p:spTree>
+  </p:cSld>
+</p:sldLayout>
+</file>
+
+<file path=ppt/slideLayouts/slideLayout5.xml><?xml version="1.0" encoding="utf-8"?>
 <p:sldLayout xmlns:a="http://schemas.openxmlformats.org/drawingml/2006/main" xmlns:p="http://schemas.openxmlformats.org/presentationml/2006/main" xmlns:r="http://schemas.openxmlformats.org/officeDocument/2006/relationships" xmlns:p14="http://schemas.microsoft.com/office/powerpoint/2010/main" xmlns:p15="http://schemas.microsoft.com/office/powerpoint/2012/main" xmlns:mc="http://schemas.openxmlformats.org/markup-compatibility/2006" type="blank" preserve="1">
   <p:cSld name="Content with Caption">
     <p:bg>
@@ -2302,7 +4411,7 @@
       </p:grpSpPr>
       <p:sp>
         <p:nvSpPr>
-          <p:cNvPr id="7" name="PlaceHolder 1"/>
+          <p:cNvPr id="25" name="PlaceHolder 1"/>
           <p:cNvSpPr>
             <a:spLocks noGrp="1"/>
           </p:cNvSpPr>
@@ -2313,7 +4422,7 @@
         <p:spPr>
           <a:xfrm>
             <a:off x="839880" y="457200"/>
-            <a:ext cx="3931560" cy="1599480"/>
+            <a:ext cx="3931200" cy="1599120"/>
           </a:xfrm>
           <a:prstGeom prst="rect">
             <a:avLst/>
@@ -2380,7 +4489,7 @@
       </p:sp>
       <p:sp>
         <p:nvSpPr>
-          <p:cNvPr id="8" name="PlaceHolder 2"/>
+          <p:cNvPr id="26" name="PlaceHolder 2"/>
           <p:cNvSpPr>
             <a:spLocks noGrp="1"/>
           </p:cNvSpPr>
@@ -2391,7 +4500,7 @@
         <p:spPr>
           <a:xfrm>
             <a:off x="5183280" y="987480"/>
-            <a:ext cx="6171480" cy="4872960"/>
+            <a:ext cx="6171120" cy="4872600"/>
           </a:xfrm>
           <a:prstGeom prst="rect">
             <a:avLst/>
@@ -2686,7 +4795,7 @@
       </p:sp>
       <p:sp>
         <p:nvSpPr>
-          <p:cNvPr id="9" name="PlaceHolder 3"/>
+          <p:cNvPr id="27" name="PlaceHolder 3"/>
           <p:cNvSpPr>
             <a:spLocks noGrp="1"/>
           </p:cNvSpPr>
@@ -2697,7 +4806,7 @@
         <p:spPr>
           <a:xfrm>
             <a:off x="839880" y="2057400"/>
-            <a:ext cx="3931560" cy="3810960"/>
+            <a:ext cx="3931200" cy="3810600"/>
           </a:xfrm>
           <a:prstGeom prst="rect">
             <a:avLst/>
@@ -2770,18 +4879,18 @@
       </p:sp>
       <p:sp>
         <p:nvSpPr>
-          <p:cNvPr id="10" name="PlaceHolder 4"/>
+          <p:cNvPr id="28" name="PlaceHolder 4"/>
           <p:cNvSpPr>
             <a:spLocks noGrp="1"/>
           </p:cNvSpPr>
           <p:nvPr>
-            <p:ph type="dt" idx="4"/>
+            <p:ph type="dt" idx="13"/>
           </p:nvPr>
         </p:nvSpPr>
         <p:spPr>
           <a:xfrm>
             <a:off x="838080" y="6356520"/>
-            <a:ext cx="2742480" cy="364320"/>
+            <a:ext cx="2742120" cy="363960"/>
           </a:xfrm>
           <a:prstGeom prst="rect">
             <a:avLst/>
@@ -2852,18 +4961,18 @@
       </p:sp>
       <p:sp>
         <p:nvSpPr>
-          <p:cNvPr id="11" name="PlaceHolder 5"/>
+          <p:cNvPr id="29" name="PlaceHolder 5"/>
           <p:cNvSpPr>
             <a:spLocks noGrp="1"/>
           </p:cNvSpPr>
           <p:nvPr>
-            <p:ph type="ftr" idx="5"/>
+            <p:ph type="ftr" idx="14"/>
           </p:nvPr>
         </p:nvSpPr>
         <p:spPr>
           <a:xfrm>
             <a:off x="4038480" y="6356520"/>
-            <a:ext cx="4114080" cy="364320"/>
+            <a:ext cx="4113720" cy="363960"/>
           </a:xfrm>
           <a:prstGeom prst="rect">
             <a:avLst/>
@@ -2930,18 +5039,18 @@
       </p:sp>
       <p:sp>
         <p:nvSpPr>
-          <p:cNvPr id="12" name="PlaceHolder 6"/>
+          <p:cNvPr id="30" name="PlaceHolder 6"/>
           <p:cNvSpPr>
             <a:spLocks noGrp="1"/>
           </p:cNvSpPr>
           <p:nvPr>
-            <p:ph type="sldNum" idx="6"/>
+            <p:ph type="sldNum" idx="15"/>
           </p:nvPr>
         </p:nvSpPr>
         <p:spPr>
           <a:xfrm>
             <a:off x="8610480" y="6356520"/>
-            <a:ext cx="2742480" cy="364320"/>
+            <a:ext cx="2742120" cy="363960"/>
           </a:xfrm>
           <a:prstGeom prst="rect">
             <a:avLst/>
@@ -2986,7 +5095,7 @@
                 <a:tab pos="0" algn="l"/>
               </a:tabLst>
             </a:pPr>
-            <a:fld id="{0779BAF2-6815-4967-863B-027A4F2A9A56}" type="slidenum">
+            <a:fld id="{49A07350-94C0-44DE-81CC-57BE4DC85431}" type="slidenum">
               <a:rPr lang="en-US" sz="1200" b="0" u="none" strike="noStrike">
                 <a:solidFill>
                   <a:schemeClr val="dk1">
@@ -3015,7 +5124,7 @@
 </p:sldLayout>
 </file>
 
-<file path=ppt/slideLayouts/slideLayout3.xml><?xml version="1.0" encoding="utf-8"?>
+<file path=ppt/slideLayouts/slideLayout6.xml><?xml version="1.0" encoding="utf-8"?>
 <p:sldLayout xmlns:a="http://schemas.openxmlformats.org/drawingml/2006/main" xmlns:p="http://schemas.openxmlformats.org/presentationml/2006/main" xmlns:r="http://schemas.openxmlformats.org/officeDocument/2006/relationships" xmlns:p14="http://schemas.microsoft.com/office/powerpoint/2010/main" xmlns:p15="http://schemas.microsoft.com/office/powerpoint/2012/main" xmlns:mc="http://schemas.openxmlformats.org/markup-compatibility/2006" type="blank" preserve="1">
   <p:cSld name="Picture with Caption">
     <p:bg>
@@ -3041,7 +5150,7 @@
       </p:grpSpPr>
       <p:sp>
         <p:nvSpPr>
-          <p:cNvPr id="13" name="PlaceHolder 1"/>
+          <p:cNvPr id="31" name="PlaceHolder 1"/>
           <p:cNvSpPr>
             <a:spLocks noGrp="1"/>
           </p:cNvSpPr>
@@ -3052,7 +5161,7 @@
         <p:spPr>
           <a:xfrm>
             <a:off x="839880" y="457200"/>
-            <a:ext cx="3931560" cy="1599480"/>
+            <a:ext cx="3931200" cy="1599120"/>
           </a:xfrm>
           <a:prstGeom prst="rect">
             <a:avLst/>
@@ -3119,7 +5228,7 @@
       </p:sp>
       <p:sp>
         <p:nvSpPr>
-          <p:cNvPr id="14" name="PlaceHolder 2"/>
+          <p:cNvPr id="32" name="PlaceHolder 2"/>
           <p:cNvSpPr>
             <a:spLocks noGrp="1"/>
           </p:cNvSpPr>
@@ -3130,7 +5239,7 @@
         <p:spPr>
           <a:xfrm>
             <a:off x="5183280" y="987480"/>
-            <a:ext cx="6171480" cy="4872960"/>
+            <a:ext cx="6171120" cy="4872600"/>
           </a:xfrm>
           <a:prstGeom prst="rect">
             <a:avLst/>
@@ -3589,7 +5698,7 @@
       </p:sp>
       <p:sp>
         <p:nvSpPr>
-          <p:cNvPr id="15" name="PlaceHolder 3"/>
+          <p:cNvPr id="33" name="PlaceHolder 3"/>
           <p:cNvSpPr>
             <a:spLocks noGrp="1"/>
           </p:cNvSpPr>
@@ -3600,7 +5709,7 @@
         <p:spPr>
           <a:xfrm>
             <a:off x="839880" y="2057400"/>
-            <a:ext cx="3931560" cy="3810960"/>
+            <a:ext cx="3931200" cy="3810600"/>
           </a:xfrm>
           <a:prstGeom prst="rect">
             <a:avLst/>
@@ -3673,18 +5782,18 @@
       </p:sp>
       <p:sp>
         <p:nvSpPr>
-          <p:cNvPr id="16" name="PlaceHolder 4"/>
+          <p:cNvPr id="34" name="PlaceHolder 4"/>
           <p:cNvSpPr>
             <a:spLocks noGrp="1"/>
           </p:cNvSpPr>
           <p:nvPr>
-            <p:ph type="dt" idx="7"/>
+            <p:ph type="dt" idx="16"/>
           </p:nvPr>
         </p:nvSpPr>
         <p:spPr>
           <a:xfrm>
             <a:off x="838080" y="6356520"/>
-            <a:ext cx="2742480" cy="364320"/>
+            <a:ext cx="2742120" cy="363960"/>
           </a:xfrm>
           <a:prstGeom prst="rect">
             <a:avLst/>
@@ -3755,18 +5864,18 @@
       </p:sp>
       <p:sp>
         <p:nvSpPr>
-          <p:cNvPr id="17" name="PlaceHolder 5"/>
+          <p:cNvPr id="35" name="PlaceHolder 5"/>
           <p:cNvSpPr>
             <a:spLocks noGrp="1"/>
           </p:cNvSpPr>
           <p:nvPr>
-            <p:ph type="ftr" idx="8"/>
+            <p:ph type="ftr" idx="17"/>
           </p:nvPr>
         </p:nvSpPr>
         <p:spPr>
           <a:xfrm>
             <a:off x="4038480" y="6356520"/>
-            <a:ext cx="4114080" cy="364320"/>
+            <a:ext cx="4113720" cy="363960"/>
           </a:xfrm>
           <a:prstGeom prst="rect">
             <a:avLst/>
@@ -3833,18 +5942,18 @@
       </p:sp>
       <p:sp>
         <p:nvSpPr>
-          <p:cNvPr id="18" name="PlaceHolder 6"/>
+          <p:cNvPr id="36" name="PlaceHolder 6"/>
           <p:cNvSpPr>
             <a:spLocks noGrp="1"/>
           </p:cNvSpPr>
           <p:nvPr>
-            <p:ph type="sldNum" idx="9"/>
+            <p:ph type="sldNum" idx="18"/>
           </p:nvPr>
         </p:nvSpPr>
         <p:spPr>
           <a:xfrm>
             <a:off x="8610480" y="6356520"/>
-            <a:ext cx="2742480" cy="364320"/>
+            <a:ext cx="2742120" cy="363960"/>
           </a:xfrm>
           <a:prstGeom prst="rect">
             <a:avLst/>
@@ -3889,7 +5998,7 @@
                 <a:tab pos="0" algn="l"/>
               </a:tabLst>
             </a:pPr>
-            <a:fld id="{D886256C-A48D-4131-A5BB-5FD4F23F54CF}" type="slidenum">
+            <a:fld id="{F3906218-7883-407D-A8BE-B4E9A34FA5E5}" type="slidenum">
               <a:rPr lang="en-US" sz="1200" b="0" u="none" strike="noStrike">
                 <a:solidFill>
                   <a:schemeClr val="dk1">
@@ -3918,7 +6027,7 @@
 </p:sldLayout>
 </file>
 
-<file path=ppt/slideLayouts/slideLayout4.xml><?xml version="1.0" encoding="utf-8"?>
+<file path=ppt/slideLayouts/slideLayout7.xml><?xml version="1.0" encoding="utf-8"?>
 <p:sldLayout xmlns:a="http://schemas.openxmlformats.org/drawingml/2006/main" xmlns:p="http://schemas.openxmlformats.org/presentationml/2006/main" xmlns:r="http://schemas.openxmlformats.org/officeDocument/2006/relationships" xmlns:p14="http://schemas.microsoft.com/office/powerpoint/2010/main" xmlns:p15="http://schemas.microsoft.com/office/powerpoint/2012/main" xmlns:mc="http://schemas.openxmlformats.org/markup-compatibility/2006" type="title" preserve="1">
   <p:cSld name="Title Slide">
     <p:bg>
@@ -3944,7 +6053,7 @@
       </p:grpSpPr>
       <p:sp>
         <p:nvSpPr>
-          <p:cNvPr id="19" name="PlaceHolder 1"/>
+          <p:cNvPr id="37" name="PlaceHolder 1"/>
           <p:cNvSpPr>
             <a:spLocks noGrp="1"/>
           </p:cNvSpPr>
@@ -3955,7 +6064,7 @@
         <p:spPr>
           <a:xfrm>
             <a:off x="1523880" y="1122480"/>
-            <a:ext cx="9143280" cy="2386800"/>
+            <a:ext cx="9142920" cy="2386440"/>
           </a:xfrm>
           <a:prstGeom prst="rect">
             <a:avLst/>
@@ -4022,18 +6131,18 @@
       </p:sp>
       <p:sp>
         <p:nvSpPr>
-          <p:cNvPr id="20" name="PlaceHolder 2"/>
+          <p:cNvPr id="38" name="PlaceHolder 2"/>
           <p:cNvSpPr>
             <a:spLocks noGrp="1"/>
           </p:cNvSpPr>
           <p:nvPr>
-            <p:ph type="dt" idx="10"/>
+            <p:ph type="dt" idx="19"/>
           </p:nvPr>
         </p:nvSpPr>
         <p:spPr>
           <a:xfrm>
             <a:off x="838080" y="6356520"/>
-            <a:ext cx="2742480" cy="364320"/>
+            <a:ext cx="2742120" cy="363960"/>
           </a:xfrm>
           <a:prstGeom prst="rect">
             <a:avLst/>
@@ -4104,18 +6213,18 @@
       </p:sp>
       <p:sp>
         <p:nvSpPr>
-          <p:cNvPr id="21" name="PlaceHolder 3"/>
+          <p:cNvPr id="39" name="PlaceHolder 3"/>
           <p:cNvSpPr>
             <a:spLocks noGrp="1"/>
           </p:cNvSpPr>
           <p:nvPr>
-            <p:ph type="ftr" idx="11"/>
+            <p:ph type="ftr" idx="20"/>
           </p:nvPr>
         </p:nvSpPr>
         <p:spPr>
           <a:xfrm>
             <a:off x="4038480" y="6356520"/>
-            <a:ext cx="4114080" cy="364320"/>
+            <a:ext cx="4113720" cy="363960"/>
           </a:xfrm>
           <a:prstGeom prst="rect">
             <a:avLst/>
@@ -4182,18 +6291,18 @@
       </p:sp>
       <p:sp>
         <p:nvSpPr>
-          <p:cNvPr id="22" name="PlaceHolder 4"/>
+          <p:cNvPr id="40" name="PlaceHolder 4"/>
           <p:cNvSpPr>
             <a:spLocks noGrp="1"/>
           </p:cNvSpPr>
           <p:nvPr>
-            <p:ph type="sldNum" idx="12"/>
+            <p:ph type="sldNum" idx="21"/>
           </p:nvPr>
         </p:nvSpPr>
         <p:spPr>
           <a:xfrm>
             <a:off x="8610480" y="6356520"/>
-            <a:ext cx="2742480" cy="364320"/>
+            <a:ext cx="2742120" cy="363960"/>
           </a:xfrm>
           <a:prstGeom prst="rect">
             <a:avLst/>
@@ -4238,7 +6347,7 @@
                 <a:tab pos="0" algn="l"/>
               </a:tabLst>
             </a:pPr>
-            <a:fld id="{2245D782-B630-4D4E-8A82-83DAE56A40DC}" type="slidenum">
+            <a:fld id="{A14F7E84-A1A6-467A-95D3-AEA3814C89B5}" type="slidenum">
               <a:rPr lang="en-US" sz="1200" b="0" u="none" strike="noStrike">
                 <a:solidFill>
                   <a:schemeClr val="dk1">
@@ -4267,7 +6376,7 @@
 </p:sldLayout>
 </file>
 
-<file path=ppt/slideLayouts/slideLayout5.xml><?xml version="1.0" encoding="utf-8"?>
+<file path=ppt/slideLayouts/slideLayout8.xml><?xml version="1.0" encoding="utf-8"?>
 <p:sldLayout xmlns:a="http://schemas.openxmlformats.org/drawingml/2006/main" xmlns:p="http://schemas.openxmlformats.org/presentationml/2006/main" xmlns:r="http://schemas.openxmlformats.org/officeDocument/2006/relationships" xmlns:p14="http://schemas.microsoft.com/office/powerpoint/2010/main" xmlns:p15="http://schemas.microsoft.com/office/powerpoint/2012/main" xmlns:mc="http://schemas.openxmlformats.org/markup-compatibility/2006" type="vertTx" preserve="1">
   <p:cSld name="Title and Vertical Text">
     <p:bg>
@@ -4293,7 +6402,7 @@
       </p:grpSpPr>
       <p:sp>
         <p:nvSpPr>
-          <p:cNvPr id="23" name="PlaceHolder 1"/>
+          <p:cNvPr id="41" name="PlaceHolder 1"/>
           <p:cNvSpPr>
             <a:spLocks noGrp="1"/>
           </p:cNvSpPr>
@@ -4304,7 +6413,7 @@
         <p:spPr>
           <a:xfrm>
             <a:off x="838080" y="365040"/>
-            <a:ext cx="10514880" cy="1324800"/>
+            <a:ext cx="10514520" cy="1324440"/>
           </a:xfrm>
           <a:prstGeom prst="rect">
             <a:avLst/>
@@ -4371,7 +6480,7 @@
       </p:sp>
       <p:sp>
         <p:nvSpPr>
-          <p:cNvPr id="24" name="PlaceHolder 2"/>
+          <p:cNvPr id="42" name="PlaceHolder 2"/>
           <p:cNvSpPr>
             <a:spLocks noGrp="1"/>
           </p:cNvSpPr>
@@ -4382,7 +6491,7 @@
         <p:spPr>
           <a:xfrm>
             <a:off x="838080" y="1825560"/>
-            <a:ext cx="10514880" cy="4350600"/>
+            <a:ext cx="10514520" cy="4350240"/>
           </a:xfrm>
           <a:prstGeom prst="rect">
             <a:avLst/>
@@ -4677,18 +6786,18 @@
       </p:sp>
       <p:sp>
         <p:nvSpPr>
-          <p:cNvPr id="25" name="PlaceHolder 3"/>
+          <p:cNvPr id="43" name="PlaceHolder 3"/>
           <p:cNvSpPr>
             <a:spLocks noGrp="1"/>
           </p:cNvSpPr>
           <p:nvPr>
-            <p:ph type="dt" idx="13"/>
+            <p:ph type="dt" idx="22"/>
           </p:nvPr>
         </p:nvSpPr>
         <p:spPr>
           <a:xfrm>
             <a:off x="838080" y="6356520"/>
-            <a:ext cx="2742480" cy="364320"/>
+            <a:ext cx="2742120" cy="363960"/>
           </a:xfrm>
           <a:prstGeom prst="rect">
             <a:avLst/>
@@ -4759,18 +6868,18 @@
       </p:sp>
       <p:sp>
         <p:nvSpPr>
-          <p:cNvPr id="26" name="PlaceHolder 4"/>
+          <p:cNvPr id="44" name="PlaceHolder 4"/>
           <p:cNvSpPr>
             <a:spLocks noGrp="1"/>
           </p:cNvSpPr>
           <p:nvPr>
-            <p:ph type="ftr" idx="14"/>
+            <p:ph type="ftr" idx="23"/>
           </p:nvPr>
         </p:nvSpPr>
         <p:spPr>
           <a:xfrm>
             <a:off x="4038480" y="6356520"/>
-            <a:ext cx="4114080" cy="364320"/>
+            <a:ext cx="4113720" cy="363960"/>
           </a:xfrm>
           <a:prstGeom prst="rect">
             <a:avLst/>
@@ -4837,18 +6946,18 @@
       </p:sp>
       <p:sp>
         <p:nvSpPr>
-          <p:cNvPr id="27" name="PlaceHolder 5"/>
+          <p:cNvPr id="45" name="PlaceHolder 5"/>
           <p:cNvSpPr>
             <a:spLocks noGrp="1"/>
           </p:cNvSpPr>
           <p:nvPr>
-            <p:ph type="sldNum" idx="15"/>
+            <p:ph type="sldNum" idx="24"/>
           </p:nvPr>
         </p:nvSpPr>
         <p:spPr>
           <a:xfrm>
             <a:off x="8610480" y="6356520"/>
-            <a:ext cx="2742480" cy="364320"/>
+            <a:ext cx="2742120" cy="363960"/>
           </a:xfrm>
           <a:prstGeom prst="rect">
             <a:avLst/>
@@ -4893,7 +7002,7 @@
                 <a:tab pos="0" algn="l"/>
               </a:tabLst>
             </a:pPr>
-            <a:fld id="{4D96530C-D960-4E4F-BD18-769F31B0248B}" type="slidenum">
+            <a:fld id="{BC250BB3-AAB5-46FC-BF03-469DAA23975C}" type="slidenum">
               <a:rPr lang="en-US" sz="1200" b="0" u="none" strike="noStrike">
                 <a:solidFill>
                   <a:schemeClr val="dk1">
@@ -4922,7 +7031,7 @@
 </p:sldLayout>
 </file>
 
-<file path=ppt/slideLayouts/slideLayout6.xml><?xml version="1.0" encoding="utf-8"?>
+<file path=ppt/slideLayouts/slideLayout9.xml><?xml version="1.0" encoding="utf-8"?>
 <p:sldLayout xmlns:a="http://schemas.openxmlformats.org/drawingml/2006/main" xmlns:p="http://schemas.openxmlformats.org/presentationml/2006/main" xmlns:r="http://schemas.openxmlformats.org/officeDocument/2006/relationships" xmlns:p14="http://schemas.microsoft.com/office/powerpoint/2010/main" xmlns:p15="http://schemas.microsoft.com/office/powerpoint/2012/main" xmlns:mc="http://schemas.openxmlformats.org/markup-compatibility/2006" type="vertTitleAndTx" preserve="1">
   <p:cSld name="Vertical Title and Text">
     <p:bg>
@@ -4948,7 +7057,7 @@
       </p:grpSpPr>
       <p:sp>
         <p:nvSpPr>
-          <p:cNvPr id="28" name="PlaceHolder 1"/>
+          <p:cNvPr id="46" name="PlaceHolder 1"/>
           <p:cNvSpPr>
             <a:spLocks noGrp="1"/>
           </p:cNvSpPr>
@@ -4959,7 +7068,7 @@
         <p:spPr>
           <a:xfrm>
             <a:off x="8724960" y="365040"/>
-            <a:ext cx="2628360" cy="5811120"/>
+            <a:ext cx="2628000" cy="5810760"/>
           </a:xfrm>
           <a:prstGeom prst="rect">
             <a:avLst/>
@@ -5026,7 +7135,7 @@
       </p:sp>
       <p:sp>
         <p:nvSpPr>
-          <p:cNvPr id="29" name="PlaceHolder 2"/>
+          <p:cNvPr id="47" name="PlaceHolder 2"/>
           <p:cNvSpPr>
             <a:spLocks noGrp="1"/>
           </p:cNvSpPr>
@@ -5037,7 +7146,7 @@
         <p:spPr>
           <a:xfrm>
             <a:off x="838080" y="365040"/>
-            <a:ext cx="7733520" cy="5811120"/>
+            <a:ext cx="7733160" cy="5810760"/>
           </a:xfrm>
           <a:prstGeom prst="rect">
             <a:avLst/>
@@ -5332,18 +7441,18 @@
       </p:sp>
       <p:sp>
         <p:nvSpPr>
-          <p:cNvPr id="30" name="PlaceHolder 3"/>
+          <p:cNvPr id="48" name="PlaceHolder 3"/>
           <p:cNvSpPr>
             <a:spLocks noGrp="1"/>
           </p:cNvSpPr>
           <p:nvPr>
-            <p:ph type="dt" idx="16"/>
+            <p:ph type="dt" idx="25"/>
           </p:nvPr>
         </p:nvSpPr>
         <p:spPr>
           <a:xfrm>
             <a:off x="838080" y="6356520"/>
-            <a:ext cx="2742480" cy="364320"/>
+            <a:ext cx="2742120" cy="363960"/>
           </a:xfrm>
           <a:prstGeom prst="rect">
             <a:avLst/>
@@ -5414,18 +7523,18 @@
       </p:sp>
       <p:sp>
         <p:nvSpPr>
-          <p:cNvPr id="31" name="PlaceHolder 4"/>
+          <p:cNvPr id="49" name="PlaceHolder 4"/>
           <p:cNvSpPr>
             <a:spLocks noGrp="1"/>
           </p:cNvSpPr>
           <p:nvPr>
-            <p:ph type="ftr" idx="17"/>
+            <p:ph type="ftr" idx="26"/>
           </p:nvPr>
         </p:nvSpPr>
         <p:spPr>
           <a:xfrm>
             <a:off x="4038480" y="6356520"/>
-            <a:ext cx="4114080" cy="364320"/>
+            <a:ext cx="4113720" cy="363960"/>
           </a:xfrm>
           <a:prstGeom prst="rect">
             <a:avLst/>
@@ -5492,18 +7601,18 @@
       </p:sp>
       <p:sp>
         <p:nvSpPr>
-          <p:cNvPr id="32" name="PlaceHolder 5"/>
+          <p:cNvPr id="50" name="PlaceHolder 5"/>
           <p:cNvSpPr>
             <a:spLocks noGrp="1"/>
           </p:cNvSpPr>
           <p:nvPr>
-            <p:ph type="sldNum" idx="18"/>
+            <p:ph type="sldNum" idx="27"/>
           </p:nvPr>
         </p:nvSpPr>
         <p:spPr>
           <a:xfrm>
             <a:off x="8610480" y="6356520"/>
-            <a:ext cx="2742480" cy="364320"/>
+            <a:ext cx="2742120" cy="363960"/>
           </a:xfrm>
           <a:prstGeom prst="rect">
             <a:avLst/>
@@ -5548,2062 +7657,7 @@
                 <a:tab pos="0" algn="l"/>
               </a:tabLst>
             </a:pPr>
-            <a:fld id="{02B2E503-C6EA-4E5E-87DA-763543BA5956}" type="slidenum">
-              <a:rPr lang="en-US" sz="1200" b="0" u="none" strike="noStrike">
-                <a:solidFill>
-                  <a:schemeClr val="dk1">
-                    <a:tint val="82000"/>
-                  </a:schemeClr>
-                </a:solidFill>
-                <a:effectLst/>
-                <a:uFillTx/>
-                <a:latin typeface="Aptos"/>
-              </a:rPr>
-              <a:t>&lt;number&gt;</a:t>
-            </a:fld>
-            <a:endParaRPr lang="en-US" sz="1200" b="0" u="none" strike="noStrike">
-              <a:solidFill>
-                <a:srgbClr val="000000"/>
-              </a:solidFill>
-              <a:effectLst/>
-              <a:uFillTx/>
-              <a:latin typeface="Times New Roman"/>
-            </a:endParaRPr>
-          </a:p>
-        </p:txBody>
-      </p:sp>
-    </p:spTree>
-  </p:cSld>
-</p:sldLayout>
-</file>
-
-<file path=ppt/slideLayouts/slideLayout7.xml><?xml version="1.0" encoding="utf-8"?>
-<p:sldLayout xmlns:a="http://schemas.openxmlformats.org/drawingml/2006/main" xmlns:p="http://schemas.openxmlformats.org/presentationml/2006/main" xmlns:r="http://schemas.openxmlformats.org/officeDocument/2006/relationships" xmlns:p14="http://schemas.microsoft.com/office/powerpoint/2010/main" xmlns:p15="http://schemas.microsoft.com/office/powerpoint/2012/main" xmlns:mc="http://schemas.openxmlformats.org/markup-compatibility/2006" type="obj" preserve="1">
-  <p:cSld name="Title and Content">
-    <p:bg>
-      <p:bgPr>
-        <a:solidFill>
-          <a:srgbClr val="FFFFFF"/>
-        </a:solidFill>
-      </p:bgPr>
-    </p:bg>
-    <p:spTree>
-      <p:nvGrpSpPr>
-        <p:cNvPr id="1" name=""/>
-        <p:cNvGrpSpPr/>
-        <p:nvPr/>
-      </p:nvGrpSpPr>
-      <p:grpSpPr>
-        <a:xfrm>
-          <a:off x="0" y="0"/>
-          <a:ext cx="0" cy="0"/>
-          <a:chOff x="0" y="0"/>
-          <a:chExt cx="0" cy="0"/>
-        </a:xfrm>
-      </p:grpSpPr>
-      <p:sp>
-        <p:nvSpPr>
-          <p:cNvPr id="33" name="PlaceHolder 1"/>
-          <p:cNvSpPr>
-            <a:spLocks noGrp="1"/>
-          </p:cNvSpPr>
-          <p:nvPr>
-            <p:ph type="title"/>
-          </p:nvPr>
-        </p:nvSpPr>
-        <p:spPr>
-          <a:xfrm>
-            <a:off x="838080" y="365040"/>
-            <a:ext cx="10514880" cy="1324800"/>
-          </a:xfrm>
-          <a:prstGeom prst="rect">
-            <a:avLst/>
-          </a:prstGeom>
-          <a:noFill/>
-          <a:ln w="0">
-            <a:noFill/>
-          </a:ln>
-        </p:spPr>
-        <p:txBody>
-          <a:bodyPr lIns="91440" tIns="45720" rIns="91440" bIns="45720" anchor="ctr">
-            <a:noAutofit/>
-          </a:bodyPr>
-          <a:lstStyle>
-            <a:lvl1pPr indent="0" algn="l" defTabSz="914400">
-              <a:lnSpc>
-                <a:spcPct val="90000"/>
-              </a:lnSpc>
-              <a:buNone/>
-              <a:tabLst>
-                <a:tab pos="0" algn="l"/>
-              </a:tabLst>
-              <a:defRPr lang="en-US" sz="4400" b="0" u="none" strike="noStrike">
-                <a:solidFill>
-                  <a:schemeClr val="dk1"/>
-                </a:solidFill>
-                <a:effectLst/>
-                <a:uFillTx/>
-                <a:latin typeface="Aptos Display"/>
-              </a:defRPr>
-            </a:lvl1pPr>
-          </a:lstStyle>
-          <a:p>
-            <a:pPr indent="0" algn="l" defTabSz="914400">
-              <a:lnSpc>
-                <a:spcPct val="90000"/>
-              </a:lnSpc>
-              <a:buNone/>
-              <a:tabLst>
-                <a:tab pos="0" algn="l"/>
-              </a:tabLst>
-            </a:pPr>
-            <a:r>
-              <a:rPr lang="en-US" sz="4400" b="0" u="none" strike="noStrike">
-                <a:solidFill>
-                  <a:schemeClr val="dk1"/>
-                </a:solidFill>
-                <a:effectLst/>
-                <a:uFillTx/>
-                <a:latin typeface="Aptos Display"/>
-              </a:rPr>
-              <a:t>Click to edit Master title style</a:t>
-            </a:r>
-            <a:endParaRPr lang="en-US" sz="4400" b="0" u="none" strike="noStrike">
-              <a:solidFill>
-                <a:schemeClr val="dk1"/>
-              </a:solidFill>
-              <a:effectLst/>
-              <a:uFillTx/>
-              <a:latin typeface="Aptos Display"/>
-            </a:endParaRPr>
-          </a:p>
-        </p:txBody>
-      </p:sp>
-      <p:sp>
-        <p:nvSpPr>
-          <p:cNvPr id="34" name="PlaceHolder 2"/>
-          <p:cNvSpPr>
-            <a:spLocks noGrp="1"/>
-          </p:cNvSpPr>
-          <p:nvPr>
-            <p:ph type="body"/>
-          </p:nvPr>
-        </p:nvSpPr>
-        <p:spPr>
-          <a:xfrm>
-            <a:off x="838080" y="1825560"/>
-            <a:ext cx="10514880" cy="4350600"/>
-          </a:xfrm>
-          <a:prstGeom prst="rect">
-            <a:avLst/>
-          </a:prstGeom>
-          <a:noFill/>
-          <a:ln w="0">
-            <a:noFill/>
-          </a:ln>
-        </p:spPr>
-        <p:txBody>
-          <a:bodyPr lIns="91440" tIns="45720" rIns="91440" bIns="45720" anchor="t">
-            <a:noAutofit/>
-          </a:bodyPr>
-          <a:lstStyle>
-            <a:lvl1pPr algn="l" defTabSz="914400">
-              <a:lnSpc>
-                <a:spcPct val="90000"/>
-              </a:lnSpc>
-              <a:spcBef>
-                <a:spcPts val="1001"/>
-              </a:spcBef>
-              <a:buClr>
-                <a:srgbClr val="000000"/>
-              </a:buClr>
-              <a:buFont typeface="Arial"/>
-              <a:buChar char="•"/>
-              <a:defRPr lang="en-US" sz="2800" b="0" u="none" strike="noStrike">
-                <a:solidFill>
-                  <a:schemeClr val="dk1"/>
-                </a:solidFill>
-                <a:effectLst/>
-                <a:uFillTx/>
-                <a:latin typeface="Aptos"/>
-              </a:defRPr>
-            </a:lvl1pPr>
-            <a:lvl2pPr lvl="1" algn="l" defTabSz="914400">
-              <a:lnSpc>
-                <a:spcPct val="90000"/>
-              </a:lnSpc>
-              <a:spcBef>
-                <a:spcPts val="499"/>
-              </a:spcBef>
-              <a:buClr>
-                <a:srgbClr val="000000"/>
-              </a:buClr>
-              <a:buFont typeface="Arial"/>
-              <a:buChar char="•"/>
-              <a:defRPr lang="en-US" sz="2400" b="0" u="none" strike="noStrike">
-                <a:solidFill>
-                  <a:schemeClr val="dk1"/>
-                </a:solidFill>
-                <a:effectLst/>
-                <a:uFillTx/>
-                <a:latin typeface="Aptos"/>
-              </a:defRPr>
-            </a:lvl2pPr>
-            <a:lvl3pPr lvl="2" algn="l" defTabSz="914400">
-              <a:lnSpc>
-                <a:spcPct val="90000"/>
-              </a:lnSpc>
-              <a:spcBef>
-                <a:spcPts val="499"/>
-              </a:spcBef>
-              <a:buClr>
-                <a:srgbClr val="000000"/>
-              </a:buClr>
-              <a:buFont typeface="Arial"/>
-              <a:buChar char="•"/>
-              <a:defRPr lang="en-US" sz="2000" b="0" u="none" strike="noStrike">
-                <a:solidFill>
-                  <a:schemeClr val="dk1"/>
-                </a:solidFill>
-                <a:effectLst/>
-                <a:uFillTx/>
-                <a:latin typeface="Aptos"/>
-              </a:defRPr>
-            </a:lvl3pPr>
-            <a:lvl4pPr lvl="3" algn="l" defTabSz="914400">
-              <a:lnSpc>
-                <a:spcPct val="90000"/>
-              </a:lnSpc>
-              <a:spcBef>
-                <a:spcPts val="499"/>
-              </a:spcBef>
-              <a:buClr>
-                <a:srgbClr val="000000"/>
-              </a:buClr>
-              <a:buFont typeface="Arial"/>
-              <a:buChar char="•"/>
-              <a:defRPr lang="en-US" sz="1800" b="0" u="none" strike="noStrike">
-                <a:solidFill>
-                  <a:schemeClr val="dk1"/>
-                </a:solidFill>
-                <a:effectLst/>
-                <a:uFillTx/>
-                <a:latin typeface="Aptos"/>
-              </a:defRPr>
-            </a:lvl4pPr>
-            <a:lvl5pPr lvl="4" algn="l" defTabSz="914400">
-              <a:lnSpc>
-                <a:spcPct val="90000"/>
-              </a:lnSpc>
-              <a:spcBef>
-                <a:spcPts val="499"/>
-              </a:spcBef>
-              <a:buClr>
-                <a:srgbClr val="000000"/>
-              </a:buClr>
-              <a:buFont typeface="Arial"/>
-              <a:buChar char="•"/>
-              <a:defRPr lang="en-US" sz="1800" b="0" u="none" strike="noStrike">
-                <a:solidFill>
-                  <a:schemeClr val="dk1"/>
-                </a:solidFill>
-                <a:effectLst/>
-                <a:uFillTx/>
-                <a:latin typeface="Aptos"/>
-              </a:defRPr>
-            </a:lvl5pPr>
-          </a:lstStyle>
-          <a:p>
-            <a:pPr marL="228600" indent="-228600" algn="l" defTabSz="914400">
-              <a:lnSpc>
-                <a:spcPct val="90000"/>
-              </a:lnSpc>
-              <a:spcBef>
-                <a:spcPts val="1001"/>
-              </a:spcBef>
-              <a:buClr>
-                <a:srgbClr val="000000"/>
-              </a:buClr>
-              <a:buFont typeface="Arial"/>
-              <a:buChar char="•"/>
-            </a:pPr>
-            <a:r>
-              <a:rPr lang="en-US" sz="2800" b="0" u="none" strike="noStrike">
-                <a:solidFill>
-                  <a:schemeClr val="dk1"/>
-                </a:solidFill>
-                <a:effectLst/>
-                <a:uFillTx/>
-                <a:latin typeface="Aptos"/>
-              </a:rPr>
-              <a:t>Click to edit Master text styles</a:t>
-            </a:r>
-            <a:endParaRPr lang="en-US" sz="2800" b="0" u="none" strike="noStrike">
-              <a:solidFill>
-                <a:schemeClr val="dk1"/>
-              </a:solidFill>
-              <a:effectLst/>
-              <a:uFillTx/>
-              <a:latin typeface="Aptos"/>
-            </a:endParaRPr>
-          </a:p>
-          <a:p>
-            <a:pPr marL="685800" lvl="1" indent="-228600" algn="l" defTabSz="914400">
-              <a:lnSpc>
-                <a:spcPct val="90000"/>
-              </a:lnSpc>
-              <a:spcBef>
-                <a:spcPts val="499"/>
-              </a:spcBef>
-              <a:buClr>
-                <a:srgbClr val="000000"/>
-              </a:buClr>
-              <a:buFont typeface="Arial"/>
-              <a:buChar char="•"/>
-            </a:pPr>
-            <a:r>
-              <a:rPr lang="en-US" sz="2400" b="0" u="none" strike="noStrike">
-                <a:solidFill>
-                  <a:schemeClr val="dk1"/>
-                </a:solidFill>
-                <a:effectLst/>
-                <a:uFillTx/>
-                <a:latin typeface="Aptos"/>
-              </a:rPr>
-              <a:t>Second level</a:t>
-            </a:r>
-            <a:endParaRPr lang="en-US" sz="2400" b="0" u="none" strike="noStrike">
-              <a:solidFill>
-                <a:schemeClr val="dk1"/>
-              </a:solidFill>
-              <a:effectLst/>
-              <a:uFillTx/>
-              <a:latin typeface="Aptos"/>
-            </a:endParaRPr>
-          </a:p>
-          <a:p>
-            <a:pPr marL="1143000" lvl="2" indent="-228600" algn="l" defTabSz="914400">
-              <a:lnSpc>
-                <a:spcPct val="90000"/>
-              </a:lnSpc>
-              <a:spcBef>
-                <a:spcPts val="499"/>
-              </a:spcBef>
-              <a:buClr>
-                <a:srgbClr val="000000"/>
-              </a:buClr>
-              <a:buFont typeface="Arial"/>
-              <a:buChar char="•"/>
-            </a:pPr>
-            <a:r>
-              <a:rPr lang="en-US" sz="2000" b="0" u="none" strike="noStrike">
-                <a:solidFill>
-                  <a:schemeClr val="dk1"/>
-                </a:solidFill>
-                <a:effectLst/>
-                <a:uFillTx/>
-                <a:latin typeface="Aptos"/>
-              </a:rPr>
-              <a:t>Third level</a:t>
-            </a:r>
-            <a:endParaRPr lang="en-US" sz="2000" b="0" u="none" strike="noStrike">
-              <a:solidFill>
-                <a:schemeClr val="dk1"/>
-              </a:solidFill>
-              <a:effectLst/>
-              <a:uFillTx/>
-              <a:latin typeface="Aptos"/>
-            </a:endParaRPr>
-          </a:p>
-          <a:p>
-            <a:pPr marL="1600200" lvl="3" indent="-228600" algn="l" defTabSz="914400">
-              <a:lnSpc>
-                <a:spcPct val="90000"/>
-              </a:lnSpc>
-              <a:spcBef>
-                <a:spcPts val="499"/>
-              </a:spcBef>
-              <a:buClr>
-                <a:srgbClr val="000000"/>
-              </a:buClr>
-              <a:buFont typeface="Arial"/>
-              <a:buChar char="•"/>
-            </a:pPr>
-            <a:r>
-              <a:rPr lang="en-US" sz="1800" b="0" u="none" strike="noStrike">
-                <a:solidFill>
-                  <a:schemeClr val="dk1"/>
-                </a:solidFill>
-                <a:effectLst/>
-                <a:uFillTx/>
-                <a:latin typeface="Aptos"/>
-              </a:rPr>
-              <a:t>Fourth level</a:t>
-            </a:r>
-            <a:endParaRPr lang="en-US" sz="1800" b="0" u="none" strike="noStrike">
-              <a:solidFill>
-                <a:schemeClr val="dk1"/>
-              </a:solidFill>
-              <a:effectLst/>
-              <a:uFillTx/>
-              <a:latin typeface="Aptos"/>
-            </a:endParaRPr>
-          </a:p>
-          <a:p>
-            <a:pPr marL="2057400" lvl="4" indent="-228600" algn="l" defTabSz="914400">
-              <a:lnSpc>
-                <a:spcPct val="90000"/>
-              </a:lnSpc>
-              <a:spcBef>
-                <a:spcPts val="499"/>
-              </a:spcBef>
-              <a:buClr>
-                <a:srgbClr val="000000"/>
-              </a:buClr>
-              <a:buFont typeface="Arial"/>
-              <a:buChar char="•"/>
-            </a:pPr>
-            <a:r>
-              <a:rPr lang="en-US" sz="1800" b="0" u="none" strike="noStrike">
-                <a:solidFill>
-                  <a:schemeClr val="dk1"/>
-                </a:solidFill>
-                <a:effectLst/>
-                <a:uFillTx/>
-                <a:latin typeface="Aptos"/>
-              </a:rPr>
-              <a:t>Fifth level</a:t>
-            </a:r>
-            <a:endParaRPr lang="en-US" sz="1800" b="0" u="none" strike="noStrike">
-              <a:solidFill>
-                <a:schemeClr val="dk1"/>
-              </a:solidFill>
-              <a:effectLst/>
-              <a:uFillTx/>
-              <a:latin typeface="Aptos"/>
-            </a:endParaRPr>
-          </a:p>
-        </p:txBody>
-      </p:sp>
-      <p:sp>
-        <p:nvSpPr>
-          <p:cNvPr id="35" name="PlaceHolder 3"/>
-          <p:cNvSpPr>
-            <a:spLocks noGrp="1"/>
-          </p:cNvSpPr>
-          <p:nvPr>
-            <p:ph type="dt" idx="19"/>
-          </p:nvPr>
-        </p:nvSpPr>
-        <p:spPr>
-          <a:xfrm>
-            <a:off x="838080" y="6356520"/>
-            <a:ext cx="2742480" cy="364320"/>
-          </a:xfrm>
-          <a:prstGeom prst="rect">
-            <a:avLst/>
-          </a:prstGeom>
-          <a:noFill/>
-          <a:ln w="0">
-            <a:noFill/>
-          </a:ln>
-        </p:spPr>
-        <p:txBody>
-          <a:bodyPr lIns="91440" tIns="45720" rIns="91440" bIns="45720" anchor="ctr">
-            <a:noAutofit/>
-          </a:bodyPr>
-          <a:lstStyle>
-            <a:lvl1pPr indent="0" algn="l" defTabSz="914400">
-              <a:lnSpc>
-                <a:spcPct val="100000"/>
-              </a:lnSpc>
-              <a:buNone/>
-              <a:tabLst>
-                <a:tab pos="0" algn="l"/>
-              </a:tabLst>
-              <a:defRPr lang="en-US" sz="1200" b="0" u="none" strike="noStrike">
-                <a:solidFill>
-                  <a:schemeClr val="dk1">
-                    <a:tint val="82000"/>
-                  </a:schemeClr>
-                </a:solidFill>
-                <a:effectLst/>
-                <a:uFillTx/>
-                <a:latin typeface="Aptos"/>
-              </a:defRPr>
-            </a:lvl1pPr>
-          </a:lstStyle>
-          <a:p>
-            <a:pPr indent="0" algn="l" defTabSz="914400">
-              <a:lnSpc>
-                <a:spcPct val="100000"/>
-              </a:lnSpc>
-              <a:buNone/>
-              <a:tabLst>
-                <a:tab pos="0" algn="l"/>
-              </a:tabLst>
-            </a:pPr>
-            <a:r>
-              <a:rPr lang="en-US" sz="1200" b="0" u="none" strike="noStrike">
-                <a:solidFill>
-                  <a:schemeClr val="dk1">
-                    <a:tint val="82000"/>
-                  </a:schemeClr>
-                </a:solidFill>
-                <a:effectLst/>
-                <a:uFillTx/>
-                <a:latin typeface="Aptos"/>
-              </a:rPr>
-              <a:t>&lt;date/time&gt;</a:t>
-            </a:r>
-            <a:endParaRPr lang="en-US" sz="1200" b="0" u="none" strike="noStrike">
-              <a:solidFill>
-                <a:srgbClr val="000000"/>
-              </a:solidFill>
-              <a:effectLst/>
-              <a:uFillTx/>
-              <a:latin typeface="Times New Roman"/>
-            </a:endParaRPr>
-          </a:p>
-        </p:txBody>
-      </p:sp>
-      <p:sp>
-        <p:nvSpPr>
-          <p:cNvPr id="36" name="PlaceHolder 4"/>
-          <p:cNvSpPr>
-            <a:spLocks noGrp="1"/>
-          </p:cNvSpPr>
-          <p:nvPr>
-            <p:ph type="ftr" idx="20"/>
-          </p:nvPr>
-        </p:nvSpPr>
-        <p:spPr>
-          <a:xfrm>
-            <a:off x="4038480" y="6356520"/>
-            <a:ext cx="4114080" cy="364320"/>
-          </a:xfrm>
-          <a:prstGeom prst="rect">
-            <a:avLst/>
-          </a:prstGeom>
-          <a:noFill/>
-          <a:ln w="0">
-            <a:noFill/>
-          </a:ln>
-        </p:spPr>
-        <p:txBody>
-          <a:bodyPr lIns="91440" tIns="45720" rIns="91440" bIns="45720" anchor="ctr">
-            <a:noAutofit/>
-          </a:bodyPr>
-          <a:lstStyle>
-            <a:lvl1pPr indent="0" algn="ctr">
-              <a:lnSpc>
-                <a:spcPct val="100000"/>
-              </a:lnSpc>
-              <a:buNone/>
-              <a:tabLst>
-                <a:tab pos="0" algn="l"/>
-              </a:tabLst>
-              <a:defRPr lang="en-US" sz="1400" b="0" u="none" strike="noStrike">
-                <a:solidFill>
-                  <a:srgbClr val="000000"/>
-                </a:solidFill>
-                <a:effectLst/>
-                <a:uFillTx/>
-                <a:latin typeface="Times New Roman"/>
-              </a:defRPr>
-            </a:lvl1pPr>
-          </a:lstStyle>
-          <a:p>
-            <a:pPr indent="0" algn="ctr">
-              <a:lnSpc>
-                <a:spcPct val="100000"/>
-              </a:lnSpc>
-              <a:buNone/>
-              <a:tabLst>
-                <a:tab pos="0" algn="l"/>
-              </a:tabLst>
-            </a:pPr>
-            <a:r>
-              <a:rPr lang="en-US" sz="1400" b="0" u="none" strike="noStrike">
-                <a:solidFill>
-                  <a:srgbClr val="000000"/>
-                </a:solidFill>
-                <a:effectLst/>
-                <a:uFillTx/>
-                <a:latin typeface="Times New Roman"/>
-              </a:rPr>
-              <a:t>&lt;footer&gt;</a:t>
-            </a:r>
-            <a:endParaRPr lang="en-US" sz="1400" b="0" u="none" strike="noStrike">
-              <a:solidFill>
-                <a:srgbClr val="000000"/>
-              </a:solidFill>
-              <a:effectLst/>
-              <a:uFillTx/>
-              <a:latin typeface="Times New Roman"/>
-            </a:endParaRPr>
-          </a:p>
-        </p:txBody>
-      </p:sp>
-      <p:sp>
-        <p:nvSpPr>
-          <p:cNvPr id="37" name="PlaceHolder 5"/>
-          <p:cNvSpPr>
-            <a:spLocks noGrp="1"/>
-          </p:cNvSpPr>
-          <p:nvPr>
-            <p:ph type="sldNum" idx="21"/>
-          </p:nvPr>
-        </p:nvSpPr>
-        <p:spPr>
-          <a:xfrm>
-            <a:off x="8610480" y="6356520"/>
-            <a:ext cx="2742480" cy="364320"/>
-          </a:xfrm>
-          <a:prstGeom prst="rect">
-            <a:avLst/>
-          </a:prstGeom>
-          <a:noFill/>
-          <a:ln w="0">
-            <a:noFill/>
-          </a:ln>
-        </p:spPr>
-        <p:txBody>
-          <a:bodyPr lIns="91440" tIns="45720" rIns="91440" bIns="45720" anchor="ctr">
-            <a:noAutofit/>
-          </a:bodyPr>
-          <a:lstStyle>
-            <a:lvl1pPr indent="0" algn="r" defTabSz="914400">
-              <a:lnSpc>
-                <a:spcPct val="100000"/>
-              </a:lnSpc>
-              <a:buNone/>
-              <a:tabLst>
-                <a:tab pos="0" algn="l"/>
-              </a:tabLst>
-              <a:defRPr lang="en-US" sz="1200" b="0" u="none" strike="noStrike">
-                <a:solidFill>
-                  <a:schemeClr val="dk1">
-                    <a:tint val="82000"/>
-                  </a:schemeClr>
-                </a:solidFill>
-                <a:effectLst/>
-                <a:uFillTx/>
-                <a:latin typeface="Aptos"/>
-              </a:defRPr>
-            </a:lvl1pPr>
-          </a:lstStyle>
-          <a:p>
-            <a:pPr indent="0" algn="r" defTabSz="914400">
-              <a:lnSpc>
-                <a:spcPct val="100000"/>
-              </a:lnSpc>
-              <a:buNone/>
-              <a:tabLst>
-                <a:tab pos="0" algn="l"/>
-              </a:tabLst>
-            </a:pPr>
-            <a:fld id="{5BBF7DDA-5B9B-4081-B278-D94D3925C75A}" type="slidenum">
-              <a:rPr lang="en-US" sz="1200" b="0" u="none" strike="noStrike">
-                <a:solidFill>
-                  <a:schemeClr val="dk1">
-                    <a:tint val="82000"/>
-                  </a:schemeClr>
-                </a:solidFill>
-                <a:effectLst/>
-                <a:uFillTx/>
-                <a:latin typeface="Aptos"/>
-              </a:rPr>
-              <a:t>&lt;number&gt;</a:t>
-            </a:fld>
-            <a:endParaRPr lang="en-US" sz="1200" b="0" u="none" strike="noStrike">
-              <a:solidFill>
-                <a:srgbClr val="000000"/>
-              </a:solidFill>
-              <a:effectLst/>
-              <a:uFillTx/>
-              <a:latin typeface="Times New Roman"/>
-            </a:endParaRPr>
-          </a:p>
-        </p:txBody>
-      </p:sp>
-    </p:spTree>
-  </p:cSld>
-</p:sldLayout>
-</file>
-
-<file path=ppt/slideLayouts/slideLayout8.xml><?xml version="1.0" encoding="utf-8"?>
-<p:sldLayout xmlns:a="http://schemas.openxmlformats.org/drawingml/2006/main" xmlns:p="http://schemas.openxmlformats.org/presentationml/2006/main" xmlns:r="http://schemas.openxmlformats.org/officeDocument/2006/relationships" xmlns:p14="http://schemas.microsoft.com/office/powerpoint/2010/main" xmlns:p15="http://schemas.microsoft.com/office/powerpoint/2012/main" xmlns:mc="http://schemas.openxmlformats.org/markup-compatibility/2006" type="blank" preserve="1">
-  <p:cSld name="Section Header">
-    <p:bg>
-      <p:bgPr>
-        <a:solidFill>
-          <a:srgbClr val="FFFFFF"/>
-        </a:solidFill>
-      </p:bgPr>
-    </p:bg>
-    <p:spTree>
-      <p:nvGrpSpPr>
-        <p:cNvPr id="1" name=""/>
-        <p:cNvGrpSpPr/>
-        <p:nvPr/>
-      </p:nvGrpSpPr>
-      <p:grpSpPr>
-        <a:xfrm>
-          <a:off x="0" y="0"/>
-          <a:ext cx="0" cy="0"/>
-          <a:chOff x="0" y="0"/>
-          <a:chExt cx="0" cy="0"/>
-        </a:xfrm>
-      </p:grpSpPr>
-      <p:sp>
-        <p:nvSpPr>
-          <p:cNvPr id="38" name="PlaceHolder 1"/>
-          <p:cNvSpPr>
-            <a:spLocks noGrp="1"/>
-          </p:cNvSpPr>
-          <p:nvPr>
-            <p:ph type="title"/>
-          </p:nvPr>
-        </p:nvSpPr>
-        <p:spPr>
-          <a:xfrm>
-            <a:off x="831960" y="1709640"/>
-            <a:ext cx="10514880" cy="2851920"/>
-          </a:xfrm>
-          <a:prstGeom prst="rect">
-            <a:avLst/>
-          </a:prstGeom>
-          <a:noFill/>
-          <a:ln w="0">
-            <a:noFill/>
-          </a:ln>
-        </p:spPr>
-        <p:txBody>
-          <a:bodyPr lIns="91440" tIns="45720" rIns="91440" bIns="45720" anchor="b">
-            <a:noAutofit/>
-          </a:bodyPr>
-          <a:lstStyle>
-            <a:lvl1pPr indent="0" algn="l" defTabSz="914400">
-              <a:lnSpc>
-                <a:spcPct val="90000"/>
-              </a:lnSpc>
-              <a:buNone/>
-              <a:tabLst>
-                <a:tab pos="0" algn="l"/>
-              </a:tabLst>
-              <a:defRPr lang="en-US" sz="6000" b="0" u="none" strike="noStrike">
-                <a:solidFill>
-                  <a:schemeClr val="dk1"/>
-                </a:solidFill>
-                <a:effectLst/>
-                <a:uFillTx/>
-                <a:latin typeface="Aptos Display"/>
-              </a:defRPr>
-            </a:lvl1pPr>
-          </a:lstStyle>
-          <a:p>
-            <a:pPr indent="0" algn="l" defTabSz="914400">
-              <a:lnSpc>
-                <a:spcPct val="90000"/>
-              </a:lnSpc>
-              <a:buNone/>
-              <a:tabLst>
-                <a:tab pos="0" algn="l"/>
-              </a:tabLst>
-            </a:pPr>
-            <a:r>
-              <a:rPr lang="en-US" sz="6000" b="0" u="none" strike="noStrike">
-                <a:solidFill>
-                  <a:schemeClr val="dk1"/>
-                </a:solidFill>
-                <a:effectLst/>
-                <a:uFillTx/>
-                <a:latin typeface="Aptos Display"/>
-              </a:rPr>
-              <a:t>Click to edit Master title style</a:t>
-            </a:r>
-            <a:endParaRPr lang="en-US" sz="6000" b="0" u="none" strike="noStrike">
-              <a:solidFill>
-                <a:schemeClr val="dk1"/>
-              </a:solidFill>
-              <a:effectLst/>
-              <a:uFillTx/>
-              <a:latin typeface="Aptos Display"/>
-            </a:endParaRPr>
-          </a:p>
-        </p:txBody>
-      </p:sp>
-      <p:sp>
-        <p:nvSpPr>
-          <p:cNvPr id="39" name="PlaceHolder 2"/>
-          <p:cNvSpPr>
-            <a:spLocks noGrp="1"/>
-          </p:cNvSpPr>
-          <p:nvPr>
-            <p:ph type="body"/>
-          </p:nvPr>
-        </p:nvSpPr>
-        <p:spPr>
-          <a:xfrm>
-            <a:off x="831960" y="4589640"/>
-            <a:ext cx="10514880" cy="1499400"/>
-          </a:xfrm>
-          <a:prstGeom prst="rect">
-            <a:avLst/>
-          </a:prstGeom>
-          <a:noFill/>
-          <a:ln w="0">
-            <a:noFill/>
-          </a:ln>
-        </p:spPr>
-        <p:txBody>
-          <a:bodyPr lIns="91440" tIns="45720" rIns="91440" bIns="45720" anchor="t">
-            <a:noAutofit/>
-          </a:bodyPr>
-          <a:lstStyle>
-            <a:lvl1pPr indent="0" algn="l" defTabSz="914400">
-              <a:lnSpc>
-                <a:spcPct val="90000"/>
-              </a:lnSpc>
-              <a:spcBef>
-                <a:spcPts val="1001"/>
-              </a:spcBef>
-              <a:buNone/>
-              <a:tabLst>
-                <a:tab pos="0" algn="l"/>
-              </a:tabLst>
-              <a:defRPr lang="en-US" sz="2400" b="0" u="none" strike="noStrike">
-                <a:solidFill>
-                  <a:schemeClr val="dk1">
-                    <a:tint val="82000"/>
-                  </a:schemeClr>
-                </a:solidFill>
-                <a:effectLst/>
-                <a:uFillTx/>
-                <a:latin typeface="Aptos"/>
-              </a:defRPr>
-            </a:lvl1pPr>
-          </a:lstStyle>
-          <a:p>
-            <a:pPr indent="0" algn="l" defTabSz="914400">
-              <a:lnSpc>
-                <a:spcPct val="90000"/>
-              </a:lnSpc>
-              <a:spcBef>
-                <a:spcPts val="1001"/>
-              </a:spcBef>
-              <a:buNone/>
-              <a:tabLst>
-                <a:tab pos="0" algn="l"/>
-              </a:tabLst>
-            </a:pPr>
-            <a:r>
-              <a:rPr lang="en-US" sz="2400" b="0" u="none" strike="noStrike">
-                <a:solidFill>
-                  <a:schemeClr val="dk1">
-                    <a:tint val="82000"/>
-                  </a:schemeClr>
-                </a:solidFill>
-                <a:effectLst/>
-                <a:uFillTx/>
-                <a:latin typeface="Aptos"/>
-              </a:rPr>
-              <a:t>Click to edit Master text styles</a:t>
-            </a:r>
-            <a:endParaRPr lang="en-US" sz="2400" b="0" u="none" strike="noStrike">
-              <a:solidFill>
-                <a:schemeClr val="dk1">
-                  <a:tint val="82000"/>
-                </a:schemeClr>
-              </a:solidFill>
-              <a:effectLst/>
-              <a:uFillTx/>
-              <a:latin typeface="Aptos"/>
-            </a:endParaRPr>
-          </a:p>
-        </p:txBody>
-      </p:sp>
-      <p:sp>
-        <p:nvSpPr>
-          <p:cNvPr id="40" name="PlaceHolder 3"/>
-          <p:cNvSpPr>
-            <a:spLocks noGrp="1"/>
-          </p:cNvSpPr>
-          <p:nvPr>
-            <p:ph type="dt" idx="22"/>
-          </p:nvPr>
-        </p:nvSpPr>
-        <p:spPr>
-          <a:xfrm>
-            <a:off x="838080" y="6356520"/>
-            <a:ext cx="2742480" cy="364320"/>
-          </a:xfrm>
-          <a:prstGeom prst="rect">
-            <a:avLst/>
-          </a:prstGeom>
-          <a:noFill/>
-          <a:ln w="0">
-            <a:noFill/>
-          </a:ln>
-        </p:spPr>
-        <p:txBody>
-          <a:bodyPr lIns="91440" tIns="45720" rIns="91440" bIns="45720" anchor="ctr">
-            <a:noAutofit/>
-          </a:bodyPr>
-          <a:lstStyle>
-            <a:lvl1pPr indent="0" algn="l" defTabSz="914400">
-              <a:lnSpc>
-                <a:spcPct val="100000"/>
-              </a:lnSpc>
-              <a:buNone/>
-              <a:tabLst>
-                <a:tab pos="0" algn="l"/>
-              </a:tabLst>
-              <a:defRPr lang="en-US" sz="1200" b="0" u="none" strike="noStrike">
-                <a:solidFill>
-                  <a:schemeClr val="dk1">
-                    <a:tint val="82000"/>
-                  </a:schemeClr>
-                </a:solidFill>
-                <a:effectLst/>
-                <a:uFillTx/>
-                <a:latin typeface="Aptos"/>
-              </a:defRPr>
-            </a:lvl1pPr>
-          </a:lstStyle>
-          <a:p>
-            <a:pPr indent="0" algn="l" defTabSz="914400">
-              <a:lnSpc>
-                <a:spcPct val="100000"/>
-              </a:lnSpc>
-              <a:buNone/>
-              <a:tabLst>
-                <a:tab pos="0" algn="l"/>
-              </a:tabLst>
-            </a:pPr>
-            <a:r>
-              <a:rPr lang="en-US" sz="1200" b="0" u="none" strike="noStrike">
-                <a:solidFill>
-                  <a:schemeClr val="dk1">
-                    <a:tint val="82000"/>
-                  </a:schemeClr>
-                </a:solidFill>
-                <a:effectLst/>
-                <a:uFillTx/>
-                <a:latin typeface="Aptos"/>
-              </a:rPr>
-              <a:t>&lt;date/time&gt;</a:t>
-            </a:r>
-            <a:endParaRPr lang="en-US" sz="1200" b="0" u="none" strike="noStrike">
-              <a:solidFill>
-                <a:srgbClr val="000000"/>
-              </a:solidFill>
-              <a:effectLst/>
-              <a:uFillTx/>
-              <a:latin typeface="Times New Roman"/>
-            </a:endParaRPr>
-          </a:p>
-        </p:txBody>
-      </p:sp>
-      <p:sp>
-        <p:nvSpPr>
-          <p:cNvPr id="41" name="PlaceHolder 4"/>
-          <p:cNvSpPr>
-            <a:spLocks noGrp="1"/>
-          </p:cNvSpPr>
-          <p:nvPr>
-            <p:ph type="ftr" idx="23"/>
-          </p:nvPr>
-        </p:nvSpPr>
-        <p:spPr>
-          <a:xfrm>
-            <a:off x="4038480" y="6356520"/>
-            <a:ext cx="4114080" cy="364320"/>
-          </a:xfrm>
-          <a:prstGeom prst="rect">
-            <a:avLst/>
-          </a:prstGeom>
-          <a:noFill/>
-          <a:ln w="0">
-            <a:noFill/>
-          </a:ln>
-        </p:spPr>
-        <p:txBody>
-          <a:bodyPr lIns="91440" tIns="45720" rIns="91440" bIns="45720" anchor="ctr">
-            <a:noAutofit/>
-          </a:bodyPr>
-          <a:lstStyle>
-            <a:lvl1pPr indent="0" algn="ctr">
-              <a:lnSpc>
-                <a:spcPct val="100000"/>
-              </a:lnSpc>
-              <a:buNone/>
-              <a:tabLst>
-                <a:tab pos="0" algn="l"/>
-              </a:tabLst>
-              <a:defRPr lang="en-US" sz="1400" b="0" u="none" strike="noStrike">
-                <a:solidFill>
-                  <a:srgbClr val="000000"/>
-                </a:solidFill>
-                <a:effectLst/>
-                <a:uFillTx/>
-                <a:latin typeface="Times New Roman"/>
-              </a:defRPr>
-            </a:lvl1pPr>
-          </a:lstStyle>
-          <a:p>
-            <a:pPr indent="0" algn="ctr">
-              <a:lnSpc>
-                <a:spcPct val="100000"/>
-              </a:lnSpc>
-              <a:buNone/>
-              <a:tabLst>
-                <a:tab pos="0" algn="l"/>
-              </a:tabLst>
-            </a:pPr>
-            <a:r>
-              <a:rPr lang="en-US" sz="1400" b="0" u="none" strike="noStrike">
-                <a:solidFill>
-                  <a:srgbClr val="000000"/>
-                </a:solidFill>
-                <a:effectLst/>
-                <a:uFillTx/>
-                <a:latin typeface="Times New Roman"/>
-              </a:rPr>
-              <a:t>&lt;footer&gt;</a:t>
-            </a:r>
-            <a:endParaRPr lang="en-US" sz="1400" b="0" u="none" strike="noStrike">
-              <a:solidFill>
-                <a:srgbClr val="000000"/>
-              </a:solidFill>
-              <a:effectLst/>
-              <a:uFillTx/>
-              <a:latin typeface="Times New Roman"/>
-            </a:endParaRPr>
-          </a:p>
-        </p:txBody>
-      </p:sp>
-      <p:sp>
-        <p:nvSpPr>
-          <p:cNvPr id="42" name="PlaceHolder 5"/>
-          <p:cNvSpPr>
-            <a:spLocks noGrp="1"/>
-          </p:cNvSpPr>
-          <p:nvPr>
-            <p:ph type="sldNum" idx="24"/>
-          </p:nvPr>
-        </p:nvSpPr>
-        <p:spPr>
-          <a:xfrm>
-            <a:off x="8610480" y="6356520"/>
-            <a:ext cx="2742480" cy="364320"/>
-          </a:xfrm>
-          <a:prstGeom prst="rect">
-            <a:avLst/>
-          </a:prstGeom>
-          <a:noFill/>
-          <a:ln w="0">
-            <a:noFill/>
-          </a:ln>
-        </p:spPr>
-        <p:txBody>
-          <a:bodyPr lIns="91440" tIns="45720" rIns="91440" bIns="45720" anchor="ctr">
-            <a:noAutofit/>
-          </a:bodyPr>
-          <a:lstStyle>
-            <a:lvl1pPr indent="0" algn="r" defTabSz="914400">
-              <a:lnSpc>
-                <a:spcPct val="100000"/>
-              </a:lnSpc>
-              <a:buNone/>
-              <a:tabLst>
-                <a:tab pos="0" algn="l"/>
-              </a:tabLst>
-              <a:defRPr lang="en-US" sz="1200" b="0" u="none" strike="noStrike">
-                <a:solidFill>
-                  <a:schemeClr val="dk1">
-                    <a:tint val="82000"/>
-                  </a:schemeClr>
-                </a:solidFill>
-                <a:effectLst/>
-                <a:uFillTx/>
-                <a:latin typeface="Aptos"/>
-              </a:defRPr>
-            </a:lvl1pPr>
-          </a:lstStyle>
-          <a:p>
-            <a:pPr indent="0" algn="r" defTabSz="914400">
-              <a:lnSpc>
-                <a:spcPct val="100000"/>
-              </a:lnSpc>
-              <a:buNone/>
-              <a:tabLst>
-                <a:tab pos="0" algn="l"/>
-              </a:tabLst>
-            </a:pPr>
-            <a:fld id="{EA348D3D-D91D-47BE-B648-72AF9DCB7CF2}" type="slidenum">
-              <a:rPr lang="en-US" sz="1200" b="0" u="none" strike="noStrike">
-                <a:solidFill>
-                  <a:schemeClr val="dk1">
-                    <a:tint val="82000"/>
-                  </a:schemeClr>
-                </a:solidFill>
-                <a:effectLst/>
-                <a:uFillTx/>
-                <a:latin typeface="Aptos"/>
-              </a:rPr>
-              <a:t>&lt;number&gt;</a:t>
-            </a:fld>
-            <a:endParaRPr lang="en-US" sz="1200" b="0" u="none" strike="noStrike">
-              <a:solidFill>
-                <a:srgbClr val="000000"/>
-              </a:solidFill>
-              <a:effectLst/>
-              <a:uFillTx/>
-              <a:latin typeface="Times New Roman"/>
-            </a:endParaRPr>
-          </a:p>
-        </p:txBody>
-      </p:sp>
-    </p:spTree>
-  </p:cSld>
-</p:sldLayout>
-</file>
-
-<file path=ppt/slideLayouts/slideLayout9.xml><?xml version="1.0" encoding="utf-8"?>
-<p:sldLayout xmlns:a="http://schemas.openxmlformats.org/drawingml/2006/main" xmlns:p="http://schemas.openxmlformats.org/presentationml/2006/main" xmlns:r="http://schemas.openxmlformats.org/officeDocument/2006/relationships" xmlns:p14="http://schemas.microsoft.com/office/powerpoint/2010/main" xmlns:p15="http://schemas.microsoft.com/office/powerpoint/2012/main" xmlns:mc="http://schemas.openxmlformats.org/markup-compatibility/2006" type="twoObj" preserve="1">
-  <p:cSld name="Two Content">
-    <p:bg>
-      <p:bgPr>
-        <a:solidFill>
-          <a:srgbClr val="FFFFFF"/>
-        </a:solidFill>
-      </p:bgPr>
-    </p:bg>
-    <p:spTree>
-      <p:nvGrpSpPr>
-        <p:cNvPr id="1" name=""/>
-        <p:cNvGrpSpPr/>
-        <p:nvPr/>
-      </p:nvGrpSpPr>
-      <p:grpSpPr>
-        <a:xfrm>
-          <a:off x="0" y="0"/>
-          <a:ext cx="0" cy="0"/>
-          <a:chOff x="0" y="0"/>
-          <a:chExt cx="0" cy="0"/>
-        </a:xfrm>
-      </p:grpSpPr>
-      <p:sp>
-        <p:nvSpPr>
-          <p:cNvPr id="43" name="PlaceHolder 1"/>
-          <p:cNvSpPr>
-            <a:spLocks noGrp="1"/>
-          </p:cNvSpPr>
-          <p:nvPr>
-            <p:ph type="title"/>
-          </p:nvPr>
-        </p:nvSpPr>
-        <p:spPr>
-          <a:xfrm>
-            <a:off x="838080" y="365040"/>
-            <a:ext cx="10514880" cy="1324800"/>
-          </a:xfrm>
-          <a:prstGeom prst="rect">
-            <a:avLst/>
-          </a:prstGeom>
-          <a:noFill/>
-          <a:ln w="0">
-            <a:noFill/>
-          </a:ln>
-        </p:spPr>
-        <p:txBody>
-          <a:bodyPr lIns="91440" tIns="45720" rIns="91440" bIns="45720" anchor="ctr">
-            <a:noAutofit/>
-          </a:bodyPr>
-          <a:lstStyle>
-            <a:lvl1pPr indent="0" algn="l" defTabSz="914400">
-              <a:lnSpc>
-                <a:spcPct val="90000"/>
-              </a:lnSpc>
-              <a:buNone/>
-              <a:tabLst>
-                <a:tab pos="0" algn="l"/>
-              </a:tabLst>
-              <a:defRPr lang="en-US" sz="4400" b="0" u="none" strike="noStrike">
-                <a:solidFill>
-                  <a:schemeClr val="dk1"/>
-                </a:solidFill>
-                <a:effectLst/>
-                <a:uFillTx/>
-                <a:latin typeface="Aptos Display"/>
-              </a:defRPr>
-            </a:lvl1pPr>
-          </a:lstStyle>
-          <a:p>
-            <a:pPr indent="0" algn="l" defTabSz="914400">
-              <a:lnSpc>
-                <a:spcPct val="90000"/>
-              </a:lnSpc>
-              <a:buNone/>
-              <a:tabLst>
-                <a:tab pos="0" algn="l"/>
-              </a:tabLst>
-            </a:pPr>
-            <a:r>
-              <a:rPr lang="en-US" sz="4400" b="0" u="none" strike="noStrike">
-                <a:solidFill>
-                  <a:schemeClr val="dk1"/>
-                </a:solidFill>
-                <a:effectLst/>
-                <a:uFillTx/>
-                <a:latin typeface="Aptos Display"/>
-              </a:rPr>
-              <a:t>Click to edit Master title style</a:t>
-            </a:r>
-            <a:endParaRPr lang="en-US" sz="4400" b="0" u="none" strike="noStrike">
-              <a:solidFill>
-                <a:schemeClr val="dk1"/>
-              </a:solidFill>
-              <a:effectLst/>
-              <a:uFillTx/>
-              <a:latin typeface="Aptos Display"/>
-            </a:endParaRPr>
-          </a:p>
-        </p:txBody>
-      </p:sp>
-      <p:sp>
-        <p:nvSpPr>
-          <p:cNvPr id="44" name="PlaceHolder 2"/>
-          <p:cNvSpPr>
-            <a:spLocks noGrp="1"/>
-          </p:cNvSpPr>
-          <p:nvPr>
-            <p:ph type="body"/>
-          </p:nvPr>
-        </p:nvSpPr>
-        <p:spPr>
-          <a:xfrm>
-            <a:off x="838080" y="1825560"/>
-            <a:ext cx="5180760" cy="4350600"/>
-          </a:xfrm>
-          <a:prstGeom prst="rect">
-            <a:avLst/>
-          </a:prstGeom>
-          <a:noFill/>
-          <a:ln w="0">
-            <a:noFill/>
-          </a:ln>
-        </p:spPr>
-        <p:txBody>
-          <a:bodyPr lIns="91440" tIns="45720" rIns="91440" bIns="45720" anchor="t">
-            <a:noAutofit/>
-          </a:bodyPr>
-          <a:lstStyle>
-            <a:lvl1pPr algn="l" defTabSz="914400">
-              <a:lnSpc>
-                <a:spcPct val="90000"/>
-              </a:lnSpc>
-              <a:spcBef>
-                <a:spcPts val="1001"/>
-              </a:spcBef>
-              <a:buClr>
-                <a:srgbClr val="000000"/>
-              </a:buClr>
-              <a:buFont typeface="Arial"/>
-              <a:buChar char="•"/>
-              <a:defRPr lang="en-US" sz="2800" b="0" u="none" strike="noStrike">
-                <a:solidFill>
-                  <a:schemeClr val="dk1"/>
-                </a:solidFill>
-                <a:effectLst/>
-                <a:uFillTx/>
-                <a:latin typeface="Aptos"/>
-              </a:defRPr>
-            </a:lvl1pPr>
-            <a:lvl2pPr lvl="1" algn="l" defTabSz="914400">
-              <a:lnSpc>
-                <a:spcPct val="90000"/>
-              </a:lnSpc>
-              <a:spcBef>
-                <a:spcPts val="499"/>
-              </a:spcBef>
-              <a:buClr>
-                <a:srgbClr val="000000"/>
-              </a:buClr>
-              <a:buFont typeface="Arial"/>
-              <a:buChar char="•"/>
-              <a:defRPr lang="en-US" sz="2400" b="0" u="none" strike="noStrike">
-                <a:solidFill>
-                  <a:schemeClr val="dk1"/>
-                </a:solidFill>
-                <a:effectLst/>
-                <a:uFillTx/>
-                <a:latin typeface="Aptos"/>
-              </a:defRPr>
-            </a:lvl2pPr>
-            <a:lvl3pPr lvl="2" algn="l" defTabSz="914400">
-              <a:lnSpc>
-                <a:spcPct val="90000"/>
-              </a:lnSpc>
-              <a:spcBef>
-                <a:spcPts val="499"/>
-              </a:spcBef>
-              <a:buClr>
-                <a:srgbClr val="000000"/>
-              </a:buClr>
-              <a:buFont typeface="Arial"/>
-              <a:buChar char="•"/>
-              <a:defRPr lang="en-US" sz="2000" b="0" u="none" strike="noStrike">
-                <a:solidFill>
-                  <a:schemeClr val="dk1"/>
-                </a:solidFill>
-                <a:effectLst/>
-                <a:uFillTx/>
-                <a:latin typeface="Aptos"/>
-              </a:defRPr>
-            </a:lvl3pPr>
-            <a:lvl4pPr lvl="3" algn="l" defTabSz="914400">
-              <a:lnSpc>
-                <a:spcPct val="90000"/>
-              </a:lnSpc>
-              <a:spcBef>
-                <a:spcPts val="499"/>
-              </a:spcBef>
-              <a:buClr>
-                <a:srgbClr val="000000"/>
-              </a:buClr>
-              <a:buFont typeface="Arial"/>
-              <a:buChar char="•"/>
-              <a:defRPr lang="en-US" sz="1800" b="0" u="none" strike="noStrike">
-                <a:solidFill>
-                  <a:schemeClr val="dk1"/>
-                </a:solidFill>
-                <a:effectLst/>
-                <a:uFillTx/>
-                <a:latin typeface="Aptos"/>
-              </a:defRPr>
-            </a:lvl4pPr>
-            <a:lvl5pPr lvl="4" algn="l" defTabSz="914400">
-              <a:lnSpc>
-                <a:spcPct val="90000"/>
-              </a:lnSpc>
-              <a:spcBef>
-                <a:spcPts val="499"/>
-              </a:spcBef>
-              <a:buClr>
-                <a:srgbClr val="000000"/>
-              </a:buClr>
-              <a:buFont typeface="Arial"/>
-              <a:buChar char="•"/>
-              <a:defRPr lang="en-US" sz="1800" b="0" u="none" strike="noStrike">
-                <a:solidFill>
-                  <a:schemeClr val="dk1"/>
-                </a:solidFill>
-                <a:effectLst/>
-                <a:uFillTx/>
-                <a:latin typeface="Aptos"/>
-              </a:defRPr>
-            </a:lvl5pPr>
-          </a:lstStyle>
-          <a:p>
-            <a:pPr marL="228600" indent="-228600" algn="l" defTabSz="914400">
-              <a:lnSpc>
-                <a:spcPct val="90000"/>
-              </a:lnSpc>
-              <a:spcBef>
-                <a:spcPts val="1001"/>
-              </a:spcBef>
-              <a:buClr>
-                <a:srgbClr val="000000"/>
-              </a:buClr>
-              <a:buFont typeface="Arial"/>
-              <a:buChar char="•"/>
-            </a:pPr>
-            <a:r>
-              <a:rPr lang="en-US" sz="2800" b="0" u="none" strike="noStrike">
-                <a:solidFill>
-                  <a:schemeClr val="dk1"/>
-                </a:solidFill>
-                <a:effectLst/>
-                <a:uFillTx/>
-                <a:latin typeface="Aptos"/>
-              </a:rPr>
-              <a:t>Click to edit Master text styles</a:t>
-            </a:r>
-            <a:endParaRPr lang="en-US" sz="2800" b="0" u="none" strike="noStrike">
-              <a:solidFill>
-                <a:schemeClr val="dk1"/>
-              </a:solidFill>
-              <a:effectLst/>
-              <a:uFillTx/>
-              <a:latin typeface="Aptos"/>
-            </a:endParaRPr>
-          </a:p>
-          <a:p>
-            <a:pPr marL="685800" lvl="1" indent="-228600" algn="l" defTabSz="914400">
-              <a:lnSpc>
-                <a:spcPct val="90000"/>
-              </a:lnSpc>
-              <a:spcBef>
-                <a:spcPts val="499"/>
-              </a:spcBef>
-              <a:buClr>
-                <a:srgbClr val="000000"/>
-              </a:buClr>
-              <a:buFont typeface="Arial"/>
-              <a:buChar char="•"/>
-            </a:pPr>
-            <a:r>
-              <a:rPr lang="en-US" sz="2400" b="0" u="none" strike="noStrike">
-                <a:solidFill>
-                  <a:schemeClr val="dk1"/>
-                </a:solidFill>
-                <a:effectLst/>
-                <a:uFillTx/>
-                <a:latin typeface="Aptos"/>
-              </a:rPr>
-              <a:t>Second level</a:t>
-            </a:r>
-            <a:endParaRPr lang="en-US" sz="2400" b="0" u="none" strike="noStrike">
-              <a:solidFill>
-                <a:schemeClr val="dk1"/>
-              </a:solidFill>
-              <a:effectLst/>
-              <a:uFillTx/>
-              <a:latin typeface="Aptos"/>
-            </a:endParaRPr>
-          </a:p>
-          <a:p>
-            <a:pPr marL="1143000" lvl="2" indent="-228600" algn="l" defTabSz="914400">
-              <a:lnSpc>
-                <a:spcPct val="90000"/>
-              </a:lnSpc>
-              <a:spcBef>
-                <a:spcPts val="499"/>
-              </a:spcBef>
-              <a:buClr>
-                <a:srgbClr val="000000"/>
-              </a:buClr>
-              <a:buFont typeface="Arial"/>
-              <a:buChar char="•"/>
-            </a:pPr>
-            <a:r>
-              <a:rPr lang="en-US" sz="2000" b="0" u="none" strike="noStrike">
-                <a:solidFill>
-                  <a:schemeClr val="dk1"/>
-                </a:solidFill>
-                <a:effectLst/>
-                <a:uFillTx/>
-                <a:latin typeface="Aptos"/>
-              </a:rPr>
-              <a:t>Third level</a:t>
-            </a:r>
-            <a:endParaRPr lang="en-US" sz="2000" b="0" u="none" strike="noStrike">
-              <a:solidFill>
-                <a:schemeClr val="dk1"/>
-              </a:solidFill>
-              <a:effectLst/>
-              <a:uFillTx/>
-              <a:latin typeface="Aptos"/>
-            </a:endParaRPr>
-          </a:p>
-          <a:p>
-            <a:pPr marL="1600200" lvl="3" indent="-228600" algn="l" defTabSz="914400">
-              <a:lnSpc>
-                <a:spcPct val="90000"/>
-              </a:lnSpc>
-              <a:spcBef>
-                <a:spcPts val="499"/>
-              </a:spcBef>
-              <a:buClr>
-                <a:srgbClr val="000000"/>
-              </a:buClr>
-              <a:buFont typeface="Arial"/>
-              <a:buChar char="•"/>
-            </a:pPr>
-            <a:r>
-              <a:rPr lang="en-US" sz="1800" b="0" u="none" strike="noStrike">
-                <a:solidFill>
-                  <a:schemeClr val="dk1"/>
-                </a:solidFill>
-                <a:effectLst/>
-                <a:uFillTx/>
-                <a:latin typeface="Aptos"/>
-              </a:rPr>
-              <a:t>Fourth level</a:t>
-            </a:r>
-            <a:endParaRPr lang="en-US" sz="1800" b="0" u="none" strike="noStrike">
-              <a:solidFill>
-                <a:schemeClr val="dk1"/>
-              </a:solidFill>
-              <a:effectLst/>
-              <a:uFillTx/>
-              <a:latin typeface="Aptos"/>
-            </a:endParaRPr>
-          </a:p>
-          <a:p>
-            <a:pPr marL="2057400" lvl="4" indent="-228600" algn="l" defTabSz="914400">
-              <a:lnSpc>
-                <a:spcPct val="90000"/>
-              </a:lnSpc>
-              <a:spcBef>
-                <a:spcPts val="499"/>
-              </a:spcBef>
-              <a:buClr>
-                <a:srgbClr val="000000"/>
-              </a:buClr>
-              <a:buFont typeface="Arial"/>
-              <a:buChar char="•"/>
-            </a:pPr>
-            <a:r>
-              <a:rPr lang="en-US" sz="1800" b="0" u="none" strike="noStrike">
-                <a:solidFill>
-                  <a:schemeClr val="dk1"/>
-                </a:solidFill>
-                <a:effectLst/>
-                <a:uFillTx/>
-                <a:latin typeface="Aptos"/>
-              </a:rPr>
-              <a:t>Fifth level</a:t>
-            </a:r>
-            <a:endParaRPr lang="en-US" sz="1800" b="0" u="none" strike="noStrike">
-              <a:solidFill>
-                <a:schemeClr val="dk1"/>
-              </a:solidFill>
-              <a:effectLst/>
-              <a:uFillTx/>
-              <a:latin typeface="Aptos"/>
-            </a:endParaRPr>
-          </a:p>
-        </p:txBody>
-      </p:sp>
-      <p:sp>
-        <p:nvSpPr>
-          <p:cNvPr id="45" name="PlaceHolder 3"/>
-          <p:cNvSpPr>
-            <a:spLocks noGrp="1"/>
-          </p:cNvSpPr>
-          <p:nvPr>
-            <p:ph type="body"/>
-          </p:nvPr>
-        </p:nvSpPr>
-        <p:spPr>
-          <a:xfrm>
-            <a:off x="6172200" y="1825560"/>
-            <a:ext cx="5180760" cy="4350600"/>
-          </a:xfrm>
-          <a:prstGeom prst="rect">
-            <a:avLst/>
-          </a:prstGeom>
-          <a:noFill/>
-          <a:ln w="0">
-            <a:noFill/>
-          </a:ln>
-        </p:spPr>
-        <p:txBody>
-          <a:bodyPr lIns="91440" tIns="45720" rIns="91440" bIns="45720" anchor="t">
-            <a:noAutofit/>
-          </a:bodyPr>
-          <a:lstStyle>
-            <a:lvl1pPr algn="l" defTabSz="914400">
-              <a:lnSpc>
-                <a:spcPct val="90000"/>
-              </a:lnSpc>
-              <a:spcBef>
-                <a:spcPts val="1001"/>
-              </a:spcBef>
-              <a:buClr>
-                <a:srgbClr val="000000"/>
-              </a:buClr>
-              <a:buFont typeface="Arial"/>
-              <a:buChar char="•"/>
-              <a:defRPr lang="en-US" sz="2800" b="0" u="none" strike="noStrike">
-                <a:solidFill>
-                  <a:schemeClr val="dk1"/>
-                </a:solidFill>
-                <a:effectLst/>
-                <a:uFillTx/>
-                <a:latin typeface="Aptos"/>
-              </a:defRPr>
-            </a:lvl1pPr>
-            <a:lvl2pPr lvl="1" algn="l" defTabSz="914400">
-              <a:lnSpc>
-                <a:spcPct val="90000"/>
-              </a:lnSpc>
-              <a:spcBef>
-                <a:spcPts val="499"/>
-              </a:spcBef>
-              <a:buClr>
-                <a:srgbClr val="000000"/>
-              </a:buClr>
-              <a:buFont typeface="Arial"/>
-              <a:buChar char="•"/>
-              <a:defRPr lang="en-US" sz="2400" b="0" u="none" strike="noStrike">
-                <a:solidFill>
-                  <a:schemeClr val="dk1"/>
-                </a:solidFill>
-                <a:effectLst/>
-                <a:uFillTx/>
-                <a:latin typeface="Aptos"/>
-              </a:defRPr>
-            </a:lvl2pPr>
-            <a:lvl3pPr lvl="2" algn="l" defTabSz="914400">
-              <a:lnSpc>
-                <a:spcPct val="90000"/>
-              </a:lnSpc>
-              <a:spcBef>
-                <a:spcPts val="499"/>
-              </a:spcBef>
-              <a:buClr>
-                <a:srgbClr val="000000"/>
-              </a:buClr>
-              <a:buFont typeface="Arial"/>
-              <a:buChar char="•"/>
-              <a:defRPr lang="en-US" sz="2000" b="0" u="none" strike="noStrike">
-                <a:solidFill>
-                  <a:schemeClr val="dk1"/>
-                </a:solidFill>
-                <a:effectLst/>
-                <a:uFillTx/>
-                <a:latin typeface="Aptos"/>
-              </a:defRPr>
-            </a:lvl3pPr>
-            <a:lvl4pPr lvl="3" algn="l" defTabSz="914400">
-              <a:lnSpc>
-                <a:spcPct val="90000"/>
-              </a:lnSpc>
-              <a:spcBef>
-                <a:spcPts val="499"/>
-              </a:spcBef>
-              <a:buClr>
-                <a:srgbClr val="000000"/>
-              </a:buClr>
-              <a:buFont typeface="Arial"/>
-              <a:buChar char="•"/>
-              <a:defRPr lang="en-US" sz="1800" b="0" u="none" strike="noStrike">
-                <a:solidFill>
-                  <a:schemeClr val="dk1"/>
-                </a:solidFill>
-                <a:effectLst/>
-                <a:uFillTx/>
-                <a:latin typeface="Aptos"/>
-              </a:defRPr>
-            </a:lvl4pPr>
-            <a:lvl5pPr lvl="4" algn="l" defTabSz="914400">
-              <a:lnSpc>
-                <a:spcPct val="90000"/>
-              </a:lnSpc>
-              <a:spcBef>
-                <a:spcPts val="499"/>
-              </a:spcBef>
-              <a:buClr>
-                <a:srgbClr val="000000"/>
-              </a:buClr>
-              <a:buFont typeface="Arial"/>
-              <a:buChar char="•"/>
-              <a:defRPr lang="en-US" sz="1800" b="0" u="none" strike="noStrike">
-                <a:solidFill>
-                  <a:schemeClr val="dk1"/>
-                </a:solidFill>
-                <a:effectLst/>
-                <a:uFillTx/>
-                <a:latin typeface="Aptos"/>
-              </a:defRPr>
-            </a:lvl5pPr>
-          </a:lstStyle>
-          <a:p>
-            <a:pPr marL="228600" indent="-228600" algn="l" defTabSz="914400">
-              <a:lnSpc>
-                <a:spcPct val="90000"/>
-              </a:lnSpc>
-              <a:spcBef>
-                <a:spcPts val="1001"/>
-              </a:spcBef>
-              <a:buClr>
-                <a:srgbClr val="000000"/>
-              </a:buClr>
-              <a:buFont typeface="Arial"/>
-              <a:buChar char="•"/>
-            </a:pPr>
-            <a:r>
-              <a:rPr lang="en-US" sz="2800" b="0" u="none" strike="noStrike">
-                <a:solidFill>
-                  <a:schemeClr val="dk1"/>
-                </a:solidFill>
-                <a:effectLst/>
-                <a:uFillTx/>
-                <a:latin typeface="Aptos"/>
-              </a:rPr>
-              <a:t>Click to edit Master text styles</a:t>
-            </a:r>
-            <a:endParaRPr lang="en-US" sz="2800" b="0" u="none" strike="noStrike">
-              <a:solidFill>
-                <a:schemeClr val="dk1"/>
-              </a:solidFill>
-              <a:effectLst/>
-              <a:uFillTx/>
-              <a:latin typeface="Aptos"/>
-            </a:endParaRPr>
-          </a:p>
-          <a:p>
-            <a:pPr marL="685800" lvl="1" indent="-228600" algn="l" defTabSz="914400">
-              <a:lnSpc>
-                <a:spcPct val="90000"/>
-              </a:lnSpc>
-              <a:spcBef>
-                <a:spcPts val="499"/>
-              </a:spcBef>
-              <a:buClr>
-                <a:srgbClr val="000000"/>
-              </a:buClr>
-              <a:buFont typeface="Arial"/>
-              <a:buChar char="•"/>
-            </a:pPr>
-            <a:r>
-              <a:rPr lang="en-US" sz="2400" b="0" u="none" strike="noStrike">
-                <a:solidFill>
-                  <a:schemeClr val="dk1"/>
-                </a:solidFill>
-                <a:effectLst/>
-                <a:uFillTx/>
-                <a:latin typeface="Aptos"/>
-              </a:rPr>
-              <a:t>Second level</a:t>
-            </a:r>
-            <a:endParaRPr lang="en-US" sz="2400" b="0" u="none" strike="noStrike">
-              <a:solidFill>
-                <a:schemeClr val="dk1"/>
-              </a:solidFill>
-              <a:effectLst/>
-              <a:uFillTx/>
-              <a:latin typeface="Aptos"/>
-            </a:endParaRPr>
-          </a:p>
-          <a:p>
-            <a:pPr marL="1143000" lvl="2" indent="-228600" algn="l" defTabSz="914400">
-              <a:lnSpc>
-                <a:spcPct val="90000"/>
-              </a:lnSpc>
-              <a:spcBef>
-                <a:spcPts val="499"/>
-              </a:spcBef>
-              <a:buClr>
-                <a:srgbClr val="000000"/>
-              </a:buClr>
-              <a:buFont typeface="Arial"/>
-              <a:buChar char="•"/>
-            </a:pPr>
-            <a:r>
-              <a:rPr lang="en-US" sz="2000" b="0" u="none" strike="noStrike">
-                <a:solidFill>
-                  <a:schemeClr val="dk1"/>
-                </a:solidFill>
-                <a:effectLst/>
-                <a:uFillTx/>
-                <a:latin typeface="Aptos"/>
-              </a:rPr>
-              <a:t>Third level</a:t>
-            </a:r>
-            <a:endParaRPr lang="en-US" sz="2000" b="0" u="none" strike="noStrike">
-              <a:solidFill>
-                <a:schemeClr val="dk1"/>
-              </a:solidFill>
-              <a:effectLst/>
-              <a:uFillTx/>
-              <a:latin typeface="Aptos"/>
-            </a:endParaRPr>
-          </a:p>
-          <a:p>
-            <a:pPr marL="1600200" lvl="3" indent="-228600" algn="l" defTabSz="914400">
-              <a:lnSpc>
-                <a:spcPct val="90000"/>
-              </a:lnSpc>
-              <a:spcBef>
-                <a:spcPts val="499"/>
-              </a:spcBef>
-              <a:buClr>
-                <a:srgbClr val="000000"/>
-              </a:buClr>
-              <a:buFont typeface="Arial"/>
-              <a:buChar char="•"/>
-            </a:pPr>
-            <a:r>
-              <a:rPr lang="en-US" sz="1800" b="0" u="none" strike="noStrike">
-                <a:solidFill>
-                  <a:schemeClr val="dk1"/>
-                </a:solidFill>
-                <a:effectLst/>
-                <a:uFillTx/>
-                <a:latin typeface="Aptos"/>
-              </a:rPr>
-              <a:t>Fourth level</a:t>
-            </a:r>
-            <a:endParaRPr lang="en-US" sz="1800" b="0" u="none" strike="noStrike">
-              <a:solidFill>
-                <a:schemeClr val="dk1"/>
-              </a:solidFill>
-              <a:effectLst/>
-              <a:uFillTx/>
-              <a:latin typeface="Aptos"/>
-            </a:endParaRPr>
-          </a:p>
-          <a:p>
-            <a:pPr marL="2057400" lvl="4" indent="-228600" algn="l" defTabSz="914400">
-              <a:lnSpc>
-                <a:spcPct val="90000"/>
-              </a:lnSpc>
-              <a:spcBef>
-                <a:spcPts val="499"/>
-              </a:spcBef>
-              <a:buClr>
-                <a:srgbClr val="000000"/>
-              </a:buClr>
-              <a:buFont typeface="Arial"/>
-              <a:buChar char="•"/>
-            </a:pPr>
-            <a:r>
-              <a:rPr lang="en-US" sz="1800" b="0" u="none" strike="noStrike">
-                <a:solidFill>
-                  <a:schemeClr val="dk1"/>
-                </a:solidFill>
-                <a:effectLst/>
-                <a:uFillTx/>
-                <a:latin typeface="Aptos"/>
-              </a:rPr>
-              <a:t>Fifth level</a:t>
-            </a:r>
-            <a:endParaRPr lang="en-US" sz="1800" b="0" u="none" strike="noStrike">
-              <a:solidFill>
-                <a:schemeClr val="dk1"/>
-              </a:solidFill>
-              <a:effectLst/>
-              <a:uFillTx/>
-              <a:latin typeface="Aptos"/>
-            </a:endParaRPr>
-          </a:p>
-        </p:txBody>
-      </p:sp>
-      <p:sp>
-        <p:nvSpPr>
-          <p:cNvPr id="46" name="PlaceHolder 4"/>
-          <p:cNvSpPr>
-            <a:spLocks noGrp="1"/>
-          </p:cNvSpPr>
-          <p:nvPr>
-            <p:ph type="dt" idx="25"/>
-          </p:nvPr>
-        </p:nvSpPr>
-        <p:spPr>
-          <a:xfrm>
-            <a:off x="838080" y="6356520"/>
-            <a:ext cx="2742480" cy="364320"/>
-          </a:xfrm>
-          <a:prstGeom prst="rect">
-            <a:avLst/>
-          </a:prstGeom>
-          <a:noFill/>
-          <a:ln w="0">
-            <a:noFill/>
-          </a:ln>
-        </p:spPr>
-        <p:txBody>
-          <a:bodyPr lIns="91440" tIns="45720" rIns="91440" bIns="45720" anchor="ctr">
-            <a:noAutofit/>
-          </a:bodyPr>
-          <a:lstStyle>
-            <a:lvl1pPr indent="0" algn="l" defTabSz="914400">
-              <a:lnSpc>
-                <a:spcPct val="100000"/>
-              </a:lnSpc>
-              <a:buNone/>
-              <a:tabLst>
-                <a:tab pos="0" algn="l"/>
-              </a:tabLst>
-              <a:defRPr lang="en-US" sz="1200" b="0" u="none" strike="noStrike">
-                <a:solidFill>
-                  <a:schemeClr val="dk1">
-                    <a:tint val="82000"/>
-                  </a:schemeClr>
-                </a:solidFill>
-                <a:effectLst/>
-                <a:uFillTx/>
-                <a:latin typeface="Aptos"/>
-              </a:defRPr>
-            </a:lvl1pPr>
-          </a:lstStyle>
-          <a:p>
-            <a:pPr indent="0" algn="l" defTabSz="914400">
-              <a:lnSpc>
-                <a:spcPct val="100000"/>
-              </a:lnSpc>
-              <a:buNone/>
-              <a:tabLst>
-                <a:tab pos="0" algn="l"/>
-              </a:tabLst>
-            </a:pPr>
-            <a:r>
-              <a:rPr lang="en-US" sz="1200" b="0" u="none" strike="noStrike">
-                <a:solidFill>
-                  <a:schemeClr val="dk1">
-                    <a:tint val="82000"/>
-                  </a:schemeClr>
-                </a:solidFill>
-                <a:effectLst/>
-                <a:uFillTx/>
-                <a:latin typeface="Aptos"/>
-              </a:rPr>
-              <a:t>&lt;date/time&gt;</a:t>
-            </a:r>
-            <a:endParaRPr lang="en-US" sz="1200" b="0" u="none" strike="noStrike">
-              <a:solidFill>
-                <a:srgbClr val="000000"/>
-              </a:solidFill>
-              <a:effectLst/>
-              <a:uFillTx/>
-              <a:latin typeface="Times New Roman"/>
-            </a:endParaRPr>
-          </a:p>
-        </p:txBody>
-      </p:sp>
-      <p:sp>
-        <p:nvSpPr>
-          <p:cNvPr id="47" name="PlaceHolder 5"/>
-          <p:cNvSpPr>
-            <a:spLocks noGrp="1"/>
-          </p:cNvSpPr>
-          <p:nvPr>
-            <p:ph type="ftr" idx="26"/>
-          </p:nvPr>
-        </p:nvSpPr>
-        <p:spPr>
-          <a:xfrm>
-            <a:off x="4038480" y="6356520"/>
-            <a:ext cx="4114080" cy="364320"/>
-          </a:xfrm>
-          <a:prstGeom prst="rect">
-            <a:avLst/>
-          </a:prstGeom>
-          <a:noFill/>
-          <a:ln w="0">
-            <a:noFill/>
-          </a:ln>
-        </p:spPr>
-        <p:txBody>
-          <a:bodyPr lIns="91440" tIns="45720" rIns="91440" bIns="45720" anchor="ctr">
-            <a:noAutofit/>
-          </a:bodyPr>
-          <a:lstStyle>
-            <a:lvl1pPr indent="0" algn="ctr">
-              <a:lnSpc>
-                <a:spcPct val="100000"/>
-              </a:lnSpc>
-              <a:buNone/>
-              <a:tabLst>
-                <a:tab pos="0" algn="l"/>
-              </a:tabLst>
-              <a:defRPr lang="en-US" sz="1400" b="0" u="none" strike="noStrike">
-                <a:solidFill>
-                  <a:srgbClr val="000000"/>
-                </a:solidFill>
-                <a:effectLst/>
-                <a:uFillTx/>
-                <a:latin typeface="Times New Roman"/>
-              </a:defRPr>
-            </a:lvl1pPr>
-          </a:lstStyle>
-          <a:p>
-            <a:pPr indent="0" algn="ctr">
-              <a:lnSpc>
-                <a:spcPct val="100000"/>
-              </a:lnSpc>
-              <a:buNone/>
-              <a:tabLst>
-                <a:tab pos="0" algn="l"/>
-              </a:tabLst>
-            </a:pPr>
-            <a:r>
-              <a:rPr lang="en-US" sz="1400" b="0" u="none" strike="noStrike">
-                <a:solidFill>
-                  <a:srgbClr val="000000"/>
-                </a:solidFill>
-                <a:effectLst/>
-                <a:uFillTx/>
-                <a:latin typeface="Times New Roman"/>
-              </a:rPr>
-              <a:t>&lt;footer&gt;</a:t>
-            </a:r>
-            <a:endParaRPr lang="en-US" sz="1400" b="0" u="none" strike="noStrike">
-              <a:solidFill>
-                <a:srgbClr val="000000"/>
-              </a:solidFill>
-              <a:effectLst/>
-              <a:uFillTx/>
-              <a:latin typeface="Times New Roman"/>
-            </a:endParaRPr>
-          </a:p>
-        </p:txBody>
-      </p:sp>
-      <p:sp>
-        <p:nvSpPr>
-          <p:cNvPr id="48" name="PlaceHolder 6"/>
-          <p:cNvSpPr>
-            <a:spLocks noGrp="1"/>
-          </p:cNvSpPr>
-          <p:nvPr>
-            <p:ph type="sldNum" idx="27"/>
-          </p:nvPr>
-        </p:nvSpPr>
-        <p:spPr>
-          <a:xfrm>
-            <a:off x="8610480" y="6356520"/>
-            <a:ext cx="2742480" cy="364320"/>
-          </a:xfrm>
-          <a:prstGeom prst="rect">
-            <a:avLst/>
-          </a:prstGeom>
-          <a:noFill/>
-          <a:ln w="0">
-            <a:noFill/>
-          </a:ln>
-        </p:spPr>
-        <p:txBody>
-          <a:bodyPr lIns="91440" tIns="45720" rIns="91440" bIns="45720" anchor="ctr">
-            <a:noAutofit/>
-          </a:bodyPr>
-          <a:lstStyle>
-            <a:lvl1pPr indent="0" algn="r" defTabSz="914400">
-              <a:lnSpc>
-                <a:spcPct val="100000"/>
-              </a:lnSpc>
-              <a:buNone/>
-              <a:tabLst>
-                <a:tab pos="0" algn="l"/>
-              </a:tabLst>
-              <a:defRPr lang="en-US" sz="1200" b="0" u="none" strike="noStrike">
-                <a:solidFill>
-                  <a:schemeClr val="dk1">
-                    <a:tint val="82000"/>
-                  </a:schemeClr>
-                </a:solidFill>
-                <a:effectLst/>
-                <a:uFillTx/>
-                <a:latin typeface="Aptos"/>
-              </a:defRPr>
-            </a:lvl1pPr>
-          </a:lstStyle>
-          <a:p>
-            <a:pPr indent="0" algn="r" defTabSz="914400">
-              <a:lnSpc>
-                <a:spcPct val="100000"/>
-              </a:lnSpc>
-              <a:buNone/>
-              <a:tabLst>
-                <a:tab pos="0" algn="l"/>
-              </a:tabLst>
-            </a:pPr>
-            <a:fld id="{B58DA0B4-8E80-4ABE-A23D-24C96D795D40}" type="slidenum">
+            <a:fld id="{163DCCD2-268E-4FAF-9ABB-5D123BEAC39A}" type="slidenum">
               <a:rPr lang="en-US" sz="1200" b="0" u="none" strike="noStrike">
                 <a:solidFill>
                   <a:schemeClr val="dk1">
@@ -7698,7 +7752,7 @@
         <p:spPr>
           <a:xfrm>
             <a:off x="838080" y="365040"/>
-            <a:ext cx="10514880" cy="1324800"/>
+            <a:ext cx="10514520" cy="1324440"/>
           </a:xfrm>
           <a:prstGeom prst="rect">
             <a:avLst/>
@@ -7757,7 +7811,7 @@
         <p:spPr>
           <a:xfrm>
             <a:off x="838080" y="1825560"/>
-            <a:ext cx="10514880" cy="4350600"/>
+            <a:ext cx="10514520" cy="4350240"/>
           </a:xfrm>
           <a:prstGeom prst="rect">
             <a:avLst/>
@@ -7942,6 +7996,40 @@
             </a:endParaRPr>
           </a:p>
           <a:p>
+            <a:pPr marL="228600" indent="-228600" algn="l" defTabSz="914400">
+              <a:lnSpc>
+                <a:spcPct val="90000"/>
+              </a:lnSpc>
+              <a:spcBef>
+                <a:spcPts val="1001"/>
+              </a:spcBef>
+              <a:buClr>
+                <a:srgbClr val="000000"/>
+              </a:buClr>
+              <a:buFont typeface="Arial"/>
+              <a:buChar char="•"/>
+            </a:pPr>
+            <a:r>
+              <a:rPr lang="en-US" sz="2800" b="1" u="none" strike="noStrike">
+                <a:solidFill>
+                  <a:schemeClr val="dk1"/>
+                </a:solidFill>
+                <a:effectLst/>
+                <a:uFillTx/>
+                <a:latin typeface="Aptos"/>
+              </a:rPr>
+              <a:t>Goals for next week</a:t>
+            </a:r>
+            <a:endParaRPr lang="en-US" sz="2800" b="0" u="none" strike="noStrike">
+              <a:solidFill>
+                <a:schemeClr val="dk1"/>
+              </a:solidFill>
+              <a:effectLst/>
+              <a:uFillTx/>
+              <a:latin typeface="Aptos"/>
+            </a:endParaRPr>
+          </a:p>
+          <a:p>
             <a:pPr marL="685800" lvl="1" indent="-228600" algn="l" defTabSz="914400">
               <a:lnSpc>
                 <a:spcPct val="90000"/>
@@ -7964,7 +8052,7 @@
                 <a:uFillTx/>
                 <a:latin typeface="Aptos"/>
               </a:rPr>
-              <a:t>Tested all components</a:t>
+              <a:t>Fine tune OpenCV for RaspberryPi</a:t>
             </a:r>
             <a:endParaRPr lang="en-US" sz="2400" b="0" u="none" strike="noStrike">
               <a:solidFill>
@@ -7976,40 +8064,6 @@
             </a:endParaRPr>
           </a:p>
           <a:p>
-            <a:pPr marL="228600" indent="-228600" algn="l" defTabSz="914400">
-              <a:lnSpc>
-                <a:spcPct val="90000"/>
-              </a:lnSpc>
-              <a:spcBef>
-                <a:spcPts val="1001"/>
-              </a:spcBef>
-              <a:buClr>
-                <a:srgbClr val="000000"/>
-              </a:buClr>
-              <a:buFont typeface="Arial"/>
-              <a:buChar char="•"/>
-            </a:pPr>
-            <a:r>
-              <a:rPr lang="en-US" sz="2800" b="1" u="none" strike="noStrike">
-                <a:solidFill>
-                  <a:schemeClr val="dk1"/>
-                </a:solidFill>
-                <a:effectLst/>
-                <a:uFillTx/>
-                <a:latin typeface="Aptos"/>
-              </a:rPr>
-              <a:t>Goals for next week</a:t>
-            </a:r>
-            <a:endParaRPr lang="en-US" sz="2800" b="0" u="none" strike="noStrike">
-              <a:solidFill>
-                <a:schemeClr val="dk1"/>
-              </a:solidFill>
-              <a:effectLst/>
-              <a:uFillTx/>
-              <a:latin typeface="Aptos"/>
-            </a:endParaRPr>
-          </a:p>
-          <a:p>
             <a:pPr marL="685800" lvl="1" indent="-228600" algn="l" defTabSz="914400">
               <a:lnSpc>
                 <a:spcPct val="90000"/>
@@ -8032,7 +8086,7 @@
                 <a:uFillTx/>
                 <a:latin typeface="Aptos"/>
               </a:rPr>
-              <a:t>Fine tune OpenCV for RaspberryPi</a:t>
+              <a:t>Test all components</a:t>
             </a:r>
             <a:endParaRPr lang="en-US" sz="2400" b="0" u="none" strike="noStrike">
               <a:solidFill>
@@ -8155,8 +8209,8 @@
         </p:nvSpPr>
         <p:spPr>
           <a:xfrm>
-            <a:off x="838080" y="365040"/>
-            <a:ext cx="10514880" cy="1324800"/>
+            <a:off x="838080" y="364680"/>
+            <a:ext cx="10514520" cy="1325160"/>
           </a:xfrm>
           <a:prstGeom prst="rect">
             <a:avLst/>
@@ -8204,7 +8258,7 @@
         <p:spPr>
           <a:xfrm>
             <a:off x="-360" y="20880"/>
-            <a:ext cx="8617680" cy="3657600"/>
+            <a:ext cx="8617320" cy="3657240"/>
           </a:xfrm>
           <a:prstGeom prst="rect">
             <a:avLst/>
@@ -8228,7 +8282,7 @@
         <p:spPr>
           <a:xfrm>
             <a:off x="2984400" y="2933280"/>
-            <a:ext cx="9207720" cy="3924720"/>
+            <a:ext cx="9207360" cy="3924360"/>
           </a:xfrm>
           <a:prstGeom prst="rect">
             <a:avLst/>
